--- a/teaching-materials/vcd-vce/powerpoint/Unit2-Design-Contexts-and-Connections.pptx
+++ b/teaching-materials/vcd-vce/powerpoint/Unit2-Design-Contexts-and-Connections.pptx
@@ -21,6 +21,7 @@
     <p:sldId id="269" r:id="rId20"/>
     <p:sldId id="270" r:id="rId21"/>
     <p:sldId id="271" r:id="rId22"/>
+    <p:sldId id="272" r:id="rId23"/>
   </p:sldIdLst>
   <p:sldSz cx="12191695" cy="6858000" type="screen4x3"/>
   <p:notesSz cx="6858000" cy="9144000"/>
@@ -3096,6 +3097,14 @@
 <file path=ppt/slides/slide1.xml><?xml version="1.0" encoding="utf-8"?>
 <p:sld xmlns:a="http://schemas.openxmlformats.org/drawingml/2006/main" xmlns:p="http://schemas.openxmlformats.org/presentationml/2006/main" xmlns:r="http://schemas.openxmlformats.org/officeDocument/2006/relationships">
   <p:cSld>
+    <p:bg>
+      <p:bgPr>
+        <a:solidFill>
+          <a:srgbClr val="FBF5F1"/>
+        </a:solidFill>
+        <a:effectLst/>
+      </p:bgPr>
+    </p:bg>
     <p:spTree>
       <p:nvGrpSpPr>
         <p:cNvPr id="1" name=""/>
@@ -3105,74 +3114,22 @@
       <p:grpSpPr/>
       <p:sp>
         <p:nvSpPr>
-          <p:cNvPr id="2" name="Title 1"/>
-          <p:cNvSpPr>
-            <a:spLocks noGrp="1"/>
-          </p:cNvSpPr>
-          <p:nvPr>
-            <p:ph type="ctrTitle"/>
-          </p:nvPr>
-        </p:nvSpPr>
-        <p:spPr/>
-        <p:txBody>
-          <a:bodyPr/>
-          <a:lstStyle/>
-          <a:p>
-            <a:r>
-              <a:rPr b="1">
-                <a:solidFill>
-                  <a:srgbClr val="6E2337"/>
-                </a:solidFill>
-                <a:latin typeface="Cambria"/>
-              </a:rPr>
-              <a:t>Unit 2: Design Contexts and Connections</a:t>
-            </a:r>
-          </a:p>
-        </p:txBody>
-      </p:sp>
-      <p:sp>
-        <p:nvSpPr>
-          <p:cNvPr id="3" name="Subtitle 2"/>
-          <p:cNvSpPr>
-            <a:spLocks noGrp="1"/>
-          </p:cNvSpPr>
-          <p:nvPr>
-            <p:ph type="subTitle" idx="1"/>
-          </p:nvPr>
-        </p:nvSpPr>
-        <p:spPr/>
-        <p:txBody>
-          <a:bodyPr/>
-          <a:lstStyle/>
-          <a:p>
-            <a:r>
-              <a:rPr sz="2000">
-                <a:solidFill>
-                  <a:srgbClr val="595959"/>
-                </a:solidFill>
-                <a:latin typeface="Calibri"/>
-              </a:rPr>
-              <a:t>VCE Visual Communication Design — Year 11</a:t>
-            </a:r>
-          </a:p>
-        </p:txBody>
-      </p:sp>
-      <p:sp>
-        <p:nvSpPr>
-          <p:cNvPr id="4" name="Rectangle 3"/>
+          <p:cNvPr id="2" name="Rounded Rectangle 1"/>
           <p:cNvSpPr/>
           <p:nvPr/>
         </p:nvSpPr>
         <p:spPr>
-          <a:xfrm>
-            <a:off x="548640" y="3063240"/>
-            <a:ext cx="1645920" cy="38100"/>
-          </a:xfrm>
-          <a:prstGeom prst="rect">
-            <a:avLst/>
+          <a:xfrm rot="21420000">
+            <a:off x="-1188720" y="-1005840"/>
+            <a:ext cx="7863840" cy="6766560"/>
+          </a:xfrm>
+          <a:prstGeom prst="roundRect">
+            <a:avLst>
+              <a:gd name="adj" fmla="val 32000"/>
+            </a:avLst>
           </a:prstGeom>
           <a:solidFill>
-            <a:srgbClr val="6E2337"/>
+            <a:srgbClr val="7A2E43"/>
           </a:solidFill>
           <a:ln>
             <a:noFill/>
@@ -3198,6 +3155,254 @@
           <a:lstStyle/>
           <a:p>
             <a:pPr algn="ctr"/>
+          </a:p>
+        </p:txBody>
+      </p:sp>
+      <p:sp>
+        <p:nvSpPr>
+          <p:cNvPr id="3" name="Oval 2"/>
+          <p:cNvSpPr/>
+          <p:nvPr/>
+        </p:nvSpPr>
+        <p:spPr>
+          <a:xfrm>
+            <a:off x="10332720" y="-640080"/>
+            <a:ext cx="2194560" cy="2194560"/>
+          </a:xfrm>
+          <a:prstGeom prst="ellipse">
+            <a:avLst/>
+          </a:prstGeom>
+          <a:solidFill>
+            <a:srgbClr val="D6A24A"/>
+          </a:solidFill>
+          <a:ln>
+            <a:noFill/>
+          </a:ln>
+          <a:effectLst/>
+        </p:spPr>
+        <p:style>
+          <a:lnRef idx="1">
+            <a:schemeClr val="accent1"/>
+          </a:lnRef>
+          <a:fillRef idx="3">
+            <a:schemeClr val="accent1"/>
+          </a:fillRef>
+          <a:effectRef idx="2">
+            <a:schemeClr val="accent1"/>
+          </a:effectRef>
+          <a:fontRef idx="minor">
+            <a:schemeClr val="lt1"/>
+          </a:fontRef>
+        </p:style>
+        <p:txBody>
+          <a:bodyPr rtlCol="0" anchor="ctr"/>
+          <a:lstStyle/>
+          <a:p>
+            <a:pPr algn="ctr"/>
+          </a:p>
+        </p:txBody>
+      </p:sp>
+      <p:sp>
+        <p:nvSpPr>
+          <p:cNvPr id="4" name="Oval 3"/>
+          <p:cNvSpPr/>
+          <p:nvPr/>
+        </p:nvSpPr>
+        <p:spPr>
+          <a:xfrm>
+            <a:off x="365760" y="5623560"/>
+            <a:ext cx="1371600" cy="1371600"/>
+          </a:xfrm>
+          <a:prstGeom prst="ellipse">
+            <a:avLst/>
+          </a:prstGeom>
+          <a:solidFill>
+            <a:srgbClr val="D98C9E"/>
+          </a:solidFill>
+          <a:ln>
+            <a:noFill/>
+          </a:ln>
+          <a:effectLst/>
+        </p:spPr>
+        <p:style>
+          <a:lnRef idx="1">
+            <a:schemeClr val="accent1"/>
+          </a:lnRef>
+          <a:fillRef idx="3">
+            <a:schemeClr val="accent1"/>
+          </a:fillRef>
+          <a:effectRef idx="2">
+            <a:schemeClr val="accent1"/>
+          </a:effectRef>
+          <a:fontRef idx="minor">
+            <a:schemeClr val="lt1"/>
+          </a:fontRef>
+        </p:style>
+        <p:txBody>
+          <a:bodyPr rtlCol="0" anchor="ctr"/>
+          <a:lstStyle/>
+          <a:p>
+            <a:pPr algn="ctr"/>
+          </a:p>
+        </p:txBody>
+      </p:sp>
+      <p:sp>
+        <p:nvSpPr>
+          <p:cNvPr id="5" name="TextBox 4"/>
+          <p:cNvSpPr txBox="1"/>
+          <p:nvPr/>
+        </p:nvSpPr>
+        <p:spPr>
+          <a:xfrm>
+            <a:off x="8503920" y="3566160"/>
+            <a:ext cx="3291840" cy="3108960"/>
+          </a:xfrm>
+          <a:prstGeom prst="rect">
+            <a:avLst/>
+          </a:prstGeom>
+          <a:noFill/>
+        </p:spPr>
+        <p:txBody>
+          <a:bodyPr wrap="none" anchor="ctr">
+            <a:spAutoFit/>
+          </a:bodyPr>
+          <a:lstStyle/>
+          <a:p>
+            <a:pPr algn="ctr"/>
+            <a:r>
+              <a:rPr sz="22000" b="1" i="0">
+                <a:solidFill>
+                  <a:srgbClr val="E7D9DD"/>
+                </a:solidFill>
+                <a:latin typeface="Cambria"/>
+              </a:rPr>
+              <a:t>2</a:t>
+            </a:r>
+          </a:p>
+        </p:txBody>
+      </p:sp>
+      <p:sp>
+        <p:nvSpPr>
+          <p:cNvPr id="6" name="Rounded Rectangle 5"/>
+          <p:cNvSpPr/>
+          <p:nvPr/>
+        </p:nvSpPr>
+        <p:spPr>
+          <a:xfrm>
+            <a:off x="731520" y="640080"/>
+            <a:ext cx="4114800" cy="502920"/>
+          </a:xfrm>
+          <a:prstGeom prst="roundRect">
+            <a:avLst>
+              <a:gd name="adj" fmla="val 50000"/>
+            </a:avLst>
+          </a:prstGeom>
+          <a:solidFill>
+            <a:srgbClr val="FFFFFF"/>
+          </a:solidFill>
+          <a:ln>
+            <a:noFill/>
+          </a:ln>
+          <a:effectLst/>
+        </p:spPr>
+        <p:style>
+          <a:lnRef idx="1">
+            <a:schemeClr val="accent1"/>
+          </a:lnRef>
+          <a:fillRef idx="3">
+            <a:schemeClr val="accent1"/>
+          </a:fillRef>
+          <a:effectRef idx="2">
+            <a:schemeClr val="accent1"/>
+          </a:effectRef>
+          <a:fontRef idx="minor">
+            <a:schemeClr val="lt1"/>
+          </a:fontRef>
+        </p:style>
+        <p:txBody>
+          <a:bodyPr rtlCol="0" anchor="ctr" wrap="none" lIns="50800" rIns="50800"/>
+          <a:lstStyle/>
+          <a:p>
+            <a:pPr algn="ctr"/>
+            <a:r>
+              <a:rPr sz="1150" b="1">
+                <a:solidFill>
+                  <a:srgbClr val="7A2E43"/>
+                </a:solidFill>
+                <a:latin typeface="Calibri"/>
+              </a:rPr>
+              <a:t>VCE VISUAL COMMUNICATION DESIGN</a:t>
+            </a:r>
+          </a:p>
+        </p:txBody>
+      </p:sp>
+      <p:sp>
+        <p:nvSpPr>
+          <p:cNvPr id="7" name="TextBox 6"/>
+          <p:cNvSpPr txBox="1"/>
+          <p:nvPr/>
+        </p:nvSpPr>
+        <p:spPr>
+          <a:xfrm>
+            <a:off x="685800" y="1417320"/>
+            <a:ext cx="5669280" cy="2377440"/>
+          </a:xfrm>
+          <a:prstGeom prst="rect">
+            <a:avLst/>
+          </a:prstGeom>
+          <a:noFill/>
+        </p:spPr>
+        <p:txBody>
+          <a:bodyPr wrap="square" anchor="t">
+            <a:spAutoFit/>
+          </a:bodyPr>
+          <a:lstStyle/>
+          <a:p>
+            <a:pPr algn="l"/>
+            <a:r>
+              <a:rPr sz="3400" b="1" i="0">
+                <a:solidFill>
+                  <a:srgbClr val="FFFFFF"/>
+                </a:solidFill>
+                <a:latin typeface="Cambria"/>
+              </a:rPr>
+              <a:t>Unit 2: Design Contexts and Connections</a:t>
+            </a:r>
+          </a:p>
+        </p:txBody>
+      </p:sp>
+      <p:sp>
+        <p:nvSpPr>
+          <p:cNvPr id="8" name="TextBox 7"/>
+          <p:cNvSpPr txBox="1"/>
+          <p:nvPr/>
+        </p:nvSpPr>
+        <p:spPr>
+          <a:xfrm>
+            <a:off x="731520" y="3794760"/>
+            <a:ext cx="5486400" cy="731520"/>
+          </a:xfrm>
+          <a:prstGeom prst="rect">
+            <a:avLst/>
+          </a:prstGeom>
+          <a:noFill/>
+        </p:spPr>
+        <p:txBody>
+          <a:bodyPr wrap="square" anchor="t">
+            <a:spAutoFit/>
+          </a:bodyPr>
+          <a:lstStyle/>
+          <a:p>
+            <a:pPr algn="l"/>
+            <a:r>
+              <a:rPr sz="1600" b="0" i="0">
+                <a:solidFill>
+                  <a:srgbClr val="F1EAEC"/>
+                </a:solidFill>
+                <a:latin typeface="Calibri"/>
+              </a:rPr>
+              <a:t>VCE Visual Communication Design — Year 11</a:t>
+            </a:r>
           </a:p>
         </p:txBody>
       </p:sp>
@@ -3215,7 +3420,7 @@
     <p:bg>
       <p:bgPr>
         <a:solidFill>
-          <a:srgbClr val="6E2337"/>
+          <a:srgbClr val="7A2E43"/>
         </a:solidFill>
         <a:effectLst/>
       </p:bgPr>
@@ -3229,23 +3434,220 @@
       <p:grpSpPr/>
       <p:sp>
         <p:nvSpPr>
-          <p:cNvPr id="2" name="Title 1"/>
-          <p:cNvSpPr>
-            <a:spLocks noGrp="1"/>
-          </p:cNvSpPr>
-          <p:nvPr>
-            <p:ph type="title"/>
-          </p:nvPr>
-        </p:nvSpPr>
-        <p:spPr/>
-        <p:txBody>
-          <a:bodyPr/>
-          <a:lstStyle/>
-          <a:p>
-            <a:r>
-              <a:rPr sz="4000" b="1">
-                <a:solidFill>
-                  <a:srgbClr val="FFFFFF"/>
+          <p:cNvPr id="2" name="Oval 1"/>
+          <p:cNvSpPr/>
+          <p:nvPr/>
+        </p:nvSpPr>
+        <p:spPr>
+          <a:xfrm>
+            <a:off x="9692640" y="-914400"/>
+            <a:ext cx="2926080" cy="2926080"/>
+          </a:xfrm>
+          <a:prstGeom prst="ellipse">
+            <a:avLst/>
+          </a:prstGeom>
+          <a:solidFill>
+            <a:srgbClr val="6B283A"/>
+          </a:solidFill>
+          <a:ln>
+            <a:noFill/>
+          </a:ln>
+          <a:effectLst/>
+        </p:spPr>
+        <p:style>
+          <a:lnRef idx="1">
+            <a:schemeClr val="accent1"/>
+          </a:lnRef>
+          <a:fillRef idx="3">
+            <a:schemeClr val="accent1"/>
+          </a:fillRef>
+          <a:effectRef idx="2">
+            <a:schemeClr val="accent1"/>
+          </a:effectRef>
+          <a:fontRef idx="minor">
+            <a:schemeClr val="lt1"/>
+          </a:fontRef>
+        </p:style>
+        <p:txBody>
+          <a:bodyPr rtlCol="0" anchor="ctr"/>
+          <a:lstStyle/>
+          <a:p>
+            <a:pPr algn="ctr"/>
+          </a:p>
+        </p:txBody>
+      </p:sp>
+      <p:sp>
+        <p:nvSpPr>
+          <p:cNvPr id="3" name="Oval 2"/>
+          <p:cNvSpPr/>
+          <p:nvPr/>
+        </p:nvSpPr>
+        <p:spPr>
+          <a:xfrm>
+            <a:off x="-914400" y="4937760"/>
+            <a:ext cx="2377440" cy="2377440"/>
+          </a:xfrm>
+          <a:prstGeom prst="ellipse">
+            <a:avLst/>
+          </a:prstGeom>
+          <a:solidFill>
+            <a:srgbClr val="6B283A"/>
+          </a:solidFill>
+          <a:ln>
+            <a:noFill/>
+          </a:ln>
+          <a:effectLst/>
+        </p:spPr>
+        <p:style>
+          <a:lnRef idx="1">
+            <a:schemeClr val="accent1"/>
+          </a:lnRef>
+          <a:fillRef idx="3">
+            <a:schemeClr val="accent1"/>
+          </a:fillRef>
+          <a:effectRef idx="2">
+            <a:schemeClr val="accent1"/>
+          </a:effectRef>
+          <a:fontRef idx="minor">
+            <a:schemeClr val="lt1"/>
+          </a:fontRef>
+        </p:style>
+        <p:txBody>
+          <a:bodyPr rtlCol="0" anchor="ctr"/>
+          <a:lstStyle/>
+          <a:p>
+            <a:pPr algn="ctr"/>
+          </a:p>
+        </p:txBody>
+      </p:sp>
+      <p:sp>
+        <p:nvSpPr>
+          <p:cNvPr id="4" name="Rounded Rectangle 3"/>
+          <p:cNvSpPr/>
+          <p:nvPr/>
+        </p:nvSpPr>
+        <p:spPr>
+          <a:xfrm>
+            <a:off x="822960" y="1051560"/>
+            <a:ext cx="1188720" cy="502920"/>
+          </a:xfrm>
+          <a:prstGeom prst="roundRect">
+            <a:avLst>
+              <a:gd name="adj" fmla="val 50000"/>
+            </a:avLst>
+          </a:prstGeom>
+          <a:solidFill>
+            <a:srgbClr val="FFFFFF"/>
+          </a:solidFill>
+          <a:ln>
+            <a:noFill/>
+          </a:ln>
+          <a:effectLst/>
+        </p:spPr>
+        <p:style>
+          <a:lnRef idx="1">
+            <a:schemeClr val="accent1"/>
+          </a:lnRef>
+          <a:fillRef idx="3">
+            <a:schemeClr val="accent1"/>
+          </a:fillRef>
+          <a:effectRef idx="2">
+            <a:schemeClr val="accent1"/>
+          </a:effectRef>
+          <a:fontRef idx="minor">
+            <a:schemeClr val="lt1"/>
+          </a:fontRef>
+        </p:style>
+        <p:txBody>
+          <a:bodyPr rtlCol="0" anchor="ctr" wrap="none" lIns="50800" rIns="50800"/>
+          <a:lstStyle/>
+          <a:p>
+            <a:pPr algn="ctr"/>
+            <a:r>
+              <a:rPr sz="1400" b="1">
+                <a:solidFill>
+                  <a:srgbClr val="612435"/>
+                </a:solidFill>
+                <a:latin typeface="Calibri"/>
+              </a:rPr>
+              <a:t>02</a:t>
+            </a:r>
+          </a:p>
+        </p:txBody>
+      </p:sp>
+      <p:sp>
+        <p:nvSpPr>
+          <p:cNvPr id="5" name="Rounded Rectangle 4"/>
+          <p:cNvSpPr/>
+          <p:nvPr/>
+        </p:nvSpPr>
+        <p:spPr>
+          <a:xfrm>
+            <a:off x="822960" y="2011680"/>
+            <a:ext cx="10515600" cy="2834640"/>
+          </a:xfrm>
+          <a:prstGeom prst="roundRect">
+            <a:avLst>
+              <a:gd name="adj" fmla="val 18000"/>
+            </a:avLst>
+          </a:prstGeom>
+          <a:solidFill>
+            <a:srgbClr val="FFFFFF"/>
+          </a:solidFill>
+          <a:ln>
+            <a:noFill/>
+          </a:ln>
+          <a:effectLst/>
+        </p:spPr>
+        <p:style>
+          <a:lnRef idx="1">
+            <a:schemeClr val="accent1"/>
+          </a:lnRef>
+          <a:fillRef idx="3">
+            <a:schemeClr val="accent1"/>
+          </a:fillRef>
+          <a:effectRef idx="2">
+            <a:schemeClr val="accent1"/>
+          </a:effectRef>
+          <a:fontRef idx="minor">
+            <a:schemeClr val="lt1"/>
+          </a:fontRef>
+        </p:style>
+        <p:txBody>
+          <a:bodyPr rtlCol="0" anchor="ctr"/>
+          <a:lstStyle/>
+          <a:p>
+            <a:pPr algn="ctr"/>
+          </a:p>
+        </p:txBody>
+      </p:sp>
+      <p:sp>
+        <p:nvSpPr>
+          <p:cNvPr id="6" name="TextBox 5"/>
+          <p:cNvSpPr txBox="1"/>
+          <p:nvPr/>
+        </p:nvSpPr>
+        <p:spPr>
+          <a:xfrm>
+            <a:off x="1280160" y="2697480"/>
+            <a:ext cx="9601200" cy="1097280"/>
+          </a:xfrm>
+          <a:prstGeom prst="rect">
+            <a:avLst/>
+          </a:prstGeom>
+          <a:noFill/>
+        </p:spPr>
+        <p:txBody>
+          <a:bodyPr wrap="square" anchor="t">
+            <a:spAutoFit/>
+          </a:bodyPr>
+          <a:lstStyle/>
+          <a:p>
+            <a:pPr algn="l"/>
+            <a:r>
+              <a:rPr sz="3400" b="1" i="0">
+                <a:solidFill>
+                  <a:srgbClr val="672738"/>
                 </a:solidFill>
                 <a:latin typeface="Cambria"/>
               </a:rPr>
@@ -3256,27 +3658,35 @@
       </p:sp>
       <p:sp>
         <p:nvSpPr>
-          <p:cNvPr id="3" name="Text Placeholder 2"/>
-          <p:cNvSpPr>
-            <a:spLocks noGrp="1"/>
-          </p:cNvSpPr>
-          <p:nvPr>
-            <p:ph type="body" idx="1"/>
-          </p:nvPr>
-        </p:nvSpPr>
-        <p:spPr/>
-        <p:txBody>
-          <a:bodyPr/>
-          <a:lstStyle/>
-          <a:p>
-            <a:r>
-              <a:rPr sz="1800">
-                <a:solidFill>
-                  <a:srgbClr val="E5E5E5"/>
-                </a:solidFill>
-                <a:latin typeface="Calibri"/>
-              </a:rPr>
-              <a:t>AOS 2 · Design and Industry Connections</a:t>
+          <p:cNvPr id="7" name="TextBox 6"/>
+          <p:cNvSpPr txBox="1"/>
+          <p:nvPr/>
+        </p:nvSpPr>
+        <p:spPr>
+          <a:xfrm>
+            <a:off x="1280160" y="3657600"/>
+            <a:ext cx="9601200" cy="548640"/>
+          </a:xfrm>
+          <a:prstGeom prst="rect">
+            <a:avLst/>
+          </a:prstGeom>
+          <a:noFill/>
+        </p:spPr>
+        <p:txBody>
+          <a:bodyPr wrap="square" anchor="t">
+            <a:spAutoFit/>
+          </a:bodyPr>
+          <a:lstStyle/>
+          <a:p>
+            <a:pPr algn="l"/>
+            <a:r>
+              <a:rPr sz="1500" b="0" i="0">
+                <a:solidFill>
+                  <a:srgbClr val="6B6B6B"/>
+                </a:solidFill>
+                <a:latin typeface="Calibri"/>
+              </a:rPr>
+              <a:t>AOS 2 - Design and Industry Connections</a:t>
             </a:r>
           </a:p>
         </p:txBody>
@@ -3292,6 +3702,14 @@
 <file path=ppt/slides/slide11.xml><?xml version="1.0" encoding="utf-8"?>
 <p:sld xmlns:a="http://schemas.openxmlformats.org/drawingml/2006/main" xmlns:p="http://schemas.openxmlformats.org/presentationml/2006/main" xmlns:r="http://schemas.openxmlformats.org/officeDocument/2006/relationships">
   <p:cSld>
+    <p:bg>
+      <p:bgPr>
+        <a:solidFill>
+          <a:srgbClr val="FBF5F1"/>
+        </a:solidFill>
+        <a:effectLst/>
+      </p:bgPr>
+    </p:bg>
     <p:spTree>
       <p:nvGrpSpPr>
         <p:cNvPr id="1" name=""/>
@@ -3301,220 +3719,373 @@
       <p:grpSpPr/>
       <p:sp>
         <p:nvSpPr>
-          <p:cNvPr id="2" name="Title 1"/>
-          <p:cNvSpPr>
-            <a:spLocks noGrp="1"/>
-          </p:cNvSpPr>
-          <p:nvPr>
-            <p:ph type="title"/>
-          </p:nvPr>
-        </p:nvSpPr>
-        <p:spPr/>
-        <p:txBody>
-          <a:bodyPr wrap="square"/>
-          <a:lstStyle/>
-          <a:p>
-            <a:r>
-              <a:rPr sz="3200" b="1">
-                <a:solidFill>
-                  <a:srgbClr val="6E2337"/>
-                </a:solidFill>
-                <a:latin typeface="Cambria"/>
-              </a:rPr>
-              <a:t>Design Fields Overlap &amp; Connect</a:t>
-            </a:r>
-          </a:p>
-        </p:txBody>
-      </p:sp>
-      <p:sp>
-        <p:nvSpPr>
-          <p:cNvPr id="3" name="Content Placeholder 2"/>
-          <p:cNvSpPr>
-            <a:spLocks noGrp="1"/>
-          </p:cNvSpPr>
-          <p:nvPr>
-            <p:ph idx="1" sz="half"/>
-          </p:nvPr>
-        </p:nvSpPr>
-        <p:spPr/>
-        <p:txBody>
-          <a:bodyPr wrap="square"/>
-          <a:lstStyle/>
-          <a:p>
-            <a:pPr>
-              <a:spcAft>
-                <a:spcPts val="1000"/>
-              </a:spcAft>
-            </a:pPr>
-            <a:r>
-              <a:rPr sz="2000" b="0" i="0">
-                <a:solidFill>
-                  <a:srgbClr val="333333"/>
-                </a:solidFill>
-                <a:latin typeface="Calibri"/>
-              </a:rPr>
-              <a:t>Real design projects rarely sit inside a single field. A single product often requires </a:t>
-            </a:r>
-            <a:r>
-              <a:rPr sz="2000" b="1" i="0">
-                <a:solidFill>
-                  <a:srgbClr val="6E2337"/>
-                </a:solidFill>
-                <a:latin typeface="Calibri"/>
-              </a:rPr>
-              <a:t>multiple design fields working together.</a:t>
-            </a:r>
-          </a:p>
-          <a:p>
-            <a:pPr>
-              <a:spcAft>
-                <a:spcPts val="1000"/>
-              </a:spcAft>
-            </a:pPr>
-            <a:r>
-              <a:rPr sz="2000" b="0" i="0">
-                <a:solidFill>
-                  <a:srgbClr val="333333"/>
-                </a:solidFill>
-                <a:latin typeface="Calibri"/>
-              </a:rPr>
-              <a:t>Example: launching a café involves communication design (branding), environmental design (fit-out), industrial design (furniture) and interaction design (ordering app) — often coordinated by different specialists.</a:t>
-            </a:r>
-          </a:p>
-        </p:txBody>
-      </p:sp>
-      <p:sp>
-        <p:nvSpPr>
-          <p:cNvPr id="4" name="Content Placeholder 3"/>
-          <p:cNvSpPr>
-            <a:spLocks noGrp="1"/>
-          </p:cNvSpPr>
-          <p:nvPr>
-            <p:ph idx="2" sz="half"/>
-          </p:nvPr>
-        </p:nvSpPr>
-        <p:spPr/>
-        <p:txBody>
-          <a:bodyPr wrap="square"/>
-          <a:lstStyle/>
-          <a:p>
-            <a:pPr>
-              <a:spcAft>
-                <a:spcPts val="1000"/>
-              </a:spcAft>
-            </a:pPr>
-            <a:r>
-              <a:rPr sz="2000" b="0" i="0">
-                <a:solidFill>
-                  <a:srgbClr val="333333"/>
-                </a:solidFill>
-                <a:latin typeface="Calibri"/>
-              </a:rPr>
-              <a:t>Why This Matters</a:t>
-            </a:r>
-          </a:p>
-          <a:p>
-            <a:pPr lvl="1">
-              <a:spcAft>
-                <a:spcPts val="1000"/>
-              </a:spcAft>
-            </a:pPr>
-            <a:r>
-              <a:rPr sz="1800" b="0" i="0">
-                <a:solidFill>
-                  <a:srgbClr val="333333"/>
-                </a:solidFill>
-                <a:latin typeface="Calibri"/>
-              </a:rPr>
-              <a:t>Designers must </a:t>
-            </a:r>
-            <a:r>
-              <a:rPr sz="1800" b="1" i="0">
-                <a:solidFill>
-                  <a:srgbClr val="6E2337"/>
-                </a:solidFill>
-                <a:latin typeface="Calibri"/>
-              </a:rPr>
-              <a:t>collaborate</a:t>
-            </a:r>
-            <a:r>
-              <a:rPr sz="1800" b="0" i="0">
-                <a:solidFill>
-                  <a:srgbClr val="333333"/>
-                </a:solidFill>
-                <a:latin typeface="Calibri"/>
-              </a:rPr>
-              <a:t> across disciplines</a:t>
-            </a:r>
-          </a:p>
-          <a:p>
-            <a:pPr lvl="1">
-              <a:spcAft>
-                <a:spcPts val="1000"/>
-              </a:spcAft>
-            </a:pPr>
-            <a:r>
-              <a:rPr sz="1800" b="0" i="0">
-                <a:solidFill>
-                  <a:srgbClr val="333333"/>
-                </a:solidFill>
-                <a:latin typeface="Calibri"/>
-              </a:rPr>
-              <a:t>Understand how their design fits a </a:t>
-            </a:r>
-            <a:r>
-              <a:rPr sz="1800" b="1" i="0">
-                <a:solidFill>
-                  <a:srgbClr val="6E2337"/>
-                </a:solidFill>
-                <a:latin typeface="Calibri"/>
-              </a:rPr>
-              <a:t>bigger production system</a:t>
-            </a:r>
-          </a:p>
-          <a:p>
-            <a:pPr lvl="1">
-              <a:spcAft>
-                <a:spcPts val="1000"/>
-              </a:spcAft>
-            </a:pPr>
-            <a:r>
-              <a:rPr sz="1800" b="0" i="0">
-                <a:solidFill>
-                  <a:srgbClr val="333333"/>
-                </a:solidFill>
-                <a:latin typeface="Calibri"/>
-              </a:rPr>
-              <a:t>Work within industry </a:t>
-            </a:r>
-            <a:r>
-              <a:rPr sz="1800" b="1" i="0">
-                <a:solidFill>
-                  <a:srgbClr val="6E2337"/>
-                </a:solidFill>
-                <a:latin typeface="Calibri"/>
-              </a:rPr>
-              <a:t>standards, ethics and IP law</a:t>
-            </a:r>
-          </a:p>
-        </p:txBody>
-      </p:sp>
-      <p:sp>
-        <p:nvSpPr>
-          <p:cNvPr id="5" name="Rectangle 4"/>
+          <p:cNvPr id="2" name="Rounded Rectangle 1"/>
           <p:cNvSpPr/>
           <p:nvPr/>
         </p:nvSpPr>
         <p:spPr>
           <a:xfrm>
-            <a:off x="548640" y="1234440"/>
-            <a:ext cx="1463040" cy="38100"/>
+            <a:off x="685800" y="502920"/>
+            <a:ext cx="3291840" cy="457200"/>
+          </a:xfrm>
+          <a:prstGeom prst="roundRect">
+            <a:avLst>
+              <a:gd name="adj" fmla="val 50000"/>
+            </a:avLst>
+          </a:prstGeom>
+          <a:solidFill>
+            <a:srgbClr val="7A2E43"/>
+          </a:solidFill>
+          <a:ln>
+            <a:noFill/>
+          </a:ln>
+          <a:effectLst/>
+        </p:spPr>
+        <p:style>
+          <a:lnRef idx="1">
+            <a:schemeClr val="accent1"/>
+          </a:lnRef>
+          <a:fillRef idx="3">
+            <a:schemeClr val="accent1"/>
+          </a:fillRef>
+          <a:effectRef idx="2">
+            <a:schemeClr val="accent1"/>
+          </a:effectRef>
+          <a:fontRef idx="minor">
+            <a:schemeClr val="lt1"/>
+          </a:fontRef>
+        </p:style>
+        <p:txBody>
+          <a:bodyPr rtlCol="0" anchor="ctr" wrap="none" lIns="50800" rIns="50800"/>
+          <a:lstStyle/>
+          <a:p>
+            <a:pPr algn="ctr"/>
+            <a:r>
+              <a:rPr sz="1100" b="1">
+                <a:solidFill>
+                  <a:srgbClr val="FFFFFF"/>
+                </a:solidFill>
+                <a:latin typeface="Calibri"/>
+              </a:rPr>
+              <a:t>DESIGN &amp; INDUSTRY CONNECTIONS</a:t>
+            </a:r>
+          </a:p>
+        </p:txBody>
+      </p:sp>
+      <p:sp>
+        <p:nvSpPr>
+          <p:cNvPr id="3" name="TextBox 2"/>
+          <p:cNvSpPr txBox="1"/>
+          <p:nvPr/>
+        </p:nvSpPr>
+        <p:spPr>
+          <a:xfrm>
+            <a:off x="685800" y="1051560"/>
+            <a:ext cx="10607040" cy="822960"/>
           </a:xfrm>
           <a:prstGeom prst="rect">
             <a:avLst/>
           </a:prstGeom>
+          <a:noFill/>
+        </p:spPr>
+        <p:txBody>
+          <a:bodyPr wrap="square" anchor="t">
+            <a:spAutoFit/>
+          </a:bodyPr>
+          <a:lstStyle/>
+          <a:p>
+            <a:pPr algn="l"/>
+            <a:r>
+              <a:rPr sz="2700" b="1" i="0">
+                <a:solidFill>
+                  <a:srgbClr val="2A1A1F"/>
+                </a:solidFill>
+                <a:latin typeface="Cambria"/>
+              </a:rPr>
+              <a:t>Design Fields Overlap &amp; Connect</a:t>
+            </a:r>
+          </a:p>
+        </p:txBody>
+      </p:sp>
+      <p:sp>
+        <p:nvSpPr>
+          <p:cNvPr id="4" name="Rounded Rectangle 3"/>
+          <p:cNvSpPr/>
+          <p:nvPr/>
+        </p:nvSpPr>
+        <p:spPr>
+          <a:xfrm>
+            <a:off x="685800" y="1874519"/>
+            <a:ext cx="5166360" cy="4526280"/>
+          </a:xfrm>
+          <a:prstGeom prst="roundRect">
+            <a:avLst>
+              <a:gd name="adj" fmla="val 6000"/>
+            </a:avLst>
+          </a:prstGeom>
           <a:solidFill>
-            <a:srgbClr val="6E2337"/>
+            <a:srgbClr val="EFE5E8"/>
+          </a:solidFill>
+          <a:ln>
+            <a:noFill/>
+          </a:ln>
+          <a:effectLst/>
+        </p:spPr>
+        <p:style>
+          <a:lnRef idx="1">
+            <a:schemeClr val="accent1"/>
+          </a:lnRef>
+          <a:fillRef idx="3">
+            <a:schemeClr val="accent1"/>
+          </a:fillRef>
+          <a:effectRef idx="2">
+            <a:schemeClr val="accent1"/>
+          </a:effectRef>
+          <a:fontRef idx="minor">
+            <a:schemeClr val="lt1"/>
+          </a:fontRef>
+        </p:style>
+        <p:txBody>
+          <a:bodyPr rtlCol="0" anchor="ctr" lIns="279400" rIns="279400" tIns="228600" bIns="228600" wrap="square"/>
+          <a:lstStyle/>
+          <a:p>
+            <a:pPr algn="ctr" indent="-203200" marL="203200">
+              <a:spcAft>
+                <a:spcPts val="900"/>
+              </a:spcAft>
+              <a:buClr>
+                <a:srgbClr val="7A2E43"/>
+              </a:buClr>
+              <a:buSzPct val="90000"/>
+              <a:buFont typeface="Arial"/>
+              <a:buChar char="●"/>
+            </a:pPr>
+            <a:r>
+              <a:rPr sz="1400" b="0" i="0">
+                <a:solidFill>
+                  <a:srgbClr val="2A1A1F"/>
+                </a:solidFill>
+                <a:latin typeface="Calibri"/>
+              </a:rPr>
+              <a:t>Real design projects rarely sit inside a single field. A single product often requires </a:t>
+            </a:r>
+            <a:r>
+              <a:rPr sz="1400" b="1" i="0">
+                <a:solidFill>
+                  <a:srgbClr val="672738"/>
+                </a:solidFill>
+                <a:latin typeface="Calibri"/>
+              </a:rPr>
+              <a:t>multiple design fields working together.</a:t>
+            </a:r>
+          </a:p>
+          <a:p>
+            <a:pPr indent="-203200" marL="203200">
+              <a:spcAft>
+                <a:spcPts val="900"/>
+              </a:spcAft>
+              <a:buClr>
+                <a:srgbClr val="7A2E43"/>
+              </a:buClr>
+              <a:buSzPct val="90000"/>
+              <a:buFont typeface="Arial"/>
+              <a:buChar char="●"/>
+            </a:pPr>
+            <a:r>
+              <a:rPr sz="1400" b="0" i="0">
+                <a:solidFill>
+                  <a:srgbClr val="2A1A1F"/>
+                </a:solidFill>
+                <a:latin typeface="Calibri"/>
+              </a:rPr>
+              <a:t>Example: launching a café involves communication design (branding), environmental design (fit-out), industrial design (furniture) and interaction design (ordering app) — often coordinated by different specialists.</a:t>
+            </a:r>
+          </a:p>
+        </p:txBody>
+      </p:sp>
+      <p:sp>
+        <p:nvSpPr>
+          <p:cNvPr id="5" name="Rounded Rectangle 4"/>
+          <p:cNvSpPr/>
+          <p:nvPr/>
+        </p:nvSpPr>
+        <p:spPr>
+          <a:xfrm>
+            <a:off x="6080760" y="1874519"/>
+            <a:ext cx="5166360" cy="4526280"/>
+          </a:xfrm>
+          <a:prstGeom prst="roundRect">
+            <a:avLst>
+              <a:gd name="adj" fmla="val 6000"/>
+            </a:avLst>
+          </a:prstGeom>
+          <a:solidFill>
+            <a:srgbClr val="F4DEE3"/>
+          </a:solidFill>
+          <a:ln>
+            <a:noFill/>
+          </a:ln>
+          <a:effectLst/>
+        </p:spPr>
+        <p:style>
+          <a:lnRef idx="1">
+            <a:schemeClr val="accent1"/>
+          </a:lnRef>
+          <a:fillRef idx="3">
+            <a:schemeClr val="accent1"/>
+          </a:fillRef>
+          <a:effectRef idx="2">
+            <a:schemeClr val="accent1"/>
+          </a:effectRef>
+          <a:fontRef idx="minor">
+            <a:schemeClr val="lt1"/>
+          </a:fontRef>
+        </p:style>
+        <p:txBody>
+          <a:bodyPr rtlCol="0" anchor="ctr" lIns="279400" rIns="279400" tIns="228600" bIns="228600" wrap="square"/>
+          <a:lstStyle/>
+          <a:p>
+            <a:pPr algn="ctr" indent="-203200" marL="203200">
+              <a:spcAft>
+                <a:spcPts val="900"/>
+              </a:spcAft>
+              <a:buClr>
+                <a:srgbClr val="D98C9E"/>
+              </a:buClr>
+              <a:buSzPct val="90000"/>
+              <a:buFont typeface="Arial"/>
+              <a:buChar char="●"/>
+            </a:pPr>
+            <a:r>
+              <a:rPr sz="1400" b="0" i="0">
+                <a:solidFill>
+                  <a:srgbClr val="2A1A1F"/>
+                </a:solidFill>
+                <a:latin typeface="Calibri"/>
+              </a:rPr>
+              <a:t>Why This Matters</a:t>
+            </a:r>
+          </a:p>
+          <a:p>
+            <a:pPr indent="-203200" marL="203200">
+              <a:spcAft>
+                <a:spcPts val="900"/>
+              </a:spcAft>
+              <a:buClr>
+                <a:srgbClr val="D98C9E"/>
+              </a:buClr>
+              <a:buSzPct val="90000"/>
+              <a:buFont typeface="Arial"/>
+              <a:buChar char="–"/>
+            </a:pPr>
+            <a:r>
+              <a:rPr sz="1250" b="0" i="0">
+                <a:solidFill>
+                  <a:srgbClr val="2A1A1F"/>
+                </a:solidFill>
+                <a:latin typeface="Calibri"/>
+              </a:rPr>
+              <a:t>Designers must </a:t>
+            </a:r>
+            <a:r>
+              <a:rPr sz="1250" b="1" i="0">
+                <a:solidFill>
+                  <a:srgbClr val="B87786"/>
+                </a:solidFill>
+                <a:latin typeface="Calibri"/>
+              </a:rPr>
+              <a:t>collaborate</a:t>
+            </a:r>
+            <a:r>
+              <a:rPr sz="1250" b="0" i="0">
+                <a:solidFill>
+                  <a:srgbClr val="2A1A1F"/>
+                </a:solidFill>
+                <a:latin typeface="Calibri"/>
+              </a:rPr>
+              <a:t> across disciplines</a:t>
+            </a:r>
+          </a:p>
+          <a:p>
+            <a:pPr indent="-203200" marL="203200">
+              <a:spcAft>
+                <a:spcPts val="900"/>
+              </a:spcAft>
+              <a:buClr>
+                <a:srgbClr val="D98C9E"/>
+              </a:buClr>
+              <a:buSzPct val="90000"/>
+              <a:buFont typeface="Arial"/>
+              <a:buChar char="–"/>
+            </a:pPr>
+            <a:r>
+              <a:rPr sz="1250" b="0" i="0">
+                <a:solidFill>
+                  <a:srgbClr val="2A1A1F"/>
+                </a:solidFill>
+                <a:latin typeface="Calibri"/>
+              </a:rPr>
+              <a:t>Understand how their design fits a </a:t>
+            </a:r>
+            <a:r>
+              <a:rPr sz="1250" b="1" i="0">
+                <a:solidFill>
+                  <a:srgbClr val="B87786"/>
+                </a:solidFill>
+                <a:latin typeface="Calibri"/>
+              </a:rPr>
+              <a:t>bigger production system</a:t>
+            </a:r>
+          </a:p>
+          <a:p>
+            <a:pPr indent="-203200" marL="203200">
+              <a:spcAft>
+                <a:spcPts val="900"/>
+              </a:spcAft>
+              <a:buClr>
+                <a:srgbClr val="D98C9E"/>
+              </a:buClr>
+              <a:buSzPct val="90000"/>
+              <a:buFont typeface="Arial"/>
+              <a:buChar char="–"/>
+            </a:pPr>
+            <a:r>
+              <a:rPr sz="1250" b="0" i="0">
+                <a:solidFill>
+                  <a:srgbClr val="2A1A1F"/>
+                </a:solidFill>
+                <a:latin typeface="Calibri"/>
+              </a:rPr>
+              <a:t>Work within industry </a:t>
+            </a:r>
+            <a:r>
+              <a:rPr sz="1250" b="1" i="0">
+                <a:solidFill>
+                  <a:srgbClr val="B87786"/>
+                </a:solidFill>
+                <a:latin typeface="Calibri"/>
+              </a:rPr>
+              <a:t>standards, ethics and IP law</a:t>
+            </a:r>
+          </a:p>
+        </p:txBody>
+      </p:sp>
+      <p:sp>
+        <p:nvSpPr>
+          <p:cNvPr id="6" name="Oval 5"/>
+          <p:cNvSpPr/>
+          <p:nvPr/>
+        </p:nvSpPr>
+        <p:spPr>
+          <a:xfrm>
+            <a:off x="5532120" y="3840480"/>
+            <a:ext cx="685800" cy="685800"/>
+          </a:xfrm>
+          <a:prstGeom prst="ellipse">
+            <a:avLst/>
+          </a:prstGeom>
+          <a:solidFill>
+            <a:srgbClr val="D6A24A"/>
           </a:solidFill>
           <a:ln>
             <a:noFill/>
@@ -3554,6 +4125,14 @@
 <file path=ppt/slides/slide12.xml><?xml version="1.0" encoding="utf-8"?>
 <p:sld xmlns:a="http://schemas.openxmlformats.org/drawingml/2006/main" xmlns:p="http://schemas.openxmlformats.org/presentationml/2006/main" xmlns:r="http://schemas.openxmlformats.org/officeDocument/2006/relationships">
   <p:cSld>
+    <p:bg>
+      <p:bgPr>
+        <a:solidFill>
+          <a:srgbClr val="FBF5F1"/>
+        </a:solidFill>
+        <a:effectLst/>
+      </p:bgPr>
+    </p:bg>
     <p:spTree>
       <p:nvGrpSpPr>
         <p:cNvPr id="1" name=""/>
@@ -3563,243 +4142,408 @@
       <p:grpSpPr/>
       <p:sp>
         <p:nvSpPr>
-          <p:cNvPr id="2" name="Title 1"/>
-          <p:cNvSpPr>
-            <a:spLocks noGrp="1"/>
-          </p:cNvSpPr>
-          <p:nvPr>
-            <p:ph type="title"/>
-          </p:nvPr>
-        </p:nvSpPr>
-        <p:spPr/>
-        <p:txBody>
-          <a:bodyPr wrap="square"/>
-          <a:lstStyle/>
-          <a:p>
-            <a:r>
-              <a:rPr sz="3200" b="1">
-                <a:solidFill>
-                  <a:srgbClr val="6E2337"/>
-                </a:solidFill>
-                <a:latin typeface="Cambria"/>
-              </a:rPr>
-              <a:t>Collaboration in Industry</a:t>
-            </a:r>
-          </a:p>
-        </p:txBody>
-      </p:sp>
-      <p:sp>
-        <p:nvSpPr>
-          <p:cNvPr id="3" name="Content Placeholder 2"/>
-          <p:cNvSpPr>
-            <a:spLocks noGrp="1"/>
-          </p:cNvSpPr>
-          <p:nvPr>
-            <p:ph idx="1" sz="half"/>
-          </p:nvPr>
-        </p:nvSpPr>
-        <p:spPr/>
-        <p:txBody>
-          <a:bodyPr wrap="square"/>
-          <a:lstStyle/>
-          <a:p>
-            <a:pPr>
-              <a:spcAft>
-                <a:spcPts val="1000"/>
-              </a:spcAft>
-            </a:pPr>
-            <a:r>
-              <a:rPr sz="2000" b="0" i="0">
-                <a:solidFill>
-                  <a:srgbClr val="333333"/>
-                </a:solidFill>
-                <a:latin typeface="Calibri"/>
-              </a:rPr>
-              <a:t>Designers rarely work in isolation. They collaborate with other professionals and tradespeople to bring a design from concept to reality.</a:t>
-            </a:r>
-          </a:p>
-          <a:p>
-            <a:pPr>
-              <a:spcAft>
-                <a:spcPts val="1000"/>
-              </a:spcAft>
-            </a:pPr>
-            <a:r>
-              <a:rPr sz="2000" b="0" i="0">
-                <a:solidFill>
-                  <a:srgbClr val="333333"/>
-                </a:solidFill>
-                <a:latin typeface="Calibri"/>
-              </a:rPr>
-              <a:t>Who Designers Collaborate With</a:t>
-            </a:r>
-          </a:p>
-          <a:p>
-            <a:pPr lvl="1">
-              <a:spcAft>
-                <a:spcPts val="1000"/>
-              </a:spcAft>
-            </a:pPr>
-            <a:r>
-              <a:rPr sz="1800" b="1" i="0">
-                <a:solidFill>
-                  <a:srgbClr val="6E2337"/>
-                </a:solidFill>
-                <a:latin typeface="Calibri"/>
-              </a:rPr>
-              <a:t>Clients</a:t>
-            </a:r>
-            <a:r>
-              <a:rPr sz="1800" b="0" i="0">
-                <a:solidFill>
-                  <a:srgbClr val="333333"/>
-                </a:solidFill>
-                <a:latin typeface="Calibri"/>
-              </a:rPr>
-              <a:t> — provide the brief, approve directions, fund the project</a:t>
-            </a:r>
-          </a:p>
-          <a:p>
-            <a:pPr lvl="1">
-              <a:spcAft>
-                <a:spcPts val="1000"/>
-              </a:spcAft>
-            </a:pPr>
-            <a:r>
-              <a:rPr sz="1800" b="1" i="0">
-                <a:solidFill>
-                  <a:srgbClr val="6E2337"/>
-                </a:solidFill>
-                <a:latin typeface="Calibri"/>
-              </a:rPr>
-              <a:t>Manufacturers / builders</a:t>
-            </a:r>
-            <a:r>
-              <a:rPr sz="1800" b="0" i="0">
-                <a:solidFill>
-                  <a:srgbClr val="333333"/>
-                </a:solidFill>
-                <a:latin typeface="Calibri"/>
-              </a:rPr>
-              <a:t> — turn designs into physical reality</a:t>
-            </a:r>
-          </a:p>
-          <a:p>
-            <a:pPr lvl="1">
-              <a:spcAft>
-                <a:spcPts val="1000"/>
-              </a:spcAft>
-            </a:pPr>
-            <a:r>
-              <a:rPr sz="1800" b="1" i="0">
-                <a:solidFill>
-                  <a:srgbClr val="6E2337"/>
-                </a:solidFill>
-                <a:latin typeface="Calibri"/>
-              </a:rPr>
-              <a:t>Other designers</a:t>
-            </a:r>
-            <a:r>
-              <a:rPr sz="1800" b="0" i="0">
-                <a:solidFill>
-                  <a:srgbClr val="333333"/>
-                </a:solidFill>
-                <a:latin typeface="Calibri"/>
-              </a:rPr>
-              <a:t> — e.g. a graphic designer working with a UX designer</a:t>
-            </a:r>
-          </a:p>
-          <a:p>
-            <a:pPr lvl="1">
-              <a:spcAft>
-                <a:spcPts val="1000"/>
-              </a:spcAft>
-            </a:pPr>
-            <a:r>
-              <a:rPr sz="1800" b="1" i="0">
-                <a:solidFill>
-                  <a:srgbClr val="6E2337"/>
-                </a:solidFill>
-                <a:latin typeface="Calibri"/>
-              </a:rPr>
-              <a:t>Marketing / printers / developers</a:t>
-            </a:r>
-            <a:r>
-              <a:rPr sz="1800" b="0" i="0">
-                <a:solidFill>
-                  <a:srgbClr val="333333"/>
-                </a:solidFill>
-                <a:latin typeface="Calibri"/>
-              </a:rPr>
-              <a:t> — deliver the design to its final audience</a:t>
-            </a:r>
-          </a:p>
-        </p:txBody>
-      </p:sp>
-      <p:sp>
-        <p:nvSpPr>
-          <p:cNvPr id="4" name="Content Placeholder 3"/>
-          <p:cNvSpPr>
-            <a:spLocks noGrp="1"/>
-          </p:cNvSpPr>
-          <p:nvPr>
-            <p:ph idx="2" sz="half"/>
-          </p:nvPr>
-        </p:nvSpPr>
-        <p:spPr/>
-        <p:txBody>
-          <a:bodyPr wrap="square"/>
-          <a:lstStyle/>
-          <a:p>
-            <a:pPr>
-              <a:spcAft>
-                <a:spcPts val="1000"/>
-              </a:spcAft>
-            </a:pPr>
-            <a:r>
-              <a:rPr sz="2000" b="0" i="0">
-                <a:solidFill>
-                  <a:srgbClr val="333333"/>
-                </a:solidFill>
-                <a:latin typeface="Calibri"/>
-              </a:rPr>
-              <a:t>Why Collaboration Matters</a:t>
-            </a:r>
-          </a:p>
-          <a:p>
-            <a:pPr>
-              <a:spcAft>
-                <a:spcPts val="1000"/>
-              </a:spcAft>
-            </a:pPr>
-            <a:r>
-              <a:rPr sz="2000" b="0" i="0">
-                <a:solidFill>
-                  <a:srgbClr val="333333"/>
-                </a:solidFill>
-                <a:latin typeface="Calibri"/>
-              </a:rPr>
-              <a:t>No single designer has expertise in every stage — from materials science to code to construction. Good collaboration keeps the design's original intent intact as it moves through production.</a:t>
-            </a:r>
-          </a:p>
-        </p:txBody>
-      </p:sp>
-      <p:sp>
-        <p:nvSpPr>
-          <p:cNvPr id="5" name="Rectangle 4"/>
+          <p:cNvPr id="2" name="Rounded Rectangle 1"/>
           <p:cNvSpPr/>
           <p:nvPr/>
         </p:nvSpPr>
         <p:spPr>
           <a:xfrm>
-            <a:off x="548640" y="1234440"/>
-            <a:ext cx="1463040" cy="38100"/>
+            <a:off x="685800" y="502920"/>
+            <a:ext cx="3291840" cy="457200"/>
+          </a:xfrm>
+          <a:prstGeom prst="roundRect">
+            <a:avLst>
+              <a:gd name="adj" fmla="val 50000"/>
+            </a:avLst>
+          </a:prstGeom>
+          <a:solidFill>
+            <a:srgbClr val="7A2E43"/>
+          </a:solidFill>
+          <a:ln>
+            <a:noFill/>
+          </a:ln>
+          <a:effectLst/>
+        </p:spPr>
+        <p:style>
+          <a:lnRef idx="1">
+            <a:schemeClr val="accent1"/>
+          </a:lnRef>
+          <a:fillRef idx="3">
+            <a:schemeClr val="accent1"/>
+          </a:fillRef>
+          <a:effectRef idx="2">
+            <a:schemeClr val="accent1"/>
+          </a:effectRef>
+          <a:fontRef idx="minor">
+            <a:schemeClr val="lt1"/>
+          </a:fontRef>
+        </p:style>
+        <p:txBody>
+          <a:bodyPr rtlCol="0" anchor="ctr" wrap="none" lIns="50800" rIns="50800"/>
+          <a:lstStyle/>
+          <a:p>
+            <a:pPr algn="ctr"/>
+            <a:r>
+              <a:rPr sz="1100" b="1">
+                <a:solidFill>
+                  <a:srgbClr val="FFFFFF"/>
+                </a:solidFill>
+                <a:latin typeface="Calibri"/>
+              </a:rPr>
+              <a:t>DESIGN &amp; INDUSTRY CONNECTIONS</a:t>
+            </a:r>
+          </a:p>
+        </p:txBody>
+      </p:sp>
+      <p:sp>
+        <p:nvSpPr>
+          <p:cNvPr id="3" name="TextBox 2"/>
+          <p:cNvSpPr txBox="1"/>
+          <p:nvPr/>
+        </p:nvSpPr>
+        <p:spPr>
+          <a:xfrm>
+            <a:off x="685800" y="1051560"/>
+            <a:ext cx="10607040" cy="822960"/>
           </a:xfrm>
           <a:prstGeom prst="rect">
             <a:avLst/>
           </a:prstGeom>
+          <a:noFill/>
+        </p:spPr>
+        <p:txBody>
+          <a:bodyPr wrap="square" anchor="t">
+            <a:spAutoFit/>
+          </a:bodyPr>
+          <a:lstStyle/>
+          <a:p>
+            <a:pPr algn="l"/>
+            <a:r>
+              <a:rPr sz="2700" b="1" i="0">
+                <a:solidFill>
+                  <a:srgbClr val="2A1A1F"/>
+                </a:solidFill>
+                <a:latin typeface="Cambria"/>
+              </a:rPr>
+              <a:t>Collaboration in Industry</a:t>
+            </a:r>
+          </a:p>
+        </p:txBody>
+      </p:sp>
+      <p:sp>
+        <p:nvSpPr>
+          <p:cNvPr id="4" name="Rounded Rectangle 3"/>
+          <p:cNvSpPr/>
+          <p:nvPr/>
+        </p:nvSpPr>
+        <p:spPr>
+          <a:xfrm>
+            <a:off x="685800" y="1874519"/>
+            <a:ext cx="5166360" cy="4526280"/>
+          </a:xfrm>
+          <a:prstGeom prst="roundRect">
+            <a:avLst>
+              <a:gd name="adj" fmla="val 6000"/>
+            </a:avLst>
+          </a:prstGeom>
           <a:solidFill>
-            <a:srgbClr val="6E2337"/>
+            <a:srgbClr val="EFE5E8"/>
+          </a:solidFill>
+          <a:ln>
+            <a:noFill/>
+          </a:ln>
+          <a:effectLst/>
+        </p:spPr>
+        <p:style>
+          <a:lnRef idx="1">
+            <a:schemeClr val="accent1"/>
+          </a:lnRef>
+          <a:fillRef idx="3">
+            <a:schemeClr val="accent1"/>
+          </a:fillRef>
+          <a:effectRef idx="2">
+            <a:schemeClr val="accent1"/>
+          </a:effectRef>
+          <a:fontRef idx="minor">
+            <a:schemeClr val="lt1"/>
+          </a:fontRef>
+        </p:style>
+        <p:txBody>
+          <a:bodyPr rtlCol="0" anchor="ctr" lIns="279400" rIns="279400" tIns="228600" bIns="228600" wrap="square"/>
+          <a:lstStyle/>
+          <a:p>
+            <a:pPr algn="ctr" indent="-203200" marL="203200">
+              <a:spcAft>
+                <a:spcPts val="900"/>
+              </a:spcAft>
+              <a:buClr>
+                <a:srgbClr val="7A2E43"/>
+              </a:buClr>
+              <a:buSzPct val="90000"/>
+              <a:buFont typeface="Arial"/>
+              <a:buChar char="●"/>
+            </a:pPr>
+            <a:r>
+              <a:rPr sz="1400" b="0" i="0">
+                <a:solidFill>
+                  <a:srgbClr val="2A1A1F"/>
+                </a:solidFill>
+                <a:latin typeface="Calibri"/>
+              </a:rPr>
+              <a:t>Designers rarely work in isolation. They collaborate with other professionals and tradespeople to bring a design from concept to reality.</a:t>
+            </a:r>
+          </a:p>
+          <a:p>
+            <a:pPr indent="-203200" marL="203200">
+              <a:spcAft>
+                <a:spcPts val="900"/>
+              </a:spcAft>
+              <a:buClr>
+                <a:srgbClr val="7A2E43"/>
+              </a:buClr>
+              <a:buSzPct val="90000"/>
+              <a:buFont typeface="Arial"/>
+              <a:buChar char="●"/>
+            </a:pPr>
+            <a:r>
+              <a:rPr sz="1400" b="0" i="0">
+                <a:solidFill>
+                  <a:srgbClr val="2A1A1F"/>
+                </a:solidFill>
+                <a:latin typeface="Calibri"/>
+              </a:rPr>
+              <a:t>Who Designers Collaborate With</a:t>
+            </a:r>
+          </a:p>
+          <a:p>
+            <a:pPr indent="-203200" marL="203200">
+              <a:spcAft>
+                <a:spcPts val="900"/>
+              </a:spcAft>
+              <a:buClr>
+                <a:srgbClr val="7A2E43"/>
+              </a:buClr>
+              <a:buSzPct val="90000"/>
+              <a:buFont typeface="Arial"/>
+              <a:buChar char="–"/>
+            </a:pPr>
+            <a:r>
+              <a:rPr sz="1250" b="1" i="0">
+                <a:solidFill>
+                  <a:srgbClr val="672738"/>
+                </a:solidFill>
+                <a:latin typeface="Calibri"/>
+              </a:rPr>
+              <a:t>Clients</a:t>
+            </a:r>
+            <a:r>
+              <a:rPr sz="1250" b="0" i="0">
+                <a:solidFill>
+                  <a:srgbClr val="2A1A1F"/>
+                </a:solidFill>
+                <a:latin typeface="Calibri"/>
+              </a:rPr>
+              <a:t> — provide the brief, approve directions, fund the project</a:t>
+            </a:r>
+          </a:p>
+          <a:p>
+            <a:pPr indent="-203200" marL="203200">
+              <a:spcAft>
+                <a:spcPts val="900"/>
+              </a:spcAft>
+              <a:buClr>
+                <a:srgbClr val="7A2E43"/>
+              </a:buClr>
+              <a:buSzPct val="90000"/>
+              <a:buFont typeface="Arial"/>
+              <a:buChar char="–"/>
+            </a:pPr>
+            <a:r>
+              <a:rPr sz="1250" b="1" i="0">
+                <a:solidFill>
+                  <a:srgbClr val="672738"/>
+                </a:solidFill>
+                <a:latin typeface="Calibri"/>
+              </a:rPr>
+              <a:t>Manufacturers / builders</a:t>
+            </a:r>
+            <a:r>
+              <a:rPr sz="1250" b="0" i="0">
+                <a:solidFill>
+                  <a:srgbClr val="2A1A1F"/>
+                </a:solidFill>
+                <a:latin typeface="Calibri"/>
+              </a:rPr>
+              <a:t> — turn designs into physical reality</a:t>
+            </a:r>
+          </a:p>
+          <a:p>
+            <a:pPr indent="-203200" marL="203200">
+              <a:spcAft>
+                <a:spcPts val="900"/>
+              </a:spcAft>
+              <a:buClr>
+                <a:srgbClr val="7A2E43"/>
+              </a:buClr>
+              <a:buSzPct val="90000"/>
+              <a:buFont typeface="Arial"/>
+              <a:buChar char="–"/>
+            </a:pPr>
+            <a:r>
+              <a:rPr sz="1250" b="1" i="0">
+                <a:solidFill>
+                  <a:srgbClr val="672738"/>
+                </a:solidFill>
+                <a:latin typeface="Calibri"/>
+              </a:rPr>
+              <a:t>Other designers</a:t>
+            </a:r>
+            <a:r>
+              <a:rPr sz="1250" b="0" i="0">
+                <a:solidFill>
+                  <a:srgbClr val="2A1A1F"/>
+                </a:solidFill>
+                <a:latin typeface="Calibri"/>
+              </a:rPr>
+              <a:t> — e.g. a graphic designer working with a UX designer</a:t>
+            </a:r>
+          </a:p>
+          <a:p>
+            <a:pPr indent="-203200" marL="203200">
+              <a:spcAft>
+                <a:spcPts val="900"/>
+              </a:spcAft>
+              <a:buClr>
+                <a:srgbClr val="7A2E43"/>
+              </a:buClr>
+              <a:buSzPct val="90000"/>
+              <a:buFont typeface="Arial"/>
+              <a:buChar char="–"/>
+            </a:pPr>
+            <a:r>
+              <a:rPr sz="1250" b="1" i="0">
+                <a:solidFill>
+                  <a:srgbClr val="672738"/>
+                </a:solidFill>
+                <a:latin typeface="Calibri"/>
+              </a:rPr>
+              <a:t>Marketing / printers / developers</a:t>
+            </a:r>
+            <a:r>
+              <a:rPr sz="1250" b="0" i="0">
+                <a:solidFill>
+                  <a:srgbClr val="2A1A1F"/>
+                </a:solidFill>
+                <a:latin typeface="Calibri"/>
+              </a:rPr>
+              <a:t> — deliver the design to its final audience</a:t>
+            </a:r>
+          </a:p>
+        </p:txBody>
+      </p:sp>
+      <p:sp>
+        <p:nvSpPr>
+          <p:cNvPr id="5" name="Rounded Rectangle 4"/>
+          <p:cNvSpPr/>
+          <p:nvPr/>
+        </p:nvSpPr>
+        <p:spPr>
+          <a:xfrm>
+            <a:off x="6080760" y="1874519"/>
+            <a:ext cx="5166360" cy="4526280"/>
+          </a:xfrm>
+          <a:prstGeom prst="roundRect">
+            <a:avLst>
+              <a:gd name="adj" fmla="val 6000"/>
+            </a:avLst>
+          </a:prstGeom>
+          <a:solidFill>
+            <a:srgbClr val="F4DEE3"/>
+          </a:solidFill>
+          <a:ln>
+            <a:noFill/>
+          </a:ln>
+          <a:effectLst/>
+        </p:spPr>
+        <p:style>
+          <a:lnRef idx="1">
+            <a:schemeClr val="accent1"/>
+          </a:lnRef>
+          <a:fillRef idx="3">
+            <a:schemeClr val="accent1"/>
+          </a:fillRef>
+          <a:effectRef idx="2">
+            <a:schemeClr val="accent1"/>
+          </a:effectRef>
+          <a:fontRef idx="minor">
+            <a:schemeClr val="lt1"/>
+          </a:fontRef>
+        </p:style>
+        <p:txBody>
+          <a:bodyPr rtlCol="0" anchor="ctr" lIns="279400" rIns="279400" tIns="228600" bIns="228600" wrap="square"/>
+          <a:lstStyle/>
+          <a:p>
+            <a:pPr algn="ctr" indent="-203200" marL="203200">
+              <a:spcAft>
+                <a:spcPts val="900"/>
+              </a:spcAft>
+              <a:buClr>
+                <a:srgbClr val="D98C9E"/>
+              </a:buClr>
+              <a:buSzPct val="90000"/>
+              <a:buFont typeface="Arial"/>
+              <a:buChar char="●"/>
+            </a:pPr>
+            <a:r>
+              <a:rPr sz="1400" b="0" i="0">
+                <a:solidFill>
+                  <a:srgbClr val="2A1A1F"/>
+                </a:solidFill>
+                <a:latin typeface="Calibri"/>
+              </a:rPr>
+              <a:t>Why Collaboration Matters</a:t>
+            </a:r>
+          </a:p>
+          <a:p>
+            <a:pPr indent="-203200" marL="203200">
+              <a:spcAft>
+                <a:spcPts val="900"/>
+              </a:spcAft>
+              <a:buClr>
+                <a:srgbClr val="D98C9E"/>
+              </a:buClr>
+              <a:buSzPct val="90000"/>
+              <a:buFont typeface="Arial"/>
+              <a:buChar char="●"/>
+            </a:pPr>
+            <a:r>
+              <a:rPr sz="1400" b="0" i="0">
+                <a:solidFill>
+                  <a:srgbClr val="2A1A1F"/>
+                </a:solidFill>
+                <a:latin typeface="Calibri"/>
+              </a:rPr>
+              <a:t>No single designer has expertise in every stage — from materials science to code to construction. Good collaboration keeps the design's original intent intact as it moves through production.</a:t>
+            </a:r>
+          </a:p>
+        </p:txBody>
+      </p:sp>
+      <p:sp>
+        <p:nvSpPr>
+          <p:cNvPr id="6" name="Oval 5"/>
+          <p:cNvSpPr/>
+          <p:nvPr/>
+        </p:nvSpPr>
+        <p:spPr>
+          <a:xfrm>
+            <a:off x="5532120" y="3840480"/>
+            <a:ext cx="685800" cy="685800"/>
+          </a:xfrm>
+          <a:prstGeom prst="ellipse">
+            <a:avLst/>
+          </a:prstGeom>
+          <a:solidFill>
+            <a:srgbClr val="D6A24A"/>
           </a:solidFill>
           <a:ln>
             <a:noFill/>
@@ -3839,6 +4583,14 @@
 <file path=ppt/slides/slide13.xml><?xml version="1.0" encoding="utf-8"?>
 <p:sld xmlns:a="http://schemas.openxmlformats.org/drawingml/2006/main" xmlns:p="http://schemas.openxmlformats.org/presentationml/2006/main" xmlns:r="http://schemas.openxmlformats.org/officeDocument/2006/relationships">
   <p:cSld>
+    <p:bg>
+      <p:bgPr>
+        <a:solidFill>
+          <a:srgbClr val="FBF5F1"/>
+        </a:solidFill>
+        <a:effectLst/>
+      </p:bgPr>
+    </p:bg>
     <p:spTree>
       <p:nvGrpSpPr>
         <p:cNvPr id="1" name=""/>
@@ -3848,225 +4600,22 @@
       <p:grpSpPr/>
       <p:sp>
         <p:nvSpPr>
-          <p:cNvPr id="2" name="Title 1"/>
-          <p:cNvSpPr>
-            <a:spLocks noGrp="1"/>
-          </p:cNvSpPr>
-          <p:nvPr>
-            <p:ph type="title"/>
-          </p:nvPr>
-        </p:nvSpPr>
-        <p:spPr/>
-        <p:txBody>
-          <a:bodyPr wrap="square"/>
-          <a:lstStyle/>
-          <a:p>
-            <a:r>
-              <a:rPr sz="3200" b="1">
-                <a:solidFill>
-                  <a:srgbClr val="6E2337"/>
-                </a:solidFill>
-                <a:latin typeface="Cambria"/>
-              </a:rPr>
-              <a:t>Factors Shaping Industry Practice</a:t>
-            </a:r>
-          </a:p>
-        </p:txBody>
-      </p:sp>
-      <p:sp>
-        <p:nvSpPr>
-          <p:cNvPr id="3" name="Content Placeholder 2"/>
-          <p:cNvSpPr>
-            <a:spLocks noGrp="1"/>
-          </p:cNvSpPr>
-          <p:nvPr>
-            <p:ph idx="1"/>
-          </p:nvPr>
-        </p:nvSpPr>
-        <p:spPr/>
-        <p:txBody>
-          <a:bodyPr wrap="square"/>
-          <a:lstStyle/>
-          <a:p>
-            <a:pPr lvl="1">
-              <a:spcAft>
-                <a:spcPts val="1000"/>
-              </a:spcAft>
-            </a:pPr>
-            <a:r>
-              <a:rPr sz="1800" b="0" i="0">
-                <a:solidFill>
-                  <a:srgbClr val="333333"/>
-                </a:solidFill>
-                <a:latin typeface="Calibri"/>
-              </a:rPr>
-              <a:t> Sustainability</a:t>
-            </a:r>
-          </a:p>
-          <a:p>
-            <a:pPr lvl="1">
-              <a:spcAft>
-                <a:spcPts val="1000"/>
-              </a:spcAft>
-            </a:pPr>
-            <a:r>
-              <a:rPr sz="1800" b="0" i="0">
-                <a:solidFill>
-                  <a:srgbClr val="333333"/>
-                </a:solidFill>
-                <a:latin typeface="Calibri"/>
-              </a:rPr>
-              <a:t>Materials, energy use, waste and end-of-life disposal are now standard client requirements.</a:t>
-            </a:r>
-          </a:p>
-          <a:p>
-            <a:pPr lvl="1">
-              <a:spcAft>
-                <a:spcPts val="1000"/>
-              </a:spcAft>
-            </a:pPr>
-            <a:r>
-              <a:rPr sz="1800" b="0" i="0">
-                <a:solidFill>
-                  <a:srgbClr val="333333"/>
-                </a:solidFill>
-                <a:latin typeface="Calibri"/>
-              </a:rPr>
-              <a:t> Technology</a:t>
-            </a:r>
-          </a:p>
-          <a:p>
-            <a:pPr lvl="1">
-              <a:spcAft>
-                <a:spcPts val="1000"/>
-              </a:spcAft>
-            </a:pPr>
-            <a:r>
-              <a:rPr sz="1800" b="0" i="0">
-                <a:solidFill>
-                  <a:srgbClr val="333333"/>
-                </a:solidFill>
-                <a:latin typeface="Calibri"/>
-              </a:rPr>
-              <a:t>New software, materials and manufacturing (3D printing, AI tools) change what's possible and expected.</a:t>
-            </a:r>
-          </a:p>
-          <a:p>
-            <a:pPr lvl="1">
-              <a:spcAft>
-                <a:spcPts val="1000"/>
-              </a:spcAft>
-            </a:pPr>
-            <a:r>
-              <a:rPr sz="1800" b="0" i="0">
-                <a:solidFill>
-                  <a:srgbClr val="333333"/>
-                </a:solidFill>
-                <a:latin typeface="Calibri"/>
-              </a:rPr>
-              <a:t> Ethics</a:t>
-            </a:r>
-          </a:p>
-          <a:p>
-            <a:pPr lvl="1">
-              <a:spcAft>
-                <a:spcPts val="1000"/>
-              </a:spcAft>
-            </a:pPr>
-            <a:r>
-              <a:rPr sz="1800" b="0" i="0">
-                <a:solidFill>
-                  <a:srgbClr val="333333"/>
-                </a:solidFill>
-                <a:latin typeface="Calibri"/>
-              </a:rPr>
-              <a:t>Fair labour, honest advertising, accessibility and inclusive design are professional expectations.</a:t>
-            </a:r>
-          </a:p>
-          <a:p>
-            <a:pPr lvl="1">
-              <a:spcAft>
-                <a:spcPts val="1000"/>
-              </a:spcAft>
-            </a:pPr>
-            <a:r>
-              <a:rPr sz="1800" b="0" i="0">
-                <a:solidFill>
-                  <a:srgbClr val="333333"/>
-                </a:solidFill>
-                <a:latin typeface="Calibri"/>
-              </a:rPr>
-              <a:t>© Intellectual Property</a:t>
-            </a:r>
-          </a:p>
-          <a:p>
-            <a:pPr lvl="1">
-              <a:spcAft>
-                <a:spcPts val="1000"/>
-              </a:spcAft>
-            </a:pPr>
-            <a:r>
-              <a:rPr sz="1800" b="0" i="0">
-                <a:solidFill>
-                  <a:srgbClr val="333333"/>
-                </a:solidFill>
-                <a:latin typeface="Calibri"/>
-              </a:rPr>
-              <a:t>Copyright, trademarks and licensing protect original design work from unauthorised copying.</a:t>
-            </a:r>
-          </a:p>
-          <a:p>
-            <a:pPr>
-              <a:spcAft>
-                <a:spcPts val="1000"/>
-              </a:spcAft>
-            </a:pPr>
-            <a:r>
-              <a:rPr sz="2000" b="0" i="0">
-                <a:solidFill>
-                  <a:srgbClr val="333333"/>
-                </a:solidFill>
-                <a:latin typeface="Calibri"/>
-              </a:rPr>
-              <a:t> These factors don't just affect big companies — they shape </a:t>
-            </a:r>
-            <a:r>
-              <a:rPr sz="2000" b="1" i="0">
-                <a:solidFill>
-                  <a:srgbClr val="6E2337"/>
-                </a:solidFill>
-                <a:latin typeface="Calibri"/>
-              </a:rPr>
-              <a:t>every</a:t>
-            </a:r>
-            <a:r>
-              <a:rPr sz="2000" b="0" i="0">
-                <a:solidFill>
-                  <a:srgbClr val="333333"/>
-                </a:solidFill>
-                <a:latin typeface="Calibri"/>
-              </a:rPr>
-              <a:t> design decision, from the materials in your VCD folio model to the fonts you're licensed to use. </a:t>
-            </a:r>
-          </a:p>
-        </p:txBody>
-      </p:sp>
-      <p:sp>
-        <p:nvSpPr>
-          <p:cNvPr id="4" name="Rectangle 3"/>
+          <p:cNvPr id="2" name="Rounded Rectangle 1"/>
           <p:cNvSpPr/>
           <p:nvPr/>
         </p:nvSpPr>
         <p:spPr>
           <a:xfrm>
-            <a:off x="548640" y="1234440"/>
-            <a:ext cx="1463040" cy="38100"/>
-          </a:xfrm>
-          <a:prstGeom prst="rect">
-            <a:avLst/>
+            <a:off x="685800" y="502920"/>
+            <a:ext cx="3291840" cy="457200"/>
+          </a:xfrm>
+          <a:prstGeom prst="roundRect">
+            <a:avLst>
+              <a:gd name="adj" fmla="val 50000"/>
+            </a:avLst>
           </a:prstGeom>
           <a:solidFill>
-            <a:srgbClr val="6E2337"/>
+            <a:srgbClr val="7A2E43"/>
           </a:solidFill>
           <a:ln>
             <a:noFill/>
@@ -4088,10 +4637,401 @@
           </a:fontRef>
         </p:style>
         <p:txBody>
-          <a:bodyPr rtlCol="0" anchor="ctr"/>
+          <a:bodyPr rtlCol="0" anchor="ctr" wrap="none" lIns="50800" rIns="50800"/>
           <a:lstStyle/>
           <a:p>
             <a:pPr algn="ctr"/>
+            <a:r>
+              <a:rPr sz="1100" b="1">
+                <a:solidFill>
+                  <a:srgbClr val="FFFFFF"/>
+                </a:solidFill>
+                <a:latin typeface="Calibri"/>
+              </a:rPr>
+              <a:t>DESIGN &amp; INDUSTRY CONNECTIONS</a:t>
+            </a:r>
+          </a:p>
+        </p:txBody>
+      </p:sp>
+      <p:sp>
+        <p:nvSpPr>
+          <p:cNvPr id="3" name="TextBox 2"/>
+          <p:cNvSpPr txBox="1"/>
+          <p:nvPr/>
+        </p:nvSpPr>
+        <p:spPr>
+          <a:xfrm>
+            <a:off x="685800" y="1051560"/>
+            <a:ext cx="10607040" cy="822960"/>
+          </a:xfrm>
+          <a:prstGeom prst="rect">
+            <a:avLst/>
+          </a:prstGeom>
+          <a:noFill/>
+        </p:spPr>
+        <p:txBody>
+          <a:bodyPr wrap="square" anchor="t">
+            <a:spAutoFit/>
+          </a:bodyPr>
+          <a:lstStyle/>
+          <a:p>
+            <a:pPr algn="l"/>
+            <a:r>
+              <a:rPr sz="2700" b="1" i="0">
+                <a:solidFill>
+                  <a:srgbClr val="2A1A1F"/>
+                </a:solidFill>
+                <a:latin typeface="Cambria"/>
+              </a:rPr>
+              <a:t>Factors Shaping Industry Practice</a:t>
+            </a:r>
+          </a:p>
+        </p:txBody>
+      </p:sp>
+      <p:sp>
+        <p:nvSpPr>
+          <p:cNvPr id="4" name="Rounded Rectangle 3"/>
+          <p:cNvSpPr/>
+          <p:nvPr/>
+        </p:nvSpPr>
+        <p:spPr>
+          <a:xfrm>
+            <a:off x="685800" y="1874519"/>
+            <a:ext cx="2500884" cy="1554480"/>
+          </a:xfrm>
+          <a:prstGeom prst="roundRect">
+            <a:avLst>
+              <a:gd name="adj" fmla="val 12000"/>
+            </a:avLst>
+          </a:prstGeom>
+          <a:solidFill>
+            <a:srgbClr val="EBDFE2"/>
+          </a:solidFill>
+          <a:ln>
+            <a:noFill/>
+          </a:ln>
+          <a:effectLst/>
+        </p:spPr>
+        <p:style>
+          <a:lnRef idx="1">
+            <a:schemeClr val="accent1"/>
+          </a:lnRef>
+          <a:fillRef idx="3">
+            <a:schemeClr val="accent1"/>
+          </a:fillRef>
+          <a:effectRef idx="2">
+            <a:schemeClr val="accent1"/>
+          </a:effectRef>
+          <a:fontRef idx="minor">
+            <a:schemeClr val="lt1"/>
+          </a:fontRef>
+        </p:style>
+        <p:txBody>
+          <a:bodyPr rtlCol="0" anchor="ctr" wrap="square" lIns="127000" rIns="127000" tIns="101600" bIns="101600"/>
+          <a:lstStyle/>
+          <a:p>
+            <a:pPr algn="ctr"/>
+            <a:r>
+              <a:rPr b="1" sz="1300">
+                <a:solidFill>
+                  <a:srgbClr val="612435"/>
+                </a:solidFill>
+                <a:latin typeface="Calibri"/>
+              </a:rPr>
+              <a:t>Sustainability</a:t>
+            </a:r>
+          </a:p>
+          <a:p>
+            <a:r>
+              <a:rPr sz="1050">
+                <a:solidFill>
+                  <a:srgbClr val="2A1A1F"/>
+                </a:solidFill>
+                <a:latin typeface="Calibri"/>
+              </a:rPr>
+              <a:t>Materials, energy use, waste and end-of-life disposal are now standard client requirements.</a:t>
+            </a:r>
+          </a:p>
+        </p:txBody>
+      </p:sp>
+      <p:sp>
+        <p:nvSpPr>
+          <p:cNvPr id="5" name="Rounded Rectangle 4"/>
+          <p:cNvSpPr/>
+          <p:nvPr/>
+        </p:nvSpPr>
+        <p:spPr>
+          <a:xfrm>
+            <a:off x="3387852" y="1874519"/>
+            <a:ext cx="2500884" cy="1554480"/>
+          </a:xfrm>
+          <a:prstGeom prst="roundRect">
+            <a:avLst>
+              <a:gd name="adj" fmla="val 12000"/>
+            </a:avLst>
+          </a:prstGeom>
+          <a:solidFill>
+            <a:srgbClr val="F8F1E3"/>
+          </a:solidFill>
+          <a:ln>
+            <a:noFill/>
+          </a:ln>
+          <a:effectLst/>
+        </p:spPr>
+        <p:style>
+          <a:lnRef idx="1">
+            <a:schemeClr val="accent1"/>
+          </a:lnRef>
+          <a:fillRef idx="3">
+            <a:schemeClr val="accent1"/>
+          </a:fillRef>
+          <a:effectRef idx="2">
+            <a:schemeClr val="accent1"/>
+          </a:effectRef>
+          <a:fontRef idx="minor">
+            <a:schemeClr val="lt1"/>
+          </a:fontRef>
+        </p:style>
+        <p:txBody>
+          <a:bodyPr rtlCol="0" anchor="ctr" wrap="square" lIns="127000" rIns="127000" tIns="101600" bIns="101600"/>
+          <a:lstStyle/>
+          <a:p>
+            <a:pPr algn="ctr"/>
+            <a:r>
+              <a:rPr b="1" sz="1300">
+                <a:solidFill>
+                  <a:srgbClr val="AB813B"/>
+                </a:solidFill>
+                <a:latin typeface="Calibri"/>
+              </a:rPr>
+              <a:t>Technology</a:t>
+            </a:r>
+          </a:p>
+          <a:p>
+            <a:r>
+              <a:rPr sz="1050">
+                <a:solidFill>
+                  <a:srgbClr val="2A1A1F"/>
+                </a:solidFill>
+                <a:latin typeface="Calibri"/>
+              </a:rPr>
+              <a:t>New software, materials and manufacturing (3D printing, AI tools) change what's possible and expected.</a:t>
+            </a:r>
+          </a:p>
+        </p:txBody>
+      </p:sp>
+      <p:sp>
+        <p:nvSpPr>
+          <p:cNvPr id="6" name="Rounded Rectangle 5"/>
+          <p:cNvSpPr/>
+          <p:nvPr/>
+        </p:nvSpPr>
+        <p:spPr>
+          <a:xfrm>
+            <a:off x="6089904" y="1874519"/>
+            <a:ext cx="2500884" cy="1554480"/>
+          </a:xfrm>
+          <a:prstGeom prst="roundRect">
+            <a:avLst>
+              <a:gd name="adj" fmla="val 12000"/>
+            </a:avLst>
+          </a:prstGeom>
+          <a:solidFill>
+            <a:srgbClr val="F9EDF0"/>
+          </a:solidFill>
+          <a:ln>
+            <a:noFill/>
+          </a:ln>
+          <a:effectLst/>
+        </p:spPr>
+        <p:style>
+          <a:lnRef idx="1">
+            <a:schemeClr val="accent1"/>
+          </a:lnRef>
+          <a:fillRef idx="3">
+            <a:schemeClr val="accent1"/>
+          </a:fillRef>
+          <a:effectRef idx="2">
+            <a:schemeClr val="accent1"/>
+          </a:effectRef>
+          <a:fontRef idx="minor">
+            <a:schemeClr val="lt1"/>
+          </a:fontRef>
+        </p:style>
+        <p:txBody>
+          <a:bodyPr rtlCol="0" anchor="ctr" wrap="square" lIns="127000" rIns="127000" tIns="101600" bIns="101600"/>
+          <a:lstStyle/>
+          <a:p>
+            <a:pPr algn="ctr"/>
+            <a:r>
+              <a:rPr b="1" sz="1300">
+                <a:solidFill>
+                  <a:srgbClr val="AD707E"/>
+                </a:solidFill>
+                <a:latin typeface="Calibri"/>
+              </a:rPr>
+              <a:t>Ethics</a:t>
+            </a:r>
+          </a:p>
+          <a:p>
+            <a:r>
+              <a:rPr sz="1050">
+                <a:solidFill>
+                  <a:srgbClr val="2A1A1F"/>
+                </a:solidFill>
+                <a:latin typeface="Calibri"/>
+              </a:rPr>
+              <a:t>Fair labour, honest advertising, accessibility and inclusive design are professional expectations.</a:t>
+            </a:r>
+          </a:p>
+        </p:txBody>
+      </p:sp>
+      <p:sp>
+        <p:nvSpPr>
+          <p:cNvPr id="7" name="Rounded Rectangle 6"/>
+          <p:cNvSpPr/>
+          <p:nvPr/>
+        </p:nvSpPr>
+        <p:spPr>
+          <a:xfrm>
+            <a:off x="8791956" y="1874519"/>
+            <a:ext cx="2500884" cy="1554480"/>
+          </a:xfrm>
+          <a:prstGeom prst="roundRect">
+            <a:avLst>
+              <a:gd name="adj" fmla="val 12000"/>
+            </a:avLst>
+          </a:prstGeom>
+          <a:solidFill>
+            <a:srgbClr val="EBDFE2"/>
+          </a:solidFill>
+          <a:ln>
+            <a:noFill/>
+          </a:ln>
+          <a:effectLst/>
+        </p:spPr>
+        <p:style>
+          <a:lnRef idx="1">
+            <a:schemeClr val="accent1"/>
+          </a:lnRef>
+          <a:fillRef idx="3">
+            <a:schemeClr val="accent1"/>
+          </a:fillRef>
+          <a:effectRef idx="2">
+            <a:schemeClr val="accent1"/>
+          </a:effectRef>
+          <a:fontRef idx="minor">
+            <a:schemeClr val="lt1"/>
+          </a:fontRef>
+        </p:style>
+        <p:txBody>
+          <a:bodyPr rtlCol="0" anchor="ctr" wrap="square" lIns="127000" rIns="127000" tIns="101600" bIns="101600"/>
+          <a:lstStyle/>
+          <a:p>
+            <a:pPr algn="ctr"/>
+            <a:r>
+              <a:rPr b="1" sz="1300">
+                <a:solidFill>
+                  <a:srgbClr val="612435"/>
+                </a:solidFill>
+                <a:latin typeface="Calibri"/>
+              </a:rPr>
+              <a:t>© Intellectual Property</a:t>
+            </a:r>
+          </a:p>
+          <a:p>
+            <a:r>
+              <a:rPr sz="1050">
+                <a:solidFill>
+                  <a:srgbClr val="2A1A1F"/>
+                </a:solidFill>
+                <a:latin typeface="Calibri"/>
+              </a:rPr>
+              <a:t>Copyright, trademarks and licensing protect original design work from unauthorised copying.</a:t>
+            </a:r>
+          </a:p>
+        </p:txBody>
+      </p:sp>
+      <p:sp>
+        <p:nvSpPr>
+          <p:cNvPr id="8" name="Rounded Rectangle 7"/>
+          <p:cNvSpPr/>
+          <p:nvPr/>
+        </p:nvSpPr>
+        <p:spPr>
+          <a:xfrm>
+            <a:off x="685800" y="3675887"/>
+            <a:ext cx="10607040" cy="2862073"/>
+          </a:xfrm>
+          <a:prstGeom prst="roundRect">
+            <a:avLst>
+              <a:gd name="adj" fmla="val 10000"/>
+            </a:avLst>
+          </a:prstGeom>
+          <a:solidFill>
+            <a:srgbClr val="F8F1E3"/>
+          </a:solidFill>
+          <a:ln>
+            <a:noFill/>
+          </a:ln>
+          <a:effectLst/>
+        </p:spPr>
+        <p:style>
+          <a:lnRef idx="1">
+            <a:schemeClr val="accent1"/>
+          </a:lnRef>
+          <a:fillRef idx="3">
+            <a:schemeClr val="accent1"/>
+          </a:fillRef>
+          <a:effectRef idx="2">
+            <a:schemeClr val="accent1"/>
+          </a:effectRef>
+          <a:fontRef idx="minor">
+            <a:schemeClr val="lt1"/>
+          </a:fontRef>
+        </p:style>
+        <p:txBody>
+          <a:bodyPr rtlCol="0" anchor="ctr" lIns="203200" rIns="203200" tIns="101600" bIns="101600" wrap="square"/>
+          <a:lstStyle/>
+          <a:p>
+            <a:pPr algn="ctr" indent="-203200" marL="203200">
+              <a:spcAft>
+                <a:spcPts val="900"/>
+              </a:spcAft>
+              <a:buClr>
+                <a:srgbClr val="D6A24A"/>
+              </a:buClr>
+              <a:buSzPct val="90000"/>
+              <a:buFont typeface="Arial"/>
+              <a:buChar char="●"/>
+            </a:pPr>
+            <a:r>
+              <a:rPr sz="1200" b="0" i="0">
+                <a:solidFill>
+                  <a:srgbClr val="2A1A1F"/>
+                </a:solidFill>
+                <a:latin typeface="Calibri"/>
+              </a:rPr>
+              <a:t> These factors don't just affect big companies — they shape </a:t>
+            </a:r>
+            <a:r>
+              <a:rPr sz="1200" b="1" i="0">
+                <a:solidFill>
+                  <a:srgbClr val="B5893E"/>
+                </a:solidFill>
+                <a:latin typeface="Calibri"/>
+              </a:rPr>
+              <a:t>every</a:t>
+            </a:r>
+            <a:r>
+              <a:rPr sz="1200" b="0" i="0">
+                <a:solidFill>
+                  <a:srgbClr val="2A1A1F"/>
+                </a:solidFill>
+                <a:latin typeface="Calibri"/>
+              </a:rPr>
+              <a:t> design decision, from the materials in your VCD folio model to the fonts you're licensed to use. </a:t>
+            </a:r>
           </a:p>
         </p:txBody>
       </p:sp>
@@ -4106,6 +5046,14 @@
 <file path=ppt/slides/slide14.xml><?xml version="1.0" encoding="utf-8"?>
 <p:sld xmlns:a="http://schemas.openxmlformats.org/drawingml/2006/main" xmlns:p="http://schemas.openxmlformats.org/presentationml/2006/main" xmlns:r="http://schemas.openxmlformats.org/officeDocument/2006/relationships">
   <p:cSld>
+    <p:bg>
+      <p:bgPr>
+        <a:solidFill>
+          <a:srgbClr val="FBF5F1"/>
+        </a:solidFill>
+        <a:effectLst/>
+      </p:bgPr>
+    </p:bg>
     <p:spTree>
       <p:nvGrpSpPr>
         <p:cNvPr id="1" name=""/>
@@ -4115,243 +5063,408 @@
       <p:grpSpPr/>
       <p:sp>
         <p:nvSpPr>
-          <p:cNvPr id="2" name="Title 1"/>
-          <p:cNvSpPr>
-            <a:spLocks noGrp="1"/>
-          </p:cNvSpPr>
-          <p:nvPr>
-            <p:ph type="title"/>
-          </p:nvPr>
-        </p:nvSpPr>
-        <p:spPr/>
-        <p:txBody>
-          <a:bodyPr wrap="square"/>
-          <a:lstStyle/>
-          <a:p>
-            <a:r>
-              <a:rPr sz="3200" b="1">
-                <a:solidFill>
-                  <a:srgbClr val="6E2337"/>
-                </a:solidFill>
-                <a:latin typeface="Cambria"/>
-              </a:rPr>
-              <a:t>Intellectual Property (IP)</a:t>
-            </a:r>
-          </a:p>
-        </p:txBody>
-      </p:sp>
-      <p:sp>
-        <p:nvSpPr>
-          <p:cNvPr id="3" name="Content Placeholder 2"/>
-          <p:cNvSpPr>
-            <a:spLocks noGrp="1"/>
-          </p:cNvSpPr>
-          <p:nvPr>
-            <p:ph idx="1" sz="half"/>
-          </p:nvPr>
-        </p:nvSpPr>
-        <p:spPr/>
-        <p:txBody>
-          <a:bodyPr wrap="square"/>
-          <a:lstStyle/>
-          <a:p>
-            <a:pPr>
-              <a:spcAft>
-                <a:spcPts val="1000"/>
-              </a:spcAft>
-            </a:pPr>
-            <a:r>
-              <a:rPr sz="2000" b="0" i="0">
-                <a:solidFill>
-                  <a:srgbClr val="333333"/>
-                </a:solidFill>
-                <a:latin typeface="Calibri"/>
-              </a:rPr>
-              <a:t>Intellectual property law protects original creative and design work from being copied or used without permission.</a:t>
-            </a:r>
-          </a:p>
-          <a:p>
-            <a:pPr>
-              <a:spcAft>
-                <a:spcPts val="1000"/>
-              </a:spcAft>
-            </a:pPr>
-            <a:r>
-              <a:rPr sz="2000" b="0" i="0">
-                <a:solidFill>
-                  <a:srgbClr val="333333"/>
-                </a:solidFill>
-                <a:latin typeface="Calibri"/>
-              </a:rPr>
-              <a:t>Types Relevant to Designers</a:t>
-            </a:r>
-          </a:p>
-          <a:p>
-            <a:pPr lvl="1">
-              <a:spcAft>
-                <a:spcPts val="1000"/>
-              </a:spcAft>
-            </a:pPr>
-            <a:r>
-              <a:rPr sz="1800" b="1" i="0">
-                <a:solidFill>
-                  <a:srgbClr val="6E2337"/>
-                </a:solidFill>
-                <a:latin typeface="Calibri"/>
-              </a:rPr>
-              <a:t>Copyright</a:t>
-            </a:r>
-            <a:r>
-              <a:rPr sz="1800" b="0" i="0">
-                <a:solidFill>
-                  <a:srgbClr val="333333"/>
-                </a:solidFill>
-                <a:latin typeface="Calibri"/>
-              </a:rPr>
-              <a:t> — automatically protects original creative works (images, layouts, text)</a:t>
-            </a:r>
-          </a:p>
-          <a:p>
-            <a:pPr lvl="1">
-              <a:spcAft>
-                <a:spcPts val="1000"/>
-              </a:spcAft>
-            </a:pPr>
-            <a:r>
-              <a:rPr sz="1800" b="1" i="0">
-                <a:solidFill>
-                  <a:srgbClr val="6E2337"/>
-                </a:solidFill>
-                <a:latin typeface="Calibri"/>
-              </a:rPr>
-              <a:t>Trademark</a:t>
-            </a:r>
-            <a:r>
-              <a:rPr sz="1800" b="0" i="0">
-                <a:solidFill>
-                  <a:srgbClr val="333333"/>
-                </a:solidFill>
-                <a:latin typeface="Calibri"/>
-              </a:rPr>
-              <a:t> — protects brand names, logos and slogans</a:t>
-            </a:r>
-          </a:p>
-          <a:p>
-            <a:pPr lvl="1">
-              <a:spcAft>
-                <a:spcPts val="1000"/>
-              </a:spcAft>
-            </a:pPr>
-            <a:r>
-              <a:rPr sz="1800" b="1" i="0">
-                <a:solidFill>
-                  <a:srgbClr val="6E2337"/>
-                </a:solidFill>
-                <a:latin typeface="Calibri"/>
-              </a:rPr>
-              <a:t>Design registration</a:t>
-            </a:r>
-            <a:r>
-              <a:rPr sz="1800" b="0" i="0">
-                <a:solidFill>
-                  <a:srgbClr val="333333"/>
-                </a:solidFill>
-                <a:latin typeface="Calibri"/>
-              </a:rPr>
-              <a:t> — protects the visual appearance of a manufactured product</a:t>
-            </a:r>
-          </a:p>
-          <a:p>
-            <a:pPr lvl="1">
-              <a:spcAft>
-                <a:spcPts val="1000"/>
-              </a:spcAft>
-            </a:pPr>
-            <a:r>
-              <a:rPr sz="1800" b="1" i="0">
-                <a:solidFill>
-                  <a:srgbClr val="6E2337"/>
-                </a:solidFill>
-                <a:latin typeface="Calibri"/>
-              </a:rPr>
-              <a:t>Patent</a:t>
-            </a:r>
-            <a:r>
-              <a:rPr sz="1800" b="0" i="0">
-                <a:solidFill>
-                  <a:srgbClr val="333333"/>
-                </a:solidFill>
-                <a:latin typeface="Calibri"/>
-              </a:rPr>
-              <a:t> — protects a new invention or functional process</a:t>
-            </a:r>
-          </a:p>
-        </p:txBody>
-      </p:sp>
-      <p:sp>
-        <p:nvSpPr>
-          <p:cNvPr id="4" name="Content Placeholder 3"/>
-          <p:cNvSpPr>
-            <a:spLocks noGrp="1"/>
-          </p:cNvSpPr>
-          <p:nvPr>
-            <p:ph idx="2" sz="half"/>
-          </p:nvPr>
-        </p:nvSpPr>
-        <p:spPr/>
-        <p:txBody>
-          <a:bodyPr wrap="square"/>
-          <a:lstStyle/>
-          <a:p>
-            <a:pPr>
-              <a:spcAft>
-                <a:spcPts val="1000"/>
-              </a:spcAft>
-            </a:pPr>
-            <a:r>
-              <a:rPr sz="2000" b="0" i="0">
-                <a:solidFill>
-                  <a:srgbClr val="333333"/>
-                </a:solidFill>
-                <a:latin typeface="Calibri"/>
-              </a:rPr>
-              <a:t>Why It Matters to You</a:t>
-            </a:r>
-          </a:p>
-          <a:p>
-            <a:pPr>
-              <a:spcAft>
-                <a:spcPts val="1000"/>
-              </a:spcAft>
-            </a:pPr>
-            <a:r>
-              <a:rPr sz="2000" b="0" i="0">
-                <a:solidFill>
-                  <a:srgbClr val="333333"/>
-                </a:solidFill>
-                <a:latin typeface="Calibri"/>
-              </a:rPr>
-              <a:t>In your own folio, always use your own photography/imagery or correctly licensed stock and fonts — using copyrighted material without permission is a real industry issue, not just a school rule.</a:t>
-            </a:r>
-          </a:p>
-        </p:txBody>
-      </p:sp>
-      <p:sp>
-        <p:nvSpPr>
-          <p:cNvPr id="5" name="Rectangle 4"/>
+          <p:cNvPr id="2" name="Rounded Rectangle 1"/>
           <p:cNvSpPr/>
           <p:nvPr/>
         </p:nvSpPr>
         <p:spPr>
           <a:xfrm>
-            <a:off x="548640" y="1234440"/>
-            <a:ext cx="1463040" cy="38100"/>
+            <a:off x="685800" y="502920"/>
+            <a:ext cx="3291840" cy="457200"/>
+          </a:xfrm>
+          <a:prstGeom prst="roundRect">
+            <a:avLst>
+              <a:gd name="adj" fmla="val 50000"/>
+            </a:avLst>
+          </a:prstGeom>
+          <a:solidFill>
+            <a:srgbClr val="7A2E43"/>
+          </a:solidFill>
+          <a:ln>
+            <a:noFill/>
+          </a:ln>
+          <a:effectLst/>
+        </p:spPr>
+        <p:style>
+          <a:lnRef idx="1">
+            <a:schemeClr val="accent1"/>
+          </a:lnRef>
+          <a:fillRef idx="3">
+            <a:schemeClr val="accent1"/>
+          </a:fillRef>
+          <a:effectRef idx="2">
+            <a:schemeClr val="accent1"/>
+          </a:effectRef>
+          <a:fontRef idx="minor">
+            <a:schemeClr val="lt1"/>
+          </a:fontRef>
+        </p:style>
+        <p:txBody>
+          <a:bodyPr rtlCol="0" anchor="ctr" wrap="none" lIns="50800" rIns="50800"/>
+          <a:lstStyle/>
+          <a:p>
+            <a:pPr algn="ctr"/>
+            <a:r>
+              <a:rPr sz="1100" b="1">
+                <a:solidFill>
+                  <a:srgbClr val="FFFFFF"/>
+                </a:solidFill>
+                <a:latin typeface="Calibri"/>
+              </a:rPr>
+              <a:t>DESIGN &amp; INDUSTRY CONNECTIONS</a:t>
+            </a:r>
+          </a:p>
+        </p:txBody>
+      </p:sp>
+      <p:sp>
+        <p:nvSpPr>
+          <p:cNvPr id="3" name="TextBox 2"/>
+          <p:cNvSpPr txBox="1"/>
+          <p:nvPr/>
+        </p:nvSpPr>
+        <p:spPr>
+          <a:xfrm>
+            <a:off x="685800" y="1051560"/>
+            <a:ext cx="10607040" cy="822960"/>
           </a:xfrm>
           <a:prstGeom prst="rect">
             <a:avLst/>
           </a:prstGeom>
+          <a:noFill/>
+        </p:spPr>
+        <p:txBody>
+          <a:bodyPr wrap="square" anchor="t">
+            <a:spAutoFit/>
+          </a:bodyPr>
+          <a:lstStyle/>
+          <a:p>
+            <a:pPr algn="l"/>
+            <a:r>
+              <a:rPr sz="2700" b="1" i="0">
+                <a:solidFill>
+                  <a:srgbClr val="2A1A1F"/>
+                </a:solidFill>
+                <a:latin typeface="Cambria"/>
+              </a:rPr>
+              <a:t>Intellectual Property (IP)</a:t>
+            </a:r>
+          </a:p>
+        </p:txBody>
+      </p:sp>
+      <p:sp>
+        <p:nvSpPr>
+          <p:cNvPr id="4" name="Rounded Rectangle 3"/>
+          <p:cNvSpPr/>
+          <p:nvPr/>
+        </p:nvSpPr>
+        <p:spPr>
+          <a:xfrm>
+            <a:off x="685800" y="1874519"/>
+            <a:ext cx="5166360" cy="4526280"/>
+          </a:xfrm>
+          <a:prstGeom prst="roundRect">
+            <a:avLst>
+              <a:gd name="adj" fmla="val 6000"/>
+            </a:avLst>
+          </a:prstGeom>
           <a:solidFill>
-            <a:srgbClr val="6E2337"/>
+            <a:srgbClr val="EFE5E8"/>
+          </a:solidFill>
+          <a:ln>
+            <a:noFill/>
+          </a:ln>
+          <a:effectLst/>
+        </p:spPr>
+        <p:style>
+          <a:lnRef idx="1">
+            <a:schemeClr val="accent1"/>
+          </a:lnRef>
+          <a:fillRef idx="3">
+            <a:schemeClr val="accent1"/>
+          </a:fillRef>
+          <a:effectRef idx="2">
+            <a:schemeClr val="accent1"/>
+          </a:effectRef>
+          <a:fontRef idx="minor">
+            <a:schemeClr val="lt1"/>
+          </a:fontRef>
+        </p:style>
+        <p:txBody>
+          <a:bodyPr rtlCol="0" anchor="ctr" lIns="279400" rIns="279400" tIns="228600" bIns="228600" wrap="square"/>
+          <a:lstStyle/>
+          <a:p>
+            <a:pPr algn="ctr" indent="-203200" marL="203200">
+              <a:spcAft>
+                <a:spcPts val="900"/>
+              </a:spcAft>
+              <a:buClr>
+                <a:srgbClr val="7A2E43"/>
+              </a:buClr>
+              <a:buSzPct val="90000"/>
+              <a:buFont typeface="Arial"/>
+              <a:buChar char="●"/>
+            </a:pPr>
+            <a:r>
+              <a:rPr sz="1400" b="0" i="0">
+                <a:solidFill>
+                  <a:srgbClr val="2A1A1F"/>
+                </a:solidFill>
+                <a:latin typeface="Calibri"/>
+              </a:rPr>
+              <a:t>Intellectual property law protects original creative and design work from being copied or used without permission.</a:t>
+            </a:r>
+          </a:p>
+          <a:p>
+            <a:pPr indent="-203200" marL="203200">
+              <a:spcAft>
+                <a:spcPts val="900"/>
+              </a:spcAft>
+              <a:buClr>
+                <a:srgbClr val="7A2E43"/>
+              </a:buClr>
+              <a:buSzPct val="90000"/>
+              <a:buFont typeface="Arial"/>
+              <a:buChar char="●"/>
+            </a:pPr>
+            <a:r>
+              <a:rPr sz="1400" b="0" i="0">
+                <a:solidFill>
+                  <a:srgbClr val="2A1A1F"/>
+                </a:solidFill>
+                <a:latin typeface="Calibri"/>
+              </a:rPr>
+              <a:t>Types Relevant to Designers</a:t>
+            </a:r>
+          </a:p>
+          <a:p>
+            <a:pPr indent="-203200" marL="203200">
+              <a:spcAft>
+                <a:spcPts val="900"/>
+              </a:spcAft>
+              <a:buClr>
+                <a:srgbClr val="7A2E43"/>
+              </a:buClr>
+              <a:buSzPct val="90000"/>
+              <a:buFont typeface="Arial"/>
+              <a:buChar char="–"/>
+            </a:pPr>
+            <a:r>
+              <a:rPr sz="1250" b="1" i="0">
+                <a:solidFill>
+                  <a:srgbClr val="672738"/>
+                </a:solidFill>
+                <a:latin typeface="Calibri"/>
+              </a:rPr>
+              <a:t>Copyright</a:t>
+            </a:r>
+            <a:r>
+              <a:rPr sz="1250" b="0" i="0">
+                <a:solidFill>
+                  <a:srgbClr val="2A1A1F"/>
+                </a:solidFill>
+                <a:latin typeface="Calibri"/>
+              </a:rPr>
+              <a:t> — automatically protects original creative works (images, layouts, text)</a:t>
+            </a:r>
+          </a:p>
+          <a:p>
+            <a:pPr indent="-203200" marL="203200">
+              <a:spcAft>
+                <a:spcPts val="900"/>
+              </a:spcAft>
+              <a:buClr>
+                <a:srgbClr val="7A2E43"/>
+              </a:buClr>
+              <a:buSzPct val="90000"/>
+              <a:buFont typeface="Arial"/>
+              <a:buChar char="–"/>
+            </a:pPr>
+            <a:r>
+              <a:rPr sz="1250" b="1" i="0">
+                <a:solidFill>
+                  <a:srgbClr val="672738"/>
+                </a:solidFill>
+                <a:latin typeface="Calibri"/>
+              </a:rPr>
+              <a:t>Trademark</a:t>
+            </a:r>
+            <a:r>
+              <a:rPr sz="1250" b="0" i="0">
+                <a:solidFill>
+                  <a:srgbClr val="2A1A1F"/>
+                </a:solidFill>
+                <a:latin typeface="Calibri"/>
+              </a:rPr>
+              <a:t> — protects brand names, logos and slogans</a:t>
+            </a:r>
+          </a:p>
+          <a:p>
+            <a:pPr indent="-203200" marL="203200">
+              <a:spcAft>
+                <a:spcPts val="900"/>
+              </a:spcAft>
+              <a:buClr>
+                <a:srgbClr val="7A2E43"/>
+              </a:buClr>
+              <a:buSzPct val="90000"/>
+              <a:buFont typeface="Arial"/>
+              <a:buChar char="–"/>
+            </a:pPr>
+            <a:r>
+              <a:rPr sz="1250" b="1" i="0">
+                <a:solidFill>
+                  <a:srgbClr val="672738"/>
+                </a:solidFill>
+                <a:latin typeface="Calibri"/>
+              </a:rPr>
+              <a:t>Design registration</a:t>
+            </a:r>
+            <a:r>
+              <a:rPr sz="1250" b="0" i="0">
+                <a:solidFill>
+                  <a:srgbClr val="2A1A1F"/>
+                </a:solidFill>
+                <a:latin typeface="Calibri"/>
+              </a:rPr>
+              <a:t> — protects the visual appearance of a manufactured product</a:t>
+            </a:r>
+          </a:p>
+          <a:p>
+            <a:pPr indent="-203200" marL="203200">
+              <a:spcAft>
+                <a:spcPts val="900"/>
+              </a:spcAft>
+              <a:buClr>
+                <a:srgbClr val="7A2E43"/>
+              </a:buClr>
+              <a:buSzPct val="90000"/>
+              <a:buFont typeface="Arial"/>
+              <a:buChar char="–"/>
+            </a:pPr>
+            <a:r>
+              <a:rPr sz="1250" b="1" i="0">
+                <a:solidFill>
+                  <a:srgbClr val="672738"/>
+                </a:solidFill>
+                <a:latin typeface="Calibri"/>
+              </a:rPr>
+              <a:t>Patent</a:t>
+            </a:r>
+            <a:r>
+              <a:rPr sz="1250" b="0" i="0">
+                <a:solidFill>
+                  <a:srgbClr val="2A1A1F"/>
+                </a:solidFill>
+                <a:latin typeface="Calibri"/>
+              </a:rPr>
+              <a:t> — protects a new invention or functional process</a:t>
+            </a:r>
+          </a:p>
+        </p:txBody>
+      </p:sp>
+      <p:sp>
+        <p:nvSpPr>
+          <p:cNvPr id="5" name="Rounded Rectangle 4"/>
+          <p:cNvSpPr/>
+          <p:nvPr/>
+        </p:nvSpPr>
+        <p:spPr>
+          <a:xfrm>
+            <a:off x="6080760" y="1874519"/>
+            <a:ext cx="5166360" cy="4526280"/>
+          </a:xfrm>
+          <a:prstGeom prst="roundRect">
+            <a:avLst>
+              <a:gd name="adj" fmla="val 6000"/>
+            </a:avLst>
+          </a:prstGeom>
+          <a:solidFill>
+            <a:srgbClr val="F4DEE3"/>
+          </a:solidFill>
+          <a:ln>
+            <a:noFill/>
+          </a:ln>
+          <a:effectLst/>
+        </p:spPr>
+        <p:style>
+          <a:lnRef idx="1">
+            <a:schemeClr val="accent1"/>
+          </a:lnRef>
+          <a:fillRef idx="3">
+            <a:schemeClr val="accent1"/>
+          </a:fillRef>
+          <a:effectRef idx="2">
+            <a:schemeClr val="accent1"/>
+          </a:effectRef>
+          <a:fontRef idx="minor">
+            <a:schemeClr val="lt1"/>
+          </a:fontRef>
+        </p:style>
+        <p:txBody>
+          <a:bodyPr rtlCol="0" anchor="ctr" lIns="279400" rIns="279400" tIns="228600" bIns="228600" wrap="square"/>
+          <a:lstStyle/>
+          <a:p>
+            <a:pPr algn="ctr" indent="-203200" marL="203200">
+              <a:spcAft>
+                <a:spcPts val="900"/>
+              </a:spcAft>
+              <a:buClr>
+                <a:srgbClr val="D98C9E"/>
+              </a:buClr>
+              <a:buSzPct val="90000"/>
+              <a:buFont typeface="Arial"/>
+              <a:buChar char="●"/>
+            </a:pPr>
+            <a:r>
+              <a:rPr sz="1400" b="0" i="0">
+                <a:solidFill>
+                  <a:srgbClr val="2A1A1F"/>
+                </a:solidFill>
+                <a:latin typeface="Calibri"/>
+              </a:rPr>
+              <a:t>Why It Matters to You</a:t>
+            </a:r>
+          </a:p>
+          <a:p>
+            <a:pPr indent="-203200" marL="203200">
+              <a:spcAft>
+                <a:spcPts val="900"/>
+              </a:spcAft>
+              <a:buClr>
+                <a:srgbClr val="D98C9E"/>
+              </a:buClr>
+              <a:buSzPct val="90000"/>
+              <a:buFont typeface="Arial"/>
+              <a:buChar char="●"/>
+            </a:pPr>
+            <a:r>
+              <a:rPr sz="1400" b="0" i="0">
+                <a:solidFill>
+                  <a:srgbClr val="2A1A1F"/>
+                </a:solidFill>
+                <a:latin typeface="Calibri"/>
+              </a:rPr>
+              <a:t>In your own folio, always use your own photography/imagery or correctly licensed stock and fonts — using copyrighted material without permission is a real industry issue, not just a school rule.</a:t>
+            </a:r>
+          </a:p>
+        </p:txBody>
+      </p:sp>
+      <p:sp>
+        <p:nvSpPr>
+          <p:cNvPr id="6" name="Oval 5"/>
+          <p:cNvSpPr/>
+          <p:nvPr/>
+        </p:nvSpPr>
+        <p:spPr>
+          <a:xfrm>
+            <a:off x="5532120" y="3840480"/>
+            <a:ext cx="685800" cy="685800"/>
+          </a:xfrm>
+          <a:prstGeom prst="ellipse">
+            <a:avLst/>
+          </a:prstGeom>
+          <a:solidFill>
+            <a:srgbClr val="D6A24A"/>
           </a:solidFill>
           <a:ln>
             <a:noFill/>
@@ -4391,6 +5504,14 @@
 <file path=ppt/slides/slide15.xml><?xml version="1.0" encoding="utf-8"?>
 <p:sld xmlns:a="http://schemas.openxmlformats.org/drawingml/2006/main" xmlns:p="http://schemas.openxmlformats.org/presentationml/2006/main" xmlns:r="http://schemas.openxmlformats.org/officeDocument/2006/relationships">
   <p:cSld>
+    <p:bg>
+      <p:bgPr>
+        <a:solidFill>
+          <a:srgbClr val="FBF5F1"/>
+        </a:solidFill>
+        <a:effectLst/>
+      </p:bgPr>
+    </p:bg>
     <p:spTree>
       <p:nvGrpSpPr>
         <p:cNvPr id="1" name=""/>
@@ -4400,223 +5521,389 @@
       <p:grpSpPr/>
       <p:sp>
         <p:nvSpPr>
-          <p:cNvPr id="2" name="Title 1"/>
-          <p:cNvSpPr>
-            <a:spLocks noGrp="1"/>
-          </p:cNvSpPr>
-          <p:nvPr>
-            <p:ph type="title"/>
-          </p:nvPr>
-        </p:nvSpPr>
-        <p:spPr/>
-        <p:txBody>
-          <a:bodyPr wrap="square"/>
-          <a:lstStyle/>
-          <a:p>
-            <a:r>
-              <a:rPr sz="3200" b="1">
-                <a:solidFill>
-                  <a:srgbClr val="6E2337"/>
-                </a:solidFill>
-                <a:latin typeface="Cambria"/>
-              </a:rPr>
-              <a:t>Answering Industry Connection Questions</a:t>
-            </a:r>
-          </a:p>
-        </p:txBody>
-      </p:sp>
-      <p:sp>
-        <p:nvSpPr>
-          <p:cNvPr id="3" name="Content Placeholder 2"/>
-          <p:cNvSpPr>
-            <a:spLocks noGrp="1"/>
-          </p:cNvSpPr>
-          <p:nvPr>
-            <p:ph idx="1" sz="half"/>
-          </p:nvPr>
-        </p:nvSpPr>
-        <p:spPr/>
-        <p:txBody>
-          <a:bodyPr wrap="square"/>
-          <a:lstStyle/>
-          <a:p>
-            <a:pPr lvl="1">
-              <a:spcAft>
-                <a:spcPts val="1000"/>
-              </a:spcAft>
-            </a:pPr>
-            <a:r>
-              <a:rPr sz="1800" b="0" i="0">
-                <a:solidFill>
-                  <a:srgbClr val="333333"/>
-                </a:solidFill>
-                <a:latin typeface="Calibri"/>
-              </a:rPr>
-              <a:t>Connection → Roles → Factor</a:t>
-            </a:r>
-          </a:p>
-          <a:p>
-            <a:pPr lvl="1">
-              <a:spcAft>
-                <a:spcPts val="1000"/>
-              </a:spcAft>
-            </a:pPr>
-            <a:r>
-              <a:rPr sz="1800" b="0" i="0">
-                <a:solidFill>
-                  <a:srgbClr val="333333"/>
-                </a:solidFill>
-                <a:latin typeface="Calibri"/>
-              </a:rPr>
-              <a:t>1. Identify which design fields/roles are connected</a:t>
-            </a:r>
-          </a:p>
-          <a:p>
-            <a:pPr lvl="1">
-              <a:spcAft>
-                <a:spcPts val="1000"/>
-              </a:spcAft>
-            </a:pPr>
-            <a:r>
-              <a:rPr sz="1800" b="0" i="0">
-                <a:solidFill>
-                  <a:srgbClr val="333333"/>
-                </a:solidFill>
-                <a:latin typeface="Calibri"/>
-              </a:rPr>
-              <a:t>2. Explain how they collaborate</a:t>
-            </a:r>
-          </a:p>
-          <a:p>
-            <a:pPr lvl="1">
-              <a:spcAft>
-                <a:spcPts val="1000"/>
-              </a:spcAft>
-            </a:pPr>
-            <a:r>
-              <a:rPr sz="1800" b="0" i="0">
-                <a:solidFill>
-                  <a:srgbClr val="333333"/>
-                </a:solidFill>
-                <a:latin typeface="Calibri"/>
-              </a:rPr>
-              <a:t>3. Link to a factor (sustainability, technology, ethics, IP)</a:t>
-            </a:r>
-          </a:p>
-        </p:txBody>
-      </p:sp>
-      <p:sp>
-        <p:nvSpPr>
-          <p:cNvPr id="4" name="Content Placeholder 3"/>
-          <p:cNvSpPr>
-            <a:spLocks noGrp="1"/>
-          </p:cNvSpPr>
-          <p:nvPr>
-            <p:ph idx="2" sz="half"/>
-          </p:nvPr>
-        </p:nvSpPr>
-        <p:spPr/>
-        <p:txBody>
-          <a:bodyPr wrap="square"/>
-          <a:lstStyle/>
-          <a:p>
-            <a:pPr>
-              <a:spcAft>
-                <a:spcPts val="1000"/>
-              </a:spcAft>
-            </a:pPr>
-            <a:r>
-              <a:rPr sz="1800" b="0" i="1">
-                <a:solidFill>
-                  <a:srgbClr val="333333"/>
-                </a:solidFill>
-                <a:latin typeface="Calibri"/>
-              </a:rPr>
-              <a:t>Sentence Starters</a:t>
-            </a:r>
-          </a:p>
-          <a:p>
-            <a:pPr lvl="1">
-              <a:spcAft>
-                <a:spcPts val="1000"/>
-              </a:spcAft>
-            </a:pPr>
-            <a:r>
-              <a:rPr sz="1800" b="0" i="0">
-                <a:solidFill>
-                  <a:srgbClr val="333333"/>
-                </a:solidFill>
-                <a:latin typeface="Calibri"/>
-              </a:rPr>
-              <a:t>"This project connects [field A] and [field B] because..."</a:t>
-            </a:r>
-          </a:p>
-          <a:p>
-            <a:pPr lvl="1">
-              <a:spcAft>
-                <a:spcPts val="1000"/>
-              </a:spcAft>
-            </a:pPr>
-            <a:r>
-              <a:rPr sz="1800" b="0" i="0">
-                <a:solidFill>
-                  <a:srgbClr val="333333"/>
-                </a:solidFill>
-                <a:latin typeface="Calibri"/>
-              </a:rPr>
-              <a:t>"The designer collaborated with [role] to..."</a:t>
-            </a:r>
-          </a:p>
-          <a:p>
-            <a:pPr lvl="1">
-              <a:spcAft>
-                <a:spcPts val="1000"/>
-              </a:spcAft>
-            </a:pPr>
-            <a:r>
-              <a:rPr sz="1800" b="0" i="0">
-                <a:solidFill>
-                  <a:srgbClr val="333333"/>
-                </a:solidFill>
-                <a:latin typeface="Calibri"/>
-              </a:rPr>
-              <a:t>"This decision reflects growing industry concern for [factor]..."</a:t>
-            </a:r>
-          </a:p>
-          <a:p>
-            <a:pPr lvl="1">
-              <a:spcAft>
-                <a:spcPts val="1000"/>
-              </a:spcAft>
-            </a:pPr>
-            <a:r>
-              <a:rPr sz="1800" b="0" i="0">
-                <a:solidFill>
-                  <a:srgbClr val="333333"/>
-                </a:solidFill>
-                <a:latin typeface="Calibri"/>
-              </a:rPr>
-              <a:t>"Without protection of [IP type], this design could be..."</a:t>
-            </a:r>
-          </a:p>
-        </p:txBody>
-      </p:sp>
-      <p:sp>
-        <p:nvSpPr>
-          <p:cNvPr id="5" name="Rectangle 4"/>
+          <p:cNvPr id="2" name="Rounded Rectangle 1"/>
           <p:cNvSpPr/>
           <p:nvPr/>
         </p:nvSpPr>
         <p:spPr>
           <a:xfrm>
-            <a:off x="548640" y="1234440"/>
-            <a:ext cx="1463040" cy="38100"/>
+            <a:off x="685800" y="502920"/>
+            <a:ext cx="3291840" cy="457200"/>
+          </a:xfrm>
+          <a:prstGeom prst="roundRect">
+            <a:avLst>
+              <a:gd name="adj" fmla="val 50000"/>
+            </a:avLst>
+          </a:prstGeom>
+          <a:solidFill>
+            <a:srgbClr val="7A2E43"/>
+          </a:solidFill>
+          <a:ln>
+            <a:noFill/>
+          </a:ln>
+          <a:effectLst/>
+        </p:spPr>
+        <p:style>
+          <a:lnRef idx="1">
+            <a:schemeClr val="accent1"/>
+          </a:lnRef>
+          <a:fillRef idx="3">
+            <a:schemeClr val="accent1"/>
+          </a:fillRef>
+          <a:effectRef idx="2">
+            <a:schemeClr val="accent1"/>
+          </a:effectRef>
+          <a:fontRef idx="minor">
+            <a:schemeClr val="lt1"/>
+          </a:fontRef>
+        </p:style>
+        <p:txBody>
+          <a:bodyPr rtlCol="0" anchor="ctr" wrap="none" lIns="50800" rIns="50800"/>
+          <a:lstStyle/>
+          <a:p>
+            <a:pPr algn="ctr"/>
+            <a:r>
+              <a:rPr sz="1100" b="1">
+                <a:solidFill>
+                  <a:srgbClr val="FFFFFF"/>
+                </a:solidFill>
+                <a:latin typeface="Calibri"/>
+              </a:rPr>
+              <a:t>DESIGN &amp; INDUSTRY CONNECTIONS</a:t>
+            </a:r>
+          </a:p>
+        </p:txBody>
+      </p:sp>
+      <p:sp>
+        <p:nvSpPr>
+          <p:cNvPr id="3" name="TextBox 2"/>
+          <p:cNvSpPr txBox="1"/>
+          <p:nvPr/>
+        </p:nvSpPr>
+        <p:spPr>
+          <a:xfrm>
+            <a:off x="685800" y="1051560"/>
+            <a:ext cx="10607040" cy="822960"/>
           </a:xfrm>
           <a:prstGeom prst="rect">
             <a:avLst/>
           </a:prstGeom>
+          <a:noFill/>
+        </p:spPr>
+        <p:txBody>
+          <a:bodyPr wrap="square" anchor="t">
+            <a:spAutoFit/>
+          </a:bodyPr>
+          <a:lstStyle/>
+          <a:p>
+            <a:pPr algn="l"/>
+            <a:r>
+              <a:rPr sz="2700" b="1" i="0">
+                <a:solidFill>
+                  <a:srgbClr val="2A1A1F"/>
+                </a:solidFill>
+                <a:latin typeface="Cambria"/>
+              </a:rPr>
+              <a:t>Answering Industry Connection Questions</a:t>
+            </a:r>
+          </a:p>
+        </p:txBody>
+      </p:sp>
+      <p:sp>
+        <p:nvSpPr>
+          <p:cNvPr id="4" name="Rounded Rectangle 3"/>
+          <p:cNvSpPr/>
+          <p:nvPr/>
+        </p:nvSpPr>
+        <p:spPr>
+          <a:xfrm>
+            <a:off x="685800" y="1874519"/>
+            <a:ext cx="5166360" cy="4526280"/>
+          </a:xfrm>
+          <a:prstGeom prst="roundRect">
+            <a:avLst>
+              <a:gd name="adj" fmla="val 6000"/>
+            </a:avLst>
+          </a:prstGeom>
           <a:solidFill>
-            <a:srgbClr val="6E2337"/>
+            <a:srgbClr val="EFE5E8"/>
+          </a:solidFill>
+          <a:ln>
+            <a:noFill/>
+          </a:ln>
+          <a:effectLst/>
+        </p:spPr>
+        <p:style>
+          <a:lnRef idx="1">
+            <a:schemeClr val="accent1"/>
+          </a:lnRef>
+          <a:fillRef idx="3">
+            <a:schemeClr val="accent1"/>
+          </a:fillRef>
+          <a:effectRef idx="2">
+            <a:schemeClr val="accent1"/>
+          </a:effectRef>
+          <a:fontRef idx="minor">
+            <a:schemeClr val="lt1"/>
+          </a:fontRef>
+        </p:style>
+        <p:txBody>
+          <a:bodyPr rtlCol="0" anchor="ctr" lIns="279400" rIns="279400" tIns="228600" bIns="228600" wrap="square"/>
+          <a:lstStyle/>
+          <a:p>
+            <a:pPr algn="ctr" indent="-203200" marL="203200">
+              <a:spcAft>
+                <a:spcPts val="900"/>
+              </a:spcAft>
+              <a:buClr>
+                <a:srgbClr val="7A2E43"/>
+              </a:buClr>
+              <a:buSzPct val="90000"/>
+              <a:buFont typeface="Arial"/>
+              <a:buChar char="–"/>
+            </a:pPr>
+            <a:r>
+              <a:rPr sz="1250" b="0" i="0">
+                <a:solidFill>
+                  <a:srgbClr val="2A1A1F"/>
+                </a:solidFill>
+                <a:latin typeface="Calibri"/>
+              </a:rPr>
+              <a:t>Connection → Roles → Factor</a:t>
+            </a:r>
+          </a:p>
+          <a:p>
+            <a:pPr indent="-203200" marL="203200">
+              <a:spcAft>
+                <a:spcPts val="900"/>
+              </a:spcAft>
+              <a:buClr>
+                <a:srgbClr val="7A2E43"/>
+              </a:buClr>
+              <a:buSzPct val="90000"/>
+              <a:buFont typeface="Arial"/>
+              <a:buChar char="–"/>
+            </a:pPr>
+            <a:r>
+              <a:rPr sz="1250" b="0" i="0">
+                <a:solidFill>
+                  <a:srgbClr val="2A1A1F"/>
+                </a:solidFill>
+                <a:latin typeface="Calibri"/>
+              </a:rPr>
+              <a:t>1. Identify which design fields/roles are connected</a:t>
+            </a:r>
+          </a:p>
+          <a:p>
+            <a:pPr indent="-203200" marL="203200">
+              <a:spcAft>
+                <a:spcPts val="900"/>
+              </a:spcAft>
+              <a:buClr>
+                <a:srgbClr val="7A2E43"/>
+              </a:buClr>
+              <a:buSzPct val="90000"/>
+              <a:buFont typeface="Arial"/>
+              <a:buChar char="–"/>
+            </a:pPr>
+            <a:r>
+              <a:rPr sz="1250" b="0" i="0">
+                <a:solidFill>
+                  <a:srgbClr val="2A1A1F"/>
+                </a:solidFill>
+                <a:latin typeface="Calibri"/>
+              </a:rPr>
+              <a:t>2. Explain how they collaborate</a:t>
+            </a:r>
+          </a:p>
+          <a:p>
+            <a:pPr indent="-203200" marL="203200">
+              <a:spcAft>
+                <a:spcPts val="900"/>
+              </a:spcAft>
+              <a:buClr>
+                <a:srgbClr val="7A2E43"/>
+              </a:buClr>
+              <a:buSzPct val="90000"/>
+              <a:buFont typeface="Arial"/>
+              <a:buChar char="–"/>
+            </a:pPr>
+            <a:r>
+              <a:rPr sz="1250" b="0" i="0">
+                <a:solidFill>
+                  <a:srgbClr val="2A1A1F"/>
+                </a:solidFill>
+                <a:latin typeface="Calibri"/>
+              </a:rPr>
+              <a:t>3. Link to a factor (sustainability, technology, ethics, IP)</a:t>
+            </a:r>
+          </a:p>
+        </p:txBody>
+      </p:sp>
+      <p:sp>
+        <p:nvSpPr>
+          <p:cNvPr id="5" name="Rounded Rectangle 4"/>
+          <p:cNvSpPr/>
+          <p:nvPr/>
+        </p:nvSpPr>
+        <p:spPr>
+          <a:xfrm>
+            <a:off x="6080760" y="1874519"/>
+            <a:ext cx="5166360" cy="4526280"/>
+          </a:xfrm>
+          <a:prstGeom prst="roundRect">
+            <a:avLst>
+              <a:gd name="adj" fmla="val 6000"/>
+            </a:avLst>
+          </a:prstGeom>
+          <a:solidFill>
+            <a:srgbClr val="F4DEE3"/>
+          </a:solidFill>
+          <a:ln>
+            <a:noFill/>
+          </a:ln>
+          <a:effectLst/>
+        </p:spPr>
+        <p:style>
+          <a:lnRef idx="1">
+            <a:schemeClr val="accent1"/>
+          </a:lnRef>
+          <a:fillRef idx="3">
+            <a:schemeClr val="accent1"/>
+          </a:fillRef>
+          <a:effectRef idx="2">
+            <a:schemeClr val="accent1"/>
+          </a:effectRef>
+          <a:fontRef idx="minor">
+            <a:schemeClr val="lt1"/>
+          </a:fontRef>
+        </p:style>
+        <p:txBody>
+          <a:bodyPr rtlCol="0" anchor="ctr" lIns="279400" rIns="279400" tIns="228600" bIns="228600" wrap="square"/>
+          <a:lstStyle/>
+          <a:p>
+            <a:pPr algn="ctr">
+              <a:spcAft>
+                <a:spcPts val="900"/>
+              </a:spcAft>
+              <a:buNone/>
+            </a:pPr>
+            <a:r>
+              <a:rPr sz="1250" b="0" i="1">
+                <a:solidFill>
+                  <a:srgbClr val="2A1A1F"/>
+                </a:solidFill>
+                <a:latin typeface="Calibri"/>
+              </a:rPr>
+              <a:t>Sentence Starters</a:t>
+            </a:r>
+          </a:p>
+          <a:p>
+            <a:pPr indent="-203200" marL="203200">
+              <a:spcAft>
+                <a:spcPts val="900"/>
+              </a:spcAft>
+              <a:buClr>
+                <a:srgbClr val="D98C9E"/>
+              </a:buClr>
+              <a:buSzPct val="90000"/>
+              <a:buFont typeface="Arial"/>
+              <a:buChar char="–"/>
+            </a:pPr>
+            <a:r>
+              <a:rPr sz="1250" b="0" i="0">
+                <a:solidFill>
+                  <a:srgbClr val="2A1A1F"/>
+                </a:solidFill>
+                <a:latin typeface="Calibri"/>
+              </a:rPr>
+              <a:t>"This project connects [field A] and [field B] because..."</a:t>
+            </a:r>
+          </a:p>
+          <a:p>
+            <a:pPr indent="-203200" marL="203200">
+              <a:spcAft>
+                <a:spcPts val="900"/>
+              </a:spcAft>
+              <a:buClr>
+                <a:srgbClr val="D98C9E"/>
+              </a:buClr>
+              <a:buSzPct val="90000"/>
+              <a:buFont typeface="Arial"/>
+              <a:buChar char="–"/>
+            </a:pPr>
+            <a:r>
+              <a:rPr sz="1250" b="0" i="0">
+                <a:solidFill>
+                  <a:srgbClr val="2A1A1F"/>
+                </a:solidFill>
+                <a:latin typeface="Calibri"/>
+              </a:rPr>
+              <a:t>"The designer collaborated with [role] to..."</a:t>
+            </a:r>
+          </a:p>
+          <a:p>
+            <a:pPr indent="-203200" marL="203200">
+              <a:spcAft>
+                <a:spcPts val="900"/>
+              </a:spcAft>
+              <a:buClr>
+                <a:srgbClr val="D98C9E"/>
+              </a:buClr>
+              <a:buSzPct val="90000"/>
+              <a:buFont typeface="Arial"/>
+              <a:buChar char="–"/>
+            </a:pPr>
+            <a:r>
+              <a:rPr sz="1250" b="0" i="0">
+                <a:solidFill>
+                  <a:srgbClr val="2A1A1F"/>
+                </a:solidFill>
+                <a:latin typeface="Calibri"/>
+              </a:rPr>
+              <a:t>"This decision reflects growing industry concern for [factor]..."</a:t>
+            </a:r>
+          </a:p>
+          <a:p>
+            <a:pPr indent="-203200" marL="203200">
+              <a:spcAft>
+                <a:spcPts val="900"/>
+              </a:spcAft>
+              <a:buClr>
+                <a:srgbClr val="D98C9E"/>
+              </a:buClr>
+              <a:buSzPct val="90000"/>
+              <a:buFont typeface="Arial"/>
+              <a:buChar char="–"/>
+            </a:pPr>
+            <a:r>
+              <a:rPr sz="1250" b="0" i="0">
+                <a:solidFill>
+                  <a:srgbClr val="2A1A1F"/>
+                </a:solidFill>
+                <a:latin typeface="Calibri"/>
+              </a:rPr>
+              <a:t>"Without protection of [IP type], this design could be..."</a:t>
+            </a:r>
+          </a:p>
+        </p:txBody>
+      </p:sp>
+      <p:sp>
+        <p:nvSpPr>
+          <p:cNvPr id="6" name="Oval 5"/>
+          <p:cNvSpPr/>
+          <p:nvPr/>
+        </p:nvSpPr>
+        <p:spPr>
+          <a:xfrm>
+            <a:off x="5532120" y="3840480"/>
+            <a:ext cx="685800" cy="685800"/>
+          </a:xfrm>
+          <a:prstGeom prst="ellipse">
+            <a:avLst/>
+          </a:prstGeom>
+          <a:solidFill>
+            <a:srgbClr val="D6A24A"/>
           </a:solidFill>
           <a:ln>
             <a:noFill/>
@@ -4656,6 +5943,14 @@
 <file path=ppt/slides/slide16.xml><?xml version="1.0" encoding="utf-8"?>
 <p:sld xmlns:a="http://schemas.openxmlformats.org/drawingml/2006/main" xmlns:p="http://schemas.openxmlformats.org/presentationml/2006/main" xmlns:r="http://schemas.openxmlformats.org/officeDocument/2006/relationships">
   <p:cSld>
+    <p:bg>
+      <p:bgPr>
+        <a:solidFill>
+          <a:srgbClr val="FBF5F1"/>
+        </a:solidFill>
+        <a:effectLst/>
+      </p:bgPr>
+    </p:bg>
     <p:spTree>
       <p:nvGrpSpPr>
         <p:cNvPr id="1" name=""/>
@@ -4665,225 +5960,22 @@
       <p:grpSpPr/>
       <p:sp>
         <p:nvSpPr>
-          <p:cNvPr id="2" name="Title 1"/>
-          <p:cNvSpPr>
-            <a:spLocks noGrp="1"/>
-          </p:cNvSpPr>
-          <p:nvPr>
-            <p:ph type="title"/>
-          </p:nvPr>
-        </p:nvSpPr>
-        <p:spPr/>
-        <p:txBody>
-          <a:bodyPr wrap="square"/>
-          <a:lstStyle/>
-          <a:p>
-            <a:r>
-              <a:rPr sz="3200" b="1">
-                <a:solidFill>
-                  <a:srgbClr val="6E2337"/>
-                </a:solidFill>
-                <a:latin typeface="Cambria"/>
-              </a:rPr>
-              <a:t>Design &amp; Industry — Quick Reference</a:t>
-            </a:r>
-          </a:p>
-        </p:txBody>
-      </p:sp>
-      <p:sp>
-        <p:nvSpPr>
-          <p:cNvPr id="3" name="Content Placeholder 2"/>
-          <p:cNvSpPr>
-            <a:spLocks noGrp="1"/>
-          </p:cNvSpPr>
-          <p:nvPr>
-            <p:ph idx="1"/>
-          </p:nvPr>
-        </p:nvSpPr>
-        <p:spPr/>
-        <p:txBody>
-          <a:bodyPr wrap="square"/>
-          <a:lstStyle/>
-          <a:p>
-            <a:pPr lvl="1">
-              <a:spcAft>
-                <a:spcPts val="1000"/>
-              </a:spcAft>
-            </a:pPr>
-            <a:r>
-              <a:rPr sz="1800" b="0" i="0">
-                <a:solidFill>
-                  <a:srgbClr val="333333"/>
-                </a:solidFill>
-                <a:latin typeface="Calibri"/>
-              </a:rPr>
-              <a:t>Overlap</a:t>
-            </a:r>
-          </a:p>
-          <a:p>
-            <a:pPr lvl="1">
-              <a:spcAft>
-                <a:spcPts val="1000"/>
-              </a:spcAft>
-            </a:pPr>
-            <a:r>
-              <a:rPr sz="1800" b="0" i="0">
-                <a:solidFill>
-                  <a:srgbClr val="333333"/>
-                </a:solidFill>
-                <a:latin typeface="Calibri"/>
-              </a:rPr>
-              <a:t>Design fields rarely work alone on real projects.</a:t>
-            </a:r>
-          </a:p>
-          <a:p>
-            <a:pPr lvl="1">
-              <a:spcAft>
-                <a:spcPts val="1000"/>
-              </a:spcAft>
-            </a:pPr>
-            <a:r>
-              <a:rPr sz="1800" b="0" i="0">
-                <a:solidFill>
-                  <a:srgbClr val="333333"/>
-                </a:solidFill>
-                <a:latin typeface="Calibri"/>
-              </a:rPr>
-              <a:t>Collaboration</a:t>
-            </a:r>
-          </a:p>
-          <a:p>
-            <a:pPr lvl="1">
-              <a:spcAft>
-                <a:spcPts val="1000"/>
-              </a:spcAft>
-            </a:pPr>
-            <a:r>
-              <a:rPr sz="1800" b="0" i="0">
-                <a:solidFill>
-                  <a:srgbClr val="333333"/>
-                </a:solidFill>
-                <a:latin typeface="Calibri"/>
-              </a:rPr>
-              <a:t>Clients, manufacturers, other designers, developers.</a:t>
-            </a:r>
-          </a:p>
-          <a:p>
-            <a:pPr lvl="1">
-              <a:spcAft>
-                <a:spcPts val="1000"/>
-              </a:spcAft>
-            </a:pPr>
-            <a:r>
-              <a:rPr sz="1800" b="0" i="0">
-                <a:solidFill>
-                  <a:srgbClr val="333333"/>
-                </a:solidFill>
-                <a:latin typeface="Calibri"/>
-              </a:rPr>
-              <a:t>Industry Factors</a:t>
-            </a:r>
-          </a:p>
-          <a:p>
-            <a:pPr lvl="1">
-              <a:spcAft>
-                <a:spcPts val="1000"/>
-              </a:spcAft>
-            </a:pPr>
-            <a:r>
-              <a:rPr sz="1800" b="0" i="0">
-                <a:solidFill>
-                  <a:srgbClr val="333333"/>
-                </a:solidFill>
-                <a:latin typeface="Calibri"/>
-              </a:rPr>
-              <a:t>Sustainability, technology, ethics, IP.</a:t>
-            </a:r>
-          </a:p>
-          <a:p>
-            <a:pPr lvl="1">
-              <a:spcAft>
-                <a:spcPts val="1000"/>
-              </a:spcAft>
-            </a:pPr>
-            <a:r>
-              <a:rPr sz="1800" b="0" i="0">
-                <a:solidFill>
-                  <a:srgbClr val="333333"/>
-                </a:solidFill>
-                <a:latin typeface="Calibri"/>
-              </a:rPr>
-              <a:t>IP Types</a:t>
-            </a:r>
-          </a:p>
-          <a:p>
-            <a:pPr lvl="1">
-              <a:spcAft>
-                <a:spcPts val="1000"/>
-              </a:spcAft>
-            </a:pPr>
-            <a:r>
-              <a:rPr sz="1800" b="0" i="0">
-                <a:solidFill>
-                  <a:srgbClr val="333333"/>
-                </a:solidFill>
-                <a:latin typeface="Calibri"/>
-              </a:rPr>
-              <a:t>Copyright, trademark, design registration, patent.</a:t>
-            </a:r>
-          </a:p>
-          <a:p>
-            <a:pPr>
-              <a:spcAft>
-                <a:spcPts val="1000"/>
-              </a:spcAft>
-            </a:pPr>
-            <a:r>
-              <a:rPr sz="2000" b="0" i="0">
-                <a:solidFill>
-                  <a:srgbClr val="333333"/>
-                </a:solidFill>
-                <a:latin typeface="Calibri"/>
-              </a:rPr>
-              <a:t> Reminder: always name the </a:t>
-            </a:r>
-            <a:r>
-              <a:rPr sz="2000" b="1" i="0">
-                <a:solidFill>
-                  <a:srgbClr val="6E2337"/>
-                </a:solidFill>
-                <a:latin typeface="Calibri"/>
-              </a:rPr>
-              <a:t>specific roles or IP type</a:t>
-            </a:r>
-            <a:r>
-              <a:rPr sz="2000" b="0" i="0">
-                <a:solidFill>
-                  <a:srgbClr val="333333"/>
-                </a:solidFill>
-                <a:latin typeface="Calibri"/>
-              </a:rPr>
-              <a:t> involved — general statements about "teamwork" earn few marks. </a:t>
-            </a:r>
-          </a:p>
-        </p:txBody>
-      </p:sp>
-      <p:sp>
-        <p:nvSpPr>
-          <p:cNvPr id="4" name="Rectangle 3"/>
+          <p:cNvPr id="2" name="Rounded Rectangle 1"/>
           <p:cNvSpPr/>
           <p:nvPr/>
         </p:nvSpPr>
         <p:spPr>
           <a:xfrm>
-            <a:off x="548640" y="1234440"/>
-            <a:ext cx="1463040" cy="38100"/>
-          </a:xfrm>
-          <a:prstGeom prst="rect">
-            <a:avLst/>
+            <a:off x="685800" y="502920"/>
+            <a:ext cx="3291840" cy="457200"/>
+          </a:xfrm>
+          <a:prstGeom prst="roundRect">
+            <a:avLst>
+              <a:gd name="adj" fmla="val 50000"/>
+            </a:avLst>
           </a:prstGeom>
           <a:solidFill>
-            <a:srgbClr val="6E2337"/>
+            <a:srgbClr val="7A2E43"/>
           </a:solidFill>
           <a:ln>
             <a:noFill/>
@@ -4905,10 +5997,581 @@
           </a:fontRef>
         </p:style>
         <p:txBody>
+          <a:bodyPr rtlCol="0" anchor="ctr" wrap="none" lIns="50800" rIns="50800"/>
+          <a:lstStyle/>
+          <a:p>
+            <a:pPr algn="ctr"/>
+            <a:r>
+              <a:rPr sz="1100" b="1">
+                <a:solidFill>
+                  <a:srgbClr val="FFFFFF"/>
+                </a:solidFill>
+                <a:latin typeface="Calibri"/>
+              </a:rPr>
+              <a:t>DESIGN &amp; INDUSTRY CONNECTIONS</a:t>
+            </a:r>
+          </a:p>
+        </p:txBody>
+      </p:sp>
+      <p:sp>
+        <p:nvSpPr>
+          <p:cNvPr id="3" name="TextBox 2"/>
+          <p:cNvSpPr txBox="1"/>
+          <p:nvPr/>
+        </p:nvSpPr>
+        <p:spPr>
+          <a:xfrm>
+            <a:off x="685800" y="1051560"/>
+            <a:ext cx="10607040" cy="822960"/>
+          </a:xfrm>
+          <a:prstGeom prst="rect">
+            <a:avLst/>
+          </a:prstGeom>
+          <a:noFill/>
+        </p:spPr>
+        <p:txBody>
+          <a:bodyPr wrap="square" anchor="t">
+            <a:spAutoFit/>
+          </a:bodyPr>
+          <a:lstStyle/>
+          <a:p>
+            <a:pPr algn="l"/>
+            <a:r>
+              <a:rPr sz="2700" b="1" i="0">
+                <a:solidFill>
+                  <a:srgbClr val="2A1A1F"/>
+                </a:solidFill>
+                <a:latin typeface="Cambria"/>
+              </a:rPr>
+              <a:t>Design &amp; Industry — Quick Reference</a:t>
+            </a:r>
+          </a:p>
+        </p:txBody>
+      </p:sp>
+      <p:sp>
+        <p:nvSpPr>
+          <p:cNvPr id="4" name="Rounded Rectangle 3"/>
+          <p:cNvSpPr/>
+          <p:nvPr/>
+        </p:nvSpPr>
+        <p:spPr>
+          <a:xfrm>
+            <a:off x="685800" y="1874519"/>
+            <a:ext cx="2500884" cy="1554480"/>
+          </a:xfrm>
+          <a:prstGeom prst="roundRect">
+            <a:avLst>
+              <a:gd name="adj" fmla="val 12000"/>
+            </a:avLst>
+          </a:prstGeom>
+          <a:solidFill>
+            <a:srgbClr val="EBDFE2"/>
+          </a:solidFill>
+          <a:ln>
+            <a:noFill/>
+          </a:ln>
+          <a:effectLst/>
+        </p:spPr>
+        <p:style>
+          <a:lnRef idx="1">
+            <a:schemeClr val="accent1"/>
+          </a:lnRef>
+          <a:fillRef idx="3">
+            <a:schemeClr val="accent1"/>
+          </a:fillRef>
+          <a:effectRef idx="2">
+            <a:schemeClr val="accent1"/>
+          </a:effectRef>
+          <a:fontRef idx="minor">
+            <a:schemeClr val="lt1"/>
+          </a:fontRef>
+        </p:style>
+        <p:txBody>
+          <a:bodyPr rtlCol="0" anchor="ctr" wrap="square" lIns="127000" rIns="127000" tIns="101600" bIns="101600"/>
+          <a:lstStyle/>
+          <a:p>
+            <a:pPr algn="ctr"/>
+            <a:r>
+              <a:rPr b="1" sz="1300">
+                <a:solidFill>
+                  <a:srgbClr val="612435"/>
+                </a:solidFill>
+                <a:latin typeface="Calibri"/>
+              </a:rPr>
+              <a:t>Overlap</a:t>
+            </a:r>
+          </a:p>
+          <a:p>
+            <a:r>
+              <a:rPr sz="1050">
+                <a:solidFill>
+                  <a:srgbClr val="2A1A1F"/>
+                </a:solidFill>
+                <a:latin typeface="Calibri"/>
+              </a:rPr>
+              <a:t>Design fields rarely work alone on real projects.</a:t>
+            </a:r>
+          </a:p>
+        </p:txBody>
+      </p:sp>
+      <p:sp>
+        <p:nvSpPr>
+          <p:cNvPr id="5" name="Rounded Rectangle 4"/>
+          <p:cNvSpPr/>
+          <p:nvPr/>
+        </p:nvSpPr>
+        <p:spPr>
+          <a:xfrm>
+            <a:off x="3387852" y="1874519"/>
+            <a:ext cx="2500884" cy="1554480"/>
+          </a:xfrm>
+          <a:prstGeom prst="roundRect">
+            <a:avLst>
+              <a:gd name="adj" fmla="val 12000"/>
+            </a:avLst>
+          </a:prstGeom>
+          <a:solidFill>
+            <a:srgbClr val="F8F1E3"/>
+          </a:solidFill>
+          <a:ln>
+            <a:noFill/>
+          </a:ln>
+          <a:effectLst/>
+        </p:spPr>
+        <p:style>
+          <a:lnRef idx="1">
+            <a:schemeClr val="accent1"/>
+          </a:lnRef>
+          <a:fillRef idx="3">
+            <a:schemeClr val="accent1"/>
+          </a:fillRef>
+          <a:effectRef idx="2">
+            <a:schemeClr val="accent1"/>
+          </a:effectRef>
+          <a:fontRef idx="minor">
+            <a:schemeClr val="lt1"/>
+          </a:fontRef>
+        </p:style>
+        <p:txBody>
+          <a:bodyPr rtlCol="0" anchor="ctr" wrap="square" lIns="127000" rIns="127000" tIns="101600" bIns="101600"/>
+          <a:lstStyle/>
+          <a:p>
+            <a:pPr algn="ctr"/>
+            <a:r>
+              <a:rPr b="1" sz="1300">
+                <a:solidFill>
+                  <a:srgbClr val="AB813B"/>
+                </a:solidFill>
+                <a:latin typeface="Calibri"/>
+              </a:rPr>
+              <a:t>Collaboration</a:t>
+            </a:r>
+          </a:p>
+          <a:p>
+            <a:r>
+              <a:rPr sz="1050">
+                <a:solidFill>
+                  <a:srgbClr val="2A1A1F"/>
+                </a:solidFill>
+                <a:latin typeface="Calibri"/>
+              </a:rPr>
+              <a:t>Clients, manufacturers, other designers, developers.</a:t>
+            </a:r>
+          </a:p>
+        </p:txBody>
+      </p:sp>
+      <p:sp>
+        <p:nvSpPr>
+          <p:cNvPr id="6" name="Rounded Rectangle 5"/>
+          <p:cNvSpPr/>
+          <p:nvPr/>
+        </p:nvSpPr>
+        <p:spPr>
+          <a:xfrm>
+            <a:off x="6089904" y="1874519"/>
+            <a:ext cx="2500884" cy="1554480"/>
+          </a:xfrm>
+          <a:prstGeom prst="roundRect">
+            <a:avLst>
+              <a:gd name="adj" fmla="val 12000"/>
+            </a:avLst>
+          </a:prstGeom>
+          <a:solidFill>
+            <a:srgbClr val="F9EDF0"/>
+          </a:solidFill>
+          <a:ln>
+            <a:noFill/>
+          </a:ln>
+          <a:effectLst/>
+        </p:spPr>
+        <p:style>
+          <a:lnRef idx="1">
+            <a:schemeClr val="accent1"/>
+          </a:lnRef>
+          <a:fillRef idx="3">
+            <a:schemeClr val="accent1"/>
+          </a:fillRef>
+          <a:effectRef idx="2">
+            <a:schemeClr val="accent1"/>
+          </a:effectRef>
+          <a:fontRef idx="minor">
+            <a:schemeClr val="lt1"/>
+          </a:fontRef>
+        </p:style>
+        <p:txBody>
+          <a:bodyPr rtlCol="0" anchor="ctr" wrap="square" lIns="127000" rIns="127000" tIns="101600" bIns="101600"/>
+          <a:lstStyle/>
+          <a:p>
+            <a:pPr algn="ctr"/>
+            <a:r>
+              <a:rPr b="1" sz="1300">
+                <a:solidFill>
+                  <a:srgbClr val="AD707E"/>
+                </a:solidFill>
+                <a:latin typeface="Calibri"/>
+              </a:rPr>
+              <a:t>Industry Factors</a:t>
+            </a:r>
+          </a:p>
+          <a:p>
+            <a:r>
+              <a:rPr sz="1050">
+                <a:solidFill>
+                  <a:srgbClr val="2A1A1F"/>
+                </a:solidFill>
+                <a:latin typeface="Calibri"/>
+              </a:rPr>
+              <a:t>Sustainability, technology, ethics, IP.</a:t>
+            </a:r>
+          </a:p>
+        </p:txBody>
+      </p:sp>
+      <p:sp>
+        <p:nvSpPr>
+          <p:cNvPr id="7" name="Rounded Rectangle 6"/>
+          <p:cNvSpPr/>
+          <p:nvPr/>
+        </p:nvSpPr>
+        <p:spPr>
+          <a:xfrm>
+            <a:off x="8791956" y="1874519"/>
+            <a:ext cx="2500884" cy="1554480"/>
+          </a:xfrm>
+          <a:prstGeom prst="roundRect">
+            <a:avLst>
+              <a:gd name="adj" fmla="val 12000"/>
+            </a:avLst>
+          </a:prstGeom>
+          <a:solidFill>
+            <a:srgbClr val="EBDFE2"/>
+          </a:solidFill>
+          <a:ln>
+            <a:noFill/>
+          </a:ln>
+          <a:effectLst/>
+        </p:spPr>
+        <p:style>
+          <a:lnRef idx="1">
+            <a:schemeClr val="accent1"/>
+          </a:lnRef>
+          <a:fillRef idx="3">
+            <a:schemeClr val="accent1"/>
+          </a:fillRef>
+          <a:effectRef idx="2">
+            <a:schemeClr val="accent1"/>
+          </a:effectRef>
+          <a:fontRef idx="minor">
+            <a:schemeClr val="lt1"/>
+          </a:fontRef>
+        </p:style>
+        <p:txBody>
+          <a:bodyPr rtlCol="0" anchor="ctr" wrap="square" lIns="127000" rIns="127000" tIns="101600" bIns="101600"/>
+          <a:lstStyle/>
+          <a:p>
+            <a:pPr algn="ctr"/>
+            <a:r>
+              <a:rPr b="1" sz="1300">
+                <a:solidFill>
+                  <a:srgbClr val="612435"/>
+                </a:solidFill>
+                <a:latin typeface="Calibri"/>
+              </a:rPr>
+              <a:t>IP Types</a:t>
+            </a:r>
+          </a:p>
+          <a:p>
+            <a:r>
+              <a:rPr sz="1050">
+                <a:solidFill>
+                  <a:srgbClr val="2A1A1F"/>
+                </a:solidFill>
+                <a:latin typeface="Calibri"/>
+              </a:rPr>
+              <a:t>Copyright, trademark, design registration, patent.</a:t>
+            </a:r>
+          </a:p>
+        </p:txBody>
+      </p:sp>
+      <p:sp>
+        <p:nvSpPr>
+          <p:cNvPr id="8" name="Rounded Rectangle 7"/>
+          <p:cNvSpPr/>
+          <p:nvPr/>
+        </p:nvSpPr>
+        <p:spPr>
+          <a:xfrm>
+            <a:off x="685800" y="3675887"/>
+            <a:ext cx="10607040" cy="2862073"/>
+          </a:xfrm>
+          <a:prstGeom prst="roundRect">
+            <a:avLst>
+              <a:gd name="adj" fmla="val 10000"/>
+            </a:avLst>
+          </a:prstGeom>
+          <a:solidFill>
+            <a:srgbClr val="F8F1E3"/>
+          </a:solidFill>
+          <a:ln>
+            <a:noFill/>
+          </a:ln>
+          <a:effectLst/>
+        </p:spPr>
+        <p:style>
+          <a:lnRef idx="1">
+            <a:schemeClr val="accent1"/>
+          </a:lnRef>
+          <a:fillRef idx="3">
+            <a:schemeClr val="accent1"/>
+          </a:fillRef>
+          <a:effectRef idx="2">
+            <a:schemeClr val="accent1"/>
+          </a:effectRef>
+          <a:fontRef idx="minor">
+            <a:schemeClr val="lt1"/>
+          </a:fontRef>
+        </p:style>
+        <p:txBody>
+          <a:bodyPr rtlCol="0" anchor="ctr" lIns="203200" rIns="203200" tIns="101600" bIns="101600" wrap="square"/>
+          <a:lstStyle/>
+          <a:p>
+            <a:pPr algn="ctr" indent="-203200" marL="203200">
+              <a:spcAft>
+                <a:spcPts val="900"/>
+              </a:spcAft>
+              <a:buClr>
+                <a:srgbClr val="D6A24A"/>
+              </a:buClr>
+              <a:buSzPct val="90000"/>
+              <a:buFont typeface="Arial"/>
+              <a:buChar char="●"/>
+            </a:pPr>
+            <a:r>
+              <a:rPr sz="1200" b="0" i="0">
+                <a:solidFill>
+                  <a:srgbClr val="2A1A1F"/>
+                </a:solidFill>
+                <a:latin typeface="Calibri"/>
+              </a:rPr>
+              <a:t> Reminder: always name the </a:t>
+            </a:r>
+            <a:r>
+              <a:rPr sz="1200" b="1" i="0">
+                <a:solidFill>
+                  <a:srgbClr val="B5893E"/>
+                </a:solidFill>
+                <a:latin typeface="Calibri"/>
+              </a:rPr>
+              <a:t>specific roles or IP type</a:t>
+            </a:r>
+            <a:r>
+              <a:rPr sz="1200" b="0" i="0">
+                <a:solidFill>
+                  <a:srgbClr val="2A1A1F"/>
+                </a:solidFill>
+                <a:latin typeface="Calibri"/>
+              </a:rPr>
+              <a:t> involved — general statements about "teamwork" earn few marks. </a:t>
+            </a:r>
+          </a:p>
+        </p:txBody>
+      </p:sp>
+    </p:spTree>
+  </p:cSld>
+  <p:clrMapOvr>
+    <a:masterClrMapping/>
+  </p:clrMapOvr>
+</p:sld>
+</file>
+
+<file path=ppt/slides/slide17.xml><?xml version="1.0" encoding="utf-8"?>
+<p:sld xmlns:a="http://schemas.openxmlformats.org/drawingml/2006/main" xmlns:p="http://schemas.openxmlformats.org/presentationml/2006/main" xmlns:r="http://schemas.openxmlformats.org/officeDocument/2006/relationships">
+  <p:cSld>
+    <p:bg>
+      <p:bgPr>
+        <a:solidFill>
+          <a:srgbClr val="7A2E43"/>
+        </a:solidFill>
+        <a:effectLst/>
+      </p:bgPr>
+    </p:bg>
+    <p:spTree>
+      <p:nvGrpSpPr>
+        <p:cNvPr id="1" name=""/>
+        <p:cNvGrpSpPr/>
+        <p:nvPr/>
+      </p:nvGrpSpPr>
+      <p:grpSpPr/>
+      <p:sp>
+        <p:nvSpPr>
+          <p:cNvPr id="2" name="Oval 1"/>
+          <p:cNvSpPr/>
+          <p:nvPr/>
+        </p:nvSpPr>
+        <p:spPr>
+          <a:xfrm>
+            <a:off x="-1097280" y="4114800"/>
+            <a:ext cx="3108960" cy="3108960"/>
+          </a:xfrm>
+          <a:prstGeom prst="ellipse">
+            <a:avLst/>
+          </a:prstGeom>
+          <a:solidFill>
+            <a:srgbClr val="6B283A"/>
+          </a:solidFill>
+          <a:ln>
+            <a:noFill/>
+          </a:ln>
+          <a:effectLst/>
+        </p:spPr>
+        <p:style>
+          <a:lnRef idx="1">
+            <a:schemeClr val="accent1"/>
+          </a:lnRef>
+          <a:fillRef idx="3">
+            <a:schemeClr val="accent1"/>
+          </a:fillRef>
+          <a:effectRef idx="2">
+            <a:schemeClr val="accent1"/>
+          </a:effectRef>
+          <a:fontRef idx="minor">
+            <a:schemeClr val="lt1"/>
+          </a:fontRef>
+        </p:style>
+        <p:txBody>
           <a:bodyPr rtlCol="0" anchor="ctr"/>
           <a:lstStyle/>
           <a:p>
             <a:pPr algn="ctr"/>
+          </a:p>
+        </p:txBody>
+      </p:sp>
+      <p:sp>
+        <p:nvSpPr>
+          <p:cNvPr id="3" name="Oval 2"/>
+          <p:cNvSpPr/>
+          <p:nvPr/>
+        </p:nvSpPr>
+        <p:spPr>
+          <a:xfrm>
+            <a:off x="9875520" y="-1188720"/>
+            <a:ext cx="2743200" cy="2743200"/>
+          </a:xfrm>
+          <a:prstGeom prst="ellipse">
+            <a:avLst/>
+          </a:prstGeom>
+          <a:solidFill>
+            <a:srgbClr val="D6A24A"/>
+          </a:solidFill>
+          <a:ln>
+            <a:noFill/>
+          </a:ln>
+          <a:effectLst/>
+        </p:spPr>
+        <p:style>
+          <a:lnRef idx="1">
+            <a:schemeClr val="accent1"/>
+          </a:lnRef>
+          <a:fillRef idx="3">
+            <a:schemeClr val="accent1"/>
+          </a:fillRef>
+          <a:effectRef idx="2">
+            <a:schemeClr val="accent1"/>
+          </a:effectRef>
+          <a:fontRef idx="minor">
+            <a:schemeClr val="lt1"/>
+          </a:fontRef>
+        </p:style>
+        <p:txBody>
+          <a:bodyPr rtlCol="0" anchor="ctr"/>
+          <a:lstStyle/>
+          <a:p>
+            <a:pPr algn="ctr"/>
+          </a:p>
+        </p:txBody>
+      </p:sp>
+      <p:sp>
+        <p:nvSpPr>
+          <p:cNvPr id="4" name="Rounded Rectangle 3"/>
+          <p:cNvSpPr/>
+          <p:nvPr/>
+        </p:nvSpPr>
+        <p:spPr>
+          <a:xfrm>
+            <a:off x="1920240" y="2286000"/>
+            <a:ext cx="8321040" cy="2377440"/>
+          </a:xfrm>
+          <a:prstGeom prst="roundRect">
+            <a:avLst>
+              <a:gd name="adj" fmla="val 20000"/>
+            </a:avLst>
+          </a:prstGeom>
+          <a:solidFill>
+            <a:srgbClr val="FFFFFF"/>
+          </a:solidFill>
+          <a:ln>
+            <a:noFill/>
+          </a:ln>
+          <a:effectLst/>
+        </p:spPr>
+        <p:style>
+          <a:lnRef idx="1">
+            <a:schemeClr val="accent1"/>
+          </a:lnRef>
+          <a:fillRef idx="3">
+            <a:schemeClr val="accent1"/>
+          </a:fillRef>
+          <a:effectRef idx="2">
+            <a:schemeClr val="accent1"/>
+          </a:effectRef>
+          <a:fontRef idx="minor">
+            <a:schemeClr val="lt1"/>
+          </a:fontRef>
+        </p:style>
+        <p:txBody>
+          <a:bodyPr rtlCol="0" anchor="ctr"/>
+          <a:lstStyle/>
+          <a:p>
+            <a:pPr algn="ctr"/>
+            <a:r>
+              <a:rPr b="1" sz="3000">
+                <a:solidFill>
+                  <a:srgbClr val="7A2E43"/>
+                </a:solidFill>
+                <a:latin typeface="Cambria"/>
+              </a:rPr>
+              <a:t>End of Unit 2</a:t>
+            </a:r>
+          </a:p>
+          <a:p>
+            <a:pPr algn="ctr"/>
+            <a:r>
+              <a:rPr sz="1400">
+                <a:solidFill>
+                  <a:srgbClr val="595959"/>
+                </a:solidFill>
+              </a:rPr>
+              <a:t>Review the matching workbook to consolidate what you have learnt.</a:t>
+            </a:r>
           </a:p>
         </p:txBody>
       </p:sp>
@@ -4926,7 +6589,7 @@
     <p:bg>
       <p:bgPr>
         <a:solidFill>
-          <a:srgbClr val="6E2337"/>
+          <a:srgbClr val="D6A24A"/>
         </a:solidFill>
         <a:effectLst/>
       </p:bgPr>
@@ -4940,23 +6603,220 @@
       <p:grpSpPr/>
       <p:sp>
         <p:nvSpPr>
-          <p:cNvPr id="2" name="Title 1"/>
-          <p:cNvSpPr>
-            <a:spLocks noGrp="1"/>
-          </p:cNvSpPr>
-          <p:nvPr>
-            <p:ph type="title"/>
-          </p:nvPr>
-        </p:nvSpPr>
-        <p:spPr/>
-        <p:txBody>
-          <a:bodyPr/>
-          <a:lstStyle/>
-          <a:p>
-            <a:r>
-              <a:rPr sz="4000" b="1">
-                <a:solidFill>
-                  <a:srgbClr val="FFFFFF"/>
+          <p:cNvPr id="2" name="Oval 1"/>
+          <p:cNvSpPr/>
+          <p:nvPr/>
+        </p:nvSpPr>
+        <p:spPr>
+          <a:xfrm>
+            <a:off x="9692640" y="-914400"/>
+            <a:ext cx="2926080" cy="2926080"/>
+          </a:xfrm>
+          <a:prstGeom prst="ellipse">
+            <a:avLst/>
+          </a:prstGeom>
+          <a:solidFill>
+            <a:srgbClr val="BC8E41"/>
+          </a:solidFill>
+          <a:ln>
+            <a:noFill/>
+          </a:ln>
+          <a:effectLst/>
+        </p:spPr>
+        <p:style>
+          <a:lnRef idx="1">
+            <a:schemeClr val="accent1"/>
+          </a:lnRef>
+          <a:fillRef idx="3">
+            <a:schemeClr val="accent1"/>
+          </a:fillRef>
+          <a:effectRef idx="2">
+            <a:schemeClr val="accent1"/>
+          </a:effectRef>
+          <a:fontRef idx="minor">
+            <a:schemeClr val="lt1"/>
+          </a:fontRef>
+        </p:style>
+        <p:txBody>
+          <a:bodyPr rtlCol="0" anchor="ctr"/>
+          <a:lstStyle/>
+          <a:p>
+            <a:pPr algn="ctr"/>
+          </a:p>
+        </p:txBody>
+      </p:sp>
+      <p:sp>
+        <p:nvSpPr>
+          <p:cNvPr id="3" name="Oval 2"/>
+          <p:cNvSpPr/>
+          <p:nvPr/>
+        </p:nvSpPr>
+        <p:spPr>
+          <a:xfrm>
+            <a:off x="-914400" y="4937760"/>
+            <a:ext cx="2377440" cy="2377440"/>
+          </a:xfrm>
+          <a:prstGeom prst="ellipse">
+            <a:avLst/>
+          </a:prstGeom>
+          <a:solidFill>
+            <a:srgbClr val="BC8E41"/>
+          </a:solidFill>
+          <a:ln>
+            <a:noFill/>
+          </a:ln>
+          <a:effectLst/>
+        </p:spPr>
+        <p:style>
+          <a:lnRef idx="1">
+            <a:schemeClr val="accent1"/>
+          </a:lnRef>
+          <a:fillRef idx="3">
+            <a:schemeClr val="accent1"/>
+          </a:fillRef>
+          <a:effectRef idx="2">
+            <a:schemeClr val="accent1"/>
+          </a:effectRef>
+          <a:fontRef idx="minor">
+            <a:schemeClr val="lt1"/>
+          </a:fontRef>
+        </p:style>
+        <p:txBody>
+          <a:bodyPr rtlCol="0" anchor="ctr"/>
+          <a:lstStyle/>
+          <a:p>
+            <a:pPr algn="ctr"/>
+          </a:p>
+        </p:txBody>
+      </p:sp>
+      <p:sp>
+        <p:nvSpPr>
+          <p:cNvPr id="4" name="Rounded Rectangle 3"/>
+          <p:cNvSpPr/>
+          <p:nvPr/>
+        </p:nvSpPr>
+        <p:spPr>
+          <a:xfrm>
+            <a:off x="822960" y="1051560"/>
+            <a:ext cx="1188720" cy="502920"/>
+          </a:xfrm>
+          <a:prstGeom prst="roundRect">
+            <a:avLst>
+              <a:gd name="adj" fmla="val 50000"/>
+            </a:avLst>
+          </a:prstGeom>
+          <a:solidFill>
+            <a:srgbClr val="FFFFFF"/>
+          </a:solidFill>
+          <a:ln>
+            <a:noFill/>
+          </a:ln>
+          <a:effectLst/>
+        </p:spPr>
+        <p:style>
+          <a:lnRef idx="1">
+            <a:schemeClr val="accent1"/>
+          </a:lnRef>
+          <a:fillRef idx="3">
+            <a:schemeClr val="accent1"/>
+          </a:fillRef>
+          <a:effectRef idx="2">
+            <a:schemeClr val="accent1"/>
+          </a:effectRef>
+          <a:fontRef idx="minor">
+            <a:schemeClr val="lt1"/>
+          </a:fontRef>
+        </p:style>
+        <p:txBody>
+          <a:bodyPr rtlCol="0" anchor="ctr" wrap="none" lIns="50800" rIns="50800"/>
+          <a:lstStyle/>
+          <a:p>
+            <a:pPr algn="ctr"/>
+            <a:r>
+              <a:rPr sz="1400" b="1">
+                <a:solidFill>
+                  <a:srgbClr val="AB813B"/>
+                </a:solidFill>
+                <a:latin typeface="Calibri"/>
+              </a:rPr>
+              <a:t>01</a:t>
+            </a:r>
+          </a:p>
+        </p:txBody>
+      </p:sp>
+      <p:sp>
+        <p:nvSpPr>
+          <p:cNvPr id="5" name="Rounded Rectangle 4"/>
+          <p:cNvSpPr/>
+          <p:nvPr/>
+        </p:nvSpPr>
+        <p:spPr>
+          <a:xfrm>
+            <a:off x="822960" y="2011680"/>
+            <a:ext cx="10515600" cy="2834640"/>
+          </a:xfrm>
+          <a:prstGeom prst="roundRect">
+            <a:avLst>
+              <a:gd name="adj" fmla="val 18000"/>
+            </a:avLst>
+          </a:prstGeom>
+          <a:solidFill>
+            <a:srgbClr val="FFFFFF"/>
+          </a:solidFill>
+          <a:ln>
+            <a:noFill/>
+          </a:ln>
+          <a:effectLst/>
+        </p:spPr>
+        <p:style>
+          <a:lnRef idx="1">
+            <a:schemeClr val="accent1"/>
+          </a:lnRef>
+          <a:fillRef idx="3">
+            <a:schemeClr val="accent1"/>
+          </a:fillRef>
+          <a:effectRef idx="2">
+            <a:schemeClr val="accent1"/>
+          </a:effectRef>
+          <a:fontRef idx="minor">
+            <a:schemeClr val="lt1"/>
+          </a:fontRef>
+        </p:style>
+        <p:txBody>
+          <a:bodyPr rtlCol="0" anchor="ctr"/>
+          <a:lstStyle/>
+          <a:p>
+            <a:pPr algn="ctr"/>
+          </a:p>
+        </p:txBody>
+      </p:sp>
+      <p:sp>
+        <p:nvSpPr>
+          <p:cNvPr id="6" name="TextBox 5"/>
+          <p:cNvSpPr txBox="1"/>
+          <p:nvPr/>
+        </p:nvSpPr>
+        <p:spPr>
+          <a:xfrm>
+            <a:off x="1280160" y="2697480"/>
+            <a:ext cx="9601200" cy="1097280"/>
+          </a:xfrm>
+          <a:prstGeom prst="rect">
+            <a:avLst/>
+          </a:prstGeom>
+          <a:noFill/>
+        </p:spPr>
+        <p:txBody>
+          <a:bodyPr wrap="square" anchor="t">
+            <a:spAutoFit/>
+          </a:bodyPr>
+          <a:lstStyle/>
+          <a:p>
+            <a:pPr algn="l"/>
+            <a:r>
+              <a:rPr sz="3400" b="1" i="0">
+                <a:solidFill>
+                  <a:srgbClr val="B5893E"/>
                 </a:solidFill>
                 <a:latin typeface="Cambria"/>
               </a:rPr>
@@ -4967,27 +6827,35 @@
       </p:sp>
       <p:sp>
         <p:nvSpPr>
-          <p:cNvPr id="3" name="Text Placeholder 2"/>
-          <p:cNvSpPr>
-            <a:spLocks noGrp="1"/>
-          </p:cNvSpPr>
-          <p:nvPr>
-            <p:ph type="body" idx="1"/>
-          </p:nvPr>
-        </p:nvSpPr>
-        <p:spPr/>
-        <p:txBody>
-          <a:bodyPr/>
-          <a:lstStyle/>
-          <a:p>
-            <a:r>
-              <a:rPr sz="1800">
-                <a:solidFill>
-                  <a:srgbClr val="E5E5E5"/>
-                </a:solidFill>
-                <a:latin typeface="Calibri"/>
-              </a:rPr>
-              <a:t>AOS 1 · Trends in Design</a:t>
+          <p:cNvPr id="7" name="TextBox 6"/>
+          <p:cNvSpPr txBox="1"/>
+          <p:nvPr/>
+        </p:nvSpPr>
+        <p:spPr>
+          <a:xfrm>
+            <a:off x="1280160" y="3657600"/>
+            <a:ext cx="9601200" cy="548640"/>
+          </a:xfrm>
+          <a:prstGeom prst="rect">
+            <a:avLst/>
+          </a:prstGeom>
+          <a:noFill/>
+        </p:spPr>
+        <p:txBody>
+          <a:bodyPr wrap="square" anchor="t">
+            <a:spAutoFit/>
+          </a:bodyPr>
+          <a:lstStyle/>
+          <a:p>
+            <a:pPr algn="l"/>
+            <a:r>
+              <a:rPr sz="1500" b="0" i="0">
+                <a:solidFill>
+                  <a:srgbClr val="6B6B6B"/>
+                </a:solidFill>
+                <a:latin typeface="Calibri"/>
+              </a:rPr>
+              <a:t>AOS 1 - Trends in Design</a:t>
             </a:r>
           </a:p>
         </p:txBody>
@@ -5003,6 +6871,14 @@
 <file path=ppt/slides/slide3.xml><?xml version="1.0" encoding="utf-8"?>
 <p:sld xmlns:a="http://schemas.openxmlformats.org/drawingml/2006/main" xmlns:p="http://schemas.openxmlformats.org/presentationml/2006/main" xmlns:r="http://schemas.openxmlformats.org/officeDocument/2006/relationships">
   <p:cSld>
+    <p:bg>
+      <p:bgPr>
+        <a:solidFill>
+          <a:srgbClr val="FBF5F1"/>
+        </a:solidFill>
+        <a:effectLst/>
+      </p:bgPr>
+    </p:bg>
     <p:spTree>
       <p:nvGrpSpPr>
         <p:cNvPr id="1" name=""/>
@@ -5012,297 +6888,462 @@
       <p:grpSpPr/>
       <p:sp>
         <p:nvSpPr>
-          <p:cNvPr id="2" name="Title 1"/>
-          <p:cNvSpPr>
-            <a:spLocks noGrp="1"/>
-          </p:cNvSpPr>
-          <p:nvPr>
-            <p:ph type="title"/>
-          </p:nvPr>
-        </p:nvSpPr>
-        <p:spPr/>
-        <p:txBody>
-          <a:bodyPr wrap="square"/>
-          <a:lstStyle/>
-          <a:p>
-            <a:r>
-              <a:rPr sz="3200" b="1">
-                <a:solidFill>
-                  <a:srgbClr val="6E2337"/>
-                </a:solidFill>
-                <a:latin typeface="Cambria"/>
-              </a:rPr>
-              <a:t>What is a Design Trend?</a:t>
-            </a:r>
-          </a:p>
-        </p:txBody>
-      </p:sp>
-      <p:sp>
-        <p:nvSpPr>
-          <p:cNvPr id="3" name="Content Placeholder 2"/>
-          <p:cNvSpPr>
-            <a:spLocks noGrp="1"/>
-          </p:cNvSpPr>
-          <p:nvPr>
-            <p:ph idx="1" sz="half"/>
-          </p:nvPr>
-        </p:nvSpPr>
-        <p:spPr/>
-        <p:txBody>
-          <a:bodyPr wrap="square"/>
-          <a:lstStyle/>
-          <a:p>
-            <a:pPr>
-              <a:spcAft>
-                <a:spcPts val="1000"/>
-              </a:spcAft>
-            </a:pPr>
-            <a:r>
-              <a:rPr sz="2000" b="0" i="0">
-                <a:solidFill>
-                  <a:srgbClr val="333333"/>
-                </a:solidFill>
-                <a:latin typeface="Calibri"/>
-              </a:rPr>
-              <a:t>A design trend is a </a:t>
-            </a:r>
-            <a:r>
-              <a:rPr sz="2000" b="1" i="0">
-                <a:solidFill>
-                  <a:srgbClr val="6E2337"/>
-                </a:solidFill>
-                <a:latin typeface="Calibri"/>
-              </a:rPr>
-              <a:t>general direction</a:t>
-            </a:r>
-            <a:r>
-              <a:rPr sz="2000" b="0" i="0">
-                <a:solidFill>
-                  <a:srgbClr val="333333"/>
-                </a:solidFill>
-                <a:latin typeface="Calibri"/>
-              </a:rPr>
-              <a:t> in which design styles, materials or ideas are developing at a particular time.</a:t>
-            </a:r>
-          </a:p>
-          <a:p>
-            <a:pPr>
-              <a:spcAft>
-                <a:spcPts val="1000"/>
-              </a:spcAft>
-            </a:pPr>
-            <a:r>
-              <a:rPr sz="2000" b="0" i="0">
-                <a:solidFill>
-                  <a:srgbClr val="333333"/>
-                </a:solidFill>
-                <a:latin typeface="Calibri"/>
-              </a:rPr>
-              <a:t>Trends emerge across </a:t>
-            </a:r>
-            <a:r>
-              <a:rPr sz="2000" b="1" i="0">
-                <a:solidFill>
-                  <a:srgbClr val="6E2337"/>
-                </a:solidFill>
-                <a:latin typeface="Calibri"/>
-              </a:rPr>
-              <a:t>all four design fields</a:t>
-            </a:r>
-            <a:r>
-              <a:rPr sz="2000" b="0" i="0">
-                <a:solidFill>
-                  <a:srgbClr val="333333"/>
-                </a:solidFill>
-                <a:latin typeface="Calibri"/>
-              </a:rPr>
-              <a:t> — communication, environmental, industrial and interaction design — often at the same time, driven by shared cultural forces.</a:t>
-            </a:r>
-          </a:p>
-          <a:p>
-            <a:pPr>
-              <a:spcAft>
-                <a:spcPts val="1000"/>
-              </a:spcAft>
-            </a:pPr>
-            <a:r>
-              <a:rPr sz="2000" b="1" i="0">
-                <a:solidFill>
-                  <a:srgbClr val="6E2337"/>
-                </a:solidFill>
-                <a:latin typeface="Calibri"/>
-              </a:rPr>
-              <a:t>Trend vs Fad</a:t>
-            </a:r>
-            <a:r>
-              <a:rPr sz="2000" b="0" i="0">
-                <a:solidFill>
-                  <a:srgbClr val="333333"/>
-                </a:solidFill>
-                <a:latin typeface="Calibri"/>
-              </a:rPr>
-              <a:t> — a trend develops over a longer period and reflects deeper shifts; a fad is short-lived and often stylistic only. </a:t>
-            </a:r>
-          </a:p>
-        </p:txBody>
-      </p:sp>
-      <p:sp>
-        <p:nvSpPr>
-          <p:cNvPr id="4" name="Content Placeholder 3"/>
-          <p:cNvSpPr>
-            <a:spLocks noGrp="1"/>
-          </p:cNvSpPr>
-          <p:nvPr>
-            <p:ph idx="2" sz="half"/>
-          </p:nvPr>
-        </p:nvSpPr>
-        <p:spPr/>
-        <p:txBody>
-          <a:bodyPr wrap="square"/>
-          <a:lstStyle/>
-          <a:p>
-            <a:pPr>
-              <a:spcAft>
-                <a:spcPts val="1000"/>
-              </a:spcAft>
-            </a:pPr>
-            <a:r>
-              <a:rPr sz="2000" b="0" i="0">
-                <a:solidFill>
-                  <a:srgbClr val="333333"/>
-                </a:solidFill>
-                <a:latin typeface="Calibri"/>
-              </a:rPr>
-              <a:t>Why Study Trends?</a:t>
-            </a:r>
-          </a:p>
-          <a:p>
-            <a:pPr lvl="1">
-              <a:spcAft>
-                <a:spcPts val="1000"/>
-              </a:spcAft>
-            </a:pPr>
-            <a:r>
-              <a:rPr sz="1800" b="0" i="0">
-                <a:solidFill>
-                  <a:srgbClr val="333333"/>
-                </a:solidFill>
-                <a:latin typeface="Calibri"/>
-              </a:rPr>
-              <a:t>Understand the </a:t>
-            </a:r>
-            <a:r>
-              <a:rPr sz="1800" b="1" i="0">
-                <a:solidFill>
-                  <a:srgbClr val="6E2337"/>
-                </a:solidFill>
-                <a:latin typeface="Calibri"/>
-              </a:rPr>
-              <a:t>context</a:t>
-            </a:r>
-            <a:r>
-              <a:rPr sz="1800" b="0" i="0">
-                <a:solidFill>
-                  <a:srgbClr val="333333"/>
-                </a:solidFill>
-                <a:latin typeface="Calibri"/>
-              </a:rPr>
-              <a:t> a design was created in</a:t>
-            </a:r>
-          </a:p>
-          <a:p>
-            <a:pPr lvl="1">
-              <a:spcAft>
-                <a:spcPts val="1000"/>
-              </a:spcAft>
-            </a:pPr>
-            <a:r>
-              <a:rPr sz="1800" b="0" i="0">
-                <a:solidFill>
-                  <a:srgbClr val="333333"/>
-                </a:solidFill>
-                <a:latin typeface="Calibri"/>
-              </a:rPr>
-              <a:t>Predict future </a:t>
-            </a:r>
-            <a:r>
-              <a:rPr sz="1800" b="1" i="0">
-                <a:solidFill>
-                  <a:srgbClr val="6E2337"/>
-                </a:solidFill>
-                <a:latin typeface="Calibri"/>
-              </a:rPr>
-              <a:t>audience expectations</a:t>
-            </a:r>
-          </a:p>
-          <a:p>
-            <a:pPr lvl="1">
-              <a:spcAft>
-                <a:spcPts val="1000"/>
-              </a:spcAft>
-            </a:pPr>
-            <a:r>
-              <a:rPr sz="1800" b="0" i="0">
-                <a:solidFill>
-                  <a:srgbClr val="333333"/>
-                </a:solidFill>
-                <a:latin typeface="Calibri"/>
-              </a:rPr>
-              <a:t>Position your own folio work within current practice</a:t>
-            </a:r>
-          </a:p>
-          <a:p>
-            <a:pPr lvl="1">
-              <a:spcAft>
-                <a:spcPts val="1000"/>
-              </a:spcAft>
-            </a:pPr>
-            <a:r>
-              <a:rPr sz="1800" b="0" i="0">
-                <a:solidFill>
-                  <a:srgbClr val="333333"/>
-                </a:solidFill>
-                <a:latin typeface="Calibri"/>
-              </a:rPr>
-              <a:t>Analyse </a:t>
-            </a:r>
-            <a:r>
-              <a:rPr sz="1800" b="1" i="0">
-                <a:solidFill>
-                  <a:srgbClr val="6E2337"/>
-                </a:solidFill>
-                <a:latin typeface="Calibri"/>
-              </a:rPr>
-              <a:t>why</a:t>
-            </a:r>
-            <a:r>
-              <a:rPr sz="1800" b="0" i="0">
-                <a:solidFill>
-                  <a:srgbClr val="333333"/>
-                </a:solidFill>
-                <a:latin typeface="Calibri"/>
-              </a:rPr>
-              <a:t> a design looks the way it does</a:t>
-            </a:r>
-          </a:p>
-        </p:txBody>
-      </p:sp>
-      <p:sp>
-        <p:nvSpPr>
-          <p:cNvPr id="5" name="Rectangle 4"/>
+          <p:cNvPr id="2" name="Rounded Rectangle 1"/>
           <p:cNvSpPr/>
           <p:nvPr/>
         </p:nvSpPr>
         <p:spPr>
           <a:xfrm>
-            <a:off x="548640" y="1234440"/>
-            <a:ext cx="1463040" cy="38100"/>
+            <a:off x="685800" y="502920"/>
+            <a:ext cx="3291840" cy="457200"/>
+          </a:xfrm>
+          <a:prstGeom prst="roundRect">
+            <a:avLst>
+              <a:gd name="adj" fmla="val 50000"/>
+            </a:avLst>
+          </a:prstGeom>
+          <a:solidFill>
+            <a:srgbClr val="7A2E43"/>
+          </a:solidFill>
+          <a:ln>
+            <a:noFill/>
+          </a:ln>
+          <a:effectLst/>
+        </p:spPr>
+        <p:style>
+          <a:lnRef idx="1">
+            <a:schemeClr val="accent1"/>
+          </a:lnRef>
+          <a:fillRef idx="3">
+            <a:schemeClr val="accent1"/>
+          </a:fillRef>
+          <a:effectRef idx="2">
+            <a:schemeClr val="accent1"/>
+          </a:effectRef>
+          <a:fontRef idx="minor">
+            <a:schemeClr val="lt1"/>
+          </a:fontRef>
+        </p:style>
+        <p:txBody>
+          <a:bodyPr rtlCol="0" anchor="ctr" wrap="none" lIns="50800" rIns="50800"/>
+          <a:lstStyle/>
+          <a:p>
+            <a:pPr algn="ctr"/>
+            <a:r>
+              <a:rPr sz="1100" b="1">
+                <a:solidFill>
+                  <a:srgbClr val="FFFFFF"/>
+                </a:solidFill>
+                <a:latin typeface="Calibri"/>
+              </a:rPr>
+              <a:t>TRENDS IN DESIGN</a:t>
+            </a:r>
+          </a:p>
+        </p:txBody>
+      </p:sp>
+      <p:sp>
+        <p:nvSpPr>
+          <p:cNvPr id="3" name="TextBox 2"/>
+          <p:cNvSpPr txBox="1"/>
+          <p:nvPr/>
+        </p:nvSpPr>
+        <p:spPr>
+          <a:xfrm>
+            <a:off x="685800" y="1051560"/>
+            <a:ext cx="10607040" cy="822960"/>
           </a:xfrm>
           <a:prstGeom prst="rect">
             <a:avLst/>
           </a:prstGeom>
+          <a:noFill/>
+        </p:spPr>
+        <p:txBody>
+          <a:bodyPr wrap="square" anchor="t">
+            <a:spAutoFit/>
+          </a:bodyPr>
+          <a:lstStyle/>
+          <a:p>
+            <a:pPr algn="l"/>
+            <a:r>
+              <a:rPr sz="2700" b="1" i="0">
+                <a:solidFill>
+                  <a:srgbClr val="2A1A1F"/>
+                </a:solidFill>
+                <a:latin typeface="Cambria"/>
+              </a:rPr>
+              <a:t>What is a Design Trend?</a:t>
+            </a:r>
+          </a:p>
+        </p:txBody>
+      </p:sp>
+      <p:sp>
+        <p:nvSpPr>
+          <p:cNvPr id="4" name="Rounded Rectangle 3"/>
+          <p:cNvSpPr/>
+          <p:nvPr/>
+        </p:nvSpPr>
+        <p:spPr>
+          <a:xfrm>
+            <a:off x="685800" y="1874519"/>
+            <a:ext cx="5166360" cy="4526280"/>
+          </a:xfrm>
+          <a:prstGeom prst="roundRect">
+            <a:avLst>
+              <a:gd name="adj" fmla="val 6000"/>
+            </a:avLst>
+          </a:prstGeom>
           <a:solidFill>
-            <a:srgbClr val="6E2337"/>
+            <a:srgbClr val="EFE5E8"/>
+          </a:solidFill>
+          <a:ln>
+            <a:noFill/>
+          </a:ln>
+          <a:effectLst/>
+        </p:spPr>
+        <p:style>
+          <a:lnRef idx="1">
+            <a:schemeClr val="accent1"/>
+          </a:lnRef>
+          <a:fillRef idx="3">
+            <a:schemeClr val="accent1"/>
+          </a:fillRef>
+          <a:effectRef idx="2">
+            <a:schemeClr val="accent1"/>
+          </a:effectRef>
+          <a:fontRef idx="minor">
+            <a:schemeClr val="lt1"/>
+          </a:fontRef>
+        </p:style>
+        <p:txBody>
+          <a:bodyPr rtlCol="0" anchor="ctr" lIns="279400" rIns="279400" tIns="228600" bIns="228600" wrap="square"/>
+          <a:lstStyle/>
+          <a:p>
+            <a:pPr algn="ctr" indent="-203200" marL="203200">
+              <a:spcAft>
+                <a:spcPts val="900"/>
+              </a:spcAft>
+              <a:buClr>
+                <a:srgbClr val="7A2E43"/>
+              </a:buClr>
+              <a:buSzPct val="90000"/>
+              <a:buFont typeface="Arial"/>
+              <a:buChar char="●"/>
+            </a:pPr>
+            <a:r>
+              <a:rPr sz="1400" b="0" i="0">
+                <a:solidFill>
+                  <a:srgbClr val="2A1A1F"/>
+                </a:solidFill>
+                <a:latin typeface="Calibri"/>
+              </a:rPr>
+              <a:t>A design trend is a </a:t>
+            </a:r>
+            <a:r>
+              <a:rPr sz="1400" b="1" i="0">
+                <a:solidFill>
+                  <a:srgbClr val="672738"/>
+                </a:solidFill>
+                <a:latin typeface="Calibri"/>
+              </a:rPr>
+              <a:t>general direction</a:t>
+            </a:r>
+            <a:r>
+              <a:rPr sz="1400" b="0" i="0">
+                <a:solidFill>
+                  <a:srgbClr val="2A1A1F"/>
+                </a:solidFill>
+                <a:latin typeface="Calibri"/>
+              </a:rPr>
+              <a:t> in which design styles, materials or ideas are developing at a particular time.</a:t>
+            </a:r>
+          </a:p>
+          <a:p>
+            <a:pPr indent="-203200" marL="203200">
+              <a:spcAft>
+                <a:spcPts val="900"/>
+              </a:spcAft>
+              <a:buClr>
+                <a:srgbClr val="7A2E43"/>
+              </a:buClr>
+              <a:buSzPct val="90000"/>
+              <a:buFont typeface="Arial"/>
+              <a:buChar char="●"/>
+            </a:pPr>
+            <a:r>
+              <a:rPr sz="1400" b="0" i="0">
+                <a:solidFill>
+                  <a:srgbClr val="2A1A1F"/>
+                </a:solidFill>
+                <a:latin typeface="Calibri"/>
+              </a:rPr>
+              <a:t>Trends emerge across </a:t>
+            </a:r>
+            <a:r>
+              <a:rPr sz="1400" b="1" i="0">
+                <a:solidFill>
+                  <a:srgbClr val="672738"/>
+                </a:solidFill>
+                <a:latin typeface="Calibri"/>
+              </a:rPr>
+              <a:t>all four design fields</a:t>
+            </a:r>
+            <a:r>
+              <a:rPr sz="1400" b="0" i="0">
+                <a:solidFill>
+                  <a:srgbClr val="2A1A1F"/>
+                </a:solidFill>
+                <a:latin typeface="Calibri"/>
+              </a:rPr>
+              <a:t> — communication, environmental, industrial and interaction design — often at the same time, driven by shared cultural forces.</a:t>
+            </a:r>
+          </a:p>
+          <a:p>
+            <a:pPr indent="-203200" marL="203200">
+              <a:spcAft>
+                <a:spcPts val="900"/>
+              </a:spcAft>
+              <a:buClr>
+                <a:srgbClr val="7A2E43"/>
+              </a:buClr>
+              <a:buSzPct val="90000"/>
+              <a:buFont typeface="Arial"/>
+              <a:buChar char="●"/>
+            </a:pPr>
+            <a:r>
+              <a:rPr sz="1400" b="1" i="0">
+                <a:solidFill>
+                  <a:srgbClr val="672738"/>
+                </a:solidFill>
+                <a:latin typeface="Calibri"/>
+              </a:rPr>
+              <a:t>Trend vs Fad</a:t>
+            </a:r>
+            <a:r>
+              <a:rPr sz="1400" b="0" i="0">
+                <a:solidFill>
+                  <a:srgbClr val="2A1A1F"/>
+                </a:solidFill>
+                <a:latin typeface="Calibri"/>
+              </a:rPr>
+              <a:t> — a trend develops over a longer period and reflects deeper shifts; a fad is short-lived and often stylistic only. </a:t>
+            </a:r>
+          </a:p>
+        </p:txBody>
+      </p:sp>
+      <p:sp>
+        <p:nvSpPr>
+          <p:cNvPr id="5" name="Rounded Rectangle 4"/>
+          <p:cNvSpPr/>
+          <p:nvPr/>
+        </p:nvSpPr>
+        <p:spPr>
+          <a:xfrm>
+            <a:off x="6080760" y="1874519"/>
+            <a:ext cx="5166360" cy="4526280"/>
+          </a:xfrm>
+          <a:prstGeom prst="roundRect">
+            <a:avLst>
+              <a:gd name="adj" fmla="val 6000"/>
+            </a:avLst>
+          </a:prstGeom>
+          <a:solidFill>
+            <a:srgbClr val="F4DEE3"/>
+          </a:solidFill>
+          <a:ln>
+            <a:noFill/>
+          </a:ln>
+          <a:effectLst/>
+        </p:spPr>
+        <p:style>
+          <a:lnRef idx="1">
+            <a:schemeClr val="accent1"/>
+          </a:lnRef>
+          <a:fillRef idx="3">
+            <a:schemeClr val="accent1"/>
+          </a:fillRef>
+          <a:effectRef idx="2">
+            <a:schemeClr val="accent1"/>
+          </a:effectRef>
+          <a:fontRef idx="minor">
+            <a:schemeClr val="lt1"/>
+          </a:fontRef>
+        </p:style>
+        <p:txBody>
+          <a:bodyPr rtlCol="0" anchor="ctr" lIns="279400" rIns="279400" tIns="228600" bIns="228600" wrap="square"/>
+          <a:lstStyle/>
+          <a:p>
+            <a:pPr algn="ctr" indent="-203200" marL="203200">
+              <a:spcAft>
+                <a:spcPts val="900"/>
+              </a:spcAft>
+              <a:buClr>
+                <a:srgbClr val="D98C9E"/>
+              </a:buClr>
+              <a:buSzPct val="90000"/>
+              <a:buFont typeface="Arial"/>
+              <a:buChar char="●"/>
+            </a:pPr>
+            <a:r>
+              <a:rPr sz="1400" b="0" i="0">
+                <a:solidFill>
+                  <a:srgbClr val="2A1A1F"/>
+                </a:solidFill>
+                <a:latin typeface="Calibri"/>
+              </a:rPr>
+              <a:t>Why Study Trends?</a:t>
+            </a:r>
+          </a:p>
+          <a:p>
+            <a:pPr indent="-203200" marL="203200">
+              <a:spcAft>
+                <a:spcPts val="900"/>
+              </a:spcAft>
+              <a:buClr>
+                <a:srgbClr val="D98C9E"/>
+              </a:buClr>
+              <a:buSzPct val="90000"/>
+              <a:buFont typeface="Arial"/>
+              <a:buChar char="–"/>
+            </a:pPr>
+            <a:r>
+              <a:rPr sz="1250" b="0" i="0">
+                <a:solidFill>
+                  <a:srgbClr val="2A1A1F"/>
+                </a:solidFill>
+                <a:latin typeface="Calibri"/>
+              </a:rPr>
+              <a:t>Understand the </a:t>
+            </a:r>
+            <a:r>
+              <a:rPr sz="1250" b="1" i="0">
+                <a:solidFill>
+                  <a:srgbClr val="B87786"/>
+                </a:solidFill>
+                <a:latin typeface="Calibri"/>
+              </a:rPr>
+              <a:t>context</a:t>
+            </a:r>
+            <a:r>
+              <a:rPr sz="1250" b="0" i="0">
+                <a:solidFill>
+                  <a:srgbClr val="2A1A1F"/>
+                </a:solidFill>
+                <a:latin typeface="Calibri"/>
+              </a:rPr>
+              <a:t> a design was created in</a:t>
+            </a:r>
+          </a:p>
+          <a:p>
+            <a:pPr indent="-203200" marL="203200">
+              <a:spcAft>
+                <a:spcPts val="900"/>
+              </a:spcAft>
+              <a:buClr>
+                <a:srgbClr val="D98C9E"/>
+              </a:buClr>
+              <a:buSzPct val="90000"/>
+              <a:buFont typeface="Arial"/>
+              <a:buChar char="–"/>
+            </a:pPr>
+            <a:r>
+              <a:rPr sz="1250" b="0" i="0">
+                <a:solidFill>
+                  <a:srgbClr val="2A1A1F"/>
+                </a:solidFill>
+                <a:latin typeface="Calibri"/>
+              </a:rPr>
+              <a:t>Predict future </a:t>
+            </a:r>
+            <a:r>
+              <a:rPr sz="1250" b="1" i="0">
+                <a:solidFill>
+                  <a:srgbClr val="B87786"/>
+                </a:solidFill>
+                <a:latin typeface="Calibri"/>
+              </a:rPr>
+              <a:t>audience expectations</a:t>
+            </a:r>
+          </a:p>
+          <a:p>
+            <a:pPr indent="-203200" marL="203200">
+              <a:spcAft>
+                <a:spcPts val="900"/>
+              </a:spcAft>
+              <a:buClr>
+                <a:srgbClr val="D98C9E"/>
+              </a:buClr>
+              <a:buSzPct val="90000"/>
+              <a:buFont typeface="Arial"/>
+              <a:buChar char="–"/>
+            </a:pPr>
+            <a:r>
+              <a:rPr sz="1250" b="0" i="0">
+                <a:solidFill>
+                  <a:srgbClr val="2A1A1F"/>
+                </a:solidFill>
+                <a:latin typeface="Calibri"/>
+              </a:rPr>
+              <a:t>Position your own folio work within current practice</a:t>
+            </a:r>
+          </a:p>
+          <a:p>
+            <a:pPr indent="-203200" marL="203200">
+              <a:spcAft>
+                <a:spcPts val="900"/>
+              </a:spcAft>
+              <a:buClr>
+                <a:srgbClr val="D98C9E"/>
+              </a:buClr>
+              <a:buSzPct val="90000"/>
+              <a:buFont typeface="Arial"/>
+              <a:buChar char="–"/>
+            </a:pPr>
+            <a:r>
+              <a:rPr sz="1250" b="0" i="0">
+                <a:solidFill>
+                  <a:srgbClr val="2A1A1F"/>
+                </a:solidFill>
+                <a:latin typeface="Calibri"/>
+              </a:rPr>
+              <a:t>Analyse </a:t>
+            </a:r>
+            <a:r>
+              <a:rPr sz="1250" b="1" i="0">
+                <a:solidFill>
+                  <a:srgbClr val="B87786"/>
+                </a:solidFill>
+                <a:latin typeface="Calibri"/>
+              </a:rPr>
+              <a:t>why</a:t>
+            </a:r>
+            <a:r>
+              <a:rPr sz="1250" b="0" i="0">
+                <a:solidFill>
+                  <a:srgbClr val="2A1A1F"/>
+                </a:solidFill>
+                <a:latin typeface="Calibri"/>
+              </a:rPr>
+              <a:t> a design looks the way it does</a:t>
+            </a:r>
+          </a:p>
+        </p:txBody>
+      </p:sp>
+      <p:sp>
+        <p:nvSpPr>
+          <p:cNvPr id="6" name="Oval 5"/>
+          <p:cNvSpPr/>
+          <p:nvPr/>
+        </p:nvSpPr>
+        <p:spPr>
+          <a:xfrm>
+            <a:off x="5532120" y="3840480"/>
+            <a:ext cx="685800" cy="685800"/>
+          </a:xfrm>
+          <a:prstGeom prst="ellipse">
+            <a:avLst/>
+          </a:prstGeom>
+          <a:solidFill>
+            <a:srgbClr val="D6A24A"/>
           </a:solidFill>
           <a:ln>
             <a:noFill/>
@@ -5342,6 +7383,14 @@
 <file path=ppt/slides/slide4.xml><?xml version="1.0" encoding="utf-8"?>
 <p:sld xmlns:a="http://schemas.openxmlformats.org/drawingml/2006/main" xmlns:p="http://schemas.openxmlformats.org/presentationml/2006/main" xmlns:r="http://schemas.openxmlformats.org/officeDocument/2006/relationships">
   <p:cSld>
+    <p:bg>
+      <p:bgPr>
+        <a:solidFill>
+          <a:srgbClr val="FBF5F1"/>
+        </a:solidFill>
+        <a:effectLst/>
+      </p:bgPr>
+    </p:bg>
     <p:spTree>
       <p:nvGrpSpPr>
         <p:cNvPr id="1" name=""/>
@@ -5351,204 +7400,330 @@
       <p:grpSpPr/>
       <p:sp>
         <p:nvSpPr>
-          <p:cNvPr id="2" name="Title 1"/>
-          <p:cNvSpPr>
-            <a:spLocks noGrp="1"/>
-          </p:cNvSpPr>
-          <p:nvPr>
-            <p:ph type="title"/>
-          </p:nvPr>
-        </p:nvSpPr>
-        <p:spPr/>
-        <p:txBody>
-          <a:bodyPr wrap="square"/>
-          <a:lstStyle/>
-          <a:p>
-            <a:r>
-              <a:rPr sz="3200" b="1">
-                <a:solidFill>
-                  <a:srgbClr val="6E2337"/>
-                </a:solidFill>
-                <a:latin typeface="Cambria"/>
-              </a:rPr>
-              <a:t>Factors that Drive Trends</a:t>
-            </a:r>
-          </a:p>
-        </p:txBody>
-      </p:sp>
-      <p:sp>
-        <p:nvSpPr>
-          <p:cNvPr id="3" name="Content Placeholder 2"/>
-          <p:cNvSpPr>
-            <a:spLocks noGrp="1"/>
-          </p:cNvSpPr>
-          <p:nvPr>
-            <p:ph idx="1"/>
-          </p:nvPr>
-        </p:nvSpPr>
-        <p:spPr/>
-        <p:txBody>
-          <a:bodyPr wrap="square"/>
-          <a:lstStyle/>
-          <a:p>
-            <a:pPr>
-              <a:spcAft>
-                <a:spcPts val="1000"/>
-              </a:spcAft>
-            </a:pPr>
-            <a:r>
-              <a:rPr sz="2000" b="0" i="0">
-                <a:solidFill>
-                  <a:srgbClr val="333333"/>
-                </a:solidFill>
-                <a:latin typeface="Calibri"/>
-              </a:rPr>
-              <a:t>Trends don't appear from nowhere — they are shaped by broader forces acting on society. When analysing a trend, always link it back to one or more of these factors.</a:t>
-            </a:r>
-          </a:p>
-          <a:p>
-            <a:pPr lvl="1">
-              <a:spcAft>
-                <a:spcPts val="1000"/>
-              </a:spcAft>
-            </a:pPr>
-            <a:r>
-              <a:rPr sz="1800" b="1" i="0">
-                <a:solidFill>
-                  <a:srgbClr val="6E2337"/>
-                </a:solidFill>
-                <a:latin typeface="Calibri"/>
-              </a:rPr>
-              <a:t>Social</a:t>
-            </a:r>
-            <a:r>
-              <a:rPr sz="1800" b="0" i="0">
-                <a:solidFill>
-                  <a:srgbClr val="333333"/>
-                </a:solidFill>
-                <a:latin typeface="Calibri"/>
-              </a:rPr>
-              <a:t> — changing lifestyles, values, demographics (e.g. remote work reshaping office design)</a:t>
-            </a:r>
-          </a:p>
-          <a:p>
-            <a:pPr lvl="1">
-              <a:spcAft>
-                <a:spcPts val="1000"/>
-              </a:spcAft>
-            </a:pPr>
-            <a:r>
-              <a:rPr sz="1800" b="1" i="0">
-                <a:solidFill>
-                  <a:srgbClr val="6E2337"/>
-                </a:solidFill>
-                <a:latin typeface="Calibri"/>
-              </a:rPr>
-              <a:t>Cultural</a:t>
-            </a:r>
-            <a:r>
-              <a:rPr sz="1800" b="0" i="0">
-                <a:solidFill>
-                  <a:srgbClr val="333333"/>
-                </a:solidFill>
-                <a:latin typeface="Calibri"/>
-              </a:rPr>
-              <a:t> — shifting attitudes, identity, heritage, globalisation of style</a:t>
-            </a:r>
-          </a:p>
-          <a:p>
-            <a:pPr lvl="1">
-              <a:spcAft>
-                <a:spcPts val="1000"/>
-              </a:spcAft>
-            </a:pPr>
-            <a:r>
-              <a:rPr sz="1800" b="1" i="0">
-                <a:solidFill>
-                  <a:srgbClr val="6E2337"/>
-                </a:solidFill>
-                <a:latin typeface="Calibri"/>
-              </a:rPr>
-              <a:t>Economic</a:t>
-            </a:r>
-            <a:r>
-              <a:rPr sz="1800" b="0" i="0">
-                <a:solidFill>
-                  <a:srgbClr val="333333"/>
-                </a:solidFill>
-                <a:latin typeface="Calibri"/>
-              </a:rPr>
-              <a:t> — cost of materials, market demand, recession vs growth</a:t>
-            </a:r>
-          </a:p>
-          <a:p>
-            <a:pPr lvl="1">
-              <a:spcAft>
-                <a:spcPts val="1000"/>
-              </a:spcAft>
-            </a:pPr>
-            <a:r>
-              <a:rPr sz="1800" b="1" i="0">
-                <a:solidFill>
-                  <a:srgbClr val="6E2337"/>
-                </a:solidFill>
-                <a:latin typeface="Calibri"/>
-              </a:rPr>
-              <a:t>Technological</a:t>
-            </a:r>
-            <a:r>
-              <a:rPr sz="1800" b="0" i="0">
-                <a:solidFill>
-                  <a:srgbClr val="333333"/>
-                </a:solidFill>
-                <a:latin typeface="Calibri"/>
-              </a:rPr>
-              <a:t> — new tools, materials and manufacturing methods (3D printing, AI, AR/VR)</a:t>
-            </a:r>
-          </a:p>
-          <a:p>
-            <a:pPr lvl="1">
-              <a:spcAft>
-                <a:spcPts val="1000"/>
-              </a:spcAft>
-            </a:pPr>
-            <a:r>
-              <a:rPr sz="1800" b="1" i="0">
-                <a:solidFill>
-                  <a:srgbClr val="6E2337"/>
-                </a:solidFill>
-                <a:latin typeface="Calibri"/>
-              </a:rPr>
-              <a:t>Environmental</a:t>
-            </a:r>
-            <a:r>
-              <a:rPr sz="1800" b="0" i="0">
-                <a:solidFill>
-                  <a:srgbClr val="333333"/>
-                </a:solidFill>
-                <a:latin typeface="Calibri"/>
-              </a:rPr>
-              <a:t> — sustainability pressures, climate concern, resource scarcity</a:t>
-            </a:r>
-          </a:p>
-        </p:txBody>
-      </p:sp>
-      <p:sp>
-        <p:nvSpPr>
-          <p:cNvPr id="4" name="Rectangle 3"/>
+          <p:cNvPr id="2" name="Rounded Rectangle 1"/>
           <p:cNvSpPr/>
           <p:nvPr/>
         </p:nvSpPr>
         <p:spPr>
           <a:xfrm>
-            <a:off x="548640" y="1234440"/>
-            <a:ext cx="1463040" cy="38100"/>
+            <a:off x="685800" y="502920"/>
+            <a:ext cx="3291840" cy="457200"/>
+          </a:xfrm>
+          <a:prstGeom prst="roundRect">
+            <a:avLst>
+              <a:gd name="adj" fmla="val 50000"/>
+            </a:avLst>
+          </a:prstGeom>
+          <a:solidFill>
+            <a:srgbClr val="7A2E43"/>
+          </a:solidFill>
+          <a:ln>
+            <a:noFill/>
+          </a:ln>
+          <a:effectLst/>
+        </p:spPr>
+        <p:style>
+          <a:lnRef idx="1">
+            <a:schemeClr val="accent1"/>
+          </a:lnRef>
+          <a:fillRef idx="3">
+            <a:schemeClr val="accent1"/>
+          </a:fillRef>
+          <a:effectRef idx="2">
+            <a:schemeClr val="accent1"/>
+          </a:effectRef>
+          <a:fontRef idx="minor">
+            <a:schemeClr val="lt1"/>
+          </a:fontRef>
+        </p:style>
+        <p:txBody>
+          <a:bodyPr rtlCol="0" anchor="ctr" wrap="none" lIns="50800" rIns="50800"/>
+          <a:lstStyle/>
+          <a:p>
+            <a:pPr algn="ctr"/>
+            <a:r>
+              <a:rPr sz="1100" b="1">
+                <a:solidFill>
+                  <a:srgbClr val="FFFFFF"/>
+                </a:solidFill>
+                <a:latin typeface="Calibri"/>
+              </a:rPr>
+              <a:t>TRENDS IN DESIGN</a:t>
+            </a:r>
+          </a:p>
+        </p:txBody>
+      </p:sp>
+      <p:sp>
+        <p:nvSpPr>
+          <p:cNvPr id="3" name="TextBox 2"/>
+          <p:cNvSpPr txBox="1"/>
+          <p:nvPr/>
+        </p:nvSpPr>
+        <p:spPr>
+          <a:xfrm>
+            <a:off x="685800" y="1051560"/>
+            <a:ext cx="10607040" cy="822960"/>
           </a:xfrm>
           <a:prstGeom prst="rect">
             <a:avLst/>
           </a:prstGeom>
+          <a:noFill/>
+        </p:spPr>
+        <p:txBody>
+          <a:bodyPr wrap="square" anchor="t">
+            <a:spAutoFit/>
+          </a:bodyPr>
+          <a:lstStyle/>
+          <a:p>
+            <a:pPr algn="l"/>
+            <a:r>
+              <a:rPr sz="2700" b="1" i="0">
+                <a:solidFill>
+                  <a:srgbClr val="2A1A1F"/>
+                </a:solidFill>
+                <a:latin typeface="Cambria"/>
+              </a:rPr>
+              <a:t>Factors that Drive Trends</a:t>
+            </a:r>
+          </a:p>
+        </p:txBody>
+      </p:sp>
+      <p:sp>
+        <p:nvSpPr>
+          <p:cNvPr id="4" name="Rounded Rectangle 3"/>
+          <p:cNvSpPr/>
+          <p:nvPr/>
+        </p:nvSpPr>
+        <p:spPr>
+          <a:xfrm>
+            <a:off x="685800" y="1874519"/>
+            <a:ext cx="10607040" cy="4526280"/>
+          </a:xfrm>
+          <a:prstGeom prst="roundRect">
+            <a:avLst>
+              <a:gd name="adj" fmla="val 6000"/>
+            </a:avLst>
+          </a:prstGeom>
           <a:solidFill>
-            <a:srgbClr val="6E2337"/>
+            <a:srgbClr val="F1EAEC"/>
+          </a:solidFill>
+          <a:ln>
+            <a:noFill/>
+          </a:ln>
+          <a:effectLst/>
+        </p:spPr>
+        <p:style>
+          <a:lnRef idx="1">
+            <a:schemeClr val="accent1"/>
+          </a:lnRef>
+          <a:fillRef idx="3">
+            <a:schemeClr val="accent1"/>
+          </a:fillRef>
+          <a:effectRef idx="2">
+            <a:schemeClr val="accent1"/>
+          </a:effectRef>
+          <a:fontRef idx="minor">
+            <a:schemeClr val="lt1"/>
+          </a:fontRef>
+        </p:style>
+        <p:txBody>
+          <a:bodyPr rtlCol="0" anchor="ctr" lIns="330200" rIns="330200" tIns="254000" bIns="254000" wrap="square"/>
+          <a:lstStyle/>
+          <a:p>
+            <a:pPr algn="ctr" indent="-203200" marL="203200">
+              <a:spcAft>
+                <a:spcPts val="900"/>
+              </a:spcAft>
+              <a:buClr>
+                <a:srgbClr val="7A2E43"/>
+              </a:buClr>
+              <a:buSzPct val="90000"/>
+              <a:buFont typeface="Arial"/>
+              <a:buChar char="●"/>
+            </a:pPr>
+            <a:r>
+              <a:rPr sz="1500" b="0" i="0">
+                <a:solidFill>
+                  <a:srgbClr val="2A1A1F"/>
+                </a:solidFill>
+                <a:latin typeface="Calibri"/>
+              </a:rPr>
+              <a:t>Trends don't appear from nowhere — they are shaped by broader forces acting on society. When analysing a trend, always link it back to one or more of these factors.</a:t>
+            </a:r>
+          </a:p>
+          <a:p>
+            <a:pPr indent="-203200" marL="203200">
+              <a:spcAft>
+                <a:spcPts val="900"/>
+              </a:spcAft>
+              <a:buClr>
+                <a:srgbClr val="7A2E43"/>
+              </a:buClr>
+              <a:buSzPct val="90000"/>
+              <a:buFont typeface="Arial"/>
+              <a:buChar char="–"/>
+            </a:pPr>
+            <a:r>
+              <a:rPr sz="1350" b="1" i="0">
+                <a:solidFill>
+                  <a:srgbClr val="672738"/>
+                </a:solidFill>
+                <a:latin typeface="Calibri"/>
+              </a:rPr>
+              <a:t>Social</a:t>
+            </a:r>
+            <a:r>
+              <a:rPr sz="1350" b="0" i="0">
+                <a:solidFill>
+                  <a:srgbClr val="2A1A1F"/>
+                </a:solidFill>
+                <a:latin typeface="Calibri"/>
+              </a:rPr>
+              <a:t> — changing lifestyles, values, demographics (e.g. remote work reshaping office design)</a:t>
+            </a:r>
+          </a:p>
+          <a:p>
+            <a:pPr indent="-203200" marL="203200">
+              <a:spcAft>
+                <a:spcPts val="900"/>
+              </a:spcAft>
+              <a:buClr>
+                <a:srgbClr val="7A2E43"/>
+              </a:buClr>
+              <a:buSzPct val="90000"/>
+              <a:buFont typeface="Arial"/>
+              <a:buChar char="–"/>
+            </a:pPr>
+            <a:r>
+              <a:rPr sz="1350" b="1" i="0">
+                <a:solidFill>
+                  <a:srgbClr val="672738"/>
+                </a:solidFill>
+                <a:latin typeface="Calibri"/>
+              </a:rPr>
+              <a:t>Cultural</a:t>
+            </a:r>
+            <a:r>
+              <a:rPr sz="1350" b="0" i="0">
+                <a:solidFill>
+                  <a:srgbClr val="2A1A1F"/>
+                </a:solidFill>
+                <a:latin typeface="Calibri"/>
+              </a:rPr>
+              <a:t> — shifting attitudes, identity, heritage, globalisation of style</a:t>
+            </a:r>
+          </a:p>
+          <a:p>
+            <a:pPr indent="-203200" marL="203200">
+              <a:spcAft>
+                <a:spcPts val="900"/>
+              </a:spcAft>
+              <a:buClr>
+                <a:srgbClr val="7A2E43"/>
+              </a:buClr>
+              <a:buSzPct val="90000"/>
+              <a:buFont typeface="Arial"/>
+              <a:buChar char="–"/>
+            </a:pPr>
+            <a:r>
+              <a:rPr sz="1350" b="1" i="0">
+                <a:solidFill>
+                  <a:srgbClr val="672738"/>
+                </a:solidFill>
+                <a:latin typeface="Calibri"/>
+              </a:rPr>
+              <a:t>Economic</a:t>
+            </a:r>
+            <a:r>
+              <a:rPr sz="1350" b="0" i="0">
+                <a:solidFill>
+                  <a:srgbClr val="2A1A1F"/>
+                </a:solidFill>
+                <a:latin typeface="Calibri"/>
+              </a:rPr>
+              <a:t> — cost of materials, market demand, recession vs growth</a:t>
+            </a:r>
+          </a:p>
+          <a:p>
+            <a:pPr indent="-203200" marL="203200">
+              <a:spcAft>
+                <a:spcPts val="900"/>
+              </a:spcAft>
+              <a:buClr>
+                <a:srgbClr val="7A2E43"/>
+              </a:buClr>
+              <a:buSzPct val="90000"/>
+              <a:buFont typeface="Arial"/>
+              <a:buChar char="–"/>
+            </a:pPr>
+            <a:r>
+              <a:rPr sz="1350" b="1" i="0">
+                <a:solidFill>
+                  <a:srgbClr val="672738"/>
+                </a:solidFill>
+                <a:latin typeface="Calibri"/>
+              </a:rPr>
+              <a:t>Technological</a:t>
+            </a:r>
+            <a:r>
+              <a:rPr sz="1350" b="0" i="0">
+                <a:solidFill>
+                  <a:srgbClr val="2A1A1F"/>
+                </a:solidFill>
+                <a:latin typeface="Calibri"/>
+              </a:rPr>
+              <a:t> — new tools, materials and manufacturing methods (3D printing, AI, AR/VR)</a:t>
+            </a:r>
+          </a:p>
+          <a:p>
+            <a:pPr indent="-203200" marL="203200">
+              <a:spcAft>
+                <a:spcPts val="900"/>
+              </a:spcAft>
+              <a:buClr>
+                <a:srgbClr val="7A2E43"/>
+              </a:buClr>
+              <a:buSzPct val="90000"/>
+              <a:buFont typeface="Arial"/>
+              <a:buChar char="–"/>
+            </a:pPr>
+            <a:r>
+              <a:rPr sz="1350" b="1" i="0">
+                <a:solidFill>
+                  <a:srgbClr val="672738"/>
+                </a:solidFill>
+                <a:latin typeface="Calibri"/>
+              </a:rPr>
+              <a:t>Environmental</a:t>
+            </a:r>
+            <a:r>
+              <a:rPr sz="1350" b="0" i="0">
+                <a:solidFill>
+                  <a:srgbClr val="2A1A1F"/>
+                </a:solidFill>
+                <a:latin typeface="Calibri"/>
+              </a:rPr>
+              <a:t> — sustainability pressures, climate concern, resource scarcity</a:t>
+            </a:r>
+          </a:p>
+        </p:txBody>
+      </p:sp>
+      <p:sp>
+        <p:nvSpPr>
+          <p:cNvPr id="5" name="Oval 4"/>
+          <p:cNvSpPr/>
+          <p:nvPr/>
+        </p:nvSpPr>
+        <p:spPr>
+          <a:xfrm>
+            <a:off x="10881360" y="5943600"/>
+            <a:ext cx="1005840" cy="1005840"/>
+          </a:xfrm>
+          <a:prstGeom prst="ellipse">
+            <a:avLst/>
+          </a:prstGeom>
+          <a:solidFill>
+            <a:srgbClr val="EDCBD3"/>
           </a:solidFill>
           <a:ln>
             <a:noFill/>
@@ -5588,6 +7763,14 @@
 <file path=ppt/slides/slide5.xml><?xml version="1.0" encoding="utf-8"?>
 <p:sld xmlns:a="http://schemas.openxmlformats.org/drawingml/2006/main" xmlns:p="http://schemas.openxmlformats.org/presentationml/2006/main" xmlns:r="http://schemas.openxmlformats.org/officeDocument/2006/relationships">
   <p:cSld>
+    <p:bg>
+      <p:bgPr>
+        <a:solidFill>
+          <a:srgbClr val="FBF5F1"/>
+        </a:solidFill>
+        <a:effectLst/>
+      </p:bgPr>
+    </p:bg>
     <p:spTree>
       <p:nvGrpSpPr>
         <p:cNvPr id="1" name=""/>
@@ -5597,231 +7780,357 @@
       <p:grpSpPr/>
       <p:sp>
         <p:nvSpPr>
-          <p:cNvPr id="2" name="Title 1"/>
-          <p:cNvSpPr>
-            <a:spLocks noGrp="1"/>
-          </p:cNvSpPr>
-          <p:nvPr>
-            <p:ph type="title"/>
-          </p:nvPr>
-        </p:nvSpPr>
-        <p:spPr/>
-        <p:txBody>
-          <a:bodyPr wrap="square"/>
-          <a:lstStyle/>
-          <a:p>
-            <a:r>
-              <a:rPr sz="3200" b="1">
-                <a:solidFill>
-                  <a:srgbClr val="6E2337"/>
-                </a:solidFill>
-                <a:latin typeface="Cambria"/>
-              </a:rPr>
-              <a:t>Sustainability &amp; Eco-Design</a:t>
-            </a:r>
-          </a:p>
-        </p:txBody>
-      </p:sp>
-      <p:sp>
-        <p:nvSpPr>
-          <p:cNvPr id="3" name="Content Placeholder 2"/>
-          <p:cNvSpPr>
-            <a:spLocks noGrp="1"/>
-          </p:cNvSpPr>
-          <p:nvPr>
-            <p:ph idx="1"/>
-          </p:nvPr>
-        </p:nvSpPr>
-        <p:spPr/>
-        <p:txBody>
-          <a:bodyPr wrap="square"/>
-          <a:lstStyle/>
-          <a:p>
-            <a:pPr lvl="1">
-              <a:spcAft>
-                <a:spcPts val="1000"/>
-              </a:spcAft>
-            </a:pPr>
-            <a:r>
-              <a:rPr sz="1800" b="0" i="0">
-                <a:solidFill>
-                  <a:srgbClr val="333333"/>
-                </a:solidFill>
-                <a:latin typeface="Calibri"/>
-              </a:rPr>
-              <a:t>A shift toward materials, processes and forms that minimise environmental impact — driven largely by </a:t>
-            </a:r>
-            <a:r>
-              <a:rPr sz="1800" b="1" i="0">
-                <a:solidFill>
-                  <a:srgbClr val="6E2337"/>
-                </a:solidFill>
-                <a:latin typeface="Calibri"/>
-              </a:rPr>
-              <a:t>environmental</a:t>
-            </a:r>
-            <a:r>
-              <a:rPr sz="1800" b="0" i="0">
-                <a:solidFill>
-                  <a:srgbClr val="333333"/>
-                </a:solidFill>
-                <a:latin typeface="Calibri"/>
-              </a:rPr>
-              <a:t> and </a:t>
-            </a:r>
-            <a:r>
-              <a:rPr sz="1800" b="1" i="0">
-                <a:solidFill>
-                  <a:srgbClr val="6E2337"/>
-                </a:solidFill>
-                <a:latin typeface="Calibri"/>
-              </a:rPr>
-              <a:t>social</a:t>
-            </a:r>
-            <a:r>
-              <a:rPr sz="1800" b="0" i="0">
-                <a:solidFill>
-                  <a:srgbClr val="333333"/>
-                </a:solidFill>
-                <a:latin typeface="Calibri"/>
-              </a:rPr>
-              <a:t> factors.</a:t>
-            </a:r>
-          </a:p>
-          <a:p>
-            <a:pPr lvl="1">
-              <a:spcAft>
-                <a:spcPts val="1000"/>
-              </a:spcAft>
-            </a:pPr>
-            <a:r>
-              <a:rPr sz="1800" b="0" i="0">
-                <a:solidFill>
-                  <a:srgbClr val="333333"/>
-                </a:solidFill>
-                <a:latin typeface="Calibri"/>
-              </a:rPr>
-              <a:t>Across the 4 Fields</a:t>
-            </a:r>
-          </a:p>
-          <a:p>
-            <a:pPr lvl="1">
-              <a:spcAft>
-                <a:spcPts val="1000"/>
-              </a:spcAft>
-            </a:pPr>
-            <a:r>
-              <a:rPr sz="1800" b="1" i="0">
-                <a:solidFill>
-                  <a:srgbClr val="6E2337"/>
-                </a:solidFill>
-                <a:latin typeface="Calibri"/>
-              </a:rPr>
-              <a:t>Communication</a:t>
-            </a:r>
-            <a:r>
-              <a:rPr sz="1800" b="0" i="0">
-                <a:solidFill>
-                  <a:srgbClr val="333333"/>
-                </a:solidFill>
-                <a:latin typeface="Calibri"/>
-              </a:rPr>
-              <a:t> — recycled paper stock, reduced ink use, digital-first campaigns</a:t>
-            </a:r>
-          </a:p>
-          <a:p>
-            <a:pPr lvl="1">
-              <a:spcAft>
-                <a:spcPts val="1000"/>
-              </a:spcAft>
-            </a:pPr>
-            <a:r>
-              <a:rPr sz="1800" b="1" i="0">
-                <a:solidFill>
-                  <a:srgbClr val="6E2337"/>
-                </a:solidFill>
-                <a:latin typeface="Calibri"/>
-              </a:rPr>
-              <a:t>Environmental</a:t>
-            </a:r>
-            <a:r>
-              <a:rPr sz="1800" b="0" i="0">
-                <a:solidFill>
-                  <a:srgbClr val="333333"/>
-                </a:solidFill>
-                <a:latin typeface="Calibri"/>
-              </a:rPr>
-              <a:t> — passive solar buildings, green roofs, reclaimed materials</a:t>
-            </a:r>
-          </a:p>
-          <a:p>
-            <a:pPr lvl="1">
-              <a:spcAft>
-                <a:spcPts val="1000"/>
-              </a:spcAft>
-            </a:pPr>
-            <a:r>
-              <a:rPr sz="1800" b="1" i="0">
-                <a:solidFill>
-                  <a:srgbClr val="6E2337"/>
-                </a:solidFill>
-                <a:latin typeface="Calibri"/>
-              </a:rPr>
-              <a:t>Industrial</a:t>
-            </a:r>
-            <a:r>
-              <a:rPr sz="1800" b="0" i="0">
-                <a:solidFill>
-                  <a:srgbClr val="333333"/>
-                </a:solidFill>
-                <a:latin typeface="Calibri"/>
-              </a:rPr>
-              <a:t> — biodegradable packaging, modular/repairable products</a:t>
-            </a:r>
-          </a:p>
-          <a:p>
-            <a:pPr lvl="1">
-              <a:spcAft>
-                <a:spcPts val="1000"/>
-              </a:spcAft>
-            </a:pPr>
-            <a:r>
-              <a:rPr sz="1800" b="1" i="0">
-                <a:solidFill>
-                  <a:srgbClr val="6E2337"/>
-                </a:solidFill>
-                <a:latin typeface="Calibri"/>
-              </a:rPr>
-              <a:t>Interaction</a:t>
-            </a:r>
-            <a:r>
-              <a:rPr sz="1800" b="0" i="0">
-                <a:solidFill>
-                  <a:srgbClr val="333333"/>
-                </a:solidFill>
-                <a:latin typeface="Calibri"/>
-              </a:rPr>
-              <a:t> — dark-mode UI to reduce energy use, low-carbon web design</a:t>
-            </a:r>
-          </a:p>
-        </p:txBody>
-      </p:sp>
-      <p:sp>
-        <p:nvSpPr>
-          <p:cNvPr id="4" name="Rectangle 3"/>
+          <p:cNvPr id="2" name="Rounded Rectangle 1"/>
           <p:cNvSpPr/>
           <p:nvPr/>
         </p:nvSpPr>
         <p:spPr>
           <a:xfrm>
-            <a:off x="548640" y="1234440"/>
-            <a:ext cx="1463040" cy="38100"/>
+            <a:off x="685800" y="502920"/>
+            <a:ext cx="3291840" cy="457200"/>
+          </a:xfrm>
+          <a:prstGeom prst="roundRect">
+            <a:avLst>
+              <a:gd name="adj" fmla="val 50000"/>
+            </a:avLst>
+          </a:prstGeom>
+          <a:solidFill>
+            <a:srgbClr val="7A2E43"/>
+          </a:solidFill>
+          <a:ln>
+            <a:noFill/>
+          </a:ln>
+          <a:effectLst/>
+        </p:spPr>
+        <p:style>
+          <a:lnRef idx="1">
+            <a:schemeClr val="accent1"/>
+          </a:lnRef>
+          <a:fillRef idx="3">
+            <a:schemeClr val="accent1"/>
+          </a:fillRef>
+          <a:effectRef idx="2">
+            <a:schemeClr val="accent1"/>
+          </a:effectRef>
+          <a:fontRef idx="minor">
+            <a:schemeClr val="lt1"/>
+          </a:fontRef>
+        </p:style>
+        <p:txBody>
+          <a:bodyPr rtlCol="0" anchor="ctr" wrap="none" lIns="50800" rIns="50800"/>
+          <a:lstStyle/>
+          <a:p>
+            <a:pPr algn="ctr"/>
+            <a:r>
+              <a:rPr sz="1100" b="1">
+                <a:solidFill>
+                  <a:srgbClr val="FFFFFF"/>
+                </a:solidFill>
+                <a:latin typeface="Calibri"/>
+              </a:rPr>
+              <a:t>TRENDS IN DESIGN</a:t>
+            </a:r>
+          </a:p>
+        </p:txBody>
+      </p:sp>
+      <p:sp>
+        <p:nvSpPr>
+          <p:cNvPr id="3" name="TextBox 2"/>
+          <p:cNvSpPr txBox="1"/>
+          <p:nvPr/>
+        </p:nvSpPr>
+        <p:spPr>
+          <a:xfrm>
+            <a:off x="685800" y="1051560"/>
+            <a:ext cx="10607040" cy="822960"/>
           </a:xfrm>
           <a:prstGeom prst="rect">
             <a:avLst/>
           </a:prstGeom>
+          <a:noFill/>
+        </p:spPr>
+        <p:txBody>
+          <a:bodyPr wrap="square" anchor="t">
+            <a:spAutoFit/>
+          </a:bodyPr>
+          <a:lstStyle/>
+          <a:p>
+            <a:pPr algn="l"/>
+            <a:r>
+              <a:rPr sz="2700" b="1" i="0">
+                <a:solidFill>
+                  <a:srgbClr val="2A1A1F"/>
+                </a:solidFill>
+                <a:latin typeface="Cambria"/>
+              </a:rPr>
+              <a:t>Sustainability &amp; Eco-Design</a:t>
+            </a:r>
+          </a:p>
+        </p:txBody>
+      </p:sp>
+      <p:sp>
+        <p:nvSpPr>
+          <p:cNvPr id="4" name="Rounded Rectangle 3"/>
+          <p:cNvSpPr/>
+          <p:nvPr/>
+        </p:nvSpPr>
+        <p:spPr>
+          <a:xfrm>
+            <a:off x="685800" y="1874519"/>
+            <a:ext cx="10607040" cy="4526280"/>
+          </a:xfrm>
+          <a:prstGeom prst="roundRect">
+            <a:avLst>
+              <a:gd name="adj" fmla="val 6000"/>
+            </a:avLst>
+          </a:prstGeom>
           <a:solidFill>
-            <a:srgbClr val="6E2337"/>
+            <a:srgbClr val="F1EAEC"/>
+          </a:solidFill>
+          <a:ln>
+            <a:noFill/>
+          </a:ln>
+          <a:effectLst/>
+        </p:spPr>
+        <p:style>
+          <a:lnRef idx="1">
+            <a:schemeClr val="accent1"/>
+          </a:lnRef>
+          <a:fillRef idx="3">
+            <a:schemeClr val="accent1"/>
+          </a:fillRef>
+          <a:effectRef idx="2">
+            <a:schemeClr val="accent1"/>
+          </a:effectRef>
+          <a:fontRef idx="minor">
+            <a:schemeClr val="lt1"/>
+          </a:fontRef>
+        </p:style>
+        <p:txBody>
+          <a:bodyPr rtlCol="0" anchor="ctr" lIns="330200" rIns="330200" tIns="254000" bIns="254000" wrap="square"/>
+          <a:lstStyle/>
+          <a:p>
+            <a:pPr algn="ctr" indent="-203200" marL="203200">
+              <a:spcAft>
+                <a:spcPts val="900"/>
+              </a:spcAft>
+              <a:buClr>
+                <a:srgbClr val="7A2E43"/>
+              </a:buClr>
+              <a:buSzPct val="90000"/>
+              <a:buFont typeface="Arial"/>
+              <a:buChar char="–"/>
+            </a:pPr>
+            <a:r>
+              <a:rPr sz="1350" b="0" i="0">
+                <a:solidFill>
+                  <a:srgbClr val="2A1A1F"/>
+                </a:solidFill>
+                <a:latin typeface="Calibri"/>
+              </a:rPr>
+              <a:t>A shift toward materials, processes and forms that minimise environmental impact — driven largely by </a:t>
+            </a:r>
+            <a:r>
+              <a:rPr sz="1350" b="1" i="0">
+                <a:solidFill>
+                  <a:srgbClr val="672738"/>
+                </a:solidFill>
+                <a:latin typeface="Calibri"/>
+              </a:rPr>
+              <a:t>environmental</a:t>
+            </a:r>
+            <a:r>
+              <a:rPr sz="1350" b="0" i="0">
+                <a:solidFill>
+                  <a:srgbClr val="2A1A1F"/>
+                </a:solidFill>
+                <a:latin typeface="Calibri"/>
+              </a:rPr>
+              <a:t> and </a:t>
+            </a:r>
+            <a:r>
+              <a:rPr sz="1350" b="1" i="0">
+                <a:solidFill>
+                  <a:srgbClr val="672738"/>
+                </a:solidFill>
+                <a:latin typeface="Calibri"/>
+              </a:rPr>
+              <a:t>social</a:t>
+            </a:r>
+            <a:r>
+              <a:rPr sz="1350" b="0" i="0">
+                <a:solidFill>
+                  <a:srgbClr val="2A1A1F"/>
+                </a:solidFill>
+                <a:latin typeface="Calibri"/>
+              </a:rPr>
+              <a:t> factors.</a:t>
+            </a:r>
+          </a:p>
+          <a:p>
+            <a:pPr indent="-203200" marL="203200">
+              <a:spcAft>
+                <a:spcPts val="900"/>
+              </a:spcAft>
+              <a:buClr>
+                <a:srgbClr val="7A2E43"/>
+              </a:buClr>
+              <a:buSzPct val="90000"/>
+              <a:buFont typeface="Arial"/>
+              <a:buChar char="–"/>
+            </a:pPr>
+            <a:r>
+              <a:rPr sz="1350" b="0" i="0">
+                <a:solidFill>
+                  <a:srgbClr val="2A1A1F"/>
+                </a:solidFill>
+                <a:latin typeface="Calibri"/>
+              </a:rPr>
+              <a:t>Across the 4 Fields</a:t>
+            </a:r>
+          </a:p>
+          <a:p>
+            <a:pPr indent="-203200" marL="203200">
+              <a:spcAft>
+                <a:spcPts val="900"/>
+              </a:spcAft>
+              <a:buClr>
+                <a:srgbClr val="7A2E43"/>
+              </a:buClr>
+              <a:buSzPct val="90000"/>
+              <a:buFont typeface="Arial"/>
+              <a:buChar char="–"/>
+            </a:pPr>
+            <a:r>
+              <a:rPr sz="1350" b="1" i="0">
+                <a:solidFill>
+                  <a:srgbClr val="672738"/>
+                </a:solidFill>
+                <a:latin typeface="Calibri"/>
+              </a:rPr>
+              <a:t>Communication</a:t>
+            </a:r>
+            <a:r>
+              <a:rPr sz="1350" b="0" i="0">
+                <a:solidFill>
+                  <a:srgbClr val="2A1A1F"/>
+                </a:solidFill>
+                <a:latin typeface="Calibri"/>
+              </a:rPr>
+              <a:t> — recycled paper stock, reduced ink use, digital-first campaigns</a:t>
+            </a:r>
+          </a:p>
+          <a:p>
+            <a:pPr indent="-203200" marL="203200">
+              <a:spcAft>
+                <a:spcPts val="900"/>
+              </a:spcAft>
+              <a:buClr>
+                <a:srgbClr val="7A2E43"/>
+              </a:buClr>
+              <a:buSzPct val="90000"/>
+              <a:buFont typeface="Arial"/>
+              <a:buChar char="–"/>
+            </a:pPr>
+            <a:r>
+              <a:rPr sz="1350" b="1" i="0">
+                <a:solidFill>
+                  <a:srgbClr val="672738"/>
+                </a:solidFill>
+                <a:latin typeface="Calibri"/>
+              </a:rPr>
+              <a:t>Environmental</a:t>
+            </a:r>
+            <a:r>
+              <a:rPr sz="1350" b="0" i="0">
+                <a:solidFill>
+                  <a:srgbClr val="2A1A1F"/>
+                </a:solidFill>
+                <a:latin typeface="Calibri"/>
+              </a:rPr>
+              <a:t> — passive solar buildings, green roofs, reclaimed materials</a:t>
+            </a:r>
+          </a:p>
+          <a:p>
+            <a:pPr indent="-203200" marL="203200">
+              <a:spcAft>
+                <a:spcPts val="900"/>
+              </a:spcAft>
+              <a:buClr>
+                <a:srgbClr val="7A2E43"/>
+              </a:buClr>
+              <a:buSzPct val="90000"/>
+              <a:buFont typeface="Arial"/>
+              <a:buChar char="–"/>
+            </a:pPr>
+            <a:r>
+              <a:rPr sz="1350" b="1" i="0">
+                <a:solidFill>
+                  <a:srgbClr val="672738"/>
+                </a:solidFill>
+                <a:latin typeface="Calibri"/>
+              </a:rPr>
+              <a:t>Industrial</a:t>
+            </a:r>
+            <a:r>
+              <a:rPr sz="1350" b="0" i="0">
+                <a:solidFill>
+                  <a:srgbClr val="2A1A1F"/>
+                </a:solidFill>
+                <a:latin typeface="Calibri"/>
+              </a:rPr>
+              <a:t> — biodegradable packaging, modular/repairable products</a:t>
+            </a:r>
+          </a:p>
+          <a:p>
+            <a:pPr indent="-203200" marL="203200">
+              <a:spcAft>
+                <a:spcPts val="900"/>
+              </a:spcAft>
+              <a:buClr>
+                <a:srgbClr val="7A2E43"/>
+              </a:buClr>
+              <a:buSzPct val="90000"/>
+              <a:buFont typeface="Arial"/>
+              <a:buChar char="–"/>
+            </a:pPr>
+            <a:r>
+              <a:rPr sz="1350" b="1" i="0">
+                <a:solidFill>
+                  <a:srgbClr val="672738"/>
+                </a:solidFill>
+                <a:latin typeface="Calibri"/>
+              </a:rPr>
+              <a:t>Interaction</a:t>
+            </a:r>
+            <a:r>
+              <a:rPr sz="1350" b="0" i="0">
+                <a:solidFill>
+                  <a:srgbClr val="2A1A1F"/>
+                </a:solidFill>
+                <a:latin typeface="Calibri"/>
+              </a:rPr>
+              <a:t> — dark-mode UI to reduce energy use, low-carbon web design</a:t>
+            </a:r>
+          </a:p>
+        </p:txBody>
+      </p:sp>
+      <p:sp>
+        <p:nvSpPr>
+          <p:cNvPr id="5" name="Oval 4"/>
+          <p:cNvSpPr/>
+          <p:nvPr/>
+        </p:nvSpPr>
+        <p:spPr>
+          <a:xfrm>
+            <a:off x="10881360" y="5943600"/>
+            <a:ext cx="1005840" cy="1005840"/>
+          </a:xfrm>
+          <a:prstGeom prst="ellipse">
+            <a:avLst/>
+          </a:prstGeom>
+          <a:solidFill>
+            <a:srgbClr val="EDCBD3"/>
           </a:solidFill>
           <a:ln>
             <a:noFill/>
@@ -5861,6 +8170,14 @@
 <file path=ppt/slides/slide6.xml><?xml version="1.0" encoding="utf-8"?>
 <p:sld xmlns:a="http://schemas.openxmlformats.org/drawingml/2006/main" xmlns:p="http://schemas.openxmlformats.org/presentationml/2006/main" xmlns:r="http://schemas.openxmlformats.org/officeDocument/2006/relationships">
   <p:cSld>
+    <p:bg>
+      <p:bgPr>
+        <a:solidFill>
+          <a:srgbClr val="FBF5F1"/>
+        </a:solidFill>
+        <a:effectLst/>
+      </p:bgPr>
+    </p:bg>
     <p:spTree>
       <p:nvGrpSpPr>
         <p:cNvPr id="1" name=""/>
@@ -5870,279 +8187,444 @@
       <p:grpSpPr/>
       <p:sp>
         <p:nvSpPr>
-          <p:cNvPr id="2" name="Title 1"/>
-          <p:cNvSpPr>
-            <a:spLocks noGrp="1"/>
-          </p:cNvSpPr>
-          <p:nvPr>
-            <p:ph type="title"/>
-          </p:nvPr>
-        </p:nvSpPr>
-        <p:spPr/>
-        <p:txBody>
-          <a:bodyPr wrap="square"/>
-          <a:lstStyle/>
-          <a:p>
-            <a:r>
-              <a:rPr sz="3200" b="1">
-                <a:solidFill>
-                  <a:srgbClr val="6E2337"/>
-                </a:solidFill>
-                <a:latin typeface="Cambria"/>
-              </a:rPr>
-              <a:t>Digital &amp; AI-Driven Design</a:t>
-            </a:r>
-          </a:p>
-        </p:txBody>
-      </p:sp>
-      <p:sp>
-        <p:nvSpPr>
-          <p:cNvPr id="3" name="Content Placeholder 2"/>
-          <p:cNvSpPr>
-            <a:spLocks noGrp="1"/>
-          </p:cNvSpPr>
-          <p:nvPr>
-            <p:ph idx="1" sz="half"/>
-          </p:nvPr>
-        </p:nvSpPr>
-        <p:spPr/>
-        <p:txBody>
-          <a:bodyPr wrap="square"/>
-          <a:lstStyle/>
-          <a:p>
-            <a:pPr>
-              <a:spcAft>
-                <a:spcPts val="1000"/>
-              </a:spcAft>
-            </a:pPr>
-            <a:r>
-              <a:rPr sz="2000" b="0" i="0">
-                <a:solidFill>
-                  <a:srgbClr val="333333"/>
-                </a:solidFill>
-                <a:latin typeface="Calibri"/>
-              </a:rPr>
-              <a:t>The rise of AI tools, generative design and immersive technology — driven by </a:t>
-            </a:r>
-            <a:r>
-              <a:rPr sz="2000" b="1" i="0">
-                <a:solidFill>
-                  <a:srgbClr val="6E2337"/>
-                </a:solidFill>
-                <a:latin typeface="Calibri"/>
-              </a:rPr>
-              <a:t>technological</a:t>
-            </a:r>
-            <a:r>
-              <a:rPr sz="2000" b="0" i="0">
-                <a:solidFill>
-                  <a:srgbClr val="333333"/>
-                </a:solidFill>
-                <a:latin typeface="Calibri"/>
-              </a:rPr>
-              <a:t> factors and shifting audience expectations.</a:t>
-            </a:r>
-          </a:p>
-          <a:p>
-            <a:pPr>
-              <a:spcAft>
-                <a:spcPts val="1000"/>
-              </a:spcAft>
-            </a:pPr>
-            <a:r>
-              <a:rPr sz="2000" b="0" i="0">
-                <a:solidFill>
-                  <a:srgbClr val="333333"/>
-                </a:solidFill>
-                <a:latin typeface="Calibri"/>
-              </a:rPr>
-              <a:t>Across the 4 Fields</a:t>
-            </a:r>
-          </a:p>
-          <a:p>
-            <a:pPr lvl="1">
-              <a:spcAft>
-                <a:spcPts val="1000"/>
-              </a:spcAft>
-            </a:pPr>
-            <a:r>
-              <a:rPr sz="1800" b="1" i="0">
-                <a:solidFill>
-                  <a:srgbClr val="6E2337"/>
-                </a:solidFill>
-                <a:latin typeface="Calibri"/>
-              </a:rPr>
-              <a:t>Communication</a:t>
-            </a:r>
-            <a:r>
-              <a:rPr sz="1800" b="0" i="0">
-                <a:solidFill>
-                  <a:srgbClr val="333333"/>
-                </a:solidFill>
-                <a:latin typeface="Calibri"/>
-              </a:rPr>
-              <a:t> — AI-generated imagery, motion graphics, personalised content</a:t>
-            </a:r>
-          </a:p>
-          <a:p>
-            <a:pPr lvl="1">
-              <a:spcAft>
-                <a:spcPts val="1000"/>
-              </a:spcAft>
-            </a:pPr>
-            <a:r>
-              <a:rPr sz="1800" b="1" i="0">
-                <a:solidFill>
-                  <a:srgbClr val="6E2337"/>
-                </a:solidFill>
-                <a:latin typeface="Calibri"/>
-              </a:rPr>
-              <a:t>Environmental</a:t>
-            </a:r>
-            <a:r>
-              <a:rPr sz="1800" b="0" i="0">
-                <a:solidFill>
-                  <a:srgbClr val="333333"/>
-                </a:solidFill>
-                <a:latin typeface="Calibri"/>
-              </a:rPr>
-              <a:t> — parametric/generative architectural forms</a:t>
-            </a:r>
-          </a:p>
-          <a:p>
-            <a:pPr lvl="1">
-              <a:spcAft>
-                <a:spcPts val="1000"/>
-              </a:spcAft>
-            </a:pPr>
-            <a:r>
-              <a:rPr sz="1800" b="1" i="0">
-                <a:solidFill>
-                  <a:srgbClr val="6E2337"/>
-                </a:solidFill>
-                <a:latin typeface="Calibri"/>
-              </a:rPr>
-              <a:t>Industrial</a:t>
-            </a:r>
-            <a:r>
-              <a:rPr sz="1800" b="0" i="0">
-                <a:solidFill>
-                  <a:srgbClr val="333333"/>
-                </a:solidFill>
-                <a:latin typeface="Calibri"/>
-              </a:rPr>
-              <a:t> — generative product design optimised by software</a:t>
-            </a:r>
-          </a:p>
-          <a:p>
-            <a:pPr lvl="1">
-              <a:spcAft>
-                <a:spcPts val="1000"/>
-              </a:spcAft>
-            </a:pPr>
-            <a:r>
-              <a:rPr sz="1800" b="1" i="0">
-                <a:solidFill>
-                  <a:srgbClr val="6E2337"/>
-                </a:solidFill>
-                <a:latin typeface="Calibri"/>
-              </a:rPr>
-              <a:t>Interaction</a:t>
-            </a:r>
-            <a:r>
-              <a:rPr sz="1800" b="0" i="0">
-                <a:solidFill>
-                  <a:srgbClr val="333333"/>
-                </a:solidFill>
-                <a:latin typeface="Calibri"/>
-              </a:rPr>
-              <a:t> — AR/VR interfaces, voice UI, adaptive apps</a:t>
-            </a:r>
-          </a:p>
-        </p:txBody>
-      </p:sp>
-      <p:sp>
-        <p:nvSpPr>
-          <p:cNvPr id="4" name="Content Placeholder 3"/>
-          <p:cNvSpPr>
-            <a:spLocks noGrp="1"/>
-          </p:cNvSpPr>
-          <p:nvPr>
-            <p:ph idx="2" sz="half"/>
-          </p:nvPr>
-        </p:nvSpPr>
-        <p:spPr/>
-        <p:txBody>
-          <a:bodyPr wrap="square"/>
-          <a:lstStyle/>
-          <a:p>
-            <a:pPr>
-              <a:spcAft>
-                <a:spcPts val="1000"/>
-              </a:spcAft>
-            </a:pPr>
-            <a:r>
-              <a:rPr sz="2000" b="0" i="0">
-                <a:solidFill>
-                  <a:srgbClr val="333333"/>
-                </a:solidFill>
-                <a:latin typeface="Calibri"/>
-              </a:rPr>
-              <a:t>Analysis Tip</a:t>
-            </a:r>
-          </a:p>
-          <a:p>
-            <a:pPr>
-              <a:spcAft>
-                <a:spcPts val="1000"/>
-              </a:spcAft>
-            </a:pPr>
-            <a:r>
-              <a:rPr sz="2000" b="0" i="0">
-                <a:solidFill>
-                  <a:srgbClr val="333333"/>
-                </a:solidFill>
-                <a:latin typeface="Calibri"/>
-              </a:rPr>
-              <a:t>When discussing this trend in the exam, name the </a:t>
-            </a:r>
-            <a:r>
-              <a:rPr sz="2000" b="1" i="0">
-                <a:solidFill>
-                  <a:srgbClr val="6E2337"/>
-                </a:solidFill>
-                <a:latin typeface="Calibri"/>
-              </a:rPr>
-              <a:t>specific technology</a:t>
-            </a:r>
-            <a:r>
-              <a:rPr sz="2000" b="0" i="0">
-                <a:solidFill>
-                  <a:srgbClr val="333333"/>
-                </a:solidFill>
-                <a:latin typeface="Calibri"/>
-              </a:rPr>
-              <a:t> (e.g. generative AI, parametric modelling) rather than saying "modern design" — vague language earns fewer marks.</a:t>
-            </a:r>
-          </a:p>
-        </p:txBody>
-      </p:sp>
-      <p:sp>
-        <p:nvSpPr>
-          <p:cNvPr id="5" name="Rectangle 4"/>
+          <p:cNvPr id="2" name="Rounded Rectangle 1"/>
           <p:cNvSpPr/>
           <p:nvPr/>
         </p:nvSpPr>
         <p:spPr>
           <a:xfrm>
-            <a:off x="548640" y="1234440"/>
-            <a:ext cx="1463040" cy="38100"/>
+            <a:off x="685800" y="502920"/>
+            <a:ext cx="3291840" cy="457200"/>
+          </a:xfrm>
+          <a:prstGeom prst="roundRect">
+            <a:avLst>
+              <a:gd name="adj" fmla="val 50000"/>
+            </a:avLst>
+          </a:prstGeom>
+          <a:solidFill>
+            <a:srgbClr val="7A2E43"/>
+          </a:solidFill>
+          <a:ln>
+            <a:noFill/>
+          </a:ln>
+          <a:effectLst/>
+        </p:spPr>
+        <p:style>
+          <a:lnRef idx="1">
+            <a:schemeClr val="accent1"/>
+          </a:lnRef>
+          <a:fillRef idx="3">
+            <a:schemeClr val="accent1"/>
+          </a:fillRef>
+          <a:effectRef idx="2">
+            <a:schemeClr val="accent1"/>
+          </a:effectRef>
+          <a:fontRef idx="minor">
+            <a:schemeClr val="lt1"/>
+          </a:fontRef>
+        </p:style>
+        <p:txBody>
+          <a:bodyPr rtlCol="0" anchor="ctr" wrap="none" lIns="50800" rIns="50800"/>
+          <a:lstStyle/>
+          <a:p>
+            <a:pPr algn="ctr"/>
+            <a:r>
+              <a:rPr sz="1100" b="1">
+                <a:solidFill>
+                  <a:srgbClr val="FFFFFF"/>
+                </a:solidFill>
+                <a:latin typeface="Calibri"/>
+              </a:rPr>
+              <a:t>TRENDS IN DESIGN</a:t>
+            </a:r>
+          </a:p>
+        </p:txBody>
+      </p:sp>
+      <p:sp>
+        <p:nvSpPr>
+          <p:cNvPr id="3" name="TextBox 2"/>
+          <p:cNvSpPr txBox="1"/>
+          <p:nvPr/>
+        </p:nvSpPr>
+        <p:spPr>
+          <a:xfrm>
+            <a:off x="685800" y="1051560"/>
+            <a:ext cx="10607040" cy="822960"/>
           </a:xfrm>
           <a:prstGeom prst="rect">
             <a:avLst/>
           </a:prstGeom>
+          <a:noFill/>
+        </p:spPr>
+        <p:txBody>
+          <a:bodyPr wrap="square" anchor="t">
+            <a:spAutoFit/>
+          </a:bodyPr>
+          <a:lstStyle/>
+          <a:p>
+            <a:pPr algn="l"/>
+            <a:r>
+              <a:rPr sz="2700" b="1" i="0">
+                <a:solidFill>
+                  <a:srgbClr val="2A1A1F"/>
+                </a:solidFill>
+                <a:latin typeface="Cambria"/>
+              </a:rPr>
+              <a:t>Digital &amp; AI-Driven Design</a:t>
+            </a:r>
+          </a:p>
+        </p:txBody>
+      </p:sp>
+      <p:sp>
+        <p:nvSpPr>
+          <p:cNvPr id="4" name="Rounded Rectangle 3"/>
+          <p:cNvSpPr/>
+          <p:nvPr/>
+        </p:nvSpPr>
+        <p:spPr>
+          <a:xfrm>
+            <a:off x="685800" y="1874519"/>
+            <a:ext cx="5166360" cy="4526280"/>
+          </a:xfrm>
+          <a:prstGeom prst="roundRect">
+            <a:avLst>
+              <a:gd name="adj" fmla="val 6000"/>
+            </a:avLst>
+          </a:prstGeom>
           <a:solidFill>
-            <a:srgbClr val="6E2337"/>
+            <a:srgbClr val="EFE5E8"/>
+          </a:solidFill>
+          <a:ln>
+            <a:noFill/>
+          </a:ln>
+          <a:effectLst/>
+        </p:spPr>
+        <p:style>
+          <a:lnRef idx="1">
+            <a:schemeClr val="accent1"/>
+          </a:lnRef>
+          <a:fillRef idx="3">
+            <a:schemeClr val="accent1"/>
+          </a:fillRef>
+          <a:effectRef idx="2">
+            <a:schemeClr val="accent1"/>
+          </a:effectRef>
+          <a:fontRef idx="minor">
+            <a:schemeClr val="lt1"/>
+          </a:fontRef>
+        </p:style>
+        <p:txBody>
+          <a:bodyPr rtlCol="0" anchor="ctr" lIns="279400" rIns="279400" tIns="228600" bIns="228600" wrap="square"/>
+          <a:lstStyle/>
+          <a:p>
+            <a:pPr algn="ctr" indent="-203200" marL="203200">
+              <a:spcAft>
+                <a:spcPts val="900"/>
+              </a:spcAft>
+              <a:buClr>
+                <a:srgbClr val="7A2E43"/>
+              </a:buClr>
+              <a:buSzPct val="90000"/>
+              <a:buFont typeface="Arial"/>
+              <a:buChar char="●"/>
+            </a:pPr>
+            <a:r>
+              <a:rPr sz="1400" b="0" i="0">
+                <a:solidFill>
+                  <a:srgbClr val="2A1A1F"/>
+                </a:solidFill>
+                <a:latin typeface="Calibri"/>
+              </a:rPr>
+              <a:t>The rise of AI tools, generative design and immersive technology — driven by </a:t>
+            </a:r>
+            <a:r>
+              <a:rPr sz="1400" b="1" i="0">
+                <a:solidFill>
+                  <a:srgbClr val="672738"/>
+                </a:solidFill>
+                <a:latin typeface="Calibri"/>
+              </a:rPr>
+              <a:t>technological</a:t>
+            </a:r>
+            <a:r>
+              <a:rPr sz="1400" b="0" i="0">
+                <a:solidFill>
+                  <a:srgbClr val="2A1A1F"/>
+                </a:solidFill>
+                <a:latin typeface="Calibri"/>
+              </a:rPr>
+              <a:t> factors and shifting audience expectations.</a:t>
+            </a:r>
+          </a:p>
+          <a:p>
+            <a:pPr indent="-203200" marL="203200">
+              <a:spcAft>
+                <a:spcPts val="900"/>
+              </a:spcAft>
+              <a:buClr>
+                <a:srgbClr val="7A2E43"/>
+              </a:buClr>
+              <a:buSzPct val="90000"/>
+              <a:buFont typeface="Arial"/>
+              <a:buChar char="●"/>
+            </a:pPr>
+            <a:r>
+              <a:rPr sz="1400" b="0" i="0">
+                <a:solidFill>
+                  <a:srgbClr val="2A1A1F"/>
+                </a:solidFill>
+                <a:latin typeface="Calibri"/>
+              </a:rPr>
+              <a:t>Across the 4 Fields</a:t>
+            </a:r>
+          </a:p>
+          <a:p>
+            <a:pPr indent="-203200" marL="203200">
+              <a:spcAft>
+                <a:spcPts val="900"/>
+              </a:spcAft>
+              <a:buClr>
+                <a:srgbClr val="7A2E43"/>
+              </a:buClr>
+              <a:buSzPct val="90000"/>
+              <a:buFont typeface="Arial"/>
+              <a:buChar char="–"/>
+            </a:pPr>
+            <a:r>
+              <a:rPr sz="1250" b="1" i="0">
+                <a:solidFill>
+                  <a:srgbClr val="672738"/>
+                </a:solidFill>
+                <a:latin typeface="Calibri"/>
+              </a:rPr>
+              <a:t>Communication</a:t>
+            </a:r>
+            <a:r>
+              <a:rPr sz="1250" b="0" i="0">
+                <a:solidFill>
+                  <a:srgbClr val="2A1A1F"/>
+                </a:solidFill>
+                <a:latin typeface="Calibri"/>
+              </a:rPr>
+              <a:t> — AI-generated imagery, motion graphics, personalised content</a:t>
+            </a:r>
+          </a:p>
+          <a:p>
+            <a:pPr indent="-203200" marL="203200">
+              <a:spcAft>
+                <a:spcPts val="900"/>
+              </a:spcAft>
+              <a:buClr>
+                <a:srgbClr val="7A2E43"/>
+              </a:buClr>
+              <a:buSzPct val="90000"/>
+              <a:buFont typeface="Arial"/>
+              <a:buChar char="–"/>
+            </a:pPr>
+            <a:r>
+              <a:rPr sz="1250" b="1" i="0">
+                <a:solidFill>
+                  <a:srgbClr val="672738"/>
+                </a:solidFill>
+                <a:latin typeface="Calibri"/>
+              </a:rPr>
+              <a:t>Environmental</a:t>
+            </a:r>
+            <a:r>
+              <a:rPr sz="1250" b="0" i="0">
+                <a:solidFill>
+                  <a:srgbClr val="2A1A1F"/>
+                </a:solidFill>
+                <a:latin typeface="Calibri"/>
+              </a:rPr>
+              <a:t> — parametric/generative architectural forms</a:t>
+            </a:r>
+          </a:p>
+          <a:p>
+            <a:pPr indent="-203200" marL="203200">
+              <a:spcAft>
+                <a:spcPts val="900"/>
+              </a:spcAft>
+              <a:buClr>
+                <a:srgbClr val="7A2E43"/>
+              </a:buClr>
+              <a:buSzPct val="90000"/>
+              <a:buFont typeface="Arial"/>
+              <a:buChar char="–"/>
+            </a:pPr>
+            <a:r>
+              <a:rPr sz="1250" b="1" i="0">
+                <a:solidFill>
+                  <a:srgbClr val="672738"/>
+                </a:solidFill>
+                <a:latin typeface="Calibri"/>
+              </a:rPr>
+              <a:t>Industrial</a:t>
+            </a:r>
+            <a:r>
+              <a:rPr sz="1250" b="0" i="0">
+                <a:solidFill>
+                  <a:srgbClr val="2A1A1F"/>
+                </a:solidFill>
+                <a:latin typeface="Calibri"/>
+              </a:rPr>
+              <a:t> — generative product design optimised by software</a:t>
+            </a:r>
+          </a:p>
+          <a:p>
+            <a:pPr indent="-203200" marL="203200">
+              <a:spcAft>
+                <a:spcPts val="900"/>
+              </a:spcAft>
+              <a:buClr>
+                <a:srgbClr val="7A2E43"/>
+              </a:buClr>
+              <a:buSzPct val="90000"/>
+              <a:buFont typeface="Arial"/>
+              <a:buChar char="–"/>
+            </a:pPr>
+            <a:r>
+              <a:rPr sz="1250" b="1" i="0">
+                <a:solidFill>
+                  <a:srgbClr val="672738"/>
+                </a:solidFill>
+                <a:latin typeface="Calibri"/>
+              </a:rPr>
+              <a:t>Interaction</a:t>
+            </a:r>
+            <a:r>
+              <a:rPr sz="1250" b="0" i="0">
+                <a:solidFill>
+                  <a:srgbClr val="2A1A1F"/>
+                </a:solidFill>
+                <a:latin typeface="Calibri"/>
+              </a:rPr>
+              <a:t> — AR/VR interfaces, voice UI, adaptive apps</a:t>
+            </a:r>
+          </a:p>
+        </p:txBody>
+      </p:sp>
+      <p:sp>
+        <p:nvSpPr>
+          <p:cNvPr id="5" name="Rounded Rectangle 4"/>
+          <p:cNvSpPr/>
+          <p:nvPr/>
+        </p:nvSpPr>
+        <p:spPr>
+          <a:xfrm>
+            <a:off x="6080760" y="1874519"/>
+            <a:ext cx="5166360" cy="4526280"/>
+          </a:xfrm>
+          <a:prstGeom prst="roundRect">
+            <a:avLst>
+              <a:gd name="adj" fmla="val 6000"/>
+            </a:avLst>
+          </a:prstGeom>
+          <a:solidFill>
+            <a:srgbClr val="F4DEE3"/>
+          </a:solidFill>
+          <a:ln>
+            <a:noFill/>
+          </a:ln>
+          <a:effectLst/>
+        </p:spPr>
+        <p:style>
+          <a:lnRef idx="1">
+            <a:schemeClr val="accent1"/>
+          </a:lnRef>
+          <a:fillRef idx="3">
+            <a:schemeClr val="accent1"/>
+          </a:fillRef>
+          <a:effectRef idx="2">
+            <a:schemeClr val="accent1"/>
+          </a:effectRef>
+          <a:fontRef idx="minor">
+            <a:schemeClr val="lt1"/>
+          </a:fontRef>
+        </p:style>
+        <p:txBody>
+          <a:bodyPr rtlCol="0" anchor="ctr" lIns="279400" rIns="279400" tIns="228600" bIns="228600" wrap="square"/>
+          <a:lstStyle/>
+          <a:p>
+            <a:pPr algn="ctr" indent="-203200" marL="203200">
+              <a:spcAft>
+                <a:spcPts val="900"/>
+              </a:spcAft>
+              <a:buClr>
+                <a:srgbClr val="D98C9E"/>
+              </a:buClr>
+              <a:buSzPct val="90000"/>
+              <a:buFont typeface="Arial"/>
+              <a:buChar char="●"/>
+            </a:pPr>
+            <a:r>
+              <a:rPr sz="1400" b="0" i="0">
+                <a:solidFill>
+                  <a:srgbClr val="2A1A1F"/>
+                </a:solidFill>
+                <a:latin typeface="Calibri"/>
+              </a:rPr>
+              <a:t>Analysis Tip</a:t>
+            </a:r>
+          </a:p>
+          <a:p>
+            <a:pPr indent="-203200" marL="203200">
+              <a:spcAft>
+                <a:spcPts val="900"/>
+              </a:spcAft>
+              <a:buClr>
+                <a:srgbClr val="D98C9E"/>
+              </a:buClr>
+              <a:buSzPct val="90000"/>
+              <a:buFont typeface="Arial"/>
+              <a:buChar char="●"/>
+            </a:pPr>
+            <a:r>
+              <a:rPr sz="1400" b="0" i="0">
+                <a:solidFill>
+                  <a:srgbClr val="2A1A1F"/>
+                </a:solidFill>
+                <a:latin typeface="Calibri"/>
+              </a:rPr>
+              <a:t>When discussing this trend in the exam, name the </a:t>
+            </a:r>
+            <a:r>
+              <a:rPr sz="1400" b="1" i="0">
+                <a:solidFill>
+                  <a:srgbClr val="B87786"/>
+                </a:solidFill>
+                <a:latin typeface="Calibri"/>
+              </a:rPr>
+              <a:t>specific technology</a:t>
+            </a:r>
+            <a:r>
+              <a:rPr sz="1400" b="0" i="0">
+                <a:solidFill>
+                  <a:srgbClr val="2A1A1F"/>
+                </a:solidFill>
+                <a:latin typeface="Calibri"/>
+              </a:rPr>
+              <a:t> (e.g. generative AI, parametric modelling) rather than saying "modern design" — vague language earns fewer marks.</a:t>
+            </a:r>
+          </a:p>
+        </p:txBody>
+      </p:sp>
+      <p:sp>
+        <p:nvSpPr>
+          <p:cNvPr id="6" name="Oval 5"/>
+          <p:cNvSpPr/>
+          <p:nvPr/>
+        </p:nvSpPr>
+        <p:spPr>
+          <a:xfrm>
+            <a:off x="5532120" y="3840480"/>
+            <a:ext cx="685800" cy="685800"/>
+          </a:xfrm>
+          <a:prstGeom prst="ellipse">
+            <a:avLst/>
+          </a:prstGeom>
+          <a:solidFill>
+            <a:srgbClr val="D6A24A"/>
           </a:solidFill>
           <a:ln>
             <a:noFill/>
@@ -6182,6 +8664,14 @@
 <file path=ppt/slides/slide7.xml><?xml version="1.0" encoding="utf-8"?>
 <p:sld xmlns:a="http://schemas.openxmlformats.org/drawingml/2006/main" xmlns:p="http://schemas.openxmlformats.org/presentationml/2006/main" xmlns:r="http://schemas.openxmlformats.org/officeDocument/2006/relationships">
   <p:cSld>
+    <p:bg>
+      <p:bgPr>
+        <a:solidFill>
+          <a:srgbClr val="FBF5F1"/>
+        </a:solidFill>
+        <a:effectLst/>
+      </p:bgPr>
+    </p:bg>
     <p:spTree>
       <p:nvGrpSpPr>
         <p:cNvPr id="1" name=""/>
@@ -6191,297 +8681,462 @@
       <p:grpSpPr/>
       <p:sp>
         <p:nvSpPr>
-          <p:cNvPr id="2" name="Title 1"/>
-          <p:cNvSpPr>
-            <a:spLocks noGrp="1"/>
-          </p:cNvSpPr>
-          <p:nvPr>
-            <p:ph type="title"/>
-          </p:nvPr>
-        </p:nvSpPr>
-        <p:spPr/>
-        <p:txBody>
-          <a:bodyPr wrap="square"/>
-          <a:lstStyle/>
-          <a:p>
-            <a:r>
-              <a:rPr sz="3200" b="1">
-                <a:solidFill>
-                  <a:srgbClr val="6E2337"/>
-                </a:solidFill>
-                <a:latin typeface="Cambria"/>
-              </a:rPr>
-              <a:t>Nostalgia &amp; Retro Revival</a:t>
-            </a:r>
-          </a:p>
-        </p:txBody>
-      </p:sp>
-      <p:sp>
-        <p:nvSpPr>
-          <p:cNvPr id="3" name="Content Placeholder 2"/>
-          <p:cNvSpPr>
-            <a:spLocks noGrp="1"/>
-          </p:cNvSpPr>
-          <p:nvPr>
-            <p:ph idx="1" sz="half"/>
-          </p:nvPr>
-        </p:nvSpPr>
-        <p:spPr/>
-        <p:txBody>
-          <a:bodyPr wrap="square"/>
-          <a:lstStyle/>
-          <a:p>
-            <a:pPr>
-              <a:spcAft>
-                <a:spcPts val="1000"/>
-              </a:spcAft>
-            </a:pPr>
-            <a:r>
-              <a:rPr sz="2000" b="0" i="0">
-                <a:solidFill>
-                  <a:srgbClr val="333333"/>
-                </a:solidFill>
-                <a:latin typeface="Calibri"/>
-              </a:rPr>
-              <a:t>A return to visual styles from past decades — driven by </a:t>
-            </a:r>
-            <a:r>
-              <a:rPr sz="2000" b="1" i="0">
-                <a:solidFill>
-                  <a:srgbClr val="6E2337"/>
-                </a:solidFill>
-                <a:latin typeface="Calibri"/>
-              </a:rPr>
-              <a:t>cultural</a:t>
-            </a:r>
-            <a:r>
-              <a:rPr sz="2000" b="0" i="0">
-                <a:solidFill>
-                  <a:srgbClr val="333333"/>
-                </a:solidFill>
-                <a:latin typeface="Calibri"/>
-              </a:rPr>
-              <a:t> and </a:t>
-            </a:r>
-            <a:r>
-              <a:rPr sz="2000" b="1" i="0">
-                <a:solidFill>
-                  <a:srgbClr val="6E2337"/>
-                </a:solidFill>
-                <a:latin typeface="Calibri"/>
-              </a:rPr>
-              <a:t>social</a:t>
-            </a:r>
-            <a:r>
-              <a:rPr sz="2000" b="0" i="0">
-                <a:solidFill>
-                  <a:srgbClr val="333333"/>
-                </a:solidFill>
-                <a:latin typeface="Calibri"/>
-              </a:rPr>
-              <a:t> factors such as comfort-seeking during uncertain times.</a:t>
-            </a:r>
-          </a:p>
-          <a:p>
-            <a:pPr>
-              <a:spcAft>
-                <a:spcPts val="1000"/>
-              </a:spcAft>
-            </a:pPr>
-            <a:r>
-              <a:rPr sz="2000" b="0" i="0">
-                <a:solidFill>
-                  <a:srgbClr val="333333"/>
-                </a:solidFill>
-                <a:latin typeface="Calibri"/>
-              </a:rPr>
-              <a:t>Across the 4 Fields</a:t>
-            </a:r>
-          </a:p>
-          <a:p>
-            <a:pPr lvl="1">
-              <a:spcAft>
-                <a:spcPts val="1000"/>
-              </a:spcAft>
-            </a:pPr>
-            <a:r>
-              <a:rPr sz="1800" b="1" i="0">
-                <a:solidFill>
-                  <a:srgbClr val="6E2337"/>
-                </a:solidFill>
-                <a:latin typeface="Calibri"/>
-              </a:rPr>
-              <a:t>Communication</a:t>
-            </a:r>
-            <a:r>
-              <a:rPr sz="1800" b="0" i="0">
-                <a:solidFill>
-                  <a:srgbClr val="333333"/>
-                </a:solidFill>
-                <a:latin typeface="Calibri"/>
-              </a:rPr>
-              <a:t> — 90s/Y2K typography and colour palettes returning in branding</a:t>
-            </a:r>
-          </a:p>
-          <a:p>
-            <a:pPr lvl="1">
-              <a:spcAft>
-                <a:spcPts val="1000"/>
-              </a:spcAft>
-            </a:pPr>
-            <a:r>
-              <a:rPr sz="1800" b="1" i="0">
-                <a:solidFill>
-                  <a:srgbClr val="6E2337"/>
-                </a:solidFill>
-                <a:latin typeface="Calibri"/>
-              </a:rPr>
-              <a:t>Environmental</a:t>
-            </a:r>
-            <a:r>
-              <a:rPr sz="1800" b="0" i="0">
-                <a:solidFill>
-                  <a:srgbClr val="333333"/>
-                </a:solidFill>
-                <a:latin typeface="Calibri"/>
-              </a:rPr>
-              <a:t> — mid-century modern interiors revived</a:t>
-            </a:r>
-          </a:p>
-          <a:p>
-            <a:pPr lvl="1">
-              <a:spcAft>
-                <a:spcPts val="1000"/>
-              </a:spcAft>
-            </a:pPr>
-            <a:r>
-              <a:rPr sz="1800" b="1" i="0">
-                <a:solidFill>
-                  <a:srgbClr val="6E2337"/>
-                </a:solidFill>
-                <a:latin typeface="Calibri"/>
-              </a:rPr>
-              <a:t>Industrial</a:t>
-            </a:r>
-            <a:r>
-              <a:rPr sz="1800" b="0" i="0">
-                <a:solidFill>
-                  <a:srgbClr val="333333"/>
-                </a:solidFill>
-                <a:latin typeface="Calibri"/>
-              </a:rPr>
-              <a:t> — retro-styled appliances and vehicles</a:t>
-            </a:r>
-          </a:p>
-          <a:p>
-            <a:pPr lvl="1">
-              <a:spcAft>
-                <a:spcPts val="1000"/>
-              </a:spcAft>
-            </a:pPr>
-            <a:r>
-              <a:rPr sz="1800" b="1" i="0">
-                <a:solidFill>
-                  <a:srgbClr val="6E2337"/>
-                </a:solidFill>
-                <a:latin typeface="Calibri"/>
-              </a:rPr>
-              <a:t>Interaction</a:t>
-            </a:r>
-            <a:r>
-              <a:rPr sz="1800" b="0" i="0">
-                <a:solidFill>
-                  <a:srgbClr val="333333"/>
-                </a:solidFill>
-                <a:latin typeface="Calibri"/>
-              </a:rPr>
-              <a:t> — skeuomorphic UI elements referencing physical objects</a:t>
-            </a:r>
-          </a:p>
-        </p:txBody>
-      </p:sp>
-      <p:sp>
-        <p:nvSpPr>
-          <p:cNvPr id="4" name="Content Placeholder 3"/>
-          <p:cNvSpPr>
-            <a:spLocks noGrp="1"/>
-          </p:cNvSpPr>
-          <p:nvPr>
-            <p:ph idx="2" sz="half"/>
-          </p:nvPr>
-        </p:nvSpPr>
-        <p:spPr/>
-        <p:txBody>
-          <a:bodyPr wrap="square"/>
-          <a:lstStyle/>
-          <a:p>
-            <a:pPr>
-              <a:spcAft>
-                <a:spcPts val="1000"/>
-              </a:spcAft>
-            </a:pPr>
-            <a:r>
-              <a:rPr sz="2000" b="0" i="0">
-                <a:solidFill>
-                  <a:srgbClr val="333333"/>
-                </a:solidFill>
-                <a:latin typeface="Calibri"/>
-              </a:rPr>
-              <a:t>Trend Cycles</a:t>
-            </a:r>
-          </a:p>
-          <a:p>
-            <a:pPr>
-              <a:spcAft>
-                <a:spcPts val="1000"/>
-              </a:spcAft>
-            </a:pPr>
-            <a:r>
-              <a:rPr sz="2000" b="0" i="0">
-                <a:solidFill>
-                  <a:srgbClr val="333333"/>
-                </a:solidFill>
-                <a:latin typeface="Calibri"/>
-              </a:rPr>
-              <a:t>Trends are often </a:t>
-            </a:r>
-            <a:r>
-              <a:rPr sz="2000" b="1" i="0">
-                <a:solidFill>
-                  <a:srgbClr val="6E2337"/>
-                </a:solidFill>
-                <a:latin typeface="Calibri"/>
-              </a:rPr>
-              <a:t>cyclical</a:t>
-            </a:r>
-            <a:r>
-              <a:rPr sz="2000" b="0" i="0">
-                <a:solidFill>
-                  <a:srgbClr val="333333"/>
-                </a:solidFill>
-                <a:latin typeface="Calibri"/>
-              </a:rPr>
-              <a:t> — styles from 20–30 years ago frequently resurface, reinterpreted with current technology and values.</a:t>
-            </a:r>
-          </a:p>
-        </p:txBody>
-      </p:sp>
-      <p:sp>
-        <p:nvSpPr>
-          <p:cNvPr id="5" name="Rectangle 4"/>
+          <p:cNvPr id="2" name="Rounded Rectangle 1"/>
           <p:cNvSpPr/>
           <p:nvPr/>
         </p:nvSpPr>
         <p:spPr>
           <a:xfrm>
-            <a:off x="548640" y="1234440"/>
-            <a:ext cx="1463040" cy="38100"/>
+            <a:off x="685800" y="502920"/>
+            <a:ext cx="3291840" cy="457200"/>
+          </a:xfrm>
+          <a:prstGeom prst="roundRect">
+            <a:avLst>
+              <a:gd name="adj" fmla="val 50000"/>
+            </a:avLst>
+          </a:prstGeom>
+          <a:solidFill>
+            <a:srgbClr val="7A2E43"/>
+          </a:solidFill>
+          <a:ln>
+            <a:noFill/>
+          </a:ln>
+          <a:effectLst/>
+        </p:spPr>
+        <p:style>
+          <a:lnRef idx="1">
+            <a:schemeClr val="accent1"/>
+          </a:lnRef>
+          <a:fillRef idx="3">
+            <a:schemeClr val="accent1"/>
+          </a:fillRef>
+          <a:effectRef idx="2">
+            <a:schemeClr val="accent1"/>
+          </a:effectRef>
+          <a:fontRef idx="minor">
+            <a:schemeClr val="lt1"/>
+          </a:fontRef>
+        </p:style>
+        <p:txBody>
+          <a:bodyPr rtlCol="0" anchor="ctr" wrap="none" lIns="50800" rIns="50800"/>
+          <a:lstStyle/>
+          <a:p>
+            <a:pPr algn="ctr"/>
+            <a:r>
+              <a:rPr sz="1100" b="1">
+                <a:solidFill>
+                  <a:srgbClr val="FFFFFF"/>
+                </a:solidFill>
+                <a:latin typeface="Calibri"/>
+              </a:rPr>
+              <a:t>TRENDS IN DESIGN</a:t>
+            </a:r>
+          </a:p>
+        </p:txBody>
+      </p:sp>
+      <p:sp>
+        <p:nvSpPr>
+          <p:cNvPr id="3" name="TextBox 2"/>
+          <p:cNvSpPr txBox="1"/>
+          <p:nvPr/>
+        </p:nvSpPr>
+        <p:spPr>
+          <a:xfrm>
+            <a:off x="685800" y="1051560"/>
+            <a:ext cx="10607040" cy="822960"/>
           </a:xfrm>
           <a:prstGeom prst="rect">
             <a:avLst/>
           </a:prstGeom>
+          <a:noFill/>
+        </p:spPr>
+        <p:txBody>
+          <a:bodyPr wrap="square" anchor="t">
+            <a:spAutoFit/>
+          </a:bodyPr>
+          <a:lstStyle/>
+          <a:p>
+            <a:pPr algn="l"/>
+            <a:r>
+              <a:rPr sz="2700" b="1" i="0">
+                <a:solidFill>
+                  <a:srgbClr val="2A1A1F"/>
+                </a:solidFill>
+                <a:latin typeface="Cambria"/>
+              </a:rPr>
+              <a:t>Nostalgia &amp; Retro Revival</a:t>
+            </a:r>
+          </a:p>
+        </p:txBody>
+      </p:sp>
+      <p:sp>
+        <p:nvSpPr>
+          <p:cNvPr id="4" name="Rounded Rectangle 3"/>
+          <p:cNvSpPr/>
+          <p:nvPr/>
+        </p:nvSpPr>
+        <p:spPr>
+          <a:xfrm>
+            <a:off x="685800" y="1874519"/>
+            <a:ext cx="5166360" cy="4526280"/>
+          </a:xfrm>
+          <a:prstGeom prst="roundRect">
+            <a:avLst>
+              <a:gd name="adj" fmla="val 6000"/>
+            </a:avLst>
+          </a:prstGeom>
           <a:solidFill>
-            <a:srgbClr val="6E2337"/>
+            <a:srgbClr val="EFE5E8"/>
+          </a:solidFill>
+          <a:ln>
+            <a:noFill/>
+          </a:ln>
+          <a:effectLst/>
+        </p:spPr>
+        <p:style>
+          <a:lnRef idx="1">
+            <a:schemeClr val="accent1"/>
+          </a:lnRef>
+          <a:fillRef idx="3">
+            <a:schemeClr val="accent1"/>
+          </a:fillRef>
+          <a:effectRef idx="2">
+            <a:schemeClr val="accent1"/>
+          </a:effectRef>
+          <a:fontRef idx="minor">
+            <a:schemeClr val="lt1"/>
+          </a:fontRef>
+        </p:style>
+        <p:txBody>
+          <a:bodyPr rtlCol="0" anchor="ctr" lIns="279400" rIns="279400" tIns="228600" bIns="228600" wrap="square"/>
+          <a:lstStyle/>
+          <a:p>
+            <a:pPr algn="ctr" indent="-203200" marL="203200">
+              <a:spcAft>
+                <a:spcPts val="900"/>
+              </a:spcAft>
+              <a:buClr>
+                <a:srgbClr val="7A2E43"/>
+              </a:buClr>
+              <a:buSzPct val="90000"/>
+              <a:buFont typeface="Arial"/>
+              <a:buChar char="●"/>
+            </a:pPr>
+            <a:r>
+              <a:rPr sz="1400" b="0" i="0">
+                <a:solidFill>
+                  <a:srgbClr val="2A1A1F"/>
+                </a:solidFill>
+                <a:latin typeface="Calibri"/>
+              </a:rPr>
+              <a:t>A return to visual styles from past decades — driven by </a:t>
+            </a:r>
+            <a:r>
+              <a:rPr sz="1400" b="1" i="0">
+                <a:solidFill>
+                  <a:srgbClr val="672738"/>
+                </a:solidFill>
+                <a:latin typeface="Calibri"/>
+              </a:rPr>
+              <a:t>cultural</a:t>
+            </a:r>
+            <a:r>
+              <a:rPr sz="1400" b="0" i="0">
+                <a:solidFill>
+                  <a:srgbClr val="2A1A1F"/>
+                </a:solidFill>
+                <a:latin typeface="Calibri"/>
+              </a:rPr>
+              <a:t> and </a:t>
+            </a:r>
+            <a:r>
+              <a:rPr sz="1400" b="1" i="0">
+                <a:solidFill>
+                  <a:srgbClr val="672738"/>
+                </a:solidFill>
+                <a:latin typeface="Calibri"/>
+              </a:rPr>
+              <a:t>social</a:t>
+            </a:r>
+            <a:r>
+              <a:rPr sz="1400" b="0" i="0">
+                <a:solidFill>
+                  <a:srgbClr val="2A1A1F"/>
+                </a:solidFill>
+                <a:latin typeface="Calibri"/>
+              </a:rPr>
+              <a:t> factors such as comfort-seeking during uncertain times.</a:t>
+            </a:r>
+          </a:p>
+          <a:p>
+            <a:pPr indent="-203200" marL="203200">
+              <a:spcAft>
+                <a:spcPts val="900"/>
+              </a:spcAft>
+              <a:buClr>
+                <a:srgbClr val="7A2E43"/>
+              </a:buClr>
+              <a:buSzPct val="90000"/>
+              <a:buFont typeface="Arial"/>
+              <a:buChar char="●"/>
+            </a:pPr>
+            <a:r>
+              <a:rPr sz="1400" b="0" i="0">
+                <a:solidFill>
+                  <a:srgbClr val="2A1A1F"/>
+                </a:solidFill>
+                <a:latin typeface="Calibri"/>
+              </a:rPr>
+              <a:t>Across the 4 Fields</a:t>
+            </a:r>
+          </a:p>
+          <a:p>
+            <a:pPr indent="-203200" marL="203200">
+              <a:spcAft>
+                <a:spcPts val="900"/>
+              </a:spcAft>
+              <a:buClr>
+                <a:srgbClr val="7A2E43"/>
+              </a:buClr>
+              <a:buSzPct val="90000"/>
+              <a:buFont typeface="Arial"/>
+              <a:buChar char="–"/>
+            </a:pPr>
+            <a:r>
+              <a:rPr sz="1250" b="1" i="0">
+                <a:solidFill>
+                  <a:srgbClr val="672738"/>
+                </a:solidFill>
+                <a:latin typeface="Calibri"/>
+              </a:rPr>
+              <a:t>Communication</a:t>
+            </a:r>
+            <a:r>
+              <a:rPr sz="1250" b="0" i="0">
+                <a:solidFill>
+                  <a:srgbClr val="2A1A1F"/>
+                </a:solidFill>
+                <a:latin typeface="Calibri"/>
+              </a:rPr>
+              <a:t> — 90s/Y2K typography and colour palettes returning in branding</a:t>
+            </a:r>
+          </a:p>
+          <a:p>
+            <a:pPr indent="-203200" marL="203200">
+              <a:spcAft>
+                <a:spcPts val="900"/>
+              </a:spcAft>
+              <a:buClr>
+                <a:srgbClr val="7A2E43"/>
+              </a:buClr>
+              <a:buSzPct val="90000"/>
+              <a:buFont typeface="Arial"/>
+              <a:buChar char="–"/>
+            </a:pPr>
+            <a:r>
+              <a:rPr sz="1250" b="1" i="0">
+                <a:solidFill>
+                  <a:srgbClr val="672738"/>
+                </a:solidFill>
+                <a:latin typeface="Calibri"/>
+              </a:rPr>
+              <a:t>Environmental</a:t>
+            </a:r>
+            <a:r>
+              <a:rPr sz="1250" b="0" i="0">
+                <a:solidFill>
+                  <a:srgbClr val="2A1A1F"/>
+                </a:solidFill>
+                <a:latin typeface="Calibri"/>
+              </a:rPr>
+              <a:t> — mid-century modern interiors revived</a:t>
+            </a:r>
+          </a:p>
+          <a:p>
+            <a:pPr indent="-203200" marL="203200">
+              <a:spcAft>
+                <a:spcPts val="900"/>
+              </a:spcAft>
+              <a:buClr>
+                <a:srgbClr val="7A2E43"/>
+              </a:buClr>
+              <a:buSzPct val="90000"/>
+              <a:buFont typeface="Arial"/>
+              <a:buChar char="–"/>
+            </a:pPr>
+            <a:r>
+              <a:rPr sz="1250" b="1" i="0">
+                <a:solidFill>
+                  <a:srgbClr val="672738"/>
+                </a:solidFill>
+                <a:latin typeface="Calibri"/>
+              </a:rPr>
+              <a:t>Industrial</a:t>
+            </a:r>
+            <a:r>
+              <a:rPr sz="1250" b="0" i="0">
+                <a:solidFill>
+                  <a:srgbClr val="2A1A1F"/>
+                </a:solidFill>
+                <a:latin typeface="Calibri"/>
+              </a:rPr>
+              <a:t> — retro-styled appliances and vehicles</a:t>
+            </a:r>
+          </a:p>
+          <a:p>
+            <a:pPr indent="-203200" marL="203200">
+              <a:spcAft>
+                <a:spcPts val="900"/>
+              </a:spcAft>
+              <a:buClr>
+                <a:srgbClr val="7A2E43"/>
+              </a:buClr>
+              <a:buSzPct val="90000"/>
+              <a:buFont typeface="Arial"/>
+              <a:buChar char="–"/>
+            </a:pPr>
+            <a:r>
+              <a:rPr sz="1250" b="1" i="0">
+                <a:solidFill>
+                  <a:srgbClr val="672738"/>
+                </a:solidFill>
+                <a:latin typeface="Calibri"/>
+              </a:rPr>
+              <a:t>Interaction</a:t>
+            </a:r>
+            <a:r>
+              <a:rPr sz="1250" b="0" i="0">
+                <a:solidFill>
+                  <a:srgbClr val="2A1A1F"/>
+                </a:solidFill>
+                <a:latin typeface="Calibri"/>
+              </a:rPr>
+              <a:t> — skeuomorphic UI elements referencing physical objects</a:t>
+            </a:r>
+          </a:p>
+        </p:txBody>
+      </p:sp>
+      <p:sp>
+        <p:nvSpPr>
+          <p:cNvPr id="5" name="Rounded Rectangle 4"/>
+          <p:cNvSpPr/>
+          <p:nvPr/>
+        </p:nvSpPr>
+        <p:spPr>
+          <a:xfrm>
+            <a:off x="6080760" y="1874519"/>
+            <a:ext cx="5166360" cy="4526280"/>
+          </a:xfrm>
+          <a:prstGeom prst="roundRect">
+            <a:avLst>
+              <a:gd name="adj" fmla="val 6000"/>
+            </a:avLst>
+          </a:prstGeom>
+          <a:solidFill>
+            <a:srgbClr val="F4DEE3"/>
+          </a:solidFill>
+          <a:ln>
+            <a:noFill/>
+          </a:ln>
+          <a:effectLst/>
+        </p:spPr>
+        <p:style>
+          <a:lnRef idx="1">
+            <a:schemeClr val="accent1"/>
+          </a:lnRef>
+          <a:fillRef idx="3">
+            <a:schemeClr val="accent1"/>
+          </a:fillRef>
+          <a:effectRef idx="2">
+            <a:schemeClr val="accent1"/>
+          </a:effectRef>
+          <a:fontRef idx="minor">
+            <a:schemeClr val="lt1"/>
+          </a:fontRef>
+        </p:style>
+        <p:txBody>
+          <a:bodyPr rtlCol="0" anchor="ctr" lIns="279400" rIns="279400" tIns="228600" bIns="228600" wrap="square"/>
+          <a:lstStyle/>
+          <a:p>
+            <a:pPr algn="ctr" indent="-203200" marL="203200">
+              <a:spcAft>
+                <a:spcPts val="900"/>
+              </a:spcAft>
+              <a:buClr>
+                <a:srgbClr val="D98C9E"/>
+              </a:buClr>
+              <a:buSzPct val="90000"/>
+              <a:buFont typeface="Arial"/>
+              <a:buChar char="●"/>
+            </a:pPr>
+            <a:r>
+              <a:rPr sz="1400" b="0" i="0">
+                <a:solidFill>
+                  <a:srgbClr val="2A1A1F"/>
+                </a:solidFill>
+                <a:latin typeface="Calibri"/>
+              </a:rPr>
+              <a:t>Trend Cycles</a:t>
+            </a:r>
+          </a:p>
+          <a:p>
+            <a:pPr indent="-203200" marL="203200">
+              <a:spcAft>
+                <a:spcPts val="900"/>
+              </a:spcAft>
+              <a:buClr>
+                <a:srgbClr val="D98C9E"/>
+              </a:buClr>
+              <a:buSzPct val="90000"/>
+              <a:buFont typeface="Arial"/>
+              <a:buChar char="●"/>
+            </a:pPr>
+            <a:r>
+              <a:rPr sz="1400" b="0" i="0">
+                <a:solidFill>
+                  <a:srgbClr val="2A1A1F"/>
+                </a:solidFill>
+                <a:latin typeface="Calibri"/>
+              </a:rPr>
+              <a:t>Trends are often </a:t>
+            </a:r>
+            <a:r>
+              <a:rPr sz="1400" b="1" i="0">
+                <a:solidFill>
+                  <a:srgbClr val="B87786"/>
+                </a:solidFill>
+                <a:latin typeface="Calibri"/>
+              </a:rPr>
+              <a:t>cyclical</a:t>
+            </a:r>
+            <a:r>
+              <a:rPr sz="1400" b="0" i="0">
+                <a:solidFill>
+                  <a:srgbClr val="2A1A1F"/>
+                </a:solidFill>
+                <a:latin typeface="Calibri"/>
+              </a:rPr>
+              <a:t> — styles from 20–30 years ago frequently resurface, reinterpreted with current technology and values.</a:t>
+            </a:r>
+          </a:p>
+        </p:txBody>
+      </p:sp>
+      <p:sp>
+        <p:nvSpPr>
+          <p:cNvPr id="6" name="Oval 5"/>
+          <p:cNvSpPr/>
+          <p:nvPr/>
+        </p:nvSpPr>
+        <p:spPr>
+          <a:xfrm>
+            <a:off x="5532120" y="3840480"/>
+            <a:ext cx="685800" cy="685800"/>
+          </a:xfrm>
+          <a:prstGeom prst="ellipse">
+            <a:avLst/>
+          </a:prstGeom>
+          <a:solidFill>
+            <a:srgbClr val="D6A24A"/>
           </a:solidFill>
           <a:ln>
             <a:noFill/>
@@ -6521,6 +9176,14 @@
 <file path=ppt/slides/slide8.xml><?xml version="1.0" encoding="utf-8"?>
 <p:sld xmlns:a="http://schemas.openxmlformats.org/drawingml/2006/main" xmlns:p="http://schemas.openxmlformats.org/presentationml/2006/main" xmlns:r="http://schemas.openxmlformats.org/officeDocument/2006/relationships">
   <p:cSld>
+    <p:bg>
+      <p:bgPr>
+        <a:solidFill>
+          <a:srgbClr val="FBF5F1"/>
+        </a:solidFill>
+        <a:effectLst/>
+      </p:bgPr>
+    </p:bg>
     <p:spTree>
       <p:nvGrpSpPr>
         <p:cNvPr id="1" name=""/>
@@ -6530,248 +9193,415 @@
       <p:grpSpPr/>
       <p:sp>
         <p:nvSpPr>
-          <p:cNvPr id="2" name="Title 1"/>
-          <p:cNvSpPr>
-            <a:spLocks noGrp="1"/>
-          </p:cNvSpPr>
-          <p:nvPr>
-            <p:ph type="title"/>
-          </p:nvPr>
-        </p:nvSpPr>
-        <p:spPr/>
-        <p:txBody>
-          <a:bodyPr wrap="square"/>
-          <a:lstStyle/>
-          <a:p>
-            <a:r>
-              <a:rPr sz="3200" b="1">
-                <a:solidFill>
-                  <a:srgbClr val="6E2337"/>
-                </a:solidFill>
-                <a:latin typeface="Cambria"/>
-              </a:rPr>
-              <a:t>Analysing a Trend</a:t>
-            </a:r>
-          </a:p>
-        </p:txBody>
-      </p:sp>
-      <p:sp>
-        <p:nvSpPr>
-          <p:cNvPr id="3" name="Content Placeholder 2"/>
-          <p:cNvSpPr>
-            <a:spLocks noGrp="1"/>
-          </p:cNvSpPr>
-          <p:nvPr>
-            <p:ph idx="1" sz="half"/>
-          </p:nvPr>
-        </p:nvSpPr>
-        <p:spPr/>
-        <p:txBody>
-          <a:bodyPr wrap="square"/>
-          <a:lstStyle/>
-          <a:p>
-            <a:pPr lvl="1">
-              <a:spcAft>
-                <a:spcPts val="1000"/>
-              </a:spcAft>
-            </a:pPr>
-            <a:r>
-              <a:rPr sz="1800" b="0" i="0">
-                <a:solidFill>
-                  <a:srgbClr val="333333"/>
-                </a:solidFill>
-                <a:latin typeface="Calibri"/>
-              </a:rPr>
-              <a:t>Trend → Factor(s) → Field Examples</a:t>
-            </a:r>
-          </a:p>
-          <a:p>
-            <a:pPr lvl="1">
-              <a:spcAft>
-                <a:spcPts val="1000"/>
-              </a:spcAft>
-            </a:pPr>
-            <a:r>
-              <a:rPr sz="1800" b="0" i="0">
-                <a:solidFill>
-                  <a:srgbClr val="333333"/>
-                </a:solidFill>
-                <a:latin typeface="Calibri"/>
-              </a:rPr>
-              <a:t>1. Name the trend</a:t>
-            </a:r>
-          </a:p>
-          <a:p>
-            <a:pPr lvl="1">
-              <a:spcAft>
-                <a:spcPts val="1000"/>
-              </a:spcAft>
-            </a:pPr>
-            <a:r>
-              <a:rPr sz="1800" b="0" i="0">
-                <a:solidFill>
-                  <a:srgbClr val="333333"/>
-                </a:solidFill>
-                <a:latin typeface="Calibri"/>
-              </a:rPr>
-              <a:t>2. Identify the driving factor(s)</a:t>
-            </a:r>
-          </a:p>
-          <a:p>
-            <a:pPr lvl="1">
-              <a:spcAft>
-                <a:spcPts val="1000"/>
-              </a:spcAft>
-            </a:pPr>
-            <a:r>
-              <a:rPr sz="1800" b="0" i="0">
-                <a:solidFill>
-                  <a:srgbClr val="333333"/>
-                </a:solidFill>
-                <a:latin typeface="Calibri"/>
-              </a:rPr>
-              <a:t>3. Give evidence from at least two design fields</a:t>
-            </a:r>
-          </a:p>
-          <a:p>
-            <a:pPr>
-              <a:spcAft>
-                <a:spcPts val="1000"/>
-              </a:spcAft>
-            </a:pPr>
-            <a:r>
-              <a:rPr sz="1800" b="1" i="1">
-                <a:solidFill>
-                  <a:srgbClr val="6E2337"/>
-                </a:solidFill>
-                <a:latin typeface="Calibri"/>
-              </a:rPr>
-              <a:t>Exam vocab:</a:t>
-            </a:r>
-            <a:r>
-              <a:rPr sz="1800" b="0" i="1">
-                <a:solidFill>
-                  <a:srgbClr val="333333"/>
-                </a:solidFill>
-                <a:latin typeface="Calibri"/>
-              </a:rPr>
-              <a:t> emerging, established, resurgence, driven by, reflects, in response to, across fields</a:t>
-            </a:r>
-          </a:p>
-        </p:txBody>
-      </p:sp>
-      <p:sp>
-        <p:nvSpPr>
-          <p:cNvPr id="4" name="Content Placeholder 3"/>
-          <p:cNvSpPr>
-            <a:spLocks noGrp="1"/>
-          </p:cNvSpPr>
-          <p:nvPr>
-            <p:ph idx="2" sz="half"/>
-          </p:nvPr>
-        </p:nvSpPr>
-        <p:spPr/>
-        <p:txBody>
-          <a:bodyPr wrap="square"/>
-          <a:lstStyle/>
-          <a:p>
-            <a:pPr>
-              <a:spcAft>
-                <a:spcPts val="1000"/>
-              </a:spcAft>
-            </a:pPr>
-            <a:r>
-              <a:rPr sz="1800" b="0" i="1">
-                <a:solidFill>
-                  <a:srgbClr val="333333"/>
-                </a:solidFill>
-                <a:latin typeface="Calibri"/>
-              </a:rPr>
-              <a:t>Sentence Starters</a:t>
-            </a:r>
-          </a:p>
-          <a:p>
-            <a:pPr lvl="1">
-              <a:spcAft>
-                <a:spcPts val="1000"/>
-              </a:spcAft>
-            </a:pPr>
-            <a:r>
-              <a:rPr sz="1800" b="0" i="0">
-                <a:solidFill>
-                  <a:srgbClr val="333333"/>
-                </a:solidFill>
-                <a:latin typeface="Calibri"/>
-              </a:rPr>
-              <a:t>"This trend is driven primarily by [factor] because..."</a:t>
-            </a:r>
-          </a:p>
-          <a:p>
-            <a:pPr lvl="1">
-              <a:spcAft>
-                <a:spcPts val="1000"/>
-              </a:spcAft>
-            </a:pPr>
-            <a:r>
-              <a:rPr sz="1800" b="0" i="0">
-                <a:solidFill>
-                  <a:srgbClr val="333333"/>
-                </a:solidFill>
-                <a:latin typeface="Calibri"/>
-              </a:rPr>
-              <a:t>"In communication design, this trend manifests as..."</a:t>
-            </a:r>
-          </a:p>
-          <a:p>
-            <a:pPr lvl="1">
-              <a:spcAft>
-                <a:spcPts val="1000"/>
-              </a:spcAft>
-            </a:pPr>
-            <a:r>
-              <a:rPr sz="1800" b="0" i="0">
-                <a:solidFill>
-                  <a:srgbClr val="333333"/>
-                </a:solidFill>
-                <a:latin typeface="Calibri"/>
-              </a:rPr>
-              <a:t>"Compared to [past trend], this reflects a shift toward..."</a:t>
-            </a:r>
-          </a:p>
-          <a:p>
-            <a:pPr lvl="1">
-              <a:spcAft>
-                <a:spcPts val="1000"/>
-              </a:spcAft>
-            </a:pPr>
-            <a:r>
-              <a:rPr sz="1800" b="0" i="0">
-                <a:solidFill>
-                  <a:srgbClr val="333333"/>
-                </a:solidFill>
-                <a:latin typeface="Calibri"/>
-              </a:rPr>
-              <a:t>"This trend is likely to continue/fade because..."</a:t>
-            </a:r>
-          </a:p>
-        </p:txBody>
-      </p:sp>
-      <p:sp>
-        <p:nvSpPr>
-          <p:cNvPr id="5" name="Rectangle 4"/>
+          <p:cNvPr id="2" name="Rounded Rectangle 1"/>
           <p:cNvSpPr/>
           <p:nvPr/>
         </p:nvSpPr>
         <p:spPr>
           <a:xfrm>
-            <a:off x="548640" y="1234440"/>
-            <a:ext cx="1463040" cy="38100"/>
+            <a:off x="685800" y="502920"/>
+            <a:ext cx="3291840" cy="457200"/>
+          </a:xfrm>
+          <a:prstGeom prst="roundRect">
+            <a:avLst>
+              <a:gd name="adj" fmla="val 50000"/>
+            </a:avLst>
+          </a:prstGeom>
+          <a:solidFill>
+            <a:srgbClr val="7A2E43"/>
+          </a:solidFill>
+          <a:ln>
+            <a:noFill/>
+          </a:ln>
+          <a:effectLst/>
+        </p:spPr>
+        <p:style>
+          <a:lnRef idx="1">
+            <a:schemeClr val="accent1"/>
+          </a:lnRef>
+          <a:fillRef idx="3">
+            <a:schemeClr val="accent1"/>
+          </a:fillRef>
+          <a:effectRef idx="2">
+            <a:schemeClr val="accent1"/>
+          </a:effectRef>
+          <a:fontRef idx="minor">
+            <a:schemeClr val="lt1"/>
+          </a:fontRef>
+        </p:style>
+        <p:txBody>
+          <a:bodyPr rtlCol="0" anchor="ctr" wrap="none" lIns="50800" rIns="50800"/>
+          <a:lstStyle/>
+          <a:p>
+            <a:pPr algn="ctr"/>
+            <a:r>
+              <a:rPr sz="1100" b="1">
+                <a:solidFill>
+                  <a:srgbClr val="FFFFFF"/>
+                </a:solidFill>
+                <a:latin typeface="Calibri"/>
+              </a:rPr>
+              <a:t>TRENDS IN DESIGN</a:t>
+            </a:r>
+          </a:p>
+        </p:txBody>
+      </p:sp>
+      <p:sp>
+        <p:nvSpPr>
+          <p:cNvPr id="3" name="TextBox 2"/>
+          <p:cNvSpPr txBox="1"/>
+          <p:nvPr/>
+        </p:nvSpPr>
+        <p:spPr>
+          <a:xfrm>
+            <a:off x="685800" y="1051560"/>
+            <a:ext cx="10607040" cy="822960"/>
           </a:xfrm>
           <a:prstGeom prst="rect">
             <a:avLst/>
           </a:prstGeom>
+          <a:noFill/>
+        </p:spPr>
+        <p:txBody>
+          <a:bodyPr wrap="square" anchor="t">
+            <a:spAutoFit/>
+          </a:bodyPr>
+          <a:lstStyle/>
+          <a:p>
+            <a:pPr algn="l"/>
+            <a:r>
+              <a:rPr sz="2700" b="1" i="0">
+                <a:solidFill>
+                  <a:srgbClr val="2A1A1F"/>
+                </a:solidFill>
+                <a:latin typeface="Cambria"/>
+              </a:rPr>
+              <a:t>Analysing a Trend</a:t>
+            </a:r>
+          </a:p>
+        </p:txBody>
+      </p:sp>
+      <p:sp>
+        <p:nvSpPr>
+          <p:cNvPr id="4" name="Rounded Rectangle 3"/>
+          <p:cNvSpPr/>
+          <p:nvPr/>
+        </p:nvSpPr>
+        <p:spPr>
+          <a:xfrm>
+            <a:off x="685800" y="1874519"/>
+            <a:ext cx="5166360" cy="4526280"/>
+          </a:xfrm>
+          <a:prstGeom prst="roundRect">
+            <a:avLst>
+              <a:gd name="adj" fmla="val 6000"/>
+            </a:avLst>
+          </a:prstGeom>
           <a:solidFill>
-            <a:srgbClr val="6E2337"/>
+            <a:srgbClr val="EFE5E8"/>
+          </a:solidFill>
+          <a:ln>
+            <a:noFill/>
+          </a:ln>
+          <a:effectLst/>
+        </p:spPr>
+        <p:style>
+          <a:lnRef idx="1">
+            <a:schemeClr val="accent1"/>
+          </a:lnRef>
+          <a:fillRef idx="3">
+            <a:schemeClr val="accent1"/>
+          </a:fillRef>
+          <a:effectRef idx="2">
+            <a:schemeClr val="accent1"/>
+          </a:effectRef>
+          <a:fontRef idx="minor">
+            <a:schemeClr val="lt1"/>
+          </a:fontRef>
+        </p:style>
+        <p:txBody>
+          <a:bodyPr rtlCol="0" anchor="ctr" lIns="279400" rIns="279400" tIns="228600" bIns="228600" wrap="square"/>
+          <a:lstStyle/>
+          <a:p>
+            <a:pPr algn="ctr" indent="-203200" marL="203200">
+              <a:spcAft>
+                <a:spcPts val="900"/>
+              </a:spcAft>
+              <a:buClr>
+                <a:srgbClr val="7A2E43"/>
+              </a:buClr>
+              <a:buSzPct val="90000"/>
+              <a:buFont typeface="Arial"/>
+              <a:buChar char="–"/>
+            </a:pPr>
+            <a:r>
+              <a:rPr sz="1250" b="0" i="0">
+                <a:solidFill>
+                  <a:srgbClr val="2A1A1F"/>
+                </a:solidFill>
+                <a:latin typeface="Calibri"/>
+              </a:rPr>
+              <a:t>Trend → Factor(s) → Field Examples</a:t>
+            </a:r>
+          </a:p>
+          <a:p>
+            <a:pPr indent="-203200" marL="203200">
+              <a:spcAft>
+                <a:spcPts val="900"/>
+              </a:spcAft>
+              <a:buClr>
+                <a:srgbClr val="7A2E43"/>
+              </a:buClr>
+              <a:buSzPct val="90000"/>
+              <a:buFont typeface="Arial"/>
+              <a:buChar char="–"/>
+            </a:pPr>
+            <a:r>
+              <a:rPr sz="1250" b="0" i="0">
+                <a:solidFill>
+                  <a:srgbClr val="2A1A1F"/>
+                </a:solidFill>
+                <a:latin typeface="Calibri"/>
+              </a:rPr>
+              <a:t>1. Name the trend</a:t>
+            </a:r>
+          </a:p>
+          <a:p>
+            <a:pPr indent="-203200" marL="203200">
+              <a:spcAft>
+                <a:spcPts val="900"/>
+              </a:spcAft>
+              <a:buClr>
+                <a:srgbClr val="7A2E43"/>
+              </a:buClr>
+              <a:buSzPct val="90000"/>
+              <a:buFont typeface="Arial"/>
+              <a:buChar char="–"/>
+            </a:pPr>
+            <a:r>
+              <a:rPr sz="1250" b="0" i="0">
+                <a:solidFill>
+                  <a:srgbClr val="2A1A1F"/>
+                </a:solidFill>
+                <a:latin typeface="Calibri"/>
+              </a:rPr>
+              <a:t>2. Identify the driving factor(s)</a:t>
+            </a:r>
+          </a:p>
+          <a:p>
+            <a:pPr indent="-203200" marL="203200">
+              <a:spcAft>
+                <a:spcPts val="900"/>
+              </a:spcAft>
+              <a:buClr>
+                <a:srgbClr val="7A2E43"/>
+              </a:buClr>
+              <a:buSzPct val="90000"/>
+              <a:buFont typeface="Arial"/>
+              <a:buChar char="–"/>
+            </a:pPr>
+            <a:r>
+              <a:rPr sz="1250" b="0" i="0">
+                <a:solidFill>
+                  <a:srgbClr val="2A1A1F"/>
+                </a:solidFill>
+                <a:latin typeface="Calibri"/>
+              </a:rPr>
+              <a:t>3. Give evidence from at least two design fields</a:t>
+            </a:r>
+          </a:p>
+          <a:p>
+            <a:pPr>
+              <a:spcAft>
+                <a:spcPts val="900"/>
+              </a:spcAft>
+              <a:buNone/>
+            </a:pPr>
+            <a:r>
+              <a:rPr sz="1250" b="1" i="1">
+                <a:solidFill>
+                  <a:srgbClr val="672738"/>
+                </a:solidFill>
+                <a:latin typeface="Calibri"/>
+              </a:rPr>
+              <a:t>Exam vocab:</a:t>
+            </a:r>
+            <a:r>
+              <a:rPr sz="1250" b="0" i="1">
+                <a:solidFill>
+                  <a:srgbClr val="2A1A1F"/>
+                </a:solidFill>
+                <a:latin typeface="Calibri"/>
+              </a:rPr>
+              <a:t> emerging, established, resurgence, driven by, reflects, in response to, across fields</a:t>
+            </a:r>
+          </a:p>
+        </p:txBody>
+      </p:sp>
+      <p:sp>
+        <p:nvSpPr>
+          <p:cNvPr id="5" name="Rounded Rectangle 4"/>
+          <p:cNvSpPr/>
+          <p:nvPr/>
+        </p:nvSpPr>
+        <p:spPr>
+          <a:xfrm>
+            <a:off x="6080760" y="1874519"/>
+            <a:ext cx="5166360" cy="4526280"/>
+          </a:xfrm>
+          <a:prstGeom prst="roundRect">
+            <a:avLst>
+              <a:gd name="adj" fmla="val 6000"/>
+            </a:avLst>
+          </a:prstGeom>
+          <a:solidFill>
+            <a:srgbClr val="F4DEE3"/>
+          </a:solidFill>
+          <a:ln>
+            <a:noFill/>
+          </a:ln>
+          <a:effectLst/>
+        </p:spPr>
+        <p:style>
+          <a:lnRef idx="1">
+            <a:schemeClr val="accent1"/>
+          </a:lnRef>
+          <a:fillRef idx="3">
+            <a:schemeClr val="accent1"/>
+          </a:fillRef>
+          <a:effectRef idx="2">
+            <a:schemeClr val="accent1"/>
+          </a:effectRef>
+          <a:fontRef idx="minor">
+            <a:schemeClr val="lt1"/>
+          </a:fontRef>
+        </p:style>
+        <p:txBody>
+          <a:bodyPr rtlCol="0" anchor="ctr" lIns="279400" rIns="279400" tIns="228600" bIns="228600" wrap="square"/>
+          <a:lstStyle/>
+          <a:p>
+            <a:pPr algn="ctr">
+              <a:spcAft>
+                <a:spcPts val="900"/>
+              </a:spcAft>
+              <a:buNone/>
+            </a:pPr>
+            <a:r>
+              <a:rPr sz="1250" b="0" i="1">
+                <a:solidFill>
+                  <a:srgbClr val="2A1A1F"/>
+                </a:solidFill>
+                <a:latin typeface="Calibri"/>
+              </a:rPr>
+              <a:t>Sentence Starters</a:t>
+            </a:r>
+          </a:p>
+          <a:p>
+            <a:pPr indent="-203200" marL="203200">
+              <a:spcAft>
+                <a:spcPts val="900"/>
+              </a:spcAft>
+              <a:buClr>
+                <a:srgbClr val="D98C9E"/>
+              </a:buClr>
+              <a:buSzPct val="90000"/>
+              <a:buFont typeface="Arial"/>
+              <a:buChar char="–"/>
+            </a:pPr>
+            <a:r>
+              <a:rPr sz="1250" b="0" i="0">
+                <a:solidFill>
+                  <a:srgbClr val="2A1A1F"/>
+                </a:solidFill>
+                <a:latin typeface="Calibri"/>
+              </a:rPr>
+              <a:t>"This trend is driven primarily by [factor] because..."</a:t>
+            </a:r>
+          </a:p>
+          <a:p>
+            <a:pPr indent="-203200" marL="203200">
+              <a:spcAft>
+                <a:spcPts val="900"/>
+              </a:spcAft>
+              <a:buClr>
+                <a:srgbClr val="D98C9E"/>
+              </a:buClr>
+              <a:buSzPct val="90000"/>
+              <a:buFont typeface="Arial"/>
+              <a:buChar char="–"/>
+            </a:pPr>
+            <a:r>
+              <a:rPr sz="1250" b="0" i="0">
+                <a:solidFill>
+                  <a:srgbClr val="2A1A1F"/>
+                </a:solidFill>
+                <a:latin typeface="Calibri"/>
+              </a:rPr>
+              <a:t>"In communication design, this trend manifests as..."</a:t>
+            </a:r>
+          </a:p>
+          <a:p>
+            <a:pPr indent="-203200" marL="203200">
+              <a:spcAft>
+                <a:spcPts val="900"/>
+              </a:spcAft>
+              <a:buClr>
+                <a:srgbClr val="D98C9E"/>
+              </a:buClr>
+              <a:buSzPct val="90000"/>
+              <a:buFont typeface="Arial"/>
+              <a:buChar char="–"/>
+            </a:pPr>
+            <a:r>
+              <a:rPr sz="1250" b="0" i="0">
+                <a:solidFill>
+                  <a:srgbClr val="2A1A1F"/>
+                </a:solidFill>
+                <a:latin typeface="Calibri"/>
+              </a:rPr>
+              <a:t>"Compared to [past trend], this reflects a shift toward..."</a:t>
+            </a:r>
+          </a:p>
+          <a:p>
+            <a:pPr indent="-203200" marL="203200">
+              <a:spcAft>
+                <a:spcPts val="900"/>
+              </a:spcAft>
+              <a:buClr>
+                <a:srgbClr val="D98C9E"/>
+              </a:buClr>
+              <a:buSzPct val="90000"/>
+              <a:buFont typeface="Arial"/>
+              <a:buChar char="–"/>
+            </a:pPr>
+            <a:r>
+              <a:rPr sz="1250" b="0" i="0">
+                <a:solidFill>
+                  <a:srgbClr val="2A1A1F"/>
+                </a:solidFill>
+                <a:latin typeface="Calibri"/>
+              </a:rPr>
+              <a:t>"This trend is likely to continue/fade because..."</a:t>
+            </a:r>
+          </a:p>
+        </p:txBody>
+      </p:sp>
+      <p:sp>
+        <p:nvSpPr>
+          <p:cNvPr id="6" name="Oval 5"/>
+          <p:cNvSpPr/>
+          <p:nvPr/>
+        </p:nvSpPr>
+        <p:spPr>
+          <a:xfrm>
+            <a:off x="5532120" y="3840480"/>
+            <a:ext cx="685800" cy="685800"/>
+          </a:xfrm>
+          <a:prstGeom prst="ellipse">
+            <a:avLst/>
+          </a:prstGeom>
+          <a:solidFill>
+            <a:srgbClr val="D6A24A"/>
           </a:solidFill>
           <a:ln>
             <a:noFill/>
@@ -6811,6 +9641,14 @@
 <file path=ppt/slides/slide9.xml><?xml version="1.0" encoding="utf-8"?>
 <p:sld xmlns:a="http://schemas.openxmlformats.org/drawingml/2006/main" xmlns:p="http://schemas.openxmlformats.org/presentationml/2006/main" xmlns:r="http://schemas.openxmlformats.org/officeDocument/2006/relationships">
   <p:cSld>
+    <p:bg>
+      <p:bgPr>
+        <a:solidFill>
+          <a:srgbClr val="FBF5F1"/>
+        </a:solidFill>
+        <a:effectLst/>
+      </p:bgPr>
+    </p:bg>
     <p:spTree>
       <p:nvGrpSpPr>
         <p:cNvPr id="1" name=""/>
@@ -6820,275 +9658,22 @@
       <p:grpSpPr/>
       <p:sp>
         <p:nvSpPr>
-          <p:cNvPr id="2" name="Title 1"/>
-          <p:cNvSpPr>
-            <a:spLocks noGrp="1"/>
-          </p:cNvSpPr>
-          <p:nvPr>
-            <p:ph type="title"/>
-          </p:nvPr>
-        </p:nvSpPr>
-        <p:spPr/>
-        <p:txBody>
-          <a:bodyPr wrap="square"/>
-          <a:lstStyle/>
-          <a:p>
-            <a:r>
-              <a:rPr sz="3200" b="1">
-                <a:solidFill>
-                  <a:srgbClr val="6E2337"/>
-                </a:solidFill>
-                <a:latin typeface="Cambria"/>
-              </a:rPr>
-              <a:t>Trends in Design — Quick Reference</a:t>
-            </a:r>
-          </a:p>
-        </p:txBody>
-      </p:sp>
-      <p:sp>
-        <p:nvSpPr>
-          <p:cNvPr id="3" name="Content Placeholder 2"/>
-          <p:cNvSpPr>
-            <a:spLocks noGrp="1"/>
-          </p:cNvSpPr>
-          <p:nvPr>
-            <p:ph idx="1"/>
-          </p:nvPr>
-        </p:nvSpPr>
-        <p:spPr/>
-        <p:txBody>
-          <a:bodyPr wrap="square"/>
-          <a:lstStyle/>
-          <a:p>
-            <a:pPr lvl="1">
-              <a:spcAft>
-                <a:spcPts val="1000"/>
-              </a:spcAft>
-            </a:pPr>
-            <a:r>
-              <a:rPr sz="1800" b="0" i="0">
-                <a:solidFill>
-                  <a:srgbClr val="333333"/>
-                </a:solidFill>
-                <a:latin typeface="Calibri"/>
-              </a:rPr>
-              <a:t>Social</a:t>
-            </a:r>
-          </a:p>
-          <a:p>
-            <a:pPr lvl="1">
-              <a:spcAft>
-                <a:spcPts val="1000"/>
-              </a:spcAft>
-            </a:pPr>
-            <a:r>
-              <a:rPr sz="1800" b="0" i="0">
-                <a:solidFill>
-                  <a:srgbClr val="333333"/>
-                </a:solidFill>
-                <a:latin typeface="Calibri"/>
-              </a:rPr>
-              <a:t>Lifestyle &amp; demographic shifts</a:t>
-            </a:r>
-          </a:p>
-          <a:p>
-            <a:pPr lvl="1">
-              <a:spcAft>
-                <a:spcPts val="1000"/>
-              </a:spcAft>
-            </a:pPr>
-            <a:r>
-              <a:rPr sz="1800" b="0" i="0">
-                <a:solidFill>
-                  <a:srgbClr val="333333"/>
-                </a:solidFill>
-                <a:latin typeface="Calibri"/>
-              </a:rPr>
-              <a:t>Cultural</a:t>
-            </a:r>
-          </a:p>
-          <a:p>
-            <a:pPr lvl="1">
-              <a:spcAft>
-                <a:spcPts val="1000"/>
-              </a:spcAft>
-            </a:pPr>
-            <a:r>
-              <a:rPr sz="1800" b="0" i="0">
-                <a:solidFill>
-                  <a:srgbClr val="333333"/>
-                </a:solidFill>
-                <a:latin typeface="Calibri"/>
-              </a:rPr>
-              <a:t>Values, identity, heritage</a:t>
-            </a:r>
-          </a:p>
-          <a:p>
-            <a:pPr lvl="1">
-              <a:spcAft>
-                <a:spcPts val="1000"/>
-              </a:spcAft>
-            </a:pPr>
-            <a:r>
-              <a:rPr sz="1800" b="0" i="0">
-                <a:solidFill>
-                  <a:srgbClr val="333333"/>
-                </a:solidFill>
-                <a:latin typeface="Calibri"/>
-              </a:rPr>
-              <a:t>Economic</a:t>
-            </a:r>
-          </a:p>
-          <a:p>
-            <a:pPr lvl="1">
-              <a:spcAft>
-                <a:spcPts val="1000"/>
-              </a:spcAft>
-            </a:pPr>
-            <a:r>
-              <a:rPr sz="1800" b="0" i="0">
-                <a:solidFill>
-                  <a:srgbClr val="333333"/>
-                </a:solidFill>
-                <a:latin typeface="Calibri"/>
-              </a:rPr>
-              <a:t>Cost, demand, market conditions</a:t>
-            </a:r>
-          </a:p>
-          <a:p>
-            <a:pPr lvl="1">
-              <a:spcAft>
-                <a:spcPts val="1000"/>
-              </a:spcAft>
-            </a:pPr>
-            <a:r>
-              <a:rPr sz="1800" b="0" i="0">
-                <a:solidFill>
-                  <a:srgbClr val="333333"/>
-                </a:solidFill>
-                <a:latin typeface="Calibri"/>
-              </a:rPr>
-              <a:t>Technological</a:t>
-            </a:r>
-          </a:p>
-          <a:p>
-            <a:pPr lvl="1">
-              <a:spcAft>
-                <a:spcPts val="1000"/>
-              </a:spcAft>
-            </a:pPr>
-            <a:r>
-              <a:rPr sz="1800" b="0" i="0">
-                <a:solidFill>
-                  <a:srgbClr val="333333"/>
-                </a:solidFill>
-                <a:latin typeface="Calibri"/>
-              </a:rPr>
-              <a:t>New tools, materials, methods</a:t>
-            </a:r>
-          </a:p>
-          <a:p>
-            <a:pPr lvl="1">
-              <a:spcAft>
-                <a:spcPts val="1000"/>
-              </a:spcAft>
-            </a:pPr>
-            <a:r>
-              <a:rPr sz="1800" b="0" i="0">
-                <a:solidFill>
-                  <a:srgbClr val="333333"/>
-                </a:solidFill>
-                <a:latin typeface="Calibri"/>
-              </a:rPr>
-              <a:t>Environmental</a:t>
-            </a:r>
-          </a:p>
-          <a:p>
-            <a:pPr lvl="1">
-              <a:spcAft>
-                <a:spcPts val="1000"/>
-              </a:spcAft>
-            </a:pPr>
-            <a:r>
-              <a:rPr sz="1800" b="0" i="0">
-                <a:solidFill>
-                  <a:srgbClr val="333333"/>
-                </a:solidFill>
-                <a:latin typeface="Calibri"/>
-              </a:rPr>
-              <a:t>Sustainability, resource pressure</a:t>
-            </a:r>
-          </a:p>
-          <a:p>
-            <a:pPr>
-              <a:spcAft>
-                <a:spcPts val="1000"/>
-              </a:spcAft>
-            </a:pPr>
-            <a:r>
-              <a:rPr sz="2000" b="0" i="0">
-                <a:solidFill>
-                  <a:srgbClr val="333333"/>
-                </a:solidFill>
-                <a:latin typeface="Calibri"/>
-              </a:rPr>
-              <a:t> Reminder: always link a trend to </a:t>
-            </a:r>
-            <a:r>
-              <a:rPr sz="2000" b="1" i="0">
-                <a:solidFill>
-                  <a:srgbClr val="6E2337"/>
-                </a:solidFill>
-                <a:latin typeface="Calibri"/>
-              </a:rPr>
-              <a:t>at least two design fields</a:t>
-            </a:r>
-            <a:r>
-              <a:rPr sz="2000" b="0" i="0">
-                <a:solidFill>
-                  <a:srgbClr val="333333"/>
-                </a:solidFill>
-                <a:latin typeface="Calibri"/>
-              </a:rPr>
-              <a:t> and name the </a:t>
-            </a:r>
-            <a:r>
-              <a:rPr sz="2000" b="1" i="0">
-                <a:solidFill>
-                  <a:srgbClr val="6E2337"/>
-                </a:solidFill>
-                <a:latin typeface="Calibri"/>
-              </a:rPr>
-              <a:t>driving factor</a:t>
-            </a:r>
-            <a:r>
-              <a:rPr sz="2000" b="0" i="0">
-                <a:solidFill>
-                  <a:srgbClr val="333333"/>
-                </a:solidFill>
-                <a:latin typeface="Calibri"/>
-              </a:rPr>
-              <a:t> in exam responses. </a:t>
-            </a:r>
-          </a:p>
-        </p:txBody>
-      </p:sp>
-      <p:sp>
-        <p:nvSpPr>
-          <p:cNvPr id="4" name="Rectangle 3"/>
+          <p:cNvPr id="2" name="Rounded Rectangle 1"/>
           <p:cNvSpPr/>
           <p:nvPr/>
         </p:nvSpPr>
         <p:spPr>
           <a:xfrm>
-            <a:off x="548640" y="1234440"/>
-            <a:ext cx="1463040" cy="38100"/>
-          </a:xfrm>
-          <a:prstGeom prst="rect">
-            <a:avLst/>
+            <a:off x="685800" y="502920"/>
+            <a:ext cx="3291840" cy="457200"/>
+          </a:xfrm>
+          <a:prstGeom prst="roundRect">
+            <a:avLst>
+              <a:gd name="adj" fmla="val 50000"/>
+            </a:avLst>
           </a:prstGeom>
           <a:solidFill>
-            <a:srgbClr val="6E2337"/>
+            <a:srgbClr val="7A2E43"/>
           </a:solidFill>
           <a:ln>
             <a:noFill/>
@@ -7110,10 +9695,485 @@
           </a:fontRef>
         </p:style>
         <p:txBody>
-          <a:bodyPr rtlCol="0" anchor="ctr"/>
+          <a:bodyPr rtlCol="0" anchor="ctr" wrap="none" lIns="50800" rIns="50800"/>
           <a:lstStyle/>
           <a:p>
             <a:pPr algn="ctr"/>
+            <a:r>
+              <a:rPr sz="1100" b="1">
+                <a:solidFill>
+                  <a:srgbClr val="FFFFFF"/>
+                </a:solidFill>
+                <a:latin typeface="Calibri"/>
+              </a:rPr>
+              <a:t>TRENDS IN DESIGN</a:t>
+            </a:r>
+          </a:p>
+        </p:txBody>
+      </p:sp>
+      <p:sp>
+        <p:nvSpPr>
+          <p:cNvPr id="3" name="TextBox 2"/>
+          <p:cNvSpPr txBox="1"/>
+          <p:nvPr/>
+        </p:nvSpPr>
+        <p:spPr>
+          <a:xfrm>
+            <a:off x="685800" y="1051560"/>
+            <a:ext cx="10607040" cy="822960"/>
+          </a:xfrm>
+          <a:prstGeom prst="rect">
+            <a:avLst/>
+          </a:prstGeom>
+          <a:noFill/>
+        </p:spPr>
+        <p:txBody>
+          <a:bodyPr wrap="square" anchor="t">
+            <a:spAutoFit/>
+          </a:bodyPr>
+          <a:lstStyle/>
+          <a:p>
+            <a:pPr algn="l"/>
+            <a:r>
+              <a:rPr sz="2700" b="1" i="0">
+                <a:solidFill>
+                  <a:srgbClr val="2A1A1F"/>
+                </a:solidFill>
+                <a:latin typeface="Cambria"/>
+              </a:rPr>
+              <a:t>Trends in Design — Quick Reference</a:t>
+            </a:r>
+          </a:p>
+        </p:txBody>
+      </p:sp>
+      <p:sp>
+        <p:nvSpPr>
+          <p:cNvPr id="4" name="Rounded Rectangle 3"/>
+          <p:cNvSpPr/>
+          <p:nvPr/>
+        </p:nvSpPr>
+        <p:spPr>
+          <a:xfrm>
+            <a:off x="685800" y="1874519"/>
+            <a:ext cx="2500884" cy="1554480"/>
+          </a:xfrm>
+          <a:prstGeom prst="roundRect">
+            <a:avLst>
+              <a:gd name="adj" fmla="val 12000"/>
+            </a:avLst>
+          </a:prstGeom>
+          <a:solidFill>
+            <a:srgbClr val="EBDFE2"/>
+          </a:solidFill>
+          <a:ln>
+            <a:noFill/>
+          </a:ln>
+          <a:effectLst/>
+        </p:spPr>
+        <p:style>
+          <a:lnRef idx="1">
+            <a:schemeClr val="accent1"/>
+          </a:lnRef>
+          <a:fillRef idx="3">
+            <a:schemeClr val="accent1"/>
+          </a:fillRef>
+          <a:effectRef idx="2">
+            <a:schemeClr val="accent1"/>
+          </a:effectRef>
+          <a:fontRef idx="minor">
+            <a:schemeClr val="lt1"/>
+          </a:fontRef>
+        </p:style>
+        <p:txBody>
+          <a:bodyPr rtlCol="0" anchor="ctr" wrap="square" lIns="127000" rIns="127000" tIns="101600" bIns="101600"/>
+          <a:lstStyle/>
+          <a:p>
+            <a:pPr algn="ctr"/>
+            <a:r>
+              <a:rPr b="1" sz="1300">
+                <a:solidFill>
+                  <a:srgbClr val="612435"/>
+                </a:solidFill>
+                <a:latin typeface="Calibri"/>
+              </a:rPr>
+              <a:t>Social</a:t>
+            </a:r>
+          </a:p>
+          <a:p>
+            <a:r>
+              <a:rPr sz="1050">
+                <a:solidFill>
+                  <a:srgbClr val="2A1A1F"/>
+                </a:solidFill>
+                <a:latin typeface="Calibri"/>
+              </a:rPr>
+              <a:t>Lifestyle &amp; demographic shifts</a:t>
+            </a:r>
+          </a:p>
+        </p:txBody>
+      </p:sp>
+      <p:sp>
+        <p:nvSpPr>
+          <p:cNvPr id="5" name="Rounded Rectangle 4"/>
+          <p:cNvSpPr/>
+          <p:nvPr/>
+        </p:nvSpPr>
+        <p:spPr>
+          <a:xfrm>
+            <a:off x="3387852" y="1874519"/>
+            <a:ext cx="2500884" cy="1554480"/>
+          </a:xfrm>
+          <a:prstGeom prst="roundRect">
+            <a:avLst>
+              <a:gd name="adj" fmla="val 12000"/>
+            </a:avLst>
+          </a:prstGeom>
+          <a:solidFill>
+            <a:srgbClr val="F8F1E3"/>
+          </a:solidFill>
+          <a:ln>
+            <a:noFill/>
+          </a:ln>
+          <a:effectLst/>
+        </p:spPr>
+        <p:style>
+          <a:lnRef idx="1">
+            <a:schemeClr val="accent1"/>
+          </a:lnRef>
+          <a:fillRef idx="3">
+            <a:schemeClr val="accent1"/>
+          </a:fillRef>
+          <a:effectRef idx="2">
+            <a:schemeClr val="accent1"/>
+          </a:effectRef>
+          <a:fontRef idx="minor">
+            <a:schemeClr val="lt1"/>
+          </a:fontRef>
+        </p:style>
+        <p:txBody>
+          <a:bodyPr rtlCol="0" anchor="ctr" wrap="square" lIns="127000" rIns="127000" tIns="101600" bIns="101600"/>
+          <a:lstStyle/>
+          <a:p>
+            <a:pPr algn="ctr"/>
+            <a:r>
+              <a:rPr b="1" sz="1300">
+                <a:solidFill>
+                  <a:srgbClr val="AB813B"/>
+                </a:solidFill>
+                <a:latin typeface="Calibri"/>
+              </a:rPr>
+              <a:t>Cultural</a:t>
+            </a:r>
+          </a:p>
+          <a:p>
+            <a:r>
+              <a:rPr sz="1050">
+                <a:solidFill>
+                  <a:srgbClr val="2A1A1F"/>
+                </a:solidFill>
+                <a:latin typeface="Calibri"/>
+              </a:rPr>
+              <a:t>Values, identity, heritage</a:t>
+            </a:r>
+          </a:p>
+        </p:txBody>
+      </p:sp>
+      <p:sp>
+        <p:nvSpPr>
+          <p:cNvPr id="6" name="Rounded Rectangle 5"/>
+          <p:cNvSpPr/>
+          <p:nvPr/>
+        </p:nvSpPr>
+        <p:spPr>
+          <a:xfrm>
+            <a:off x="6089904" y="1874519"/>
+            <a:ext cx="2500884" cy="1554480"/>
+          </a:xfrm>
+          <a:prstGeom prst="roundRect">
+            <a:avLst>
+              <a:gd name="adj" fmla="val 12000"/>
+            </a:avLst>
+          </a:prstGeom>
+          <a:solidFill>
+            <a:srgbClr val="F9EDF0"/>
+          </a:solidFill>
+          <a:ln>
+            <a:noFill/>
+          </a:ln>
+          <a:effectLst/>
+        </p:spPr>
+        <p:style>
+          <a:lnRef idx="1">
+            <a:schemeClr val="accent1"/>
+          </a:lnRef>
+          <a:fillRef idx="3">
+            <a:schemeClr val="accent1"/>
+          </a:fillRef>
+          <a:effectRef idx="2">
+            <a:schemeClr val="accent1"/>
+          </a:effectRef>
+          <a:fontRef idx="minor">
+            <a:schemeClr val="lt1"/>
+          </a:fontRef>
+        </p:style>
+        <p:txBody>
+          <a:bodyPr rtlCol="0" anchor="ctr" wrap="square" lIns="127000" rIns="127000" tIns="101600" bIns="101600"/>
+          <a:lstStyle/>
+          <a:p>
+            <a:pPr algn="ctr"/>
+            <a:r>
+              <a:rPr b="1" sz="1300">
+                <a:solidFill>
+                  <a:srgbClr val="AD707E"/>
+                </a:solidFill>
+                <a:latin typeface="Calibri"/>
+              </a:rPr>
+              <a:t>Economic</a:t>
+            </a:r>
+          </a:p>
+          <a:p>
+            <a:r>
+              <a:rPr sz="1050">
+                <a:solidFill>
+                  <a:srgbClr val="2A1A1F"/>
+                </a:solidFill>
+                <a:latin typeface="Calibri"/>
+              </a:rPr>
+              <a:t>Cost, demand, market conditions</a:t>
+            </a:r>
+          </a:p>
+        </p:txBody>
+      </p:sp>
+      <p:sp>
+        <p:nvSpPr>
+          <p:cNvPr id="7" name="Rounded Rectangle 6"/>
+          <p:cNvSpPr/>
+          <p:nvPr/>
+        </p:nvSpPr>
+        <p:spPr>
+          <a:xfrm>
+            <a:off x="8791956" y="1874519"/>
+            <a:ext cx="2500884" cy="1554480"/>
+          </a:xfrm>
+          <a:prstGeom prst="roundRect">
+            <a:avLst>
+              <a:gd name="adj" fmla="val 12000"/>
+            </a:avLst>
+          </a:prstGeom>
+          <a:solidFill>
+            <a:srgbClr val="EBDFE2"/>
+          </a:solidFill>
+          <a:ln>
+            <a:noFill/>
+          </a:ln>
+          <a:effectLst/>
+        </p:spPr>
+        <p:style>
+          <a:lnRef idx="1">
+            <a:schemeClr val="accent1"/>
+          </a:lnRef>
+          <a:fillRef idx="3">
+            <a:schemeClr val="accent1"/>
+          </a:fillRef>
+          <a:effectRef idx="2">
+            <a:schemeClr val="accent1"/>
+          </a:effectRef>
+          <a:fontRef idx="minor">
+            <a:schemeClr val="lt1"/>
+          </a:fontRef>
+        </p:style>
+        <p:txBody>
+          <a:bodyPr rtlCol="0" anchor="ctr" wrap="square" lIns="127000" rIns="127000" tIns="101600" bIns="101600"/>
+          <a:lstStyle/>
+          <a:p>
+            <a:pPr algn="ctr"/>
+            <a:r>
+              <a:rPr b="1" sz="1300">
+                <a:solidFill>
+                  <a:srgbClr val="612435"/>
+                </a:solidFill>
+                <a:latin typeface="Calibri"/>
+              </a:rPr>
+              <a:t>Technological</a:t>
+            </a:r>
+          </a:p>
+          <a:p>
+            <a:r>
+              <a:rPr sz="1050">
+                <a:solidFill>
+                  <a:srgbClr val="2A1A1F"/>
+                </a:solidFill>
+                <a:latin typeface="Calibri"/>
+              </a:rPr>
+              <a:t>New tools, materials, methods</a:t>
+            </a:r>
+          </a:p>
+        </p:txBody>
+      </p:sp>
+      <p:sp>
+        <p:nvSpPr>
+          <p:cNvPr id="8" name="Rounded Rectangle 7"/>
+          <p:cNvSpPr/>
+          <p:nvPr/>
+        </p:nvSpPr>
+        <p:spPr>
+          <a:xfrm>
+            <a:off x="685800" y="3630167"/>
+            <a:ext cx="2500884" cy="1554480"/>
+          </a:xfrm>
+          <a:prstGeom prst="roundRect">
+            <a:avLst>
+              <a:gd name="adj" fmla="val 12000"/>
+            </a:avLst>
+          </a:prstGeom>
+          <a:solidFill>
+            <a:srgbClr val="F8F1E3"/>
+          </a:solidFill>
+          <a:ln>
+            <a:noFill/>
+          </a:ln>
+          <a:effectLst/>
+        </p:spPr>
+        <p:style>
+          <a:lnRef idx="1">
+            <a:schemeClr val="accent1"/>
+          </a:lnRef>
+          <a:fillRef idx="3">
+            <a:schemeClr val="accent1"/>
+          </a:fillRef>
+          <a:effectRef idx="2">
+            <a:schemeClr val="accent1"/>
+          </a:effectRef>
+          <a:fontRef idx="minor">
+            <a:schemeClr val="lt1"/>
+          </a:fontRef>
+        </p:style>
+        <p:txBody>
+          <a:bodyPr rtlCol="0" anchor="ctr" wrap="square" lIns="127000" rIns="127000" tIns="101600" bIns="101600"/>
+          <a:lstStyle/>
+          <a:p>
+            <a:pPr algn="ctr"/>
+            <a:r>
+              <a:rPr b="1" sz="1300">
+                <a:solidFill>
+                  <a:srgbClr val="AB813B"/>
+                </a:solidFill>
+                <a:latin typeface="Calibri"/>
+              </a:rPr>
+              <a:t>Environmental</a:t>
+            </a:r>
+          </a:p>
+          <a:p>
+            <a:r>
+              <a:rPr sz="1050">
+                <a:solidFill>
+                  <a:srgbClr val="2A1A1F"/>
+                </a:solidFill>
+                <a:latin typeface="Calibri"/>
+              </a:rPr>
+              <a:t>Sustainability, resource pressure</a:t>
+            </a:r>
+          </a:p>
+        </p:txBody>
+      </p:sp>
+      <p:sp>
+        <p:nvSpPr>
+          <p:cNvPr id="9" name="Rounded Rectangle 8"/>
+          <p:cNvSpPr/>
+          <p:nvPr/>
+        </p:nvSpPr>
+        <p:spPr>
+          <a:xfrm>
+            <a:off x="685800" y="5431535"/>
+            <a:ext cx="10607040" cy="1106425"/>
+          </a:xfrm>
+          <a:prstGeom prst="roundRect">
+            <a:avLst>
+              <a:gd name="adj" fmla="val 10000"/>
+            </a:avLst>
+          </a:prstGeom>
+          <a:solidFill>
+            <a:srgbClr val="F8F1E3"/>
+          </a:solidFill>
+          <a:ln>
+            <a:noFill/>
+          </a:ln>
+          <a:effectLst/>
+        </p:spPr>
+        <p:style>
+          <a:lnRef idx="1">
+            <a:schemeClr val="accent1"/>
+          </a:lnRef>
+          <a:fillRef idx="3">
+            <a:schemeClr val="accent1"/>
+          </a:fillRef>
+          <a:effectRef idx="2">
+            <a:schemeClr val="accent1"/>
+          </a:effectRef>
+          <a:fontRef idx="minor">
+            <a:schemeClr val="lt1"/>
+          </a:fontRef>
+        </p:style>
+        <p:txBody>
+          <a:bodyPr rtlCol="0" anchor="ctr" lIns="203200" rIns="203200" tIns="101600" bIns="101600" wrap="square"/>
+          <a:lstStyle/>
+          <a:p>
+            <a:pPr algn="ctr" indent="-203200" marL="203200">
+              <a:spcAft>
+                <a:spcPts val="900"/>
+              </a:spcAft>
+              <a:buClr>
+                <a:srgbClr val="D6A24A"/>
+              </a:buClr>
+              <a:buSzPct val="90000"/>
+              <a:buFont typeface="Arial"/>
+              <a:buChar char="●"/>
+            </a:pPr>
+            <a:r>
+              <a:rPr sz="1200" b="0" i="0">
+                <a:solidFill>
+                  <a:srgbClr val="2A1A1F"/>
+                </a:solidFill>
+                <a:latin typeface="Calibri"/>
+              </a:rPr>
+              <a:t> Reminder: always link a trend to </a:t>
+            </a:r>
+            <a:r>
+              <a:rPr sz="1200" b="1" i="0">
+                <a:solidFill>
+                  <a:srgbClr val="B5893E"/>
+                </a:solidFill>
+                <a:latin typeface="Calibri"/>
+              </a:rPr>
+              <a:t>at least two design fields</a:t>
+            </a:r>
+            <a:r>
+              <a:rPr sz="1200" b="0" i="0">
+                <a:solidFill>
+                  <a:srgbClr val="2A1A1F"/>
+                </a:solidFill>
+                <a:latin typeface="Calibri"/>
+              </a:rPr>
+              <a:t> and name the </a:t>
+            </a:r>
+            <a:r>
+              <a:rPr sz="1200" b="1" i="0">
+                <a:solidFill>
+                  <a:srgbClr val="B5893E"/>
+                </a:solidFill>
+                <a:latin typeface="Calibri"/>
+              </a:rPr>
+              <a:t>driving factor</a:t>
+            </a:r>
+            <a:r>
+              <a:rPr sz="1200" b="0" i="0">
+                <a:solidFill>
+                  <a:srgbClr val="2A1A1F"/>
+                </a:solidFill>
+                <a:latin typeface="Calibri"/>
+              </a:rPr>
+              <a:t> in exam responses. </a:t>
+            </a:r>
           </a:p>
         </p:txBody>
       </p:sp>

--- a/teaching-materials/vcd-vce/powerpoint/Unit2-Design-Contexts-and-Connections.pptx
+++ b/teaching-materials/vcd-vce/powerpoint/Unit2-Design-Contexts-and-Connections.pptx
@@ -22,6 +22,16 @@
     <p:sldId id="270" r:id="rId21"/>
     <p:sldId id="271" r:id="rId22"/>
     <p:sldId id="272" r:id="rId23"/>
+    <p:sldId id="273" r:id="rId24"/>
+    <p:sldId id="274" r:id="rId25"/>
+    <p:sldId id="275" r:id="rId26"/>
+    <p:sldId id="276" r:id="rId27"/>
+    <p:sldId id="277" r:id="rId28"/>
+    <p:sldId id="278" r:id="rId29"/>
+    <p:sldId id="279" r:id="rId30"/>
+    <p:sldId id="280" r:id="rId31"/>
+    <p:sldId id="281" r:id="rId32"/>
+    <p:sldId id="282" r:id="rId33"/>
   </p:sldIdLst>
   <p:sldSz cx="12191695" cy="6858000" type="screen4x3"/>
   <p:notesSz cx="6858000" cy="9144000"/>
@@ -6409,7 +6419,7 @@
     <p:bg>
       <p:bgPr>
         <a:solidFill>
-          <a:srgbClr val="7A2E43"/>
+          <a:srgbClr val="D6A24A"/>
         </a:solidFill>
         <a:effectLst/>
       </p:bgPr>
@@ -6429,14 +6439,14 @@
         </p:nvSpPr>
         <p:spPr>
           <a:xfrm>
-            <a:off x="-1097280" y="4114800"/>
-            <a:ext cx="3108960" cy="3108960"/>
+            <a:off x="9692640" y="-914400"/>
+            <a:ext cx="2926080" cy="2926080"/>
           </a:xfrm>
           <a:prstGeom prst="ellipse">
             <a:avLst/>
           </a:prstGeom>
           <a:solidFill>
-            <a:srgbClr val="6B283A"/>
+            <a:srgbClr val="BC8E41"/>
           </a:solidFill>
           <a:ln>
             <a:noFill/>
@@ -6473,14 +6483,14 @@
         </p:nvSpPr>
         <p:spPr>
           <a:xfrm>
-            <a:off x="9875520" y="-1188720"/>
-            <a:ext cx="2743200" cy="2743200"/>
+            <a:off x="-914400" y="4937760"/>
+            <a:ext cx="2377440" cy="2377440"/>
           </a:xfrm>
           <a:prstGeom prst="ellipse">
             <a:avLst/>
           </a:prstGeom>
           <a:solidFill>
-            <a:srgbClr val="D6A24A"/>
+            <a:srgbClr val="BC8E41"/>
           </a:solidFill>
           <a:ln>
             <a:noFill/>
@@ -6517,12 +6527,12 @@
         </p:nvSpPr>
         <p:spPr>
           <a:xfrm>
-            <a:off x="1920240" y="2286000"/>
-            <a:ext cx="8321040" cy="2377440"/>
+            <a:off x="822960" y="1051560"/>
+            <a:ext cx="1188720" cy="502920"/>
           </a:xfrm>
           <a:prstGeom prst="roundRect">
             <a:avLst>
-              <a:gd name="adj" fmla="val 20000"/>
+              <a:gd name="adj" fmla="val 50000"/>
             </a:avLst>
           </a:prstGeom>
           <a:solidFill>
@@ -6548,30 +6558,849 @@
           </a:fontRef>
         </p:style>
         <p:txBody>
+          <a:bodyPr rtlCol="0" anchor="ctr" wrap="none" lIns="50800" rIns="50800"/>
+          <a:lstStyle/>
+          <a:p>
+            <a:pPr algn="ctr"/>
+            <a:r>
+              <a:rPr sz="1400" b="1">
+                <a:solidFill>
+                  <a:srgbClr val="AB813B"/>
+                </a:solidFill>
+                <a:latin typeface="Calibri"/>
+              </a:rPr>
+              <a:t>03</a:t>
+            </a:r>
+          </a:p>
+        </p:txBody>
+      </p:sp>
+      <p:sp>
+        <p:nvSpPr>
+          <p:cNvPr id="5" name="Rounded Rectangle 4"/>
+          <p:cNvSpPr/>
+          <p:nvPr/>
+        </p:nvSpPr>
+        <p:spPr>
+          <a:xfrm>
+            <a:off x="822960" y="2011680"/>
+            <a:ext cx="10515600" cy="2834640"/>
+          </a:xfrm>
+          <a:prstGeom prst="roundRect">
+            <a:avLst>
+              <a:gd name="adj" fmla="val 18000"/>
+            </a:avLst>
+          </a:prstGeom>
+          <a:solidFill>
+            <a:srgbClr val="FFFFFF"/>
+          </a:solidFill>
+          <a:ln>
+            <a:noFill/>
+          </a:ln>
+          <a:effectLst/>
+        </p:spPr>
+        <p:style>
+          <a:lnRef idx="1">
+            <a:schemeClr val="accent1"/>
+          </a:lnRef>
+          <a:fillRef idx="3">
+            <a:schemeClr val="accent1"/>
+          </a:fillRef>
+          <a:effectRef idx="2">
+            <a:schemeClr val="accent1"/>
+          </a:effectRef>
+          <a:fontRef idx="minor">
+            <a:schemeClr val="lt1"/>
+          </a:fontRef>
+        </p:style>
+        <p:txBody>
           <a:bodyPr rtlCol="0" anchor="ctr"/>
           <a:lstStyle/>
           <a:p>
             <a:pPr algn="ctr"/>
-            <a:r>
-              <a:rPr b="1" sz="3000">
-                <a:solidFill>
-                  <a:srgbClr val="7A2E43"/>
+          </a:p>
+        </p:txBody>
+      </p:sp>
+      <p:sp>
+        <p:nvSpPr>
+          <p:cNvPr id="6" name="TextBox 5"/>
+          <p:cNvSpPr txBox="1"/>
+          <p:nvPr/>
+        </p:nvSpPr>
+        <p:spPr>
+          <a:xfrm>
+            <a:off x="1280160" y="2697480"/>
+            <a:ext cx="9601200" cy="1097280"/>
+          </a:xfrm>
+          <a:prstGeom prst="rect">
+            <a:avLst/>
+          </a:prstGeom>
+          <a:noFill/>
+        </p:spPr>
+        <p:txBody>
+          <a:bodyPr wrap="square" anchor="t">
+            <a:spAutoFit/>
+          </a:bodyPr>
+          <a:lstStyle/>
+          <a:p>
+            <a:pPr algn="l"/>
+            <a:r>
+              <a:rPr sz="3400" b="1" i="0">
+                <a:solidFill>
+                  <a:srgbClr val="B5893E"/>
                 </a:solidFill>
                 <a:latin typeface="Cambria"/>
               </a:rPr>
-              <a:t>End of Unit 2</a:t>
-            </a:r>
-          </a:p>
+              <a:t>Extended Knowledge</a:t>
+            </a:r>
+          </a:p>
+        </p:txBody>
+      </p:sp>
+      <p:sp>
+        <p:nvSpPr>
+          <p:cNvPr id="7" name="TextBox 6"/>
+          <p:cNvSpPr txBox="1"/>
+          <p:nvPr/>
+        </p:nvSpPr>
+        <p:spPr>
+          <a:xfrm>
+            <a:off x="1280160" y="3657600"/>
+            <a:ext cx="9601200" cy="548640"/>
+          </a:xfrm>
+          <a:prstGeom prst="rect">
+            <a:avLst/>
+          </a:prstGeom>
+          <a:noFill/>
+        </p:spPr>
+        <p:txBody>
+          <a:bodyPr wrap="square" anchor="t">
+            <a:spAutoFit/>
+          </a:bodyPr>
+          <a:lstStyle/>
+          <a:p>
+            <a:pPr algn="l"/>
+            <a:r>
+              <a:rPr sz="1500" b="0" i="0">
+                <a:solidFill>
+                  <a:srgbClr val="6B6B6B"/>
+                </a:solidFill>
+                <a:latin typeface="Calibri"/>
+              </a:rPr>
+              <a:t>Beyond the study design</a:t>
+            </a:r>
+          </a:p>
+        </p:txBody>
+      </p:sp>
+    </p:spTree>
+  </p:cSld>
+  <p:clrMapOvr>
+    <a:masterClrMapping/>
+  </p:clrMapOvr>
+</p:sld>
+</file>
+
+<file path=ppt/slides/slide18.xml><?xml version="1.0" encoding="utf-8"?>
+<p:sld xmlns:a="http://schemas.openxmlformats.org/drawingml/2006/main" xmlns:p="http://schemas.openxmlformats.org/presentationml/2006/main" xmlns:r="http://schemas.openxmlformats.org/officeDocument/2006/relationships">
+  <p:cSld>
+    <p:bg>
+      <p:bgPr>
+        <a:solidFill>
+          <a:srgbClr val="FBF5F1"/>
+        </a:solidFill>
+        <a:effectLst/>
+      </p:bgPr>
+    </p:bg>
+    <p:spTree>
+      <p:nvGrpSpPr>
+        <p:cNvPr id="1" name=""/>
+        <p:cNvGrpSpPr/>
+        <p:nvPr/>
+      </p:nvGrpSpPr>
+      <p:grpSpPr/>
+      <p:sp>
+        <p:nvSpPr>
+          <p:cNvPr id="2" name="Rounded Rectangle 1"/>
+          <p:cNvSpPr/>
+          <p:nvPr/>
+        </p:nvSpPr>
+        <p:spPr>
+          <a:xfrm>
+            <a:off x="685800" y="502920"/>
+            <a:ext cx="3291840" cy="457200"/>
+          </a:xfrm>
+          <a:prstGeom prst="roundRect">
+            <a:avLst>
+              <a:gd name="adj" fmla="val 50000"/>
+            </a:avLst>
+          </a:prstGeom>
+          <a:solidFill>
+            <a:srgbClr val="7A2E43"/>
+          </a:solidFill>
+          <a:ln>
+            <a:noFill/>
+          </a:ln>
+          <a:effectLst/>
+        </p:spPr>
+        <p:style>
+          <a:lnRef idx="1">
+            <a:schemeClr val="accent1"/>
+          </a:lnRef>
+          <a:fillRef idx="3">
+            <a:schemeClr val="accent1"/>
+          </a:fillRef>
+          <a:effectRef idx="2">
+            <a:schemeClr val="accent1"/>
+          </a:effectRef>
+          <a:fontRef idx="minor">
+            <a:schemeClr val="lt1"/>
+          </a:fontRef>
+        </p:style>
+        <p:txBody>
+          <a:bodyPr rtlCol="0" anchor="ctr" wrap="none" lIns="50800" rIns="50800"/>
+          <a:lstStyle/>
           <a:p>
             <a:pPr algn="ctr"/>
             <a:r>
-              <a:rPr sz="1400">
-                <a:solidFill>
-                  <a:srgbClr val="595959"/>
-                </a:solidFill>
-              </a:rPr>
-              <a:t>Review the matching workbook to consolidate what you have learnt.</a:t>
-            </a:r>
+              <a:rPr sz="1100" b="1">
+                <a:solidFill>
+                  <a:srgbClr val="FFFFFF"/>
+                </a:solidFill>
+                <a:latin typeface="Calibri"/>
+              </a:rPr>
+              <a:t>EXTENDED KNOWLEDGE</a:t>
+            </a:r>
+          </a:p>
+        </p:txBody>
+      </p:sp>
+      <p:sp>
+        <p:nvSpPr>
+          <p:cNvPr id="3" name="TextBox 2"/>
+          <p:cNvSpPr txBox="1"/>
+          <p:nvPr/>
+        </p:nvSpPr>
+        <p:spPr>
+          <a:xfrm>
+            <a:off x="685800" y="1051560"/>
+            <a:ext cx="10607040" cy="822960"/>
+          </a:xfrm>
+          <a:prstGeom prst="rect">
+            <a:avLst/>
+          </a:prstGeom>
+          <a:noFill/>
+        </p:spPr>
+        <p:txBody>
+          <a:bodyPr wrap="square" anchor="t">
+            <a:spAutoFit/>
+          </a:bodyPr>
+          <a:lstStyle/>
+          <a:p>
+            <a:pPr algn="l"/>
+            <a:r>
+              <a:rPr sz="2700" b="1" i="0">
+                <a:solidFill>
+                  <a:srgbClr val="2A1A1F"/>
+                </a:solidFill>
+                <a:latin typeface="Cambria"/>
+              </a:rPr>
+              <a:t>More Design Movements and Trends in History</a:t>
+            </a:r>
+          </a:p>
+        </p:txBody>
+      </p:sp>
+      <p:sp>
+        <p:nvSpPr>
+          <p:cNvPr id="4" name="Rounded Rectangle 3"/>
+          <p:cNvSpPr/>
+          <p:nvPr/>
+        </p:nvSpPr>
+        <p:spPr>
+          <a:xfrm>
+            <a:off x="685800" y="1874519"/>
+            <a:ext cx="10607040" cy="4526280"/>
+          </a:xfrm>
+          <a:prstGeom prst="roundRect">
+            <a:avLst>
+              <a:gd name="adj" fmla="val 6000"/>
+            </a:avLst>
+          </a:prstGeom>
+          <a:solidFill>
+            <a:srgbClr val="F1EAEC"/>
+          </a:solidFill>
+          <a:ln>
+            <a:noFill/>
+          </a:ln>
+          <a:effectLst/>
+        </p:spPr>
+        <p:style>
+          <a:lnRef idx="1">
+            <a:schemeClr val="accent1"/>
+          </a:lnRef>
+          <a:fillRef idx="3">
+            <a:schemeClr val="accent1"/>
+          </a:fillRef>
+          <a:effectRef idx="2">
+            <a:schemeClr val="accent1"/>
+          </a:effectRef>
+          <a:fontRef idx="minor">
+            <a:schemeClr val="lt1"/>
+          </a:fontRef>
+        </p:style>
+        <p:txBody>
+          <a:bodyPr rtlCol="0" anchor="ctr" lIns="330200" rIns="330200" tIns="254000" bIns="254000" wrap="square"/>
+          <a:lstStyle/>
+          <a:p>
+            <a:pPr algn="ctr" indent="-203200" marL="203200">
+              <a:spcAft>
+                <a:spcPts val="900"/>
+              </a:spcAft>
+              <a:buClr>
+                <a:srgbClr val="7A2E43"/>
+              </a:buClr>
+              <a:buSzPct val="90000"/>
+              <a:buFont typeface="Arial"/>
+              <a:buChar char="●"/>
+            </a:pPr>
+            <a:r>
+              <a:rPr sz="1500" b="1" i="0">
+                <a:solidFill>
+                  <a:srgbClr val="672738"/>
+                </a:solidFill>
+                <a:latin typeface="Calibri"/>
+              </a:rPr>
+              <a:t>Movements not covered in Unit 1</a:t>
+            </a:r>
+          </a:p>
+          <a:p>
+            <a:pPr indent="-203200" marL="203200">
+              <a:spcAft>
+                <a:spcPts val="900"/>
+              </a:spcAft>
+              <a:buClr>
+                <a:srgbClr val="7A2E43"/>
+              </a:buClr>
+              <a:buSzPct val="90000"/>
+              <a:buFont typeface="Arial"/>
+              <a:buChar char="–"/>
+            </a:pPr>
+            <a:r>
+              <a:rPr sz="1350" b="0" i="0">
+                <a:solidFill>
+                  <a:srgbClr val="2A1A1F"/>
+                </a:solidFill>
+                <a:latin typeface="Calibri"/>
+              </a:rPr>
+              <a:t>Arts and Crafts (late 1800s) — reaction against industrialisation, craftsmanship, William Morris</a:t>
+            </a:r>
+          </a:p>
+          <a:p>
+            <a:pPr indent="-203200" marL="203200">
+              <a:spcAft>
+                <a:spcPts val="900"/>
+              </a:spcAft>
+              <a:buClr>
+                <a:srgbClr val="7A2E43"/>
+              </a:buClr>
+              <a:buSzPct val="90000"/>
+              <a:buFont typeface="Arial"/>
+              <a:buChar char="–"/>
+            </a:pPr>
+            <a:r>
+              <a:rPr sz="1350" b="0" i="0">
+                <a:solidFill>
+                  <a:srgbClr val="2A1A1F"/>
+                </a:solidFill>
+                <a:latin typeface="Calibri"/>
+              </a:rPr>
+              <a:t>Art Nouveau (1890s-1910s) — organic, flowing lines inspired by nature</a:t>
+            </a:r>
+          </a:p>
+          <a:p>
+            <a:pPr indent="-203200" marL="203200">
+              <a:spcAft>
+                <a:spcPts val="900"/>
+              </a:spcAft>
+              <a:buClr>
+                <a:srgbClr val="7A2E43"/>
+              </a:buClr>
+              <a:buSzPct val="90000"/>
+              <a:buFont typeface="Arial"/>
+              <a:buChar char="–"/>
+            </a:pPr>
+            <a:r>
+              <a:rPr sz="1350" b="0" i="0">
+                <a:solidFill>
+                  <a:srgbClr val="2A1A1F"/>
+                </a:solidFill>
+                <a:latin typeface="Calibri"/>
+              </a:rPr>
+              <a:t>Constructivism (1920s Russia) — geometric abstraction in service of social/political ideas</a:t>
+            </a:r>
+          </a:p>
+          <a:p>
+            <a:pPr indent="-203200" marL="203200">
+              <a:spcAft>
+                <a:spcPts val="900"/>
+              </a:spcAft>
+              <a:buClr>
+                <a:srgbClr val="7A2E43"/>
+              </a:buClr>
+              <a:buSzPct val="90000"/>
+              <a:buFont typeface="Arial"/>
+              <a:buChar char="–"/>
+            </a:pPr>
+            <a:r>
+              <a:rPr sz="1350" b="0" i="0">
+                <a:solidFill>
+                  <a:srgbClr val="2A1A1F"/>
+                </a:solidFill>
+                <a:latin typeface="Calibri"/>
+              </a:rPr>
+              <a:t>De Stijl (1917 onward) — primary colours, grids, Piet Mondrian and Theo van Doesburg</a:t>
+            </a:r>
+          </a:p>
+          <a:p>
+            <a:pPr indent="-203200" marL="203200">
+              <a:spcAft>
+                <a:spcPts val="900"/>
+              </a:spcAft>
+              <a:buClr>
+                <a:srgbClr val="7A2E43"/>
+              </a:buClr>
+              <a:buSzPct val="90000"/>
+              <a:buFont typeface="Arial"/>
+              <a:buChar char="–"/>
+            </a:pPr>
+            <a:r>
+              <a:rPr sz="1350" b="0" i="0">
+                <a:solidFill>
+                  <a:srgbClr val="2A1A1F"/>
+                </a:solidFill>
+                <a:latin typeface="Calibri"/>
+              </a:rPr>
+              <a:t>Memphis Group (1980s) — bold colour, clashing patterns, postmodern furniture and product design</a:t>
+            </a:r>
+          </a:p>
+          <a:p>
+            <a:pPr indent="-203200" marL="203200">
+              <a:spcAft>
+                <a:spcPts val="900"/>
+              </a:spcAft>
+              <a:buClr>
+                <a:srgbClr val="7A2E43"/>
+              </a:buClr>
+              <a:buSzPct val="90000"/>
+              <a:buFont typeface="Arial"/>
+              <a:buChar char="–"/>
+            </a:pPr>
+            <a:r>
+              <a:rPr sz="1350" b="0" i="0">
+                <a:solidFill>
+                  <a:srgbClr val="2A1A1F"/>
+                </a:solidFill>
+                <a:latin typeface="Calibri"/>
+              </a:rPr>
+              <a:t>Minimalism — reduction to essential form, 'less is more'</a:t>
+            </a:r>
+          </a:p>
+          <a:p>
+            <a:pPr indent="-203200" marL="203200">
+              <a:spcAft>
+                <a:spcPts val="900"/>
+              </a:spcAft>
+              <a:buClr>
+                <a:srgbClr val="7A2E43"/>
+              </a:buClr>
+              <a:buSzPct val="90000"/>
+              <a:buFont typeface="Arial"/>
+              <a:buChar char="–"/>
+            </a:pPr>
+            <a:r>
+              <a:rPr sz="1350" b="0" i="0">
+                <a:solidFill>
+                  <a:srgbClr val="2A1A1F"/>
+                </a:solidFill>
+                <a:latin typeface="Calibri"/>
+              </a:rPr>
+              <a:t>Brutalism — raw, unornamented forms in both architecture and web/graphic design</a:t>
+            </a:r>
+          </a:p>
+          <a:p>
+            <a:pPr indent="-203200" marL="203200">
+              <a:spcAft>
+                <a:spcPts val="900"/>
+              </a:spcAft>
+              <a:buClr>
+                <a:srgbClr val="7A2E43"/>
+              </a:buClr>
+              <a:buSzPct val="90000"/>
+              <a:buFont typeface="Arial"/>
+              <a:buChar char="●"/>
+            </a:pPr>
+            <a:r>
+              <a:rPr sz="1500" b="1" i="0">
+                <a:solidFill>
+                  <a:srgbClr val="672738"/>
+                </a:solidFill>
+                <a:latin typeface="Calibri"/>
+              </a:rPr>
+              <a:t>Contemporary considerations</a:t>
+            </a:r>
+          </a:p>
+          <a:p>
+            <a:pPr indent="-203200" marL="203200">
+              <a:spcAft>
+                <a:spcPts val="900"/>
+              </a:spcAft>
+              <a:buClr>
+                <a:srgbClr val="7A2E43"/>
+              </a:buClr>
+              <a:buSzPct val="90000"/>
+              <a:buFont typeface="Arial"/>
+              <a:buChar char="–"/>
+            </a:pPr>
+            <a:r>
+              <a:rPr sz="1350" b="0" i="0">
+                <a:solidFill>
+                  <a:srgbClr val="2A1A1F"/>
+                </a:solidFill>
+                <a:latin typeface="Calibri"/>
+              </a:rPr>
+              <a:t>Y2K aesthetic revival, AI-generated imagery and the ethical questions it raises around authorship and originality, and the growing influence of motion/interactive design as screens become the primary medium for communication design.</a:t>
+            </a:r>
+          </a:p>
+        </p:txBody>
+      </p:sp>
+      <p:sp>
+        <p:nvSpPr>
+          <p:cNvPr id="5" name="Oval 4"/>
+          <p:cNvSpPr/>
+          <p:nvPr/>
+        </p:nvSpPr>
+        <p:spPr>
+          <a:xfrm>
+            <a:off x="10881360" y="5943600"/>
+            <a:ext cx="1005840" cy="1005840"/>
+          </a:xfrm>
+          <a:prstGeom prst="ellipse">
+            <a:avLst/>
+          </a:prstGeom>
+          <a:solidFill>
+            <a:srgbClr val="EDCBD3"/>
+          </a:solidFill>
+          <a:ln>
+            <a:noFill/>
+          </a:ln>
+          <a:effectLst/>
+        </p:spPr>
+        <p:style>
+          <a:lnRef idx="1">
+            <a:schemeClr val="accent1"/>
+          </a:lnRef>
+          <a:fillRef idx="3">
+            <a:schemeClr val="accent1"/>
+          </a:fillRef>
+          <a:effectRef idx="2">
+            <a:schemeClr val="accent1"/>
+          </a:effectRef>
+          <a:fontRef idx="minor">
+            <a:schemeClr val="lt1"/>
+          </a:fontRef>
+        </p:style>
+        <p:txBody>
+          <a:bodyPr rtlCol="0" anchor="ctr"/>
+          <a:lstStyle/>
+          <a:p>
+            <a:pPr algn="ctr"/>
+          </a:p>
+        </p:txBody>
+      </p:sp>
+    </p:spTree>
+  </p:cSld>
+  <p:clrMapOvr>
+    <a:masterClrMapping/>
+  </p:clrMapOvr>
+</p:sld>
+</file>
+
+<file path=ppt/slides/slide19.xml><?xml version="1.0" encoding="utf-8"?>
+<p:sld xmlns:a="http://schemas.openxmlformats.org/drawingml/2006/main" xmlns:p="http://schemas.openxmlformats.org/presentationml/2006/main" xmlns:r="http://schemas.openxmlformats.org/officeDocument/2006/relationships">
+  <p:cSld>
+    <p:bg>
+      <p:bgPr>
+        <a:solidFill>
+          <a:srgbClr val="FBF5F1"/>
+        </a:solidFill>
+        <a:effectLst/>
+      </p:bgPr>
+    </p:bg>
+    <p:spTree>
+      <p:nvGrpSpPr>
+        <p:cNvPr id="1" name=""/>
+        <p:cNvGrpSpPr/>
+        <p:nvPr/>
+      </p:nvGrpSpPr>
+      <p:grpSpPr/>
+      <p:sp>
+        <p:nvSpPr>
+          <p:cNvPr id="2" name="Rounded Rectangle 1"/>
+          <p:cNvSpPr/>
+          <p:nvPr/>
+        </p:nvSpPr>
+        <p:spPr>
+          <a:xfrm>
+            <a:off x="685800" y="502920"/>
+            <a:ext cx="3291840" cy="457200"/>
+          </a:xfrm>
+          <a:prstGeom prst="roundRect">
+            <a:avLst>
+              <a:gd name="adj" fmla="val 50000"/>
+            </a:avLst>
+          </a:prstGeom>
+          <a:solidFill>
+            <a:srgbClr val="7A2E43"/>
+          </a:solidFill>
+          <a:ln>
+            <a:noFill/>
+          </a:ln>
+          <a:effectLst/>
+        </p:spPr>
+        <p:style>
+          <a:lnRef idx="1">
+            <a:schemeClr val="accent1"/>
+          </a:lnRef>
+          <a:fillRef idx="3">
+            <a:schemeClr val="accent1"/>
+          </a:fillRef>
+          <a:effectRef idx="2">
+            <a:schemeClr val="accent1"/>
+          </a:effectRef>
+          <a:fontRef idx="minor">
+            <a:schemeClr val="lt1"/>
+          </a:fontRef>
+        </p:style>
+        <p:txBody>
+          <a:bodyPr rtlCol="0" anchor="ctr" wrap="none" lIns="50800" rIns="50800"/>
+          <a:lstStyle/>
+          <a:p>
+            <a:pPr algn="ctr"/>
+            <a:r>
+              <a:rPr sz="1100" b="1">
+                <a:solidFill>
+                  <a:srgbClr val="FFFFFF"/>
+                </a:solidFill>
+                <a:latin typeface="Calibri"/>
+              </a:rPr>
+              <a:t>EXTENDED KNOWLEDGE</a:t>
+            </a:r>
+          </a:p>
+        </p:txBody>
+      </p:sp>
+      <p:sp>
+        <p:nvSpPr>
+          <p:cNvPr id="3" name="TextBox 2"/>
+          <p:cNvSpPr txBox="1"/>
+          <p:nvPr/>
+        </p:nvSpPr>
+        <p:spPr>
+          <a:xfrm>
+            <a:off x="685800" y="1051560"/>
+            <a:ext cx="10607040" cy="822960"/>
+          </a:xfrm>
+          <a:prstGeom prst="rect">
+            <a:avLst/>
+          </a:prstGeom>
+          <a:noFill/>
+        </p:spPr>
+        <p:txBody>
+          <a:bodyPr wrap="square" anchor="t">
+            <a:spAutoFit/>
+          </a:bodyPr>
+          <a:lstStyle/>
+          <a:p>
+            <a:pPr algn="l"/>
+            <a:r>
+              <a:rPr sz="2700" b="1" i="0">
+                <a:solidFill>
+                  <a:srgbClr val="2A1A1F"/>
+                </a:solidFill>
+                <a:latin typeface="Cambria"/>
+              </a:rPr>
+              <a:t>Sustainable and Circular Design</a:t>
+            </a:r>
+          </a:p>
+        </p:txBody>
+      </p:sp>
+      <p:sp>
+        <p:nvSpPr>
+          <p:cNvPr id="4" name="Rounded Rectangle 3"/>
+          <p:cNvSpPr/>
+          <p:nvPr/>
+        </p:nvSpPr>
+        <p:spPr>
+          <a:xfrm>
+            <a:off x="685800" y="1874519"/>
+            <a:ext cx="10607040" cy="4526280"/>
+          </a:xfrm>
+          <a:prstGeom prst="roundRect">
+            <a:avLst>
+              <a:gd name="adj" fmla="val 6000"/>
+            </a:avLst>
+          </a:prstGeom>
+          <a:solidFill>
+            <a:srgbClr val="F1EAEC"/>
+          </a:solidFill>
+          <a:ln>
+            <a:noFill/>
+          </a:ln>
+          <a:effectLst/>
+        </p:spPr>
+        <p:style>
+          <a:lnRef idx="1">
+            <a:schemeClr val="accent1"/>
+          </a:lnRef>
+          <a:fillRef idx="3">
+            <a:schemeClr val="accent1"/>
+          </a:fillRef>
+          <a:effectRef idx="2">
+            <a:schemeClr val="accent1"/>
+          </a:effectRef>
+          <a:fontRef idx="minor">
+            <a:schemeClr val="lt1"/>
+          </a:fontRef>
+        </p:style>
+        <p:txBody>
+          <a:bodyPr rtlCol="0" anchor="ctr" lIns="330200" rIns="330200" tIns="254000" bIns="254000" wrap="square"/>
+          <a:lstStyle/>
+          <a:p>
+            <a:pPr algn="ctr" indent="-203200" marL="203200">
+              <a:spcAft>
+                <a:spcPts val="900"/>
+              </a:spcAft>
+              <a:buClr>
+                <a:srgbClr val="7A2E43"/>
+              </a:buClr>
+              <a:buSzPct val="90000"/>
+              <a:buFont typeface="Arial"/>
+              <a:buChar char="●"/>
+            </a:pPr>
+            <a:r>
+              <a:rPr sz="1500" b="1" i="0">
+                <a:solidFill>
+                  <a:srgbClr val="672738"/>
+                </a:solidFill>
+                <a:latin typeface="Calibri"/>
+              </a:rPr>
+              <a:t>Key concepts</a:t>
+            </a:r>
+          </a:p>
+          <a:p>
+            <a:pPr indent="-203200" marL="203200">
+              <a:spcAft>
+                <a:spcPts val="900"/>
+              </a:spcAft>
+              <a:buClr>
+                <a:srgbClr val="7A2E43"/>
+              </a:buClr>
+              <a:buSzPct val="90000"/>
+              <a:buFont typeface="Arial"/>
+              <a:buChar char="–"/>
+            </a:pPr>
+            <a:r>
+              <a:rPr sz="1350" b="0" i="0">
+                <a:solidFill>
+                  <a:srgbClr val="2A1A1F"/>
+                </a:solidFill>
+                <a:latin typeface="Calibri"/>
+              </a:rPr>
+              <a:t>Cradle-to-cradle design — products designed so materials can be fully recycled or biodegraded at end of life</a:t>
+            </a:r>
+          </a:p>
+          <a:p>
+            <a:pPr indent="-203200" marL="203200">
+              <a:spcAft>
+                <a:spcPts val="900"/>
+              </a:spcAft>
+              <a:buClr>
+                <a:srgbClr val="7A2E43"/>
+              </a:buClr>
+              <a:buSzPct val="90000"/>
+              <a:buFont typeface="Arial"/>
+              <a:buChar char="–"/>
+            </a:pPr>
+            <a:r>
+              <a:rPr sz="1350" b="0" i="0">
+                <a:solidFill>
+                  <a:srgbClr val="2A1A1F"/>
+                </a:solidFill>
+                <a:latin typeface="Calibri"/>
+              </a:rPr>
+              <a:t>Biomimicry — solving design problems by learning from natural systems and forms</a:t>
+            </a:r>
+          </a:p>
+          <a:p>
+            <a:pPr indent="-203200" marL="203200">
+              <a:spcAft>
+                <a:spcPts val="900"/>
+              </a:spcAft>
+              <a:buClr>
+                <a:srgbClr val="7A2E43"/>
+              </a:buClr>
+              <a:buSzPct val="90000"/>
+              <a:buFont typeface="Arial"/>
+              <a:buChar char="–"/>
+            </a:pPr>
+            <a:r>
+              <a:rPr sz="1350" b="0" i="0">
+                <a:solidFill>
+                  <a:srgbClr val="2A1A1F"/>
+                </a:solidFill>
+                <a:latin typeface="Calibri"/>
+              </a:rPr>
+              <a:t>Design for disassembly — products engineered to be easily taken apart for repair or recycling</a:t>
+            </a:r>
+          </a:p>
+        </p:txBody>
+      </p:sp>
+      <p:sp>
+        <p:nvSpPr>
+          <p:cNvPr id="5" name="Oval 4"/>
+          <p:cNvSpPr/>
+          <p:nvPr/>
+        </p:nvSpPr>
+        <p:spPr>
+          <a:xfrm>
+            <a:off x="10881360" y="5943600"/>
+            <a:ext cx="1005840" cy="1005840"/>
+          </a:xfrm>
+          <a:prstGeom prst="ellipse">
+            <a:avLst/>
+          </a:prstGeom>
+          <a:solidFill>
+            <a:srgbClr val="EDCBD3"/>
+          </a:solidFill>
+          <a:ln>
+            <a:noFill/>
+          </a:ln>
+          <a:effectLst/>
+        </p:spPr>
+        <p:style>
+          <a:lnRef idx="1">
+            <a:schemeClr val="accent1"/>
+          </a:lnRef>
+          <a:fillRef idx="3">
+            <a:schemeClr val="accent1"/>
+          </a:fillRef>
+          <a:effectRef idx="2">
+            <a:schemeClr val="accent1"/>
+          </a:effectRef>
+          <a:fontRef idx="minor">
+            <a:schemeClr val="lt1"/>
+          </a:fontRef>
+        </p:style>
+        <p:txBody>
+          <a:bodyPr rtlCol="0" anchor="ctr"/>
+          <a:lstStyle/>
+          <a:p>
+            <a:pPr algn="ctr"/>
           </a:p>
         </p:txBody>
       </p:sp>
@@ -6856,6 +7685,2630 @@
                 <a:latin typeface="Calibri"/>
               </a:rPr>
               <a:t>AOS 1 - Trends in Design</a:t>
+            </a:r>
+          </a:p>
+        </p:txBody>
+      </p:sp>
+    </p:spTree>
+  </p:cSld>
+  <p:clrMapOvr>
+    <a:masterClrMapping/>
+  </p:clrMapOvr>
+</p:sld>
+</file>
+
+<file path=ppt/slides/slide20.xml><?xml version="1.0" encoding="utf-8"?>
+<p:sld xmlns:a="http://schemas.openxmlformats.org/drawingml/2006/main" xmlns:p="http://schemas.openxmlformats.org/presentationml/2006/main" xmlns:r="http://schemas.openxmlformats.org/officeDocument/2006/relationships">
+  <p:cSld>
+    <p:bg>
+      <p:bgPr>
+        <a:solidFill>
+          <a:srgbClr val="FBF5F1"/>
+        </a:solidFill>
+        <a:effectLst/>
+      </p:bgPr>
+    </p:bg>
+    <p:spTree>
+      <p:nvGrpSpPr>
+        <p:cNvPr id="1" name=""/>
+        <p:cNvGrpSpPr/>
+        <p:nvPr/>
+      </p:nvGrpSpPr>
+      <p:grpSpPr/>
+      <p:sp>
+        <p:nvSpPr>
+          <p:cNvPr id="2" name="Rounded Rectangle 1"/>
+          <p:cNvSpPr/>
+          <p:nvPr/>
+        </p:nvSpPr>
+        <p:spPr>
+          <a:xfrm>
+            <a:off x="685800" y="502920"/>
+            <a:ext cx="3291840" cy="457200"/>
+          </a:xfrm>
+          <a:prstGeom prst="roundRect">
+            <a:avLst>
+              <a:gd name="adj" fmla="val 50000"/>
+            </a:avLst>
+          </a:prstGeom>
+          <a:solidFill>
+            <a:srgbClr val="7A2E43"/>
+          </a:solidFill>
+          <a:ln>
+            <a:noFill/>
+          </a:ln>
+          <a:effectLst/>
+        </p:spPr>
+        <p:style>
+          <a:lnRef idx="1">
+            <a:schemeClr val="accent1"/>
+          </a:lnRef>
+          <a:fillRef idx="3">
+            <a:schemeClr val="accent1"/>
+          </a:fillRef>
+          <a:effectRef idx="2">
+            <a:schemeClr val="accent1"/>
+          </a:effectRef>
+          <a:fontRef idx="minor">
+            <a:schemeClr val="lt1"/>
+          </a:fontRef>
+        </p:style>
+        <p:txBody>
+          <a:bodyPr rtlCol="0" anchor="ctr" wrap="none" lIns="50800" rIns="50800"/>
+          <a:lstStyle/>
+          <a:p>
+            <a:pPr algn="ctr"/>
+            <a:r>
+              <a:rPr sz="1100" b="1">
+                <a:solidFill>
+                  <a:srgbClr val="FFFFFF"/>
+                </a:solidFill>
+                <a:latin typeface="Calibri"/>
+              </a:rPr>
+              <a:t>EXTENDED KNOWLEDGE</a:t>
+            </a:r>
+          </a:p>
+        </p:txBody>
+      </p:sp>
+      <p:sp>
+        <p:nvSpPr>
+          <p:cNvPr id="3" name="TextBox 2"/>
+          <p:cNvSpPr txBox="1"/>
+          <p:nvPr/>
+        </p:nvSpPr>
+        <p:spPr>
+          <a:xfrm>
+            <a:off x="685800" y="1051560"/>
+            <a:ext cx="10607040" cy="822960"/>
+          </a:xfrm>
+          <a:prstGeom prst="rect">
+            <a:avLst/>
+          </a:prstGeom>
+          <a:noFill/>
+        </p:spPr>
+        <p:txBody>
+          <a:bodyPr wrap="square" anchor="t">
+            <a:spAutoFit/>
+          </a:bodyPr>
+          <a:lstStyle/>
+          <a:p>
+            <a:pPr algn="l"/>
+            <a:r>
+              <a:rPr sz="2700" b="1" i="0">
+                <a:solidFill>
+                  <a:srgbClr val="2A1A1F"/>
+                </a:solidFill>
+                <a:latin typeface="Cambria"/>
+              </a:rPr>
+              <a:t>Branding and Identity Theory</a:t>
+            </a:r>
+          </a:p>
+        </p:txBody>
+      </p:sp>
+      <p:sp>
+        <p:nvSpPr>
+          <p:cNvPr id="4" name="Rounded Rectangle 3"/>
+          <p:cNvSpPr/>
+          <p:nvPr/>
+        </p:nvSpPr>
+        <p:spPr>
+          <a:xfrm>
+            <a:off x="685800" y="1874519"/>
+            <a:ext cx="10607040" cy="4526280"/>
+          </a:xfrm>
+          <a:prstGeom prst="roundRect">
+            <a:avLst>
+              <a:gd name="adj" fmla="val 6000"/>
+            </a:avLst>
+          </a:prstGeom>
+          <a:solidFill>
+            <a:srgbClr val="F1EAEC"/>
+          </a:solidFill>
+          <a:ln>
+            <a:noFill/>
+          </a:ln>
+          <a:effectLst/>
+        </p:spPr>
+        <p:style>
+          <a:lnRef idx="1">
+            <a:schemeClr val="accent1"/>
+          </a:lnRef>
+          <a:fillRef idx="3">
+            <a:schemeClr val="accent1"/>
+          </a:fillRef>
+          <a:effectRef idx="2">
+            <a:schemeClr val="accent1"/>
+          </a:effectRef>
+          <a:fontRef idx="minor">
+            <a:schemeClr val="lt1"/>
+          </a:fontRef>
+        </p:style>
+        <p:txBody>
+          <a:bodyPr rtlCol="0" anchor="ctr" lIns="330200" rIns="330200" tIns="254000" bIns="254000" wrap="square"/>
+          <a:lstStyle/>
+          <a:p>
+            <a:pPr algn="ctr" indent="-203200" marL="203200">
+              <a:spcAft>
+                <a:spcPts val="900"/>
+              </a:spcAft>
+              <a:buClr>
+                <a:srgbClr val="7A2E43"/>
+              </a:buClr>
+              <a:buSzPct val="90000"/>
+              <a:buFont typeface="Arial"/>
+              <a:buChar char="●"/>
+            </a:pPr>
+            <a:r>
+              <a:rPr sz="1500" b="1" i="0">
+                <a:solidFill>
+                  <a:srgbClr val="672738"/>
+                </a:solidFill>
+                <a:latin typeface="Calibri"/>
+              </a:rPr>
+              <a:t>Core concepts</a:t>
+            </a:r>
+          </a:p>
+          <a:p>
+            <a:pPr indent="-203200" marL="203200">
+              <a:spcAft>
+                <a:spcPts val="900"/>
+              </a:spcAft>
+              <a:buClr>
+                <a:srgbClr val="7A2E43"/>
+              </a:buClr>
+              <a:buSzPct val="90000"/>
+              <a:buFont typeface="Arial"/>
+              <a:buChar char="–"/>
+            </a:pPr>
+            <a:r>
+              <a:rPr sz="1350" b="0" i="0">
+                <a:solidFill>
+                  <a:srgbClr val="2A1A1F"/>
+                </a:solidFill>
+                <a:latin typeface="Calibri"/>
+              </a:rPr>
+              <a:t>Brand architecture — how a company organises and relates multiple sub-brands</a:t>
+            </a:r>
+          </a:p>
+          <a:p>
+            <a:pPr indent="-203200" marL="203200">
+              <a:spcAft>
+                <a:spcPts val="900"/>
+              </a:spcAft>
+              <a:buClr>
+                <a:srgbClr val="7A2E43"/>
+              </a:buClr>
+              <a:buSzPct val="90000"/>
+              <a:buFont typeface="Arial"/>
+              <a:buChar char="–"/>
+            </a:pPr>
+            <a:r>
+              <a:rPr sz="1350" b="0" i="0">
+                <a:solidFill>
+                  <a:srgbClr val="2A1A1F"/>
+                </a:solidFill>
+                <a:latin typeface="Calibri"/>
+              </a:rPr>
+              <a:t>Tone of voice — the consistent personality expressed through language and visuals</a:t>
+            </a:r>
+          </a:p>
+          <a:p>
+            <a:pPr indent="-203200" marL="203200">
+              <a:spcAft>
+                <a:spcPts val="900"/>
+              </a:spcAft>
+              <a:buClr>
+                <a:srgbClr val="7A2E43"/>
+              </a:buClr>
+              <a:buSzPct val="90000"/>
+              <a:buFont typeface="Arial"/>
+              <a:buChar char="–"/>
+            </a:pPr>
+            <a:r>
+              <a:rPr sz="1350" b="0" i="0">
+                <a:solidFill>
+                  <a:srgbClr val="2A1A1F"/>
+                </a:solidFill>
+                <a:latin typeface="Calibri"/>
+              </a:rPr>
+              <a:t>Brand guidelines — documented rules for logo use, colour, type and imagery</a:t>
+            </a:r>
+          </a:p>
+          <a:p>
+            <a:pPr indent="-203200" marL="203200">
+              <a:spcAft>
+                <a:spcPts val="900"/>
+              </a:spcAft>
+              <a:buClr>
+                <a:srgbClr val="7A2E43"/>
+              </a:buClr>
+              <a:buSzPct val="90000"/>
+              <a:buFont typeface="Arial"/>
+              <a:buChar char="●"/>
+            </a:pPr>
+            <a:r>
+              <a:rPr sz="1500" b="1" i="0">
+                <a:solidFill>
+                  <a:srgbClr val="672738"/>
+                </a:solidFill>
+                <a:latin typeface="Calibri"/>
+              </a:rPr>
+              <a:t>Worth researching</a:t>
+            </a:r>
+          </a:p>
+          <a:p>
+            <a:pPr indent="-203200" marL="203200">
+              <a:spcAft>
+                <a:spcPts val="900"/>
+              </a:spcAft>
+              <a:buClr>
+                <a:srgbClr val="7A2E43"/>
+              </a:buClr>
+              <a:buSzPct val="90000"/>
+              <a:buFont typeface="Arial"/>
+              <a:buChar char="–"/>
+            </a:pPr>
+            <a:r>
+              <a:rPr sz="1350" b="0" i="0">
+                <a:solidFill>
+                  <a:srgbClr val="2A1A1F"/>
+                </a:solidFill>
+                <a:latin typeface="Calibri"/>
+              </a:rPr>
+              <a:t>Case studies of how major brands have evolved their logos over decades (simplification for digital screens is a common contemporary driver) make strong exam and folio examples.</a:t>
+            </a:r>
+          </a:p>
+        </p:txBody>
+      </p:sp>
+      <p:sp>
+        <p:nvSpPr>
+          <p:cNvPr id="5" name="Oval 4"/>
+          <p:cNvSpPr/>
+          <p:nvPr/>
+        </p:nvSpPr>
+        <p:spPr>
+          <a:xfrm>
+            <a:off x="10881360" y="5943600"/>
+            <a:ext cx="1005840" cy="1005840"/>
+          </a:xfrm>
+          <a:prstGeom prst="ellipse">
+            <a:avLst/>
+          </a:prstGeom>
+          <a:solidFill>
+            <a:srgbClr val="EDCBD3"/>
+          </a:solidFill>
+          <a:ln>
+            <a:noFill/>
+          </a:ln>
+          <a:effectLst/>
+        </p:spPr>
+        <p:style>
+          <a:lnRef idx="1">
+            <a:schemeClr val="accent1"/>
+          </a:lnRef>
+          <a:fillRef idx="3">
+            <a:schemeClr val="accent1"/>
+          </a:fillRef>
+          <a:effectRef idx="2">
+            <a:schemeClr val="accent1"/>
+          </a:effectRef>
+          <a:fontRef idx="minor">
+            <a:schemeClr val="lt1"/>
+          </a:fontRef>
+        </p:style>
+        <p:txBody>
+          <a:bodyPr rtlCol="0" anchor="ctr"/>
+          <a:lstStyle/>
+          <a:p>
+            <a:pPr algn="ctr"/>
+          </a:p>
+        </p:txBody>
+      </p:sp>
+    </p:spTree>
+  </p:cSld>
+  <p:clrMapOvr>
+    <a:masterClrMapping/>
+  </p:clrMapOvr>
+</p:sld>
+</file>
+
+<file path=ppt/slides/slide21.xml><?xml version="1.0" encoding="utf-8"?>
+<p:sld xmlns:a="http://schemas.openxmlformats.org/drawingml/2006/main" xmlns:p="http://schemas.openxmlformats.org/presentationml/2006/main" xmlns:r="http://schemas.openxmlformats.org/officeDocument/2006/relationships">
+  <p:cSld>
+    <p:bg>
+      <p:bgPr>
+        <a:solidFill>
+          <a:srgbClr val="FBF5F1"/>
+        </a:solidFill>
+        <a:effectLst/>
+      </p:bgPr>
+    </p:bg>
+    <p:spTree>
+      <p:nvGrpSpPr>
+        <p:cNvPr id="1" name=""/>
+        <p:cNvGrpSpPr/>
+        <p:nvPr/>
+      </p:nvGrpSpPr>
+      <p:grpSpPr/>
+      <p:sp>
+        <p:nvSpPr>
+          <p:cNvPr id="2" name="Rounded Rectangle 1"/>
+          <p:cNvSpPr/>
+          <p:nvPr/>
+        </p:nvSpPr>
+        <p:spPr>
+          <a:xfrm>
+            <a:off x="685800" y="502920"/>
+            <a:ext cx="3291840" cy="457200"/>
+          </a:xfrm>
+          <a:prstGeom prst="roundRect">
+            <a:avLst>
+              <a:gd name="adj" fmla="val 50000"/>
+            </a:avLst>
+          </a:prstGeom>
+          <a:solidFill>
+            <a:srgbClr val="7A2E43"/>
+          </a:solidFill>
+          <a:ln>
+            <a:noFill/>
+          </a:ln>
+          <a:effectLst/>
+        </p:spPr>
+        <p:style>
+          <a:lnRef idx="1">
+            <a:schemeClr val="accent1"/>
+          </a:lnRef>
+          <a:fillRef idx="3">
+            <a:schemeClr val="accent1"/>
+          </a:fillRef>
+          <a:effectRef idx="2">
+            <a:schemeClr val="accent1"/>
+          </a:effectRef>
+          <a:fontRef idx="minor">
+            <a:schemeClr val="lt1"/>
+          </a:fontRef>
+        </p:style>
+        <p:txBody>
+          <a:bodyPr rtlCol="0" anchor="ctr" wrap="none" lIns="50800" rIns="50800"/>
+          <a:lstStyle/>
+          <a:p>
+            <a:pPr algn="ctr"/>
+            <a:r>
+              <a:rPr sz="1100" b="1">
+                <a:solidFill>
+                  <a:srgbClr val="FFFFFF"/>
+                </a:solidFill>
+                <a:latin typeface="Calibri"/>
+              </a:rPr>
+              <a:t>EXTENDED KNOWLEDGE</a:t>
+            </a:r>
+          </a:p>
+        </p:txBody>
+      </p:sp>
+      <p:sp>
+        <p:nvSpPr>
+          <p:cNvPr id="3" name="TextBox 2"/>
+          <p:cNvSpPr txBox="1"/>
+          <p:nvPr/>
+        </p:nvSpPr>
+        <p:spPr>
+          <a:xfrm>
+            <a:off x="685800" y="1051560"/>
+            <a:ext cx="10607040" cy="822960"/>
+          </a:xfrm>
+          <a:prstGeom prst="rect">
+            <a:avLst/>
+          </a:prstGeom>
+          <a:noFill/>
+        </p:spPr>
+        <p:txBody>
+          <a:bodyPr wrap="square" anchor="t">
+            <a:spAutoFit/>
+          </a:bodyPr>
+          <a:lstStyle/>
+          <a:p>
+            <a:pPr algn="l"/>
+            <a:r>
+              <a:rPr sz="2700" b="1" i="0">
+                <a:solidFill>
+                  <a:srgbClr val="2A1A1F"/>
+                </a:solidFill>
+                <a:latin typeface="Cambria"/>
+              </a:rPr>
+              <a:t>UX/UI and Service Design Basics</a:t>
+            </a:r>
+          </a:p>
+        </p:txBody>
+      </p:sp>
+      <p:sp>
+        <p:nvSpPr>
+          <p:cNvPr id="4" name="Rounded Rectangle 3"/>
+          <p:cNvSpPr/>
+          <p:nvPr/>
+        </p:nvSpPr>
+        <p:spPr>
+          <a:xfrm>
+            <a:off x="685800" y="1874519"/>
+            <a:ext cx="10607040" cy="4526280"/>
+          </a:xfrm>
+          <a:prstGeom prst="roundRect">
+            <a:avLst>
+              <a:gd name="adj" fmla="val 6000"/>
+            </a:avLst>
+          </a:prstGeom>
+          <a:solidFill>
+            <a:srgbClr val="F1EAEC"/>
+          </a:solidFill>
+          <a:ln>
+            <a:noFill/>
+          </a:ln>
+          <a:effectLst/>
+        </p:spPr>
+        <p:style>
+          <a:lnRef idx="1">
+            <a:schemeClr val="accent1"/>
+          </a:lnRef>
+          <a:fillRef idx="3">
+            <a:schemeClr val="accent1"/>
+          </a:fillRef>
+          <a:effectRef idx="2">
+            <a:schemeClr val="accent1"/>
+          </a:effectRef>
+          <a:fontRef idx="minor">
+            <a:schemeClr val="lt1"/>
+          </a:fontRef>
+        </p:style>
+        <p:txBody>
+          <a:bodyPr rtlCol="0" anchor="ctr" lIns="330200" rIns="330200" tIns="254000" bIns="254000" wrap="square"/>
+          <a:lstStyle/>
+          <a:p>
+            <a:pPr algn="ctr">
+              <a:spcAft>
+                <a:spcPts val="900"/>
+              </a:spcAft>
+              <a:buNone/>
+            </a:pPr>
+            <a:r>
+              <a:rPr sz="1350" b="1" i="1">
+                <a:solidFill>
+                  <a:srgbClr val="672738"/>
+                </a:solidFill>
+                <a:latin typeface="Calibri"/>
+              </a:rPr>
+              <a:t>Key terms</a:t>
+            </a:r>
+          </a:p>
+          <a:p>
+            <a:pPr indent="-203200" marL="203200">
+              <a:spcAft>
+                <a:spcPts val="900"/>
+              </a:spcAft>
+              <a:buClr>
+                <a:srgbClr val="7A2E43"/>
+              </a:buClr>
+              <a:buSzPct val="90000"/>
+              <a:buFont typeface="Arial"/>
+              <a:buChar char="–"/>
+            </a:pPr>
+            <a:r>
+              <a:rPr sz="1350" b="0" i="0">
+                <a:solidFill>
+                  <a:srgbClr val="2A1A1F"/>
+                </a:solidFill>
+                <a:latin typeface="Calibri"/>
+              </a:rPr>
+              <a:t>User persona — a fictional profile representing a target user segment</a:t>
+            </a:r>
+          </a:p>
+          <a:p>
+            <a:pPr indent="-203200" marL="203200">
+              <a:spcAft>
+                <a:spcPts val="900"/>
+              </a:spcAft>
+              <a:buClr>
+                <a:srgbClr val="7A2E43"/>
+              </a:buClr>
+              <a:buSzPct val="90000"/>
+              <a:buFont typeface="Arial"/>
+              <a:buChar char="–"/>
+            </a:pPr>
+            <a:r>
+              <a:rPr sz="1350" b="0" i="0">
+                <a:solidFill>
+                  <a:srgbClr val="2A1A1F"/>
+                </a:solidFill>
+                <a:latin typeface="Calibri"/>
+              </a:rPr>
+              <a:t>User journey map — a visualisation of the steps a user takes to complete a task</a:t>
+            </a:r>
+          </a:p>
+          <a:p>
+            <a:pPr indent="-203200" marL="203200">
+              <a:spcAft>
+                <a:spcPts val="900"/>
+              </a:spcAft>
+              <a:buClr>
+                <a:srgbClr val="7A2E43"/>
+              </a:buClr>
+              <a:buSzPct val="90000"/>
+              <a:buFont typeface="Arial"/>
+              <a:buChar char="–"/>
+            </a:pPr>
+            <a:r>
+              <a:rPr sz="1350" b="0" i="0">
+                <a:solidFill>
+                  <a:srgbClr val="2A1A1F"/>
+                </a:solidFill>
+                <a:latin typeface="Calibri"/>
+              </a:rPr>
+              <a:t>Wireframe — a low-fidelity structural sketch of an interface, before visual design is applied</a:t>
+            </a:r>
+          </a:p>
+          <a:p>
+            <a:pPr indent="-203200" marL="203200">
+              <a:spcAft>
+                <a:spcPts val="900"/>
+              </a:spcAft>
+              <a:buClr>
+                <a:srgbClr val="7A2E43"/>
+              </a:buClr>
+              <a:buSzPct val="90000"/>
+              <a:buFont typeface="Arial"/>
+              <a:buChar char="–"/>
+            </a:pPr>
+            <a:r>
+              <a:rPr sz="1350" b="0" i="0">
+                <a:solidFill>
+                  <a:srgbClr val="2A1A1F"/>
+                </a:solidFill>
+                <a:latin typeface="Calibri"/>
+              </a:rPr>
+              <a:t>Service design — designing the end-to-end experience of a service, not just a single artefact</a:t>
+            </a:r>
+          </a:p>
+        </p:txBody>
+      </p:sp>
+      <p:sp>
+        <p:nvSpPr>
+          <p:cNvPr id="5" name="Oval 4"/>
+          <p:cNvSpPr/>
+          <p:nvPr/>
+        </p:nvSpPr>
+        <p:spPr>
+          <a:xfrm>
+            <a:off x="10881360" y="5943600"/>
+            <a:ext cx="1005840" cy="1005840"/>
+          </a:xfrm>
+          <a:prstGeom prst="ellipse">
+            <a:avLst/>
+          </a:prstGeom>
+          <a:solidFill>
+            <a:srgbClr val="EDCBD3"/>
+          </a:solidFill>
+          <a:ln>
+            <a:noFill/>
+          </a:ln>
+          <a:effectLst/>
+        </p:spPr>
+        <p:style>
+          <a:lnRef idx="1">
+            <a:schemeClr val="accent1"/>
+          </a:lnRef>
+          <a:fillRef idx="3">
+            <a:schemeClr val="accent1"/>
+          </a:fillRef>
+          <a:effectRef idx="2">
+            <a:schemeClr val="accent1"/>
+          </a:effectRef>
+          <a:fontRef idx="minor">
+            <a:schemeClr val="lt1"/>
+          </a:fontRef>
+        </p:style>
+        <p:txBody>
+          <a:bodyPr rtlCol="0" anchor="ctr"/>
+          <a:lstStyle/>
+          <a:p>
+            <a:pPr algn="ctr"/>
+          </a:p>
+        </p:txBody>
+      </p:sp>
+    </p:spTree>
+  </p:cSld>
+  <p:clrMapOvr>
+    <a:masterClrMapping/>
+  </p:clrMapOvr>
+</p:sld>
+</file>
+
+<file path=ppt/slides/slide22.xml><?xml version="1.0" encoding="utf-8"?>
+<p:sld xmlns:a="http://schemas.openxmlformats.org/drawingml/2006/main" xmlns:p="http://schemas.openxmlformats.org/presentationml/2006/main" xmlns:r="http://schemas.openxmlformats.org/officeDocument/2006/relationships">
+  <p:cSld>
+    <p:bg>
+      <p:bgPr>
+        <a:solidFill>
+          <a:srgbClr val="FBF5F1"/>
+        </a:solidFill>
+        <a:effectLst/>
+      </p:bgPr>
+    </p:bg>
+    <p:spTree>
+      <p:nvGrpSpPr>
+        <p:cNvPr id="1" name=""/>
+        <p:cNvGrpSpPr/>
+        <p:nvPr/>
+      </p:nvGrpSpPr>
+      <p:grpSpPr/>
+      <p:sp>
+        <p:nvSpPr>
+          <p:cNvPr id="2" name="Rounded Rectangle 1"/>
+          <p:cNvSpPr/>
+          <p:nvPr/>
+        </p:nvSpPr>
+        <p:spPr>
+          <a:xfrm>
+            <a:off x="685800" y="502920"/>
+            <a:ext cx="3291840" cy="457200"/>
+          </a:xfrm>
+          <a:prstGeom prst="roundRect">
+            <a:avLst>
+              <a:gd name="adj" fmla="val 50000"/>
+            </a:avLst>
+          </a:prstGeom>
+          <a:solidFill>
+            <a:srgbClr val="7A2E43"/>
+          </a:solidFill>
+          <a:ln>
+            <a:noFill/>
+          </a:ln>
+          <a:effectLst/>
+        </p:spPr>
+        <p:style>
+          <a:lnRef idx="1">
+            <a:schemeClr val="accent1"/>
+          </a:lnRef>
+          <a:fillRef idx="3">
+            <a:schemeClr val="accent1"/>
+          </a:fillRef>
+          <a:effectRef idx="2">
+            <a:schemeClr val="accent1"/>
+          </a:effectRef>
+          <a:fontRef idx="minor">
+            <a:schemeClr val="lt1"/>
+          </a:fontRef>
+        </p:style>
+        <p:txBody>
+          <a:bodyPr rtlCol="0" anchor="ctr" wrap="none" lIns="50800" rIns="50800"/>
+          <a:lstStyle/>
+          <a:p>
+            <a:pPr algn="ctr"/>
+            <a:r>
+              <a:rPr sz="1100" b="1">
+                <a:solidFill>
+                  <a:srgbClr val="FFFFFF"/>
+                </a:solidFill>
+                <a:latin typeface="Calibri"/>
+              </a:rPr>
+              <a:t>EXTENDED KNOWLEDGE</a:t>
+            </a:r>
+          </a:p>
+        </p:txBody>
+      </p:sp>
+      <p:sp>
+        <p:nvSpPr>
+          <p:cNvPr id="3" name="TextBox 2"/>
+          <p:cNvSpPr txBox="1"/>
+          <p:nvPr/>
+        </p:nvSpPr>
+        <p:spPr>
+          <a:xfrm>
+            <a:off x="685800" y="1051560"/>
+            <a:ext cx="10607040" cy="822960"/>
+          </a:xfrm>
+          <a:prstGeom prst="rect">
+            <a:avLst/>
+          </a:prstGeom>
+          <a:noFill/>
+        </p:spPr>
+        <p:txBody>
+          <a:bodyPr wrap="square" anchor="t">
+            <a:spAutoFit/>
+          </a:bodyPr>
+          <a:lstStyle/>
+          <a:p>
+            <a:pPr algn="l"/>
+            <a:r>
+              <a:rPr sz="2700" b="1" i="0">
+                <a:solidFill>
+                  <a:srgbClr val="2A1A1F"/>
+                </a:solidFill>
+                <a:latin typeface="Cambria"/>
+              </a:rPr>
+              <a:t>Design Ethics and Responsibility</a:t>
+            </a:r>
+          </a:p>
+        </p:txBody>
+      </p:sp>
+      <p:sp>
+        <p:nvSpPr>
+          <p:cNvPr id="4" name="Rounded Rectangle 3"/>
+          <p:cNvSpPr/>
+          <p:nvPr/>
+        </p:nvSpPr>
+        <p:spPr>
+          <a:xfrm>
+            <a:off x="685800" y="1874519"/>
+            <a:ext cx="10607040" cy="4526280"/>
+          </a:xfrm>
+          <a:prstGeom prst="roundRect">
+            <a:avLst>
+              <a:gd name="adj" fmla="val 6000"/>
+            </a:avLst>
+          </a:prstGeom>
+          <a:solidFill>
+            <a:srgbClr val="F1EAEC"/>
+          </a:solidFill>
+          <a:ln>
+            <a:noFill/>
+          </a:ln>
+          <a:effectLst/>
+        </p:spPr>
+        <p:style>
+          <a:lnRef idx="1">
+            <a:schemeClr val="accent1"/>
+          </a:lnRef>
+          <a:fillRef idx="3">
+            <a:schemeClr val="accent1"/>
+          </a:fillRef>
+          <a:effectRef idx="2">
+            <a:schemeClr val="accent1"/>
+          </a:effectRef>
+          <a:fontRef idx="minor">
+            <a:schemeClr val="lt1"/>
+          </a:fontRef>
+        </p:style>
+        <p:txBody>
+          <a:bodyPr rtlCol="0" anchor="ctr" lIns="330200" rIns="330200" tIns="254000" bIns="254000" wrap="square"/>
+          <a:lstStyle/>
+          <a:p>
+            <a:pPr algn="ctr" indent="-203200" marL="203200">
+              <a:spcAft>
+                <a:spcPts val="900"/>
+              </a:spcAft>
+              <a:buClr>
+                <a:srgbClr val="7A2E43"/>
+              </a:buClr>
+              <a:buSzPct val="90000"/>
+              <a:buFont typeface="Arial"/>
+              <a:buChar char="●"/>
+            </a:pPr>
+            <a:r>
+              <a:rPr sz="1500" b="1" i="0">
+                <a:solidFill>
+                  <a:srgbClr val="672738"/>
+                </a:solidFill>
+                <a:latin typeface="Calibri"/>
+              </a:rPr>
+              <a:t>Issues to be aware of</a:t>
+            </a:r>
+          </a:p>
+          <a:p>
+            <a:pPr indent="-203200" marL="203200">
+              <a:spcAft>
+                <a:spcPts val="900"/>
+              </a:spcAft>
+              <a:buClr>
+                <a:srgbClr val="7A2E43"/>
+              </a:buClr>
+              <a:buSzPct val="90000"/>
+              <a:buFont typeface="Arial"/>
+              <a:buChar char="–"/>
+            </a:pPr>
+            <a:r>
+              <a:rPr sz="1350" b="0" i="0">
+                <a:solidFill>
+                  <a:srgbClr val="2A1A1F"/>
+                </a:solidFill>
+                <a:latin typeface="Calibri"/>
+              </a:rPr>
+              <a:t>Dark patterns — interface designs that deliberately trick users into unintended actions</a:t>
+            </a:r>
+          </a:p>
+          <a:p>
+            <a:pPr indent="-203200" marL="203200">
+              <a:spcAft>
+                <a:spcPts val="900"/>
+              </a:spcAft>
+              <a:buClr>
+                <a:srgbClr val="7A2E43"/>
+              </a:buClr>
+              <a:buSzPct val="90000"/>
+              <a:buFont typeface="Arial"/>
+              <a:buChar char="–"/>
+            </a:pPr>
+            <a:r>
+              <a:rPr sz="1350" b="0" i="0">
+                <a:solidFill>
+                  <a:srgbClr val="2A1A1F"/>
+                </a:solidFill>
+                <a:latin typeface="Calibri"/>
+              </a:rPr>
+              <a:t>Greenwashing — packaging/branding that overstates environmental credentials</a:t>
+            </a:r>
+          </a:p>
+          <a:p>
+            <a:pPr indent="-203200" marL="203200">
+              <a:spcAft>
+                <a:spcPts val="900"/>
+              </a:spcAft>
+              <a:buClr>
+                <a:srgbClr val="7A2E43"/>
+              </a:buClr>
+              <a:buSzPct val="90000"/>
+              <a:buFont typeface="Arial"/>
+              <a:buChar char="–"/>
+            </a:pPr>
+            <a:r>
+              <a:rPr sz="1350" b="0" i="0">
+                <a:solidFill>
+                  <a:srgbClr val="2A1A1F"/>
+                </a:solidFill>
+                <a:latin typeface="Calibri"/>
+              </a:rPr>
+              <a:t>Cultural appropriation vs appreciation — using cultural motifs respectfully and with context</a:t>
+            </a:r>
+          </a:p>
+          <a:p>
+            <a:pPr indent="-203200" marL="203200">
+              <a:spcAft>
+                <a:spcPts val="900"/>
+              </a:spcAft>
+              <a:buClr>
+                <a:srgbClr val="7A2E43"/>
+              </a:buClr>
+              <a:buSzPct val="90000"/>
+              <a:buFont typeface="Arial"/>
+              <a:buChar char="–"/>
+            </a:pPr>
+            <a:r>
+              <a:rPr sz="1350" b="0" i="0">
+                <a:solidFill>
+                  <a:srgbClr val="2A1A1F"/>
+                </a:solidFill>
+                <a:latin typeface="Calibri"/>
+              </a:rPr>
+              <a:t>Inclusive design — designing for the widest possible range of users, including disability</a:t>
+            </a:r>
+          </a:p>
+        </p:txBody>
+      </p:sp>
+      <p:sp>
+        <p:nvSpPr>
+          <p:cNvPr id="5" name="Oval 4"/>
+          <p:cNvSpPr/>
+          <p:nvPr/>
+        </p:nvSpPr>
+        <p:spPr>
+          <a:xfrm>
+            <a:off x="10881360" y="5943600"/>
+            <a:ext cx="1005840" cy="1005840"/>
+          </a:xfrm>
+          <a:prstGeom prst="ellipse">
+            <a:avLst/>
+          </a:prstGeom>
+          <a:solidFill>
+            <a:srgbClr val="EDCBD3"/>
+          </a:solidFill>
+          <a:ln>
+            <a:noFill/>
+          </a:ln>
+          <a:effectLst/>
+        </p:spPr>
+        <p:style>
+          <a:lnRef idx="1">
+            <a:schemeClr val="accent1"/>
+          </a:lnRef>
+          <a:fillRef idx="3">
+            <a:schemeClr val="accent1"/>
+          </a:fillRef>
+          <a:effectRef idx="2">
+            <a:schemeClr val="accent1"/>
+          </a:effectRef>
+          <a:fontRef idx="minor">
+            <a:schemeClr val="lt1"/>
+          </a:fontRef>
+        </p:style>
+        <p:txBody>
+          <a:bodyPr rtlCol="0" anchor="ctr"/>
+          <a:lstStyle/>
+          <a:p>
+            <a:pPr algn="ctr"/>
+          </a:p>
+        </p:txBody>
+      </p:sp>
+    </p:spTree>
+  </p:cSld>
+  <p:clrMapOvr>
+    <a:masterClrMapping/>
+  </p:clrMapOvr>
+</p:sld>
+</file>
+
+<file path=ppt/slides/slide23.xml><?xml version="1.0" encoding="utf-8"?>
+<p:sld xmlns:a="http://schemas.openxmlformats.org/drawingml/2006/main" xmlns:p="http://schemas.openxmlformats.org/presentationml/2006/main" xmlns:r="http://schemas.openxmlformats.org/officeDocument/2006/relationships">
+  <p:cSld>
+    <p:bg>
+      <p:bgPr>
+        <a:solidFill>
+          <a:srgbClr val="FBF5F1"/>
+        </a:solidFill>
+        <a:effectLst/>
+      </p:bgPr>
+    </p:bg>
+    <p:spTree>
+      <p:nvGrpSpPr>
+        <p:cNvPr id="1" name=""/>
+        <p:cNvGrpSpPr/>
+        <p:nvPr/>
+      </p:nvGrpSpPr>
+      <p:grpSpPr/>
+      <p:sp>
+        <p:nvSpPr>
+          <p:cNvPr id="2" name="Rounded Rectangle 1"/>
+          <p:cNvSpPr/>
+          <p:nvPr/>
+        </p:nvSpPr>
+        <p:spPr>
+          <a:xfrm>
+            <a:off x="685800" y="502920"/>
+            <a:ext cx="3291840" cy="457200"/>
+          </a:xfrm>
+          <a:prstGeom prst="roundRect">
+            <a:avLst>
+              <a:gd name="adj" fmla="val 50000"/>
+            </a:avLst>
+          </a:prstGeom>
+          <a:solidFill>
+            <a:srgbClr val="7A2E43"/>
+          </a:solidFill>
+          <a:ln>
+            <a:noFill/>
+          </a:ln>
+          <a:effectLst/>
+        </p:spPr>
+        <p:style>
+          <a:lnRef idx="1">
+            <a:schemeClr val="accent1"/>
+          </a:lnRef>
+          <a:fillRef idx="3">
+            <a:schemeClr val="accent1"/>
+          </a:fillRef>
+          <a:effectRef idx="2">
+            <a:schemeClr val="accent1"/>
+          </a:effectRef>
+          <a:fontRef idx="minor">
+            <a:schemeClr val="lt1"/>
+          </a:fontRef>
+        </p:style>
+        <p:txBody>
+          <a:bodyPr rtlCol="0" anchor="ctr" wrap="none" lIns="50800" rIns="50800"/>
+          <a:lstStyle/>
+          <a:p>
+            <a:pPr algn="ctr"/>
+            <a:r>
+              <a:rPr sz="1100" b="1">
+                <a:solidFill>
+                  <a:srgbClr val="FFFFFF"/>
+                </a:solidFill>
+                <a:latin typeface="Calibri"/>
+              </a:rPr>
+              <a:t>EXTENDED KNOWLEDGE</a:t>
+            </a:r>
+          </a:p>
+        </p:txBody>
+      </p:sp>
+      <p:sp>
+        <p:nvSpPr>
+          <p:cNvPr id="3" name="TextBox 2"/>
+          <p:cNvSpPr txBox="1"/>
+          <p:nvPr/>
+        </p:nvSpPr>
+        <p:spPr>
+          <a:xfrm>
+            <a:off x="685800" y="1051560"/>
+            <a:ext cx="10607040" cy="822960"/>
+          </a:xfrm>
+          <a:prstGeom prst="rect">
+            <a:avLst/>
+          </a:prstGeom>
+          <a:noFill/>
+        </p:spPr>
+        <p:txBody>
+          <a:bodyPr wrap="square" anchor="t">
+            <a:spAutoFit/>
+          </a:bodyPr>
+          <a:lstStyle/>
+          <a:p>
+            <a:pPr algn="l"/>
+            <a:r>
+              <a:rPr sz="2700" b="1" i="0">
+                <a:solidFill>
+                  <a:srgbClr val="2A1A1F"/>
+                </a:solidFill>
+                <a:latin typeface="Cambria"/>
+              </a:rPr>
+              <a:t>Designer Case Studies</a:t>
+            </a:r>
+          </a:p>
+        </p:txBody>
+      </p:sp>
+      <p:sp>
+        <p:nvSpPr>
+          <p:cNvPr id="4" name="Rounded Rectangle 3"/>
+          <p:cNvSpPr/>
+          <p:nvPr/>
+        </p:nvSpPr>
+        <p:spPr>
+          <a:xfrm>
+            <a:off x="685800" y="1874519"/>
+            <a:ext cx="10607040" cy="4526280"/>
+          </a:xfrm>
+          <a:prstGeom prst="roundRect">
+            <a:avLst>
+              <a:gd name="adj" fmla="val 6000"/>
+            </a:avLst>
+          </a:prstGeom>
+          <a:solidFill>
+            <a:srgbClr val="F1EAEC"/>
+          </a:solidFill>
+          <a:ln>
+            <a:noFill/>
+          </a:ln>
+          <a:effectLst/>
+        </p:spPr>
+        <p:style>
+          <a:lnRef idx="1">
+            <a:schemeClr val="accent1"/>
+          </a:lnRef>
+          <a:fillRef idx="3">
+            <a:schemeClr val="accent1"/>
+          </a:fillRef>
+          <a:effectRef idx="2">
+            <a:schemeClr val="accent1"/>
+          </a:effectRef>
+          <a:fontRef idx="minor">
+            <a:schemeClr val="lt1"/>
+          </a:fontRef>
+        </p:style>
+        <p:txBody>
+          <a:bodyPr rtlCol="0" anchor="ctr" lIns="330200" rIns="330200" tIns="254000" bIns="254000" wrap="square"/>
+          <a:lstStyle/>
+          <a:p>
+            <a:pPr algn="ctr" indent="-203200" marL="203200">
+              <a:spcAft>
+                <a:spcPts val="900"/>
+              </a:spcAft>
+              <a:buClr>
+                <a:srgbClr val="7A2E43"/>
+              </a:buClr>
+              <a:buSzPct val="90000"/>
+              <a:buFont typeface="Arial"/>
+              <a:buChar char="●"/>
+            </a:pPr>
+            <a:r>
+              <a:rPr sz="1500" b="1" i="0">
+                <a:solidFill>
+                  <a:srgbClr val="672738"/>
+                </a:solidFill>
+                <a:latin typeface="Calibri"/>
+              </a:rPr>
+              <a:t>Figures worth knowing</a:t>
+            </a:r>
+          </a:p>
+          <a:p>
+            <a:pPr indent="-203200" marL="203200">
+              <a:spcAft>
+                <a:spcPts val="900"/>
+              </a:spcAft>
+              <a:buClr>
+                <a:srgbClr val="7A2E43"/>
+              </a:buClr>
+              <a:buSzPct val="90000"/>
+              <a:buFont typeface="Arial"/>
+              <a:buChar char="–"/>
+            </a:pPr>
+            <a:r>
+              <a:rPr sz="1350" b="0" i="0">
+                <a:solidFill>
+                  <a:srgbClr val="2A1A1F"/>
+                </a:solidFill>
+                <a:latin typeface="Calibri"/>
+              </a:rPr>
+              <a:t>Paula Scher — bold typographic identity work (Citibank, The Public Theater)</a:t>
+            </a:r>
+          </a:p>
+          <a:p>
+            <a:pPr indent="-203200" marL="203200">
+              <a:spcAft>
+                <a:spcPts val="900"/>
+              </a:spcAft>
+              <a:buClr>
+                <a:srgbClr val="7A2E43"/>
+              </a:buClr>
+              <a:buSzPct val="90000"/>
+              <a:buFont typeface="Arial"/>
+              <a:buChar char="–"/>
+            </a:pPr>
+            <a:r>
+              <a:rPr sz="1350" b="0" i="0">
+                <a:solidFill>
+                  <a:srgbClr val="2A1A1F"/>
+                </a:solidFill>
+                <a:latin typeface="Calibri"/>
+              </a:rPr>
+              <a:t>Massimo Vignelli — Swiss-influenced systems design (New York City subway map)</a:t>
+            </a:r>
+          </a:p>
+          <a:p>
+            <a:pPr indent="-203200" marL="203200">
+              <a:spcAft>
+                <a:spcPts val="900"/>
+              </a:spcAft>
+              <a:buClr>
+                <a:srgbClr val="7A2E43"/>
+              </a:buClr>
+              <a:buSzPct val="90000"/>
+              <a:buFont typeface="Arial"/>
+              <a:buChar char="–"/>
+            </a:pPr>
+            <a:r>
+              <a:rPr sz="1350" b="0" i="0">
+                <a:solidFill>
+                  <a:srgbClr val="2A1A1F"/>
+                </a:solidFill>
+                <a:latin typeface="Calibri"/>
+              </a:rPr>
+              <a:t>Dieter Rams — 10 principles of good design, Braun product design</a:t>
+            </a:r>
+          </a:p>
+          <a:p>
+            <a:pPr indent="-203200" marL="203200">
+              <a:spcAft>
+                <a:spcPts val="900"/>
+              </a:spcAft>
+              <a:buClr>
+                <a:srgbClr val="7A2E43"/>
+              </a:buClr>
+              <a:buSzPct val="90000"/>
+              <a:buFont typeface="Arial"/>
+              <a:buChar char="–"/>
+            </a:pPr>
+            <a:r>
+              <a:rPr sz="1350" b="0" i="0">
+                <a:solidFill>
+                  <a:srgbClr val="2A1A1F"/>
+                </a:solidFill>
+                <a:latin typeface="Calibri"/>
+              </a:rPr>
+              <a:t>Saul Bass — pioneering film title sequences and corporate logos</a:t>
+            </a:r>
+          </a:p>
+        </p:txBody>
+      </p:sp>
+      <p:sp>
+        <p:nvSpPr>
+          <p:cNvPr id="5" name="Oval 4"/>
+          <p:cNvSpPr/>
+          <p:nvPr/>
+        </p:nvSpPr>
+        <p:spPr>
+          <a:xfrm>
+            <a:off x="10881360" y="5943600"/>
+            <a:ext cx="1005840" cy="1005840"/>
+          </a:xfrm>
+          <a:prstGeom prst="ellipse">
+            <a:avLst/>
+          </a:prstGeom>
+          <a:solidFill>
+            <a:srgbClr val="EDCBD3"/>
+          </a:solidFill>
+          <a:ln>
+            <a:noFill/>
+          </a:ln>
+          <a:effectLst/>
+        </p:spPr>
+        <p:style>
+          <a:lnRef idx="1">
+            <a:schemeClr val="accent1"/>
+          </a:lnRef>
+          <a:fillRef idx="3">
+            <a:schemeClr val="accent1"/>
+          </a:fillRef>
+          <a:effectRef idx="2">
+            <a:schemeClr val="accent1"/>
+          </a:effectRef>
+          <a:fontRef idx="minor">
+            <a:schemeClr val="lt1"/>
+          </a:fontRef>
+        </p:style>
+        <p:txBody>
+          <a:bodyPr rtlCol="0" anchor="ctr"/>
+          <a:lstStyle/>
+          <a:p>
+            <a:pPr algn="ctr"/>
+          </a:p>
+        </p:txBody>
+      </p:sp>
+    </p:spTree>
+  </p:cSld>
+  <p:clrMapOvr>
+    <a:masterClrMapping/>
+  </p:clrMapOvr>
+</p:sld>
+</file>
+
+<file path=ppt/slides/slide24.xml><?xml version="1.0" encoding="utf-8"?>
+<p:sld xmlns:a="http://schemas.openxmlformats.org/drawingml/2006/main" xmlns:p="http://schemas.openxmlformats.org/presentationml/2006/main" xmlns:r="http://schemas.openxmlformats.org/officeDocument/2006/relationships">
+  <p:cSld>
+    <p:bg>
+      <p:bgPr>
+        <a:solidFill>
+          <a:srgbClr val="7A2E43"/>
+        </a:solidFill>
+        <a:effectLst/>
+      </p:bgPr>
+    </p:bg>
+    <p:spTree>
+      <p:nvGrpSpPr>
+        <p:cNvPr id="1" name=""/>
+        <p:cNvGrpSpPr/>
+        <p:nvPr/>
+      </p:nvGrpSpPr>
+      <p:grpSpPr/>
+      <p:sp>
+        <p:nvSpPr>
+          <p:cNvPr id="2" name="Oval 1"/>
+          <p:cNvSpPr/>
+          <p:nvPr/>
+        </p:nvSpPr>
+        <p:spPr>
+          <a:xfrm>
+            <a:off x="9692640" y="-914400"/>
+            <a:ext cx="2926080" cy="2926080"/>
+          </a:xfrm>
+          <a:prstGeom prst="ellipse">
+            <a:avLst/>
+          </a:prstGeom>
+          <a:solidFill>
+            <a:srgbClr val="6B283A"/>
+          </a:solidFill>
+          <a:ln>
+            <a:noFill/>
+          </a:ln>
+          <a:effectLst/>
+        </p:spPr>
+        <p:style>
+          <a:lnRef idx="1">
+            <a:schemeClr val="accent1"/>
+          </a:lnRef>
+          <a:fillRef idx="3">
+            <a:schemeClr val="accent1"/>
+          </a:fillRef>
+          <a:effectRef idx="2">
+            <a:schemeClr val="accent1"/>
+          </a:effectRef>
+          <a:fontRef idx="minor">
+            <a:schemeClr val="lt1"/>
+          </a:fontRef>
+        </p:style>
+        <p:txBody>
+          <a:bodyPr rtlCol="0" anchor="ctr"/>
+          <a:lstStyle/>
+          <a:p>
+            <a:pPr algn="ctr"/>
+          </a:p>
+        </p:txBody>
+      </p:sp>
+      <p:sp>
+        <p:nvSpPr>
+          <p:cNvPr id="3" name="Oval 2"/>
+          <p:cNvSpPr/>
+          <p:nvPr/>
+        </p:nvSpPr>
+        <p:spPr>
+          <a:xfrm>
+            <a:off x="-914400" y="4937760"/>
+            <a:ext cx="2377440" cy="2377440"/>
+          </a:xfrm>
+          <a:prstGeom prst="ellipse">
+            <a:avLst/>
+          </a:prstGeom>
+          <a:solidFill>
+            <a:srgbClr val="6B283A"/>
+          </a:solidFill>
+          <a:ln>
+            <a:noFill/>
+          </a:ln>
+          <a:effectLst/>
+        </p:spPr>
+        <p:style>
+          <a:lnRef idx="1">
+            <a:schemeClr val="accent1"/>
+          </a:lnRef>
+          <a:fillRef idx="3">
+            <a:schemeClr val="accent1"/>
+          </a:fillRef>
+          <a:effectRef idx="2">
+            <a:schemeClr val="accent1"/>
+          </a:effectRef>
+          <a:fontRef idx="minor">
+            <a:schemeClr val="lt1"/>
+          </a:fontRef>
+        </p:style>
+        <p:txBody>
+          <a:bodyPr rtlCol="0" anchor="ctr"/>
+          <a:lstStyle/>
+          <a:p>
+            <a:pPr algn="ctr"/>
+          </a:p>
+        </p:txBody>
+      </p:sp>
+      <p:sp>
+        <p:nvSpPr>
+          <p:cNvPr id="4" name="Rounded Rectangle 3"/>
+          <p:cNvSpPr/>
+          <p:nvPr/>
+        </p:nvSpPr>
+        <p:spPr>
+          <a:xfrm>
+            <a:off x="822960" y="1051560"/>
+            <a:ext cx="1188720" cy="502920"/>
+          </a:xfrm>
+          <a:prstGeom prst="roundRect">
+            <a:avLst>
+              <a:gd name="adj" fmla="val 50000"/>
+            </a:avLst>
+          </a:prstGeom>
+          <a:solidFill>
+            <a:srgbClr val="FFFFFF"/>
+          </a:solidFill>
+          <a:ln>
+            <a:noFill/>
+          </a:ln>
+          <a:effectLst/>
+        </p:spPr>
+        <p:style>
+          <a:lnRef idx="1">
+            <a:schemeClr val="accent1"/>
+          </a:lnRef>
+          <a:fillRef idx="3">
+            <a:schemeClr val="accent1"/>
+          </a:fillRef>
+          <a:effectRef idx="2">
+            <a:schemeClr val="accent1"/>
+          </a:effectRef>
+          <a:fontRef idx="minor">
+            <a:schemeClr val="lt1"/>
+          </a:fontRef>
+        </p:style>
+        <p:txBody>
+          <a:bodyPr rtlCol="0" anchor="ctr" wrap="none" lIns="50800" rIns="50800"/>
+          <a:lstStyle/>
+          <a:p>
+            <a:pPr algn="ctr"/>
+            <a:r>
+              <a:rPr sz="1400" b="1">
+                <a:solidFill>
+                  <a:srgbClr val="612435"/>
+                </a:solidFill>
+                <a:latin typeface="Calibri"/>
+              </a:rPr>
+              <a:t>04</a:t>
+            </a:r>
+          </a:p>
+        </p:txBody>
+      </p:sp>
+      <p:sp>
+        <p:nvSpPr>
+          <p:cNvPr id="5" name="Rounded Rectangle 4"/>
+          <p:cNvSpPr/>
+          <p:nvPr/>
+        </p:nvSpPr>
+        <p:spPr>
+          <a:xfrm>
+            <a:off x="822960" y="2011680"/>
+            <a:ext cx="10515600" cy="2834640"/>
+          </a:xfrm>
+          <a:prstGeom prst="roundRect">
+            <a:avLst>
+              <a:gd name="adj" fmla="val 18000"/>
+            </a:avLst>
+          </a:prstGeom>
+          <a:solidFill>
+            <a:srgbClr val="FFFFFF"/>
+          </a:solidFill>
+          <a:ln>
+            <a:noFill/>
+          </a:ln>
+          <a:effectLst/>
+        </p:spPr>
+        <p:style>
+          <a:lnRef idx="1">
+            <a:schemeClr val="accent1"/>
+          </a:lnRef>
+          <a:fillRef idx="3">
+            <a:schemeClr val="accent1"/>
+          </a:fillRef>
+          <a:effectRef idx="2">
+            <a:schemeClr val="accent1"/>
+          </a:effectRef>
+          <a:fontRef idx="minor">
+            <a:schemeClr val="lt1"/>
+          </a:fontRef>
+        </p:style>
+        <p:txBody>
+          <a:bodyPr rtlCol="0" anchor="ctr"/>
+          <a:lstStyle/>
+          <a:p>
+            <a:pPr algn="ctr"/>
+          </a:p>
+        </p:txBody>
+      </p:sp>
+      <p:sp>
+        <p:nvSpPr>
+          <p:cNvPr id="6" name="TextBox 5"/>
+          <p:cNvSpPr txBox="1"/>
+          <p:nvPr/>
+        </p:nvSpPr>
+        <p:spPr>
+          <a:xfrm>
+            <a:off x="1280160" y="2697480"/>
+            <a:ext cx="9601200" cy="1097280"/>
+          </a:xfrm>
+          <a:prstGeom prst="rect">
+            <a:avLst/>
+          </a:prstGeom>
+          <a:noFill/>
+        </p:spPr>
+        <p:txBody>
+          <a:bodyPr wrap="square" anchor="t">
+            <a:spAutoFit/>
+          </a:bodyPr>
+          <a:lstStyle/>
+          <a:p>
+            <a:pPr algn="l"/>
+            <a:r>
+              <a:rPr sz="3400" b="1" i="0">
+                <a:solidFill>
+                  <a:srgbClr val="672738"/>
+                </a:solidFill>
+                <a:latin typeface="Cambria"/>
+              </a:rPr>
+              <a:t>SAC Briefing</a:t>
+            </a:r>
+          </a:p>
+        </p:txBody>
+      </p:sp>
+      <p:sp>
+        <p:nvSpPr>
+          <p:cNvPr id="7" name="TextBox 6"/>
+          <p:cNvSpPr txBox="1"/>
+          <p:nvPr/>
+        </p:nvSpPr>
+        <p:spPr>
+          <a:xfrm>
+            <a:off x="1280160" y="3657600"/>
+            <a:ext cx="9601200" cy="548640"/>
+          </a:xfrm>
+          <a:prstGeom prst="rect">
+            <a:avLst/>
+          </a:prstGeom>
+          <a:noFill/>
+        </p:spPr>
+        <p:txBody>
+          <a:bodyPr wrap="square" anchor="t">
+            <a:spAutoFit/>
+          </a:bodyPr>
+          <a:lstStyle/>
+          <a:p>
+            <a:pPr algn="l"/>
+            <a:r>
+              <a:rPr sz="1500" b="0" i="0">
+                <a:solidFill>
+                  <a:srgbClr val="6B6B6B"/>
+                </a:solidFill>
+                <a:latin typeface="Calibri"/>
+              </a:rPr>
+              <a:t>Draft — confirm against your school’s SAC schedule</a:t>
+            </a:r>
+          </a:p>
+        </p:txBody>
+      </p:sp>
+    </p:spTree>
+  </p:cSld>
+  <p:clrMapOvr>
+    <a:masterClrMapping/>
+  </p:clrMapOvr>
+</p:sld>
+</file>
+
+<file path=ppt/slides/slide25.xml><?xml version="1.0" encoding="utf-8"?>
+<p:sld xmlns:a="http://schemas.openxmlformats.org/drawingml/2006/main" xmlns:p="http://schemas.openxmlformats.org/presentationml/2006/main" xmlns:r="http://schemas.openxmlformats.org/officeDocument/2006/relationships">
+  <p:cSld>
+    <p:bg>
+      <p:bgPr>
+        <a:solidFill>
+          <a:srgbClr val="FBF5F1"/>
+        </a:solidFill>
+        <a:effectLst/>
+      </p:bgPr>
+    </p:bg>
+    <p:spTree>
+      <p:nvGrpSpPr>
+        <p:cNvPr id="1" name=""/>
+        <p:cNvGrpSpPr/>
+        <p:nvPr/>
+      </p:nvGrpSpPr>
+      <p:grpSpPr/>
+      <p:sp>
+        <p:nvSpPr>
+          <p:cNvPr id="2" name="Rounded Rectangle 1"/>
+          <p:cNvSpPr/>
+          <p:nvPr/>
+        </p:nvSpPr>
+        <p:spPr>
+          <a:xfrm>
+            <a:off x="685800" y="502920"/>
+            <a:ext cx="3291840" cy="457200"/>
+          </a:xfrm>
+          <a:prstGeom prst="roundRect">
+            <a:avLst>
+              <a:gd name="adj" fmla="val 50000"/>
+            </a:avLst>
+          </a:prstGeom>
+          <a:solidFill>
+            <a:srgbClr val="7A2E43"/>
+          </a:solidFill>
+          <a:ln>
+            <a:noFill/>
+          </a:ln>
+          <a:effectLst/>
+        </p:spPr>
+        <p:style>
+          <a:lnRef idx="1">
+            <a:schemeClr val="accent1"/>
+          </a:lnRef>
+          <a:fillRef idx="3">
+            <a:schemeClr val="accent1"/>
+          </a:fillRef>
+          <a:effectRef idx="2">
+            <a:schemeClr val="accent1"/>
+          </a:effectRef>
+          <a:fontRef idx="minor">
+            <a:schemeClr val="lt1"/>
+          </a:fontRef>
+        </p:style>
+        <p:txBody>
+          <a:bodyPr rtlCol="0" anchor="ctr" wrap="none" lIns="50800" rIns="50800"/>
+          <a:lstStyle/>
+          <a:p>
+            <a:pPr algn="ctr"/>
+            <a:r>
+              <a:rPr sz="1100" b="1">
+                <a:solidFill>
+                  <a:srgbClr val="FFFFFF"/>
+                </a:solidFill>
+                <a:latin typeface="Calibri"/>
+              </a:rPr>
+              <a:t>SAC BRIEFING</a:t>
+            </a:r>
+          </a:p>
+        </p:txBody>
+      </p:sp>
+      <p:sp>
+        <p:nvSpPr>
+          <p:cNvPr id="3" name="TextBox 2"/>
+          <p:cNvSpPr txBox="1"/>
+          <p:nvPr/>
+        </p:nvSpPr>
+        <p:spPr>
+          <a:xfrm>
+            <a:off x="685800" y="1051560"/>
+            <a:ext cx="10607040" cy="822960"/>
+          </a:xfrm>
+          <a:prstGeom prst="rect">
+            <a:avLst/>
+          </a:prstGeom>
+          <a:noFill/>
+        </p:spPr>
+        <p:txBody>
+          <a:bodyPr wrap="square" anchor="t">
+            <a:spAutoFit/>
+          </a:bodyPr>
+          <a:lstStyle/>
+          <a:p>
+            <a:pPr algn="l"/>
+            <a:r>
+              <a:rPr sz="2700" b="1" i="0">
+                <a:solidFill>
+                  <a:srgbClr val="2A1A1F"/>
+                </a:solidFill>
+                <a:latin typeface="Cambria"/>
+              </a:rPr>
+              <a:t>Outcome 1 (AOS 1) — Trends in Design</a:t>
+            </a:r>
+          </a:p>
+        </p:txBody>
+      </p:sp>
+      <p:sp>
+        <p:nvSpPr>
+          <p:cNvPr id="4" name="Rounded Rectangle 3"/>
+          <p:cNvSpPr/>
+          <p:nvPr/>
+        </p:nvSpPr>
+        <p:spPr>
+          <a:xfrm>
+            <a:off x="685800" y="1874519"/>
+            <a:ext cx="10607040" cy="4526280"/>
+          </a:xfrm>
+          <a:prstGeom prst="roundRect">
+            <a:avLst>
+              <a:gd name="adj" fmla="val 6000"/>
+            </a:avLst>
+          </a:prstGeom>
+          <a:solidFill>
+            <a:srgbClr val="F1EAEC"/>
+          </a:solidFill>
+          <a:ln>
+            <a:noFill/>
+          </a:ln>
+          <a:effectLst/>
+        </p:spPr>
+        <p:style>
+          <a:lnRef idx="1">
+            <a:schemeClr val="accent1"/>
+          </a:lnRef>
+          <a:fillRef idx="3">
+            <a:schemeClr val="accent1"/>
+          </a:fillRef>
+          <a:effectRef idx="2">
+            <a:schemeClr val="accent1"/>
+          </a:effectRef>
+          <a:fontRef idx="minor">
+            <a:schemeClr val="lt1"/>
+          </a:fontRef>
+        </p:style>
+        <p:txBody>
+          <a:bodyPr rtlCol="0" anchor="ctr" lIns="330200" rIns="330200" tIns="254000" bIns="254000" wrap="square"/>
+          <a:lstStyle/>
+          <a:p>
+            <a:pPr algn="ctr" indent="-203200" marL="203200">
+              <a:spcAft>
+                <a:spcPts val="900"/>
+              </a:spcAft>
+              <a:buClr>
+                <a:srgbClr val="7A2E43"/>
+              </a:buClr>
+              <a:buSzPct val="90000"/>
+              <a:buFont typeface="Arial"/>
+              <a:buChar char="●"/>
+            </a:pPr>
+            <a:r>
+              <a:rPr sz="1500" b="1" i="0">
+                <a:solidFill>
+                  <a:srgbClr val="672738"/>
+                </a:solidFill>
+                <a:latin typeface="Calibri"/>
+              </a:rPr>
+              <a:t>Task</a:t>
+            </a:r>
+          </a:p>
+          <a:p>
+            <a:pPr indent="-203200" marL="203200">
+              <a:spcAft>
+                <a:spcPts val="900"/>
+              </a:spcAft>
+              <a:buClr>
+                <a:srgbClr val="7A2E43"/>
+              </a:buClr>
+              <a:buSzPct val="90000"/>
+              <a:buFont typeface="Arial"/>
+              <a:buChar char="–"/>
+            </a:pPr>
+            <a:r>
+              <a:rPr sz="1350" b="0" i="0">
+                <a:solidFill>
+                  <a:srgbClr val="2A1A1F"/>
+                </a:solidFill>
+                <a:latin typeface="Calibri"/>
+              </a:rPr>
+              <a:t>Select a current design trend. Analyse how it manifests across at least two design fields, identifying the factor(s) driving it. Respond as a structured written report or exam-style short-answer responses.</a:t>
+            </a:r>
+          </a:p>
+          <a:p>
+            <a:pPr indent="-203200" marL="203200">
+              <a:spcAft>
+                <a:spcPts val="900"/>
+              </a:spcAft>
+              <a:buClr>
+                <a:srgbClr val="7A2E43"/>
+              </a:buClr>
+              <a:buSzPct val="90000"/>
+              <a:buFont typeface="Arial"/>
+              <a:buChar char="●"/>
+            </a:pPr>
+            <a:r>
+              <a:rPr sz="1500" b="1" i="0">
+                <a:solidFill>
+                  <a:srgbClr val="672738"/>
+                </a:solidFill>
+                <a:latin typeface="Calibri"/>
+              </a:rPr>
+              <a:t>Conditions</a:t>
+            </a:r>
+          </a:p>
+          <a:p>
+            <a:pPr indent="-203200" marL="203200">
+              <a:spcAft>
+                <a:spcPts val="900"/>
+              </a:spcAft>
+              <a:buClr>
+                <a:srgbClr val="7A2E43"/>
+              </a:buClr>
+              <a:buSzPct val="90000"/>
+              <a:buFont typeface="Arial"/>
+              <a:buChar char="–"/>
+            </a:pPr>
+            <a:r>
+              <a:rPr sz="1350" b="0" i="0">
+                <a:solidFill>
+                  <a:srgbClr val="2A1A1F"/>
+                </a:solidFill>
+                <a:latin typeface="Calibri"/>
+              </a:rPr>
+              <a:t>Completed in class over 1-2 periods</a:t>
+            </a:r>
+          </a:p>
+          <a:p>
+            <a:pPr indent="-203200" marL="203200">
+              <a:spcAft>
+                <a:spcPts val="900"/>
+              </a:spcAft>
+              <a:buClr>
+                <a:srgbClr val="7A2E43"/>
+              </a:buClr>
+              <a:buSzPct val="90000"/>
+              <a:buFont typeface="Arial"/>
+              <a:buChar char="–"/>
+            </a:pPr>
+            <a:r>
+              <a:rPr sz="1350" b="0" i="0">
+                <a:solidFill>
+                  <a:srgbClr val="2A1A1F"/>
+                </a:solidFill>
+                <a:latin typeface="Calibri"/>
+              </a:rPr>
+              <a:t>Notes permitted; no internet access</a:t>
+            </a:r>
+          </a:p>
+          <a:p>
+            <a:pPr indent="-203200" marL="203200">
+              <a:spcAft>
+                <a:spcPts val="900"/>
+              </a:spcAft>
+              <a:buClr>
+                <a:srgbClr val="7A2E43"/>
+              </a:buClr>
+              <a:buSzPct val="90000"/>
+              <a:buFont typeface="Arial"/>
+              <a:buChar char="–"/>
+            </a:pPr>
+            <a:r>
+              <a:rPr sz="1350" b="0" i="0">
+                <a:solidFill>
+                  <a:srgbClr val="2A1A1F"/>
+                </a:solidFill>
+                <a:latin typeface="Calibri"/>
+              </a:rPr>
+              <a:t>Individual, supervised work</a:t>
+            </a:r>
+          </a:p>
+          <a:p>
+            <a:pPr indent="-203200" marL="203200">
+              <a:spcAft>
+                <a:spcPts val="900"/>
+              </a:spcAft>
+              <a:buClr>
+                <a:srgbClr val="7A2E43"/>
+              </a:buClr>
+              <a:buSzPct val="90000"/>
+              <a:buFont typeface="Arial"/>
+              <a:buChar char="●"/>
+            </a:pPr>
+            <a:r>
+              <a:rPr sz="1500" b="1" i="0">
+                <a:solidFill>
+                  <a:srgbClr val="672738"/>
+                </a:solidFill>
+                <a:latin typeface="Calibri"/>
+              </a:rPr>
+              <a:t>Assessment Criteria (/30)</a:t>
+            </a:r>
+          </a:p>
+          <a:p>
+            <a:pPr indent="-203200" marL="203200">
+              <a:spcAft>
+                <a:spcPts val="900"/>
+              </a:spcAft>
+              <a:buClr>
+                <a:srgbClr val="7A2E43"/>
+              </a:buClr>
+              <a:buSzPct val="90000"/>
+              <a:buFont typeface="Arial"/>
+              <a:buChar char="–"/>
+            </a:pPr>
+            <a:r>
+              <a:rPr sz="1350" b="0" i="0">
+                <a:solidFill>
+                  <a:srgbClr val="2A1A1F"/>
+                </a:solidFill>
+                <a:latin typeface="Calibri"/>
+              </a:rPr>
+              <a:t>Identification of trend and driving factor(s) — 5 marks</a:t>
+            </a:r>
+          </a:p>
+          <a:p>
+            <a:pPr indent="-203200" marL="203200">
+              <a:spcAft>
+                <a:spcPts val="900"/>
+              </a:spcAft>
+              <a:buClr>
+                <a:srgbClr val="7A2E43"/>
+              </a:buClr>
+              <a:buSzPct val="90000"/>
+              <a:buFont typeface="Arial"/>
+              <a:buChar char="–"/>
+            </a:pPr>
+            <a:r>
+              <a:rPr sz="1350" b="0" i="0">
+                <a:solidFill>
+                  <a:srgbClr val="2A1A1F"/>
+                </a:solidFill>
+                <a:latin typeface="Calibri"/>
+              </a:rPr>
+              <a:t>Analysis across 2+ design fields with specific evidence — 15 marks</a:t>
+            </a:r>
+          </a:p>
+          <a:p>
+            <a:pPr indent="-203200" marL="203200">
+              <a:spcAft>
+                <a:spcPts val="900"/>
+              </a:spcAft>
+              <a:buClr>
+                <a:srgbClr val="7A2E43"/>
+              </a:buClr>
+              <a:buSzPct val="90000"/>
+              <a:buFont typeface="Arial"/>
+              <a:buChar char="–"/>
+            </a:pPr>
+            <a:r>
+              <a:rPr sz="1350" b="0" i="0">
+                <a:solidFill>
+                  <a:srgbClr val="2A1A1F"/>
+                </a:solidFill>
+                <a:latin typeface="Calibri"/>
+              </a:rPr>
+              <a:t>Use of accurate vocabulary — 5 marks</a:t>
+            </a:r>
+          </a:p>
+          <a:p>
+            <a:pPr indent="-203200" marL="203200">
+              <a:spcAft>
+                <a:spcPts val="900"/>
+              </a:spcAft>
+              <a:buClr>
+                <a:srgbClr val="7A2E43"/>
+              </a:buClr>
+              <a:buSzPct val="90000"/>
+              <a:buFont typeface="Arial"/>
+              <a:buChar char="–"/>
+            </a:pPr>
+            <a:r>
+              <a:rPr sz="1350" b="0" i="0">
+                <a:solidFill>
+                  <a:srgbClr val="2A1A1F"/>
+                </a:solidFill>
+                <a:latin typeface="Calibri"/>
+              </a:rPr>
+              <a:t>Written expression — 5 marks</a:t>
+            </a:r>
+          </a:p>
+        </p:txBody>
+      </p:sp>
+      <p:sp>
+        <p:nvSpPr>
+          <p:cNvPr id="5" name="Oval 4"/>
+          <p:cNvSpPr/>
+          <p:nvPr/>
+        </p:nvSpPr>
+        <p:spPr>
+          <a:xfrm>
+            <a:off x="10881360" y="5943600"/>
+            <a:ext cx="1005840" cy="1005840"/>
+          </a:xfrm>
+          <a:prstGeom prst="ellipse">
+            <a:avLst/>
+          </a:prstGeom>
+          <a:solidFill>
+            <a:srgbClr val="EDCBD3"/>
+          </a:solidFill>
+          <a:ln>
+            <a:noFill/>
+          </a:ln>
+          <a:effectLst/>
+        </p:spPr>
+        <p:style>
+          <a:lnRef idx="1">
+            <a:schemeClr val="accent1"/>
+          </a:lnRef>
+          <a:fillRef idx="3">
+            <a:schemeClr val="accent1"/>
+          </a:fillRef>
+          <a:effectRef idx="2">
+            <a:schemeClr val="accent1"/>
+          </a:effectRef>
+          <a:fontRef idx="minor">
+            <a:schemeClr val="lt1"/>
+          </a:fontRef>
+        </p:style>
+        <p:txBody>
+          <a:bodyPr rtlCol="0" anchor="ctr"/>
+          <a:lstStyle/>
+          <a:p>
+            <a:pPr algn="ctr"/>
+          </a:p>
+        </p:txBody>
+      </p:sp>
+    </p:spTree>
+  </p:cSld>
+  <p:clrMapOvr>
+    <a:masterClrMapping/>
+  </p:clrMapOvr>
+</p:sld>
+</file>
+
+<file path=ppt/slides/slide26.xml><?xml version="1.0" encoding="utf-8"?>
+<p:sld xmlns:a="http://schemas.openxmlformats.org/drawingml/2006/main" xmlns:p="http://schemas.openxmlformats.org/presentationml/2006/main" xmlns:r="http://schemas.openxmlformats.org/officeDocument/2006/relationships">
+  <p:cSld>
+    <p:bg>
+      <p:bgPr>
+        <a:solidFill>
+          <a:srgbClr val="FBF5F1"/>
+        </a:solidFill>
+        <a:effectLst/>
+      </p:bgPr>
+    </p:bg>
+    <p:spTree>
+      <p:nvGrpSpPr>
+        <p:cNvPr id="1" name=""/>
+        <p:cNvGrpSpPr/>
+        <p:nvPr/>
+      </p:nvGrpSpPr>
+      <p:grpSpPr/>
+      <p:sp>
+        <p:nvSpPr>
+          <p:cNvPr id="2" name="Rounded Rectangle 1"/>
+          <p:cNvSpPr/>
+          <p:nvPr/>
+        </p:nvSpPr>
+        <p:spPr>
+          <a:xfrm>
+            <a:off x="685800" y="502920"/>
+            <a:ext cx="3291840" cy="457200"/>
+          </a:xfrm>
+          <a:prstGeom prst="roundRect">
+            <a:avLst>
+              <a:gd name="adj" fmla="val 50000"/>
+            </a:avLst>
+          </a:prstGeom>
+          <a:solidFill>
+            <a:srgbClr val="7A2E43"/>
+          </a:solidFill>
+          <a:ln>
+            <a:noFill/>
+          </a:ln>
+          <a:effectLst/>
+        </p:spPr>
+        <p:style>
+          <a:lnRef idx="1">
+            <a:schemeClr val="accent1"/>
+          </a:lnRef>
+          <a:fillRef idx="3">
+            <a:schemeClr val="accent1"/>
+          </a:fillRef>
+          <a:effectRef idx="2">
+            <a:schemeClr val="accent1"/>
+          </a:effectRef>
+          <a:fontRef idx="minor">
+            <a:schemeClr val="lt1"/>
+          </a:fontRef>
+        </p:style>
+        <p:txBody>
+          <a:bodyPr rtlCol="0" anchor="ctr" wrap="none" lIns="50800" rIns="50800"/>
+          <a:lstStyle/>
+          <a:p>
+            <a:pPr algn="ctr"/>
+            <a:r>
+              <a:rPr sz="1100" b="1">
+                <a:solidFill>
+                  <a:srgbClr val="FFFFFF"/>
+                </a:solidFill>
+                <a:latin typeface="Calibri"/>
+              </a:rPr>
+              <a:t>SAC BRIEFING</a:t>
+            </a:r>
+          </a:p>
+        </p:txBody>
+      </p:sp>
+      <p:sp>
+        <p:nvSpPr>
+          <p:cNvPr id="3" name="TextBox 2"/>
+          <p:cNvSpPr txBox="1"/>
+          <p:nvPr/>
+        </p:nvSpPr>
+        <p:spPr>
+          <a:xfrm>
+            <a:off x="685800" y="1051560"/>
+            <a:ext cx="10607040" cy="822960"/>
+          </a:xfrm>
+          <a:prstGeom prst="rect">
+            <a:avLst/>
+          </a:prstGeom>
+          <a:noFill/>
+        </p:spPr>
+        <p:txBody>
+          <a:bodyPr wrap="square" anchor="t">
+            <a:spAutoFit/>
+          </a:bodyPr>
+          <a:lstStyle/>
+          <a:p>
+            <a:pPr algn="l"/>
+            <a:r>
+              <a:rPr sz="2700" b="1" i="0">
+                <a:solidFill>
+                  <a:srgbClr val="2A1A1F"/>
+                </a:solidFill>
+                <a:latin typeface="Cambria"/>
+              </a:rPr>
+              <a:t>Outcome 2 (AOS 2) — Design and Industry Connections</a:t>
+            </a:r>
+          </a:p>
+        </p:txBody>
+      </p:sp>
+      <p:sp>
+        <p:nvSpPr>
+          <p:cNvPr id="4" name="Rounded Rectangle 3"/>
+          <p:cNvSpPr/>
+          <p:nvPr/>
+        </p:nvSpPr>
+        <p:spPr>
+          <a:xfrm>
+            <a:off x="685800" y="1874519"/>
+            <a:ext cx="10607040" cy="4526280"/>
+          </a:xfrm>
+          <a:prstGeom prst="roundRect">
+            <a:avLst>
+              <a:gd name="adj" fmla="val 6000"/>
+            </a:avLst>
+          </a:prstGeom>
+          <a:solidFill>
+            <a:srgbClr val="F1EAEC"/>
+          </a:solidFill>
+          <a:ln>
+            <a:noFill/>
+          </a:ln>
+          <a:effectLst/>
+        </p:spPr>
+        <p:style>
+          <a:lnRef idx="1">
+            <a:schemeClr val="accent1"/>
+          </a:lnRef>
+          <a:fillRef idx="3">
+            <a:schemeClr val="accent1"/>
+          </a:fillRef>
+          <a:effectRef idx="2">
+            <a:schemeClr val="accent1"/>
+          </a:effectRef>
+          <a:fontRef idx="minor">
+            <a:schemeClr val="lt1"/>
+          </a:fontRef>
+        </p:style>
+        <p:txBody>
+          <a:bodyPr rtlCol="0" anchor="ctr" lIns="330200" rIns="330200" tIns="254000" bIns="254000" wrap="square"/>
+          <a:lstStyle/>
+          <a:p>
+            <a:pPr algn="ctr" indent="-203200" marL="203200">
+              <a:spcAft>
+                <a:spcPts val="900"/>
+              </a:spcAft>
+              <a:buClr>
+                <a:srgbClr val="7A2E43"/>
+              </a:buClr>
+              <a:buSzPct val="90000"/>
+              <a:buFont typeface="Arial"/>
+              <a:buChar char="●"/>
+            </a:pPr>
+            <a:r>
+              <a:rPr sz="1500" b="1" i="0">
+                <a:solidFill>
+                  <a:srgbClr val="672738"/>
+                </a:solidFill>
+                <a:latin typeface="Calibri"/>
+              </a:rPr>
+              <a:t>Task</a:t>
+            </a:r>
+          </a:p>
+          <a:p>
+            <a:pPr indent="-203200" marL="203200">
+              <a:spcAft>
+                <a:spcPts val="900"/>
+              </a:spcAft>
+              <a:buClr>
+                <a:srgbClr val="7A2E43"/>
+              </a:buClr>
+              <a:buSzPct val="90000"/>
+              <a:buFont typeface="Arial"/>
+              <a:buChar char="–"/>
+            </a:pPr>
+            <a:r>
+              <a:rPr sz="1350" b="0" i="0">
+                <a:solidFill>
+                  <a:srgbClr val="2A1A1F"/>
+                </a:solidFill>
+                <a:latin typeface="Calibri"/>
+              </a:rPr>
+              <a:t>Respond to a brief requiring industry awareness: produce a visual communication in one design field, while documenting at least one industry connection (a collaboration role, an intellectual property consideration, or an industry factor) relevant to the project.</a:t>
+            </a:r>
+          </a:p>
+          <a:p>
+            <a:pPr indent="-203200" marL="203200">
+              <a:spcAft>
+                <a:spcPts val="900"/>
+              </a:spcAft>
+              <a:buClr>
+                <a:srgbClr val="7A2E43"/>
+              </a:buClr>
+              <a:buSzPct val="90000"/>
+              <a:buFont typeface="Arial"/>
+              <a:buChar char="●"/>
+            </a:pPr>
+            <a:r>
+              <a:rPr sz="1500" b="1" i="0">
+                <a:solidFill>
+                  <a:srgbClr val="672738"/>
+                </a:solidFill>
+                <a:latin typeface="Calibri"/>
+              </a:rPr>
+              <a:t>Conditions</a:t>
+            </a:r>
+          </a:p>
+          <a:p>
+            <a:pPr indent="-203200" marL="203200">
+              <a:spcAft>
+                <a:spcPts val="900"/>
+              </a:spcAft>
+              <a:buClr>
+                <a:srgbClr val="7A2E43"/>
+              </a:buClr>
+              <a:buSzPct val="90000"/>
+              <a:buFont typeface="Arial"/>
+              <a:buChar char="–"/>
+            </a:pPr>
+            <a:r>
+              <a:rPr sz="1350" b="0" i="0">
+                <a:solidFill>
+                  <a:srgbClr val="2A1A1F"/>
+                </a:solidFill>
+                <a:latin typeface="Calibri"/>
+              </a:rPr>
+              <a:t>Completed over approximately 3-4 weeks</a:t>
+            </a:r>
+          </a:p>
+          <a:p>
+            <a:pPr indent="-203200" marL="203200">
+              <a:spcAft>
+                <a:spcPts val="900"/>
+              </a:spcAft>
+              <a:buClr>
+                <a:srgbClr val="7A2E43"/>
+              </a:buClr>
+              <a:buSzPct val="90000"/>
+              <a:buFont typeface="Arial"/>
+              <a:buChar char="–"/>
+            </a:pPr>
+            <a:r>
+              <a:rPr sz="1350" b="0" i="0">
+                <a:solidFill>
+                  <a:srgbClr val="2A1A1F"/>
+                </a:solidFill>
+                <a:latin typeface="Calibri"/>
+              </a:rPr>
+              <a:t>Folio submission combining process work and final piece</a:t>
+            </a:r>
+          </a:p>
+          <a:p>
+            <a:pPr indent="-203200" marL="203200">
+              <a:spcAft>
+                <a:spcPts val="900"/>
+              </a:spcAft>
+              <a:buClr>
+                <a:srgbClr val="7A2E43"/>
+              </a:buClr>
+              <a:buSzPct val="90000"/>
+              <a:buFont typeface="Arial"/>
+              <a:buChar char="–"/>
+            </a:pPr>
+            <a:r>
+              <a:rPr sz="1350" b="0" i="0">
+                <a:solidFill>
+                  <a:srgbClr val="2A1A1F"/>
+                </a:solidFill>
+                <a:latin typeface="Calibri"/>
+              </a:rPr>
+              <a:t>Individual work</a:t>
+            </a:r>
+          </a:p>
+          <a:p>
+            <a:pPr indent="-203200" marL="203200">
+              <a:spcAft>
+                <a:spcPts val="900"/>
+              </a:spcAft>
+              <a:buClr>
+                <a:srgbClr val="7A2E43"/>
+              </a:buClr>
+              <a:buSzPct val="90000"/>
+              <a:buFont typeface="Arial"/>
+              <a:buChar char="●"/>
+            </a:pPr>
+            <a:r>
+              <a:rPr sz="1500" b="1" i="0">
+                <a:solidFill>
+                  <a:srgbClr val="672738"/>
+                </a:solidFill>
+                <a:latin typeface="Calibri"/>
+              </a:rPr>
+              <a:t>Assessment Criteria (/50)</a:t>
+            </a:r>
+          </a:p>
+          <a:p>
+            <a:pPr indent="-203200" marL="203200">
+              <a:spcAft>
+                <a:spcPts val="900"/>
+              </a:spcAft>
+              <a:buClr>
+                <a:srgbClr val="7A2E43"/>
+              </a:buClr>
+              <a:buSzPct val="90000"/>
+              <a:buFont typeface="Arial"/>
+              <a:buChar char="–"/>
+            </a:pPr>
+            <a:r>
+              <a:rPr sz="1350" b="0" i="0">
+                <a:solidFill>
+                  <a:srgbClr val="2A1A1F"/>
+                </a:solidFill>
+                <a:latin typeface="Calibri"/>
+              </a:rPr>
+              <a:t>Response to the brief — 15 marks</a:t>
+            </a:r>
+          </a:p>
+          <a:p>
+            <a:pPr indent="-203200" marL="203200">
+              <a:spcAft>
+                <a:spcPts val="900"/>
+              </a:spcAft>
+              <a:buClr>
+                <a:srgbClr val="7A2E43"/>
+              </a:buClr>
+              <a:buSzPct val="90000"/>
+              <a:buFont typeface="Arial"/>
+              <a:buChar char="–"/>
+            </a:pPr>
+            <a:r>
+              <a:rPr sz="1350" b="0" i="0">
+                <a:solidFill>
+                  <a:srgbClr val="2A1A1F"/>
+                </a:solidFill>
+                <a:latin typeface="Calibri"/>
+              </a:rPr>
+              <a:t>Evidence of the design process — 15 marks</a:t>
+            </a:r>
+          </a:p>
+          <a:p>
+            <a:pPr indent="-203200" marL="203200">
+              <a:spcAft>
+                <a:spcPts val="900"/>
+              </a:spcAft>
+              <a:buClr>
+                <a:srgbClr val="7A2E43"/>
+              </a:buClr>
+              <a:buSzPct val="90000"/>
+              <a:buFont typeface="Arial"/>
+              <a:buChar char="–"/>
+            </a:pPr>
+            <a:r>
+              <a:rPr sz="1350" b="0" i="0">
+                <a:solidFill>
+                  <a:srgbClr val="2A1A1F"/>
+                </a:solidFill>
+                <a:latin typeface="Calibri"/>
+              </a:rPr>
+              <a:t>Discussion of industry connection(s) — 10 marks</a:t>
+            </a:r>
+          </a:p>
+          <a:p>
+            <a:pPr indent="-203200" marL="203200">
+              <a:spcAft>
+                <a:spcPts val="900"/>
+              </a:spcAft>
+              <a:buClr>
+                <a:srgbClr val="7A2E43"/>
+              </a:buClr>
+              <a:buSzPct val="90000"/>
+              <a:buFont typeface="Arial"/>
+              <a:buChar char="–"/>
+            </a:pPr>
+            <a:r>
+              <a:rPr sz="1350" b="0" i="0">
+                <a:solidFill>
+                  <a:srgbClr val="2A1A1F"/>
+                </a:solidFill>
+                <a:latin typeface="Calibri"/>
+              </a:rPr>
+              <a:t>Quality of final presentation — 10 marks</a:t>
+            </a:r>
+          </a:p>
+        </p:txBody>
+      </p:sp>
+      <p:sp>
+        <p:nvSpPr>
+          <p:cNvPr id="5" name="Oval 4"/>
+          <p:cNvSpPr/>
+          <p:nvPr/>
+        </p:nvSpPr>
+        <p:spPr>
+          <a:xfrm>
+            <a:off x="10881360" y="5943600"/>
+            <a:ext cx="1005840" cy="1005840"/>
+          </a:xfrm>
+          <a:prstGeom prst="ellipse">
+            <a:avLst/>
+          </a:prstGeom>
+          <a:solidFill>
+            <a:srgbClr val="EDCBD3"/>
+          </a:solidFill>
+          <a:ln>
+            <a:noFill/>
+          </a:ln>
+          <a:effectLst/>
+        </p:spPr>
+        <p:style>
+          <a:lnRef idx="1">
+            <a:schemeClr val="accent1"/>
+          </a:lnRef>
+          <a:fillRef idx="3">
+            <a:schemeClr val="accent1"/>
+          </a:fillRef>
+          <a:effectRef idx="2">
+            <a:schemeClr val="accent1"/>
+          </a:effectRef>
+          <a:fontRef idx="minor">
+            <a:schemeClr val="lt1"/>
+          </a:fontRef>
+        </p:style>
+        <p:txBody>
+          <a:bodyPr rtlCol="0" anchor="ctr"/>
+          <a:lstStyle/>
+          <a:p>
+            <a:pPr algn="ctr"/>
+          </a:p>
+        </p:txBody>
+      </p:sp>
+    </p:spTree>
+  </p:cSld>
+  <p:clrMapOvr>
+    <a:masterClrMapping/>
+  </p:clrMapOvr>
+</p:sld>
+</file>
+
+<file path=ppt/slides/slide27.xml><?xml version="1.0" encoding="utf-8"?>
+<p:sld xmlns:a="http://schemas.openxmlformats.org/drawingml/2006/main" xmlns:p="http://schemas.openxmlformats.org/presentationml/2006/main" xmlns:r="http://schemas.openxmlformats.org/officeDocument/2006/relationships">
+  <p:cSld>
+    <p:bg>
+      <p:bgPr>
+        <a:solidFill>
+          <a:srgbClr val="7A2E43"/>
+        </a:solidFill>
+        <a:effectLst/>
+      </p:bgPr>
+    </p:bg>
+    <p:spTree>
+      <p:nvGrpSpPr>
+        <p:cNvPr id="1" name=""/>
+        <p:cNvGrpSpPr/>
+        <p:nvPr/>
+      </p:nvGrpSpPr>
+      <p:grpSpPr/>
+      <p:sp>
+        <p:nvSpPr>
+          <p:cNvPr id="2" name="Oval 1"/>
+          <p:cNvSpPr/>
+          <p:nvPr/>
+        </p:nvSpPr>
+        <p:spPr>
+          <a:xfrm>
+            <a:off x="-1097280" y="4114800"/>
+            <a:ext cx="3108960" cy="3108960"/>
+          </a:xfrm>
+          <a:prstGeom prst="ellipse">
+            <a:avLst/>
+          </a:prstGeom>
+          <a:solidFill>
+            <a:srgbClr val="6B283A"/>
+          </a:solidFill>
+          <a:ln>
+            <a:noFill/>
+          </a:ln>
+          <a:effectLst/>
+        </p:spPr>
+        <p:style>
+          <a:lnRef idx="1">
+            <a:schemeClr val="accent1"/>
+          </a:lnRef>
+          <a:fillRef idx="3">
+            <a:schemeClr val="accent1"/>
+          </a:fillRef>
+          <a:effectRef idx="2">
+            <a:schemeClr val="accent1"/>
+          </a:effectRef>
+          <a:fontRef idx="minor">
+            <a:schemeClr val="lt1"/>
+          </a:fontRef>
+        </p:style>
+        <p:txBody>
+          <a:bodyPr rtlCol="0" anchor="ctr"/>
+          <a:lstStyle/>
+          <a:p>
+            <a:pPr algn="ctr"/>
+          </a:p>
+        </p:txBody>
+      </p:sp>
+      <p:sp>
+        <p:nvSpPr>
+          <p:cNvPr id="3" name="Oval 2"/>
+          <p:cNvSpPr/>
+          <p:nvPr/>
+        </p:nvSpPr>
+        <p:spPr>
+          <a:xfrm>
+            <a:off x="9875520" y="-1188720"/>
+            <a:ext cx="2743200" cy="2743200"/>
+          </a:xfrm>
+          <a:prstGeom prst="ellipse">
+            <a:avLst/>
+          </a:prstGeom>
+          <a:solidFill>
+            <a:srgbClr val="D6A24A"/>
+          </a:solidFill>
+          <a:ln>
+            <a:noFill/>
+          </a:ln>
+          <a:effectLst/>
+        </p:spPr>
+        <p:style>
+          <a:lnRef idx="1">
+            <a:schemeClr val="accent1"/>
+          </a:lnRef>
+          <a:fillRef idx="3">
+            <a:schemeClr val="accent1"/>
+          </a:fillRef>
+          <a:effectRef idx="2">
+            <a:schemeClr val="accent1"/>
+          </a:effectRef>
+          <a:fontRef idx="minor">
+            <a:schemeClr val="lt1"/>
+          </a:fontRef>
+        </p:style>
+        <p:txBody>
+          <a:bodyPr rtlCol="0" anchor="ctr"/>
+          <a:lstStyle/>
+          <a:p>
+            <a:pPr algn="ctr"/>
+          </a:p>
+        </p:txBody>
+      </p:sp>
+      <p:sp>
+        <p:nvSpPr>
+          <p:cNvPr id="4" name="Rounded Rectangle 3"/>
+          <p:cNvSpPr/>
+          <p:nvPr/>
+        </p:nvSpPr>
+        <p:spPr>
+          <a:xfrm>
+            <a:off x="1920240" y="2286000"/>
+            <a:ext cx="8321040" cy="2377440"/>
+          </a:xfrm>
+          <a:prstGeom prst="roundRect">
+            <a:avLst>
+              <a:gd name="adj" fmla="val 20000"/>
+            </a:avLst>
+          </a:prstGeom>
+          <a:solidFill>
+            <a:srgbClr val="FFFFFF"/>
+          </a:solidFill>
+          <a:ln>
+            <a:noFill/>
+          </a:ln>
+          <a:effectLst/>
+        </p:spPr>
+        <p:style>
+          <a:lnRef idx="1">
+            <a:schemeClr val="accent1"/>
+          </a:lnRef>
+          <a:fillRef idx="3">
+            <a:schemeClr val="accent1"/>
+          </a:fillRef>
+          <a:effectRef idx="2">
+            <a:schemeClr val="accent1"/>
+          </a:effectRef>
+          <a:fontRef idx="minor">
+            <a:schemeClr val="lt1"/>
+          </a:fontRef>
+        </p:style>
+        <p:txBody>
+          <a:bodyPr rtlCol="0" anchor="ctr"/>
+          <a:lstStyle/>
+          <a:p>
+            <a:pPr algn="ctr"/>
+            <a:r>
+              <a:rPr b="1" sz="3000">
+                <a:solidFill>
+                  <a:srgbClr val="7A2E43"/>
+                </a:solidFill>
+                <a:latin typeface="Cambria"/>
+              </a:rPr>
+              <a:t>End of Unit 2</a:t>
+            </a:r>
+          </a:p>
+          <a:p>
+            <a:pPr algn="ctr"/>
+            <a:r>
+              <a:rPr sz="1400">
+                <a:solidFill>
+                  <a:srgbClr val="595959"/>
+                </a:solidFill>
+              </a:rPr>
+              <a:t>Review the matching workbook to consolidate what you have learnt.</a:t>
             </a:r>
           </a:p>
         </p:txBody>

--- a/teaching-materials/vcd-vce/powerpoint/Unit2-Design-Contexts-and-Connections.pptx
+++ b/teaching-materials/vcd-vce/powerpoint/Unit2-Design-Contexts-and-Connections.pptx
@@ -32,6 +32,12 @@
     <p:sldId id="280" r:id="rId31"/>
     <p:sldId id="281" r:id="rId32"/>
     <p:sldId id="282" r:id="rId33"/>
+    <p:sldId id="283" r:id="rId34"/>
+    <p:sldId id="284" r:id="rId35"/>
+    <p:sldId id="285" r:id="rId36"/>
+    <p:sldId id="286" r:id="rId37"/>
+    <p:sldId id="287" r:id="rId38"/>
+    <p:sldId id="288" r:id="rId39"/>
   </p:sldIdLst>
   <p:sldSz cx="12191695" cy="6858000" type="screen4x3"/>
   <p:notesSz cx="6858000" cy="9144000"/>
@@ -3430,7 +3436,7 @@
     <p:bg>
       <p:bgPr>
         <a:solidFill>
-          <a:srgbClr val="7A2E43"/>
+          <a:srgbClr val="D98C9E"/>
         </a:solidFill>
         <a:effectLst/>
       </p:bgPr>
@@ -3450,14 +3456,14 @@
         </p:nvSpPr>
         <p:spPr>
           <a:xfrm>
-            <a:off x="9692640" y="-914400"/>
-            <a:ext cx="2926080" cy="2926080"/>
+            <a:off x="-914400" y="-914400"/>
+            <a:ext cx="2103120" cy="2103120"/>
           </a:xfrm>
           <a:prstGeom prst="ellipse">
             <a:avLst/>
           </a:prstGeom>
           <a:solidFill>
-            <a:srgbClr val="6B283A"/>
+            <a:srgbClr val="BE7B8B"/>
           </a:solidFill>
           <a:ln>
             <a:noFill/>
@@ -3494,14 +3500,14 @@
         </p:nvSpPr>
         <p:spPr>
           <a:xfrm>
-            <a:off x="-914400" y="4937760"/>
-            <a:ext cx="2377440" cy="2377440"/>
+            <a:off x="11064240" y="5852160"/>
+            <a:ext cx="1737360" cy="1737360"/>
           </a:xfrm>
           <a:prstGeom prst="ellipse">
             <a:avLst/>
           </a:prstGeom>
           <a:solidFill>
-            <a:srgbClr val="6B283A"/>
+            <a:srgbClr val="BE7B8B"/>
           </a:solidFill>
           <a:ln>
             <a:noFill/>
@@ -3538,8 +3544,8 @@
         </p:nvSpPr>
         <p:spPr>
           <a:xfrm>
-            <a:off x="822960" y="1051560"/>
-            <a:ext cx="1188720" cy="502920"/>
+            <a:off x="685800" y="457200"/>
+            <a:ext cx="1033271" cy="502920"/>
           </a:xfrm>
           <a:prstGeom prst="roundRect">
             <a:avLst>
@@ -3569,36 +3575,181 @@
           </a:fontRef>
         </p:style>
         <p:txBody>
-          <a:bodyPr rtlCol="0" anchor="ctr" wrap="none" lIns="50800" rIns="50800"/>
+          <a:bodyPr rtlCol="0" anchor="ctr"/>
           <a:lstStyle/>
           <a:p>
             <a:pPr algn="ctr"/>
             <a:r>
-              <a:rPr sz="1400" b="1">
-                <a:solidFill>
-                  <a:srgbClr val="612435"/>
-                </a:solidFill>
-                <a:latin typeface="Calibri"/>
-              </a:rPr>
-              <a:t>02</a:t>
-            </a:r>
-          </a:p>
-        </p:txBody>
-      </p:sp>
-      <p:sp>
-        <p:nvSpPr>
-          <p:cNvPr id="5" name="Rounded Rectangle 4"/>
+              <a:rPr b="1" sz="1400">
+                <a:solidFill>
+                  <a:srgbClr val="8D5B66"/>
+                </a:solidFill>
+                <a:latin typeface="Calibri"/>
+              </a:rPr>
+              <a:t>QUIZ</a:t>
+            </a:r>
+          </a:p>
+        </p:txBody>
+      </p:sp>
+      <p:sp>
+        <p:nvSpPr>
+          <p:cNvPr id="5" name="TextBox 4"/>
+          <p:cNvSpPr txBox="1"/>
+          <p:nvPr/>
+        </p:nvSpPr>
+        <p:spPr>
+          <a:xfrm>
+            <a:off x="685800" y="1143000"/>
+            <a:ext cx="10607040" cy="914400"/>
+          </a:xfrm>
+          <a:prstGeom prst="rect">
+            <a:avLst/>
+          </a:prstGeom>
+          <a:noFill/>
+        </p:spPr>
+        <p:txBody>
+          <a:bodyPr wrap="square" anchor="t">
+            <a:spAutoFit/>
+          </a:bodyPr>
+          <a:lstStyle/>
+          <a:p>
+            <a:pPr algn="l"/>
+            <a:r>
+              <a:rPr sz="3000" b="1" i="0">
+                <a:solidFill>
+                  <a:srgbClr val="FFFFFF"/>
+                </a:solidFill>
+                <a:latin typeface="Cambria"/>
+              </a:rPr>
+              <a:t>Trend or Fad?</a:t>
+            </a:r>
+          </a:p>
+        </p:txBody>
+      </p:sp>
+      <p:sp>
+        <p:nvSpPr>
+          <p:cNvPr id="6" name="Rounded Rectangle 5"/>
           <p:cNvSpPr/>
           <p:nvPr/>
         </p:nvSpPr>
         <p:spPr>
           <a:xfrm>
-            <a:off x="822960" y="2011680"/>
-            <a:ext cx="10515600" cy="2834640"/>
+            <a:off x="685800" y="2148840"/>
+            <a:ext cx="960120" cy="411480"/>
           </a:xfrm>
           <a:prstGeom prst="roundRect">
             <a:avLst>
-              <a:gd name="adj" fmla="val 18000"/>
+              <a:gd name="adj" fmla="val 50000"/>
+            </a:avLst>
+          </a:prstGeom>
+          <a:solidFill>
+            <a:srgbClr val="A26976"/>
+          </a:solidFill>
+          <a:ln>
+            <a:noFill/>
+          </a:ln>
+          <a:effectLst/>
+        </p:spPr>
+        <p:style>
+          <a:lnRef idx="1">
+            <a:schemeClr val="accent1"/>
+          </a:lnRef>
+          <a:fillRef idx="3">
+            <a:schemeClr val="accent1"/>
+          </a:fillRef>
+          <a:effectRef idx="2">
+            <a:schemeClr val="accent1"/>
+          </a:effectRef>
+          <a:fontRef idx="minor">
+            <a:schemeClr val="lt1"/>
+          </a:fontRef>
+        </p:style>
+        <p:txBody>
+          <a:bodyPr rtlCol="0" anchor="ctr" wrap="none" lIns="50800" rIns="50800"/>
+          <a:lstStyle/>
+          <a:p>
+            <a:pPr algn="ctr"/>
+            <a:r>
+              <a:rPr sz="1050" b="1">
+                <a:solidFill>
+                  <a:srgbClr val="FFFFFF"/>
+                </a:solidFill>
+                <a:latin typeface="Calibri"/>
+              </a:rPr>
+              <a:t>5 MIN</a:t>
+            </a:r>
+          </a:p>
+        </p:txBody>
+      </p:sp>
+      <p:sp>
+        <p:nvSpPr>
+          <p:cNvPr id="7" name="Rounded Rectangle 6"/>
+          <p:cNvSpPr/>
+          <p:nvPr/>
+        </p:nvSpPr>
+        <p:spPr>
+          <a:xfrm>
+            <a:off x="1783080" y="2148840"/>
+            <a:ext cx="1563624" cy="411480"/>
+          </a:xfrm>
+          <a:prstGeom prst="roundRect">
+            <a:avLst>
+              <a:gd name="adj" fmla="val 50000"/>
+            </a:avLst>
+          </a:prstGeom>
+          <a:solidFill>
+            <a:srgbClr val="A26976"/>
+          </a:solidFill>
+          <a:ln>
+            <a:noFill/>
+          </a:ln>
+          <a:effectLst/>
+        </p:spPr>
+        <p:style>
+          <a:lnRef idx="1">
+            <a:schemeClr val="accent1"/>
+          </a:lnRef>
+          <a:fillRef idx="3">
+            <a:schemeClr val="accent1"/>
+          </a:fillRef>
+          <a:effectRef idx="2">
+            <a:schemeClr val="accent1"/>
+          </a:effectRef>
+          <a:fontRef idx="minor">
+            <a:schemeClr val="lt1"/>
+          </a:fontRef>
+        </p:style>
+        <p:txBody>
+          <a:bodyPr rtlCol="0" anchor="ctr" wrap="none" lIns="50800" rIns="50800"/>
+          <a:lstStyle/>
+          <a:p>
+            <a:pPr algn="ctr"/>
+            <a:r>
+              <a:rPr sz="1050" b="1">
+                <a:solidFill>
+                  <a:srgbClr val="FFFFFF"/>
+                </a:solidFill>
+                <a:latin typeface="Calibri"/>
+              </a:rPr>
+              <a:t>WHOLE CLASS</a:t>
+            </a:r>
+          </a:p>
+        </p:txBody>
+      </p:sp>
+      <p:sp>
+        <p:nvSpPr>
+          <p:cNvPr id="8" name="Rounded Rectangle 7"/>
+          <p:cNvSpPr/>
+          <p:nvPr/>
+        </p:nvSpPr>
+        <p:spPr>
+          <a:xfrm>
+            <a:off x="685800" y="2788920"/>
+            <a:ext cx="10607040" cy="3246120"/>
+          </a:xfrm>
+          <a:prstGeom prst="roundRect">
+            <a:avLst>
+              <a:gd name="adj" fmla="val 8000"/>
             </a:avLst>
           </a:prstGeom>
           <a:solidFill>
@@ -3624,23 +3775,86 @@
           </a:fontRef>
         </p:style>
         <p:txBody>
-          <a:bodyPr rtlCol="0" anchor="ctr"/>
-          <a:lstStyle/>
-          <a:p>
-            <a:pPr algn="ctr"/>
-          </a:p>
-        </p:txBody>
-      </p:sp>
-      <p:sp>
-        <p:nvSpPr>
-          <p:cNvPr id="6" name="TextBox 5"/>
+          <a:bodyPr rtlCol="0" anchor="ctr" lIns="304800" rIns="304800" tIns="203200" bIns="203200" wrap="square"/>
+          <a:lstStyle/>
+          <a:p>
+            <a:pPr algn="ctr" indent="-203200" marL="203200">
+              <a:spcAft>
+                <a:spcPts val="900"/>
+              </a:spcAft>
+              <a:buClr>
+                <a:srgbClr val="D98C9E"/>
+              </a:buClr>
+              <a:buSzPct val="90000"/>
+              <a:buFont typeface="Arial"/>
+              <a:buChar char="●"/>
+            </a:pPr>
+            <a:r>
+              <a:rPr sz="1450" b="0" i="0">
+                <a:solidFill>
+                  <a:srgbClr val="2A1A1F"/>
+                </a:solidFill>
+                <a:latin typeface="Calibri"/>
+              </a:rPr>
+              <a:t>Teacher shows 5 example scenarios (a product, style or campaign).</a:t>
+            </a:r>
+          </a:p>
+          <a:p>
+            <a:pPr indent="-203200" marL="203200">
+              <a:spcAft>
+                <a:spcPts val="900"/>
+              </a:spcAft>
+              <a:buClr>
+                <a:srgbClr val="D98C9E"/>
+              </a:buClr>
+              <a:buSzPct val="90000"/>
+              <a:buFont typeface="Arial"/>
+              <a:buChar char="●"/>
+            </a:pPr>
+            <a:r>
+              <a:rPr sz="1450" b="0" i="0">
+                <a:solidFill>
+                  <a:srgbClr val="2A1A1F"/>
+                </a:solidFill>
+                <a:latin typeface="Calibri"/>
+              </a:rPr>
+              <a:t>Students vote "trend" or "fad" for each by show of hands.</a:t>
+            </a:r>
+          </a:p>
+          <a:p>
+            <a:pPr indent="-203200" marL="203200">
+              <a:spcAft>
+                <a:spcPts val="900"/>
+              </a:spcAft>
+              <a:buClr>
+                <a:srgbClr val="D98C9E"/>
+              </a:buClr>
+              <a:buSzPct val="90000"/>
+              <a:buFont typeface="Arial"/>
+              <a:buChar char="●"/>
+            </a:pPr>
+            <a:r>
+              <a:rPr sz="1450" b="0" i="0">
+                <a:solidFill>
+                  <a:srgbClr val="2A1A1F"/>
+                </a:solidFill>
+                <a:latin typeface="Calibri"/>
+              </a:rPr>
+              <a:t>Discuss the reasoning behind each vote before revealing the answer.</a:t>
+            </a:r>
+          </a:p>
+        </p:txBody>
+      </p:sp>
+      <p:sp>
+        <p:nvSpPr>
+          <p:cNvPr id="9" name="TextBox 8"/>
           <p:cNvSpPr txBox="1"/>
           <p:nvPr/>
         </p:nvSpPr>
         <p:spPr>
           <a:xfrm>
-            <a:off x="1280160" y="2697480"/>
-            <a:ext cx="9601200" cy="1097280"/>
+            <a:off x="685800" y="6217920"/>
+            <a:ext cx="10607040" cy="502920"/>
           </a:xfrm>
           <a:prstGeom prst="rect">
             <a:avLst/>
@@ -3655,48 +3869,13 @@
           <a:p>
             <a:pPr algn="l"/>
             <a:r>
-              <a:rPr sz="3400" b="1" i="0">
-                <a:solidFill>
-                  <a:srgbClr val="672738"/>
-                </a:solidFill>
-                <a:latin typeface="Cambria"/>
-              </a:rPr>
-              <a:t>Design &amp; Industry Connections</a:t>
-            </a:r>
-          </a:p>
-        </p:txBody>
-      </p:sp>
-      <p:sp>
-        <p:nvSpPr>
-          <p:cNvPr id="7" name="TextBox 6"/>
-          <p:cNvSpPr txBox="1"/>
-          <p:nvPr/>
-        </p:nvSpPr>
-        <p:spPr>
-          <a:xfrm>
-            <a:off x="1280160" y="3657600"/>
-            <a:ext cx="9601200" cy="548640"/>
-          </a:xfrm>
-          <a:prstGeom prst="rect">
-            <a:avLst/>
-          </a:prstGeom>
-          <a:noFill/>
-        </p:spPr>
-        <p:txBody>
-          <a:bodyPr wrap="square" anchor="t">
-            <a:spAutoFit/>
-          </a:bodyPr>
-          <a:lstStyle/>
-          <a:p>
-            <a:pPr algn="l"/>
-            <a:r>
-              <a:rPr sz="1500" b="0" i="0">
-                <a:solidFill>
-                  <a:srgbClr val="6B6B6B"/>
-                </a:solidFill>
-                <a:latin typeface="Calibri"/>
-              </a:rPr>
-              <a:t>AOS 2 - Design and Industry Connections</a:t>
+              <a:rPr sz="1250" b="0" i="1">
+                <a:solidFill>
+                  <a:srgbClr val="FFFFFF"/>
+                </a:solidFill>
+                <a:latin typeface="Calibri"/>
+              </a:rPr>
+              <a:t>Debrief: What made the fads different from the genuine trends?</a:t>
             </a:r>
           </a:p>
         </p:txBody>
@@ -3715,7 +3894,7 @@
     <p:bg>
       <p:bgPr>
         <a:solidFill>
-          <a:srgbClr val="FBF5F1"/>
+          <a:srgbClr val="D98C9E"/>
         </a:solidFill>
         <a:effectLst/>
       </p:bgPr>
@@ -3729,22 +3908,20 @@
       <p:grpSpPr/>
       <p:sp>
         <p:nvSpPr>
-          <p:cNvPr id="2" name="Rounded Rectangle 1"/>
+          <p:cNvPr id="2" name="Oval 1"/>
           <p:cNvSpPr/>
           <p:nvPr/>
         </p:nvSpPr>
         <p:spPr>
           <a:xfrm>
-            <a:off x="685800" y="502920"/>
-            <a:ext cx="3291840" cy="457200"/>
-          </a:xfrm>
-          <a:prstGeom prst="roundRect">
-            <a:avLst>
-              <a:gd name="adj" fmla="val 50000"/>
-            </a:avLst>
+            <a:off x="-914400" y="-914400"/>
+            <a:ext cx="2103120" cy="2103120"/>
+          </a:xfrm>
+          <a:prstGeom prst="ellipse">
+            <a:avLst/>
           </a:prstGeom>
           <a:solidFill>
-            <a:srgbClr val="7A2E43"/>
+            <a:srgbClr val="BE7B8B"/>
           </a:solidFill>
           <a:ln>
             <a:noFill/>
@@ -3766,75 +3943,29 @@
           </a:fontRef>
         </p:style>
         <p:txBody>
-          <a:bodyPr rtlCol="0" anchor="ctr" wrap="none" lIns="50800" rIns="50800"/>
+          <a:bodyPr rtlCol="0" anchor="ctr"/>
           <a:lstStyle/>
           <a:p>
             <a:pPr algn="ctr"/>
-            <a:r>
-              <a:rPr sz="1100" b="1">
-                <a:solidFill>
-                  <a:srgbClr val="FFFFFF"/>
-                </a:solidFill>
-                <a:latin typeface="Calibri"/>
-              </a:rPr>
-              <a:t>DESIGN &amp; INDUSTRY CONNECTIONS</a:t>
-            </a:r>
-          </a:p>
-        </p:txBody>
-      </p:sp>
-      <p:sp>
-        <p:nvSpPr>
-          <p:cNvPr id="3" name="TextBox 2"/>
-          <p:cNvSpPr txBox="1"/>
-          <p:nvPr/>
-        </p:nvSpPr>
-        <p:spPr>
-          <a:xfrm>
-            <a:off x="685800" y="1051560"/>
-            <a:ext cx="10607040" cy="822960"/>
-          </a:xfrm>
-          <a:prstGeom prst="rect">
+          </a:p>
+        </p:txBody>
+      </p:sp>
+      <p:sp>
+        <p:nvSpPr>
+          <p:cNvPr id="3" name="Oval 2"/>
+          <p:cNvSpPr/>
+          <p:nvPr/>
+        </p:nvSpPr>
+        <p:spPr>
+          <a:xfrm>
+            <a:off x="11064240" y="5852160"/>
+            <a:ext cx="1737360" cy="1737360"/>
+          </a:xfrm>
+          <a:prstGeom prst="ellipse">
             <a:avLst/>
           </a:prstGeom>
-          <a:noFill/>
-        </p:spPr>
-        <p:txBody>
-          <a:bodyPr wrap="square" anchor="t">
-            <a:spAutoFit/>
-          </a:bodyPr>
-          <a:lstStyle/>
-          <a:p>
-            <a:pPr algn="l"/>
-            <a:r>
-              <a:rPr sz="2700" b="1" i="0">
-                <a:solidFill>
-                  <a:srgbClr val="2A1A1F"/>
-                </a:solidFill>
-                <a:latin typeface="Cambria"/>
-              </a:rPr>
-              <a:t>Design Fields Overlap &amp; Connect</a:t>
-            </a:r>
-          </a:p>
-        </p:txBody>
-      </p:sp>
-      <p:sp>
-        <p:nvSpPr>
-          <p:cNvPr id="4" name="Rounded Rectangle 3"/>
-          <p:cNvSpPr/>
-          <p:nvPr/>
-        </p:nvSpPr>
-        <p:spPr>
-          <a:xfrm>
-            <a:off x="685800" y="1874519"/>
-            <a:ext cx="5166360" cy="4526280"/>
-          </a:xfrm>
-          <a:prstGeom prst="roundRect">
-            <a:avLst>
-              <a:gd name="adj" fmla="val 6000"/>
-            </a:avLst>
-          </a:prstGeom>
           <a:solidFill>
-            <a:srgbClr val="EFE5E8"/>
+            <a:srgbClr val="BE7B8B"/>
           </a:solidFill>
           <a:ln>
             <a:noFill/>
@@ -3856,81 +3987,31 @@
           </a:fontRef>
         </p:style>
         <p:txBody>
-          <a:bodyPr rtlCol="0" anchor="ctr" lIns="279400" rIns="279400" tIns="228600" bIns="228600" wrap="square"/>
-          <a:lstStyle/>
-          <a:p>
-            <a:pPr algn="ctr" indent="-203200" marL="203200">
-              <a:spcAft>
-                <a:spcPts val="900"/>
-              </a:spcAft>
-              <a:buClr>
-                <a:srgbClr val="7A2E43"/>
-              </a:buClr>
-              <a:buSzPct val="90000"/>
-              <a:buFont typeface="Arial"/>
-              <a:buChar char="●"/>
-            </a:pPr>
-            <a:r>
-              <a:rPr sz="1400" b="0" i="0">
-                <a:solidFill>
-                  <a:srgbClr val="2A1A1F"/>
-                </a:solidFill>
-                <a:latin typeface="Calibri"/>
-              </a:rPr>
-              <a:t>Real design projects rarely sit inside a single field. A single product often requires </a:t>
-            </a:r>
-            <a:r>
-              <a:rPr sz="1400" b="1" i="0">
-                <a:solidFill>
-                  <a:srgbClr val="672738"/>
-                </a:solidFill>
-                <a:latin typeface="Calibri"/>
-              </a:rPr>
-              <a:t>multiple design fields working together.</a:t>
-            </a:r>
-          </a:p>
-          <a:p>
-            <a:pPr indent="-203200" marL="203200">
-              <a:spcAft>
-                <a:spcPts val="900"/>
-              </a:spcAft>
-              <a:buClr>
-                <a:srgbClr val="7A2E43"/>
-              </a:buClr>
-              <a:buSzPct val="90000"/>
-              <a:buFont typeface="Arial"/>
-              <a:buChar char="●"/>
-            </a:pPr>
-            <a:r>
-              <a:rPr sz="1400" b="0" i="0">
-                <a:solidFill>
-                  <a:srgbClr val="2A1A1F"/>
-                </a:solidFill>
-                <a:latin typeface="Calibri"/>
-              </a:rPr>
-              <a:t>Example: launching a café involves communication design (branding), environmental design (fit-out), industrial design (furniture) and interaction design (ordering app) — often coordinated by different specialists.</a:t>
-            </a:r>
-          </a:p>
-        </p:txBody>
-      </p:sp>
-      <p:sp>
-        <p:nvSpPr>
-          <p:cNvPr id="5" name="Rounded Rectangle 4"/>
+          <a:bodyPr rtlCol="0" anchor="ctr"/>
+          <a:lstStyle/>
+          <a:p>
+            <a:pPr algn="ctr"/>
+          </a:p>
+        </p:txBody>
+      </p:sp>
+      <p:sp>
+        <p:nvSpPr>
+          <p:cNvPr id="4" name="Rounded Rectangle 3"/>
           <p:cNvSpPr/>
           <p:nvPr/>
         </p:nvSpPr>
         <p:spPr>
           <a:xfrm>
-            <a:off x="6080760" y="1874519"/>
-            <a:ext cx="5166360" cy="4526280"/>
+            <a:off x="685800" y="457200"/>
+            <a:ext cx="1696212" cy="502920"/>
           </a:xfrm>
           <a:prstGeom prst="roundRect">
             <a:avLst>
-              <a:gd name="adj" fmla="val 6000"/>
+              <a:gd name="adj" fmla="val 50000"/>
             </a:avLst>
           </a:prstGeom>
           <a:solidFill>
-            <a:srgbClr val="F4DEE3"/>
+            <a:srgbClr val="FFFFFF"/>
           </a:solidFill>
           <a:ln>
             <a:noFill/>
@@ -3952,7 +4033,207 @@
           </a:fontRef>
         </p:style>
         <p:txBody>
-          <a:bodyPr rtlCol="0" anchor="ctr" lIns="279400" rIns="279400" tIns="228600" bIns="228600" wrap="square"/>
+          <a:bodyPr rtlCol="0" anchor="ctr"/>
+          <a:lstStyle/>
+          <a:p>
+            <a:pPr algn="ctr"/>
+            <a:r>
+              <a:rPr b="1" sz="1400">
+                <a:solidFill>
+                  <a:srgbClr val="8D5B66"/>
+                </a:solidFill>
+                <a:latin typeface="Calibri"/>
+              </a:rPr>
+              <a:t>CHALLENGE</a:t>
+            </a:r>
+          </a:p>
+        </p:txBody>
+      </p:sp>
+      <p:sp>
+        <p:nvSpPr>
+          <p:cNvPr id="5" name="TextBox 4"/>
+          <p:cNvSpPr txBox="1"/>
+          <p:nvPr/>
+        </p:nvSpPr>
+        <p:spPr>
+          <a:xfrm>
+            <a:off x="685800" y="1143000"/>
+            <a:ext cx="10607040" cy="914400"/>
+          </a:xfrm>
+          <a:prstGeom prst="rect">
+            <a:avLst/>
+          </a:prstGeom>
+          <a:noFill/>
+        </p:spPr>
+        <p:txBody>
+          <a:bodyPr wrap="square" anchor="t">
+            <a:spAutoFit/>
+          </a:bodyPr>
+          <a:lstStyle/>
+          <a:p>
+            <a:pPr algn="l"/>
+            <a:r>
+              <a:rPr sz="3000" b="1" i="0">
+                <a:solidFill>
+                  <a:srgbClr val="FFFFFF"/>
+                </a:solidFill>
+                <a:latin typeface="Cambria"/>
+              </a:rPr>
+              <a:t>Spot the Trend</a:t>
+            </a:r>
+          </a:p>
+        </p:txBody>
+      </p:sp>
+      <p:sp>
+        <p:nvSpPr>
+          <p:cNvPr id="6" name="Rounded Rectangle 5"/>
+          <p:cNvSpPr/>
+          <p:nvPr/>
+        </p:nvSpPr>
+        <p:spPr>
+          <a:xfrm>
+            <a:off x="685800" y="2148840"/>
+            <a:ext cx="960120" cy="411480"/>
+          </a:xfrm>
+          <a:prstGeom prst="roundRect">
+            <a:avLst>
+              <a:gd name="adj" fmla="val 50000"/>
+            </a:avLst>
+          </a:prstGeom>
+          <a:solidFill>
+            <a:srgbClr val="A26976"/>
+          </a:solidFill>
+          <a:ln>
+            <a:noFill/>
+          </a:ln>
+          <a:effectLst/>
+        </p:spPr>
+        <p:style>
+          <a:lnRef idx="1">
+            <a:schemeClr val="accent1"/>
+          </a:lnRef>
+          <a:fillRef idx="3">
+            <a:schemeClr val="accent1"/>
+          </a:fillRef>
+          <a:effectRef idx="2">
+            <a:schemeClr val="accent1"/>
+          </a:effectRef>
+          <a:fontRef idx="minor">
+            <a:schemeClr val="lt1"/>
+          </a:fontRef>
+        </p:style>
+        <p:txBody>
+          <a:bodyPr rtlCol="0" anchor="ctr" wrap="none" lIns="50800" rIns="50800"/>
+          <a:lstStyle/>
+          <a:p>
+            <a:pPr algn="ctr"/>
+            <a:r>
+              <a:rPr sz="1050" b="1">
+                <a:solidFill>
+                  <a:srgbClr val="FFFFFF"/>
+                </a:solidFill>
+                <a:latin typeface="Calibri"/>
+              </a:rPr>
+              <a:t>8 MIN</a:t>
+            </a:r>
+          </a:p>
+        </p:txBody>
+      </p:sp>
+      <p:sp>
+        <p:nvSpPr>
+          <p:cNvPr id="7" name="Rounded Rectangle 6"/>
+          <p:cNvSpPr/>
+          <p:nvPr/>
+        </p:nvSpPr>
+        <p:spPr>
+          <a:xfrm>
+            <a:off x="1783080" y="2148840"/>
+            <a:ext cx="960120" cy="411480"/>
+          </a:xfrm>
+          <a:prstGeom prst="roundRect">
+            <a:avLst>
+              <a:gd name="adj" fmla="val 50000"/>
+            </a:avLst>
+          </a:prstGeom>
+          <a:solidFill>
+            <a:srgbClr val="A26976"/>
+          </a:solidFill>
+          <a:ln>
+            <a:noFill/>
+          </a:ln>
+          <a:effectLst/>
+        </p:spPr>
+        <p:style>
+          <a:lnRef idx="1">
+            <a:schemeClr val="accent1"/>
+          </a:lnRef>
+          <a:fillRef idx="3">
+            <a:schemeClr val="accent1"/>
+          </a:fillRef>
+          <a:effectRef idx="2">
+            <a:schemeClr val="accent1"/>
+          </a:effectRef>
+          <a:fontRef idx="minor">
+            <a:schemeClr val="lt1"/>
+          </a:fontRef>
+        </p:style>
+        <p:txBody>
+          <a:bodyPr rtlCol="0" anchor="ctr" wrap="none" lIns="50800" rIns="50800"/>
+          <a:lstStyle/>
+          <a:p>
+            <a:pPr algn="ctr"/>
+            <a:r>
+              <a:rPr sz="1050" b="1">
+                <a:solidFill>
+                  <a:srgbClr val="FFFFFF"/>
+                </a:solidFill>
+                <a:latin typeface="Calibri"/>
+              </a:rPr>
+              <a:t>PAIRS</a:t>
+            </a:r>
+          </a:p>
+        </p:txBody>
+      </p:sp>
+      <p:sp>
+        <p:nvSpPr>
+          <p:cNvPr id="8" name="Rounded Rectangle 7"/>
+          <p:cNvSpPr/>
+          <p:nvPr/>
+        </p:nvSpPr>
+        <p:spPr>
+          <a:xfrm>
+            <a:off x="685800" y="2788920"/>
+            <a:ext cx="10607040" cy="3246120"/>
+          </a:xfrm>
+          <a:prstGeom prst="roundRect">
+            <a:avLst>
+              <a:gd name="adj" fmla="val 8000"/>
+            </a:avLst>
+          </a:prstGeom>
+          <a:solidFill>
+            <a:srgbClr val="FFFFFF"/>
+          </a:solidFill>
+          <a:ln>
+            <a:noFill/>
+          </a:ln>
+          <a:effectLst/>
+        </p:spPr>
+        <p:style>
+          <a:lnRef idx="1">
+            <a:schemeClr val="accent1"/>
+          </a:lnRef>
+          <a:fillRef idx="3">
+            <a:schemeClr val="accent1"/>
+          </a:fillRef>
+          <a:effectRef idx="2">
+            <a:schemeClr val="accent1"/>
+          </a:effectRef>
+          <a:fontRef idx="minor">
+            <a:schemeClr val="lt1"/>
+          </a:fontRef>
+        </p:style>
+        <p:txBody>
+          <a:bodyPr rtlCol="0" anchor="ctr" lIns="304800" rIns="304800" tIns="203200" bIns="203200" wrap="square"/>
           <a:lstStyle/>
           <a:p>
             <a:pPr algn="ctr" indent="-203200" marL="203200">
@@ -3967,13 +4248,13 @@
               <a:buChar char="●"/>
             </a:pPr>
             <a:r>
-              <a:rPr sz="1400" b="0" i="0">
-                <a:solidFill>
-                  <a:srgbClr val="2A1A1F"/>
-                </a:solidFill>
-                <a:latin typeface="Calibri"/>
-              </a:rPr>
-              <a:t>Why This Matters</a:t>
+              <a:rPr sz="1450" b="0" i="0">
+                <a:solidFill>
+                  <a:srgbClr val="2A1A1F"/>
+                </a:solidFill>
+                <a:latin typeface="Calibri"/>
+              </a:rPr>
+              <a:t>Given a magazine, ad or product image, identify one visible design trend.</a:t>
             </a:r>
           </a:p>
           <a:p>
@@ -3986,34 +4267,16 @@
               </a:buClr>
               <a:buSzPct val="90000"/>
               <a:buFont typeface="Arial"/>
-              <a:buChar char="–"/>
+              <a:buChar char="●"/>
             </a:pPr>
             <a:r>
-              <a:rPr sz="1250" b="0" i="0">
-                <a:solidFill>
-                  <a:srgbClr val="2A1A1F"/>
-                </a:solidFill>
-                <a:latin typeface="Calibri"/>
-              </a:rPr>
-              <a:t>Designers must </a:t>
-            </a:r>
-            <a:r>
-              <a:rPr sz="1250" b="1" i="0">
-                <a:solidFill>
-                  <a:srgbClr val="B87786"/>
-                </a:solidFill>
-                <a:latin typeface="Calibri"/>
-              </a:rPr>
-              <a:t>collaborate</a:t>
-            </a:r>
-            <a:r>
-              <a:rPr sz="1250" b="0" i="0">
-                <a:solidFill>
-                  <a:srgbClr val="2A1A1F"/>
-                </a:solidFill>
-                <a:latin typeface="Calibri"/>
-              </a:rPr>
-              <a:t> across disciplines</a:t>
+              <a:rPr sz="1450" b="0" i="0">
+                <a:solidFill>
+                  <a:srgbClr val="2A1A1F"/>
+                </a:solidFill>
+                <a:latin typeface="Calibri"/>
+              </a:rPr>
+              <a:t>Name the factor (social, cultural, economic, technological, environmental) driving it.</a:t>
             </a:r>
           </a:p>
           <a:p>
@@ -4026,101 +4289,52 @@
               </a:buClr>
               <a:buSzPct val="90000"/>
               <a:buFont typeface="Arial"/>
-              <a:buChar char="–"/>
+              <a:buChar char="●"/>
             </a:pPr>
             <a:r>
-              <a:rPr sz="1250" b="0" i="0">
-                <a:solidFill>
-                  <a:srgbClr val="2A1A1F"/>
-                </a:solidFill>
-                <a:latin typeface="Calibri"/>
-              </a:rPr>
-              <a:t>Understand how their design fits a </a:t>
-            </a:r>
-            <a:r>
-              <a:rPr sz="1250" b="1" i="0">
-                <a:solidFill>
-                  <a:srgbClr val="B87786"/>
-                </a:solidFill>
-                <a:latin typeface="Calibri"/>
-              </a:rPr>
-              <a:t>bigger production system</a:t>
-            </a:r>
-          </a:p>
-          <a:p>
-            <a:pPr indent="-203200" marL="203200">
-              <a:spcAft>
-                <a:spcPts val="900"/>
-              </a:spcAft>
-              <a:buClr>
-                <a:srgbClr val="D98C9E"/>
-              </a:buClr>
-              <a:buSzPct val="90000"/>
-              <a:buFont typeface="Arial"/>
-              <a:buChar char="–"/>
-            </a:pPr>
-            <a:r>
-              <a:rPr sz="1250" b="0" i="0">
-                <a:solidFill>
-                  <a:srgbClr val="2A1A1F"/>
-                </a:solidFill>
-                <a:latin typeface="Calibri"/>
-              </a:rPr>
-              <a:t>Work within industry </a:t>
-            </a:r>
-            <a:r>
-              <a:rPr sz="1250" b="1" i="0">
-                <a:solidFill>
-                  <a:srgbClr val="B87786"/>
-                </a:solidFill>
-                <a:latin typeface="Calibri"/>
-              </a:rPr>
-              <a:t>standards, ethics and IP law</a:t>
-            </a:r>
-          </a:p>
-        </p:txBody>
-      </p:sp>
-      <p:sp>
-        <p:nvSpPr>
-          <p:cNvPr id="6" name="Oval 5"/>
-          <p:cNvSpPr/>
-          <p:nvPr/>
-        </p:nvSpPr>
-        <p:spPr>
-          <a:xfrm>
-            <a:off x="5532120" y="3840480"/>
-            <a:ext cx="685800" cy="685800"/>
-          </a:xfrm>
-          <a:prstGeom prst="ellipse">
+              <a:rPr sz="1450" b="0" i="0">
+                <a:solidFill>
+                  <a:srgbClr val="2A1A1F"/>
+                </a:solidFill>
+                <a:latin typeface="Calibri"/>
+              </a:rPr>
+              <a:t>Be ready to justify your answer with specific visual evidence.</a:t>
+            </a:r>
+          </a:p>
+        </p:txBody>
+      </p:sp>
+      <p:sp>
+        <p:nvSpPr>
+          <p:cNvPr id="9" name="TextBox 8"/>
+          <p:cNvSpPr txBox="1"/>
+          <p:nvPr/>
+        </p:nvSpPr>
+        <p:spPr>
+          <a:xfrm>
+            <a:off x="685800" y="6217920"/>
+            <a:ext cx="10607040" cy="502920"/>
+          </a:xfrm>
+          <a:prstGeom prst="rect">
             <a:avLst/>
           </a:prstGeom>
-          <a:solidFill>
-            <a:srgbClr val="D6A24A"/>
-          </a:solidFill>
-          <a:ln>
-            <a:noFill/>
-          </a:ln>
-          <a:effectLst/>
-        </p:spPr>
-        <p:style>
-          <a:lnRef idx="1">
-            <a:schemeClr val="accent1"/>
-          </a:lnRef>
-          <a:fillRef idx="3">
-            <a:schemeClr val="accent1"/>
-          </a:fillRef>
-          <a:effectRef idx="2">
-            <a:schemeClr val="accent1"/>
-          </a:effectRef>
-          <a:fontRef idx="minor">
-            <a:schemeClr val="lt1"/>
-          </a:fontRef>
-        </p:style>
-        <p:txBody>
-          <a:bodyPr rtlCol="0" anchor="ctr"/>
-          <a:lstStyle/>
-          <a:p>
-            <a:pPr algn="ctr"/>
+          <a:noFill/>
+        </p:spPr>
+        <p:txBody>
+          <a:bodyPr wrap="square" anchor="t">
+            <a:spAutoFit/>
+          </a:bodyPr>
+          <a:lstStyle/>
+          <a:p>
+            <a:pPr algn="l"/>
+            <a:r>
+              <a:rPr sz="1250" b="0" i="1">
+                <a:solidFill>
+                  <a:srgbClr val="FFFFFF"/>
+                </a:solidFill>
+                <a:latin typeface="Calibri"/>
+              </a:rPr>
+              <a:t>Debrief: Share your trend and factor with another pair — do they agree?</a:t>
+            </a:r>
           </a:p>
         </p:txBody>
       </p:sp>
@@ -4138,7 +4352,7 @@
     <p:bg>
       <p:bgPr>
         <a:solidFill>
-          <a:srgbClr val="FBF5F1"/>
+          <a:srgbClr val="7A2E43"/>
         </a:solidFill>
         <a:effectLst/>
       </p:bgPr>
@@ -4152,22 +4366,20 @@
       <p:grpSpPr/>
       <p:sp>
         <p:nvSpPr>
-          <p:cNvPr id="2" name="Rounded Rectangle 1"/>
+          <p:cNvPr id="2" name="Oval 1"/>
           <p:cNvSpPr/>
           <p:nvPr/>
         </p:nvSpPr>
         <p:spPr>
           <a:xfrm>
-            <a:off x="685800" y="502920"/>
-            <a:ext cx="3291840" cy="457200"/>
-          </a:xfrm>
-          <a:prstGeom prst="roundRect">
-            <a:avLst>
-              <a:gd name="adj" fmla="val 50000"/>
-            </a:avLst>
+            <a:off x="9692640" y="-914400"/>
+            <a:ext cx="2926080" cy="2926080"/>
+          </a:xfrm>
+          <a:prstGeom prst="ellipse">
+            <a:avLst/>
           </a:prstGeom>
           <a:solidFill>
-            <a:srgbClr val="7A2E43"/>
+            <a:srgbClr val="6B283A"/>
           </a:solidFill>
           <a:ln>
             <a:noFill/>
@@ -4189,75 +4401,29 @@
           </a:fontRef>
         </p:style>
         <p:txBody>
-          <a:bodyPr rtlCol="0" anchor="ctr" wrap="none" lIns="50800" rIns="50800"/>
+          <a:bodyPr rtlCol="0" anchor="ctr"/>
           <a:lstStyle/>
           <a:p>
             <a:pPr algn="ctr"/>
-            <a:r>
-              <a:rPr sz="1100" b="1">
-                <a:solidFill>
-                  <a:srgbClr val="FFFFFF"/>
-                </a:solidFill>
-                <a:latin typeface="Calibri"/>
-              </a:rPr>
-              <a:t>DESIGN &amp; INDUSTRY CONNECTIONS</a:t>
-            </a:r>
-          </a:p>
-        </p:txBody>
-      </p:sp>
-      <p:sp>
-        <p:nvSpPr>
-          <p:cNvPr id="3" name="TextBox 2"/>
-          <p:cNvSpPr txBox="1"/>
-          <p:nvPr/>
-        </p:nvSpPr>
-        <p:spPr>
-          <a:xfrm>
-            <a:off x="685800" y="1051560"/>
-            <a:ext cx="10607040" cy="822960"/>
-          </a:xfrm>
-          <a:prstGeom prst="rect">
+          </a:p>
+        </p:txBody>
+      </p:sp>
+      <p:sp>
+        <p:nvSpPr>
+          <p:cNvPr id="3" name="Oval 2"/>
+          <p:cNvSpPr/>
+          <p:nvPr/>
+        </p:nvSpPr>
+        <p:spPr>
+          <a:xfrm>
+            <a:off x="-914400" y="4937760"/>
+            <a:ext cx="2377440" cy="2377440"/>
+          </a:xfrm>
+          <a:prstGeom prst="ellipse">
             <a:avLst/>
           </a:prstGeom>
-          <a:noFill/>
-        </p:spPr>
-        <p:txBody>
-          <a:bodyPr wrap="square" anchor="t">
-            <a:spAutoFit/>
-          </a:bodyPr>
-          <a:lstStyle/>
-          <a:p>
-            <a:pPr algn="l"/>
-            <a:r>
-              <a:rPr sz="2700" b="1" i="0">
-                <a:solidFill>
-                  <a:srgbClr val="2A1A1F"/>
-                </a:solidFill>
-                <a:latin typeface="Cambria"/>
-              </a:rPr>
-              <a:t>Collaboration in Industry</a:t>
-            </a:r>
-          </a:p>
-        </p:txBody>
-      </p:sp>
-      <p:sp>
-        <p:nvSpPr>
-          <p:cNvPr id="4" name="Rounded Rectangle 3"/>
-          <p:cNvSpPr/>
-          <p:nvPr/>
-        </p:nvSpPr>
-        <p:spPr>
-          <a:xfrm>
-            <a:off x="685800" y="1874519"/>
-            <a:ext cx="5166360" cy="4526280"/>
-          </a:xfrm>
-          <a:prstGeom prst="roundRect">
-            <a:avLst>
-              <a:gd name="adj" fmla="val 6000"/>
-            </a:avLst>
-          </a:prstGeom>
           <a:solidFill>
-            <a:srgbClr val="EFE5E8"/>
+            <a:srgbClr val="6B283A"/>
           </a:solidFill>
           <a:ln>
             <a:noFill/>
@@ -4279,196 +4445,31 @@
           </a:fontRef>
         </p:style>
         <p:txBody>
-          <a:bodyPr rtlCol="0" anchor="ctr" lIns="279400" rIns="279400" tIns="228600" bIns="228600" wrap="square"/>
-          <a:lstStyle/>
-          <a:p>
-            <a:pPr algn="ctr" indent="-203200" marL="203200">
-              <a:spcAft>
-                <a:spcPts val="900"/>
-              </a:spcAft>
-              <a:buClr>
-                <a:srgbClr val="7A2E43"/>
-              </a:buClr>
-              <a:buSzPct val="90000"/>
-              <a:buFont typeface="Arial"/>
-              <a:buChar char="●"/>
-            </a:pPr>
-            <a:r>
-              <a:rPr sz="1400" b="0" i="0">
-                <a:solidFill>
-                  <a:srgbClr val="2A1A1F"/>
-                </a:solidFill>
-                <a:latin typeface="Calibri"/>
-              </a:rPr>
-              <a:t>Designers rarely work in isolation. They collaborate with other professionals and tradespeople to bring a design from concept to reality.</a:t>
-            </a:r>
-          </a:p>
-          <a:p>
-            <a:pPr indent="-203200" marL="203200">
-              <a:spcAft>
-                <a:spcPts val="900"/>
-              </a:spcAft>
-              <a:buClr>
-                <a:srgbClr val="7A2E43"/>
-              </a:buClr>
-              <a:buSzPct val="90000"/>
-              <a:buFont typeface="Arial"/>
-              <a:buChar char="●"/>
-            </a:pPr>
-            <a:r>
-              <a:rPr sz="1400" b="0" i="0">
-                <a:solidFill>
-                  <a:srgbClr val="2A1A1F"/>
-                </a:solidFill>
-                <a:latin typeface="Calibri"/>
-              </a:rPr>
-              <a:t>Who Designers Collaborate With</a:t>
-            </a:r>
-          </a:p>
-          <a:p>
-            <a:pPr indent="-203200" marL="203200">
-              <a:spcAft>
-                <a:spcPts val="900"/>
-              </a:spcAft>
-              <a:buClr>
-                <a:srgbClr val="7A2E43"/>
-              </a:buClr>
-              <a:buSzPct val="90000"/>
-              <a:buFont typeface="Arial"/>
-              <a:buChar char="–"/>
-            </a:pPr>
-            <a:r>
-              <a:rPr sz="1250" b="1" i="0">
-                <a:solidFill>
-                  <a:srgbClr val="672738"/>
-                </a:solidFill>
-                <a:latin typeface="Calibri"/>
-              </a:rPr>
-              <a:t>Clients</a:t>
-            </a:r>
-            <a:r>
-              <a:rPr sz="1250" b="0" i="0">
-                <a:solidFill>
-                  <a:srgbClr val="2A1A1F"/>
-                </a:solidFill>
-                <a:latin typeface="Calibri"/>
-              </a:rPr>
-              <a:t> — provide the brief, approve directions, fund the project</a:t>
-            </a:r>
-          </a:p>
-          <a:p>
-            <a:pPr indent="-203200" marL="203200">
-              <a:spcAft>
-                <a:spcPts val="900"/>
-              </a:spcAft>
-              <a:buClr>
-                <a:srgbClr val="7A2E43"/>
-              </a:buClr>
-              <a:buSzPct val="90000"/>
-              <a:buFont typeface="Arial"/>
-              <a:buChar char="–"/>
-            </a:pPr>
-            <a:r>
-              <a:rPr sz="1250" b="1" i="0">
-                <a:solidFill>
-                  <a:srgbClr val="672738"/>
-                </a:solidFill>
-                <a:latin typeface="Calibri"/>
-              </a:rPr>
-              <a:t>Manufacturers / builders</a:t>
-            </a:r>
-            <a:r>
-              <a:rPr sz="1250" b="0" i="0">
-                <a:solidFill>
-                  <a:srgbClr val="2A1A1F"/>
-                </a:solidFill>
-                <a:latin typeface="Calibri"/>
-              </a:rPr>
-              <a:t> — turn designs into physical reality</a:t>
-            </a:r>
-          </a:p>
-          <a:p>
-            <a:pPr indent="-203200" marL="203200">
-              <a:spcAft>
-                <a:spcPts val="900"/>
-              </a:spcAft>
-              <a:buClr>
-                <a:srgbClr val="7A2E43"/>
-              </a:buClr>
-              <a:buSzPct val="90000"/>
-              <a:buFont typeface="Arial"/>
-              <a:buChar char="–"/>
-            </a:pPr>
-            <a:r>
-              <a:rPr sz="1250" b="1" i="0">
-                <a:solidFill>
-                  <a:srgbClr val="672738"/>
-                </a:solidFill>
-                <a:latin typeface="Calibri"/>
-              </a:rPr>
-              <a:t>Other designers</a:t>
-            </a:r>
-            <a:r>
-              <a:rPr sz="1250" b="0" i="0">
-                <a:solidFill>
-                  <a:srgbClr val="2A1A1F"/>
-                </a:solidFill>
-                <a:latin typeface="Calibri"/>
-              </a:rPr>
-              <a:t> — e.g. a graphic designer working with a UX designer</a:t>
-            </a:r>
-          </a:p>
-          <a:p>
-            <a:pPr indent="-203200" marL="203200">
-              <a:spcAft>
-                <a:spcPts val="900"/>
-              </a:spcAft>
-              <a:buClr>
-                <a:srgbClr val="7A2E43"/>
-              </a:buClr>
-              <a:buSzPct val="90000"/>
-              <a:buFont typeface="Arial"/>
-              <a:buChar char="–"/>
-            </a:pPr>
-            <a:r>
-              <a:rPr sz="1250" b="1" i="0">
-                <a:solidFill>
-                  <a:srgbClr val="672738"/>
-                </a:solidFill>
-                <a:latin typeface="Calibri"/>
-              </a:rPr>
-              <a:t>Marketing / printers / developers</a:t>
-            </a:r>
-            <a:r>
-              <a:rPr sz="1250" b="0" i="0">
-                <a:solidFill>
-                  <a:srgbClr val="2A1A1F"/>
-                </a:solidFill>
-                <a:latin typeface="Calibri"/>
-              </a:rPr>
-              <a:t> — deliver the design to its final audience</a:t>
-            </a:r>
-          </a:p>
-        </p:txBody>
-      </p:sp>
-      <p:sp>
-        <p:nvSpPr>
-          <p:cNvPr id="5" name="Rounded Rectangle 4"/>
+          <a:bodyPr rtlCol="0" anchor="ctr"/>
+          <a:lstStyle/>
+          <a:p>
+            <a:pPr algn="ctr"/>
+          </a:p>
+        </p:txBody>
+      </p:sp>
+      <p:sp>
+        <p:nvSpPr>
+          <p:cNvPr id="4" name="Rounded Rectangle 3"/>
           <p:cNvSpPr/>
           <p:nvPr/>
         </p:nvSpPr>
         <p:spPr>
           <a:xfrm>
-            <a:off x="6080760" y="1874519"/>
-            <a:ext cx="5166360" cy="4526280"/>
+            <a:off x="822960" y="1051560"/>
+            <a:ext cx="1188720" cy="502920"/>
           </a:xfrm>
           <a:prstGeom prst="roundRect">
             <a:avLst>
-              <a:gd name="adj" fmla="val 6000"/>
+              <a:gd name="adj" fmla="val 50000"/>
             </a:avLst>
           </a:prstGeom>
           <a:solidFill>
-            <a:srgbClr val="F4DEE3"/>
+            <a:srgbClr val="FFFFFF"/>
           </a:solidFill>
           <a:ln>
             <a:noFill/>
@@ -4490,70 +4491,40 @@
           </a:fontRef>
         </p:style>
         <p:txBody>
-          <a:bodyPr rtlCol="0" anchor="ctr" lIns="279400" rIns="279400" tIns="228600" bIns="228600" wrap="square"/>
-          <a:lstStyle/>
-          <a:p>
-            <a:pPr algn="ctr" indent="-203200" marL="203200">
-              <a:spcAft>
-                <a:spcPts val="900"/>
-              </a:spcAft>
-              <a:buClr>
-                <a:srgbClr val="D98C9E"/>
-              </a:buClr>
-              <a:buSzPct val="90000"/>
-              <a:buFont typeface="Arial"/>
-              <a:buChar char="●"/>
-            </a:pPr>
-            <a:r>
-              <a:rPr sz="1400" b="0" i="0">
-                <a:solidFill>
-                  <a:srgbClr val="2A1A1F"/>
-                </a:solidFill>
-                <a:latin typeface="Calibri"/>
-              </a:rPr>
-              <a:t>Why Collaboration Matters</a:t>
-            </a:r>
-          </a:p>
-          <a:p>
-            <a:pPr indent="-203200" marL="203200">
-              <a:spcAft>
-                <a:spcPts val="900"/>
-              </a:spcAft>
-              <a:buClr>
-                <a:srgbClr val="D98C9E"/>
-              </a:buClr>
-              <a:buSzPct val="90000"/>
-              <a:buFont typeface="Arial"/>
-              <a:buChar char="●"/>
-            </a:pPr>
-            <a:r>
-              <a:rPr sz="1400" b="0" i="0">
-                <a:solidFill>
-                  <a:srgbClr val="2A1A1F"/>
-                </a:solidFill>
-                <a:latin typeface="Calibri"/>
-              </a:rPr>
-              <a:t>No single designer has expertise in every stage — from materials science to code to construction. Good collaboration keeps the design's original intent intact as it moves through production.</a:t>
-            </a:r>
-          </a:p>
-        </p:txBody>
-      </p:sp>
-      <p:sp>
-        <p:nvSpPr>
-          <p:cNvPr id="6" name="Oval 5"/>
+          <a:bodyPr rtlCol="0" anchor="ctr" wrap="none" lIns="50800" rIns="50800"/>
+          <a:lstStyle/>
+          <a:p>
+            <a:pPr algn="ctr"/>
+            <a:r>
+              <a:rPr sz="1400" b="1">
+                <a:solidFill>
+                  <a:srgbClr val="612435"/>
+                </a:solidFill>
+                <a:latin typeface="Calibri"/>
+              </a:rPr>
+              <a:t>02</a:t>
+            </a:r>
+          </a:p>
+        </p:txBody>
+      </p:sp>
+      <p:sp>
+        <p:nvSpPr>
+          <p:cNvPr id="5" name="Rounded Rectangle 4"/>
           <p:cNvSpPr/>
           <p:nvPr/>
         </p:nvSpPr>
         <p:spPr>
           <a:xfrm>
-            <a:off x="5532120" y="3840480"/>
-            <a:ext cx="685800" cy="685800"/>
-          </a:xfrm>
-          <a:prstGeom prst="ellipse">
-            <a:avLst/>
+            <a:off x="822960" y="2011680"/>
+            <a:ext cx="10515600" cy="2834640"/>
+          </a:xfrm>
+          <a:prstGeom prst="roundRect">
+            <a:avLst>
+              <a:gd name="adj" fmla="val 18000"/>
+            </a:avLst>
           </a:prstGeom>
           <a:solidFill>
-            <a:srgbClr val="D6A24A"/>
+            <a:srgbClr val="FFFFFF"/>
           </a:solidFill>
           <a:ln>
             <a:noFill/>
@@ -4579,6 +4550,76 @@
           <a:lstStyle/>
           <a:p>
             <a:pPr algn="ctr"/>
+          </a:p>
+        </p:txBody>
+      </p:sp>
+      <p:sp>
+        <p:nvSpPr>
+          <p:cNvPr id="6" name="TextBox 5"/>
+          <p:cNvSpPr txBox="1"/>
+          <p:nvPr/>
+        </p:nvSpPr>
+        <p:spPr>
+          <a:xfrm>
+            <a:off x="1280160" y="2697480"/>
+            <a:ext cx="9601200" cy="1097280"/>
+          </a:xfrm>
+          <a:prstGeom prst="rect">
+            <a:avLst/>
+          </a:prstGeom>
+          <a:noFill/>
+        </p:spPr>
+        <p:txBody>
+          <a:bodyPr wrap="square" anchor="t">
+            <a:spAutoFit/>
+          </a:bodyPr>
+          <a:lstStyle/>
+          <a:p>
+            <a:pPr algn="l"/>
+            <a:r>
+              <a:rPr sz="3400" b="1" i="0">
+                <a:solidFill>
+                  <a:srgbClr val="672738"/>
+                </a:solidFill>
+                <a:latin typeface="Cambria"/>
+              </a:rPr>
+              <a:t>Design &amp; Industry Connections</a:t>
+            </a:r>
+          </a:p>
+        </p:txBody>
+      </p:sp>
+      <p:sp>
+        <p:nvSpPr>
+          <p:cNvPr id="7" name="TextBox 6"/>
+          <p:cNvSpPr txBox="1"/>
+          <p:nvPr/>
+        </p:nvSpPr>
+        <p:spPr>
+          <a:xfrm>
+            <a:off x="1280160" y="3657600"/>
+            <a:ext cx="9601200" cy="548640"/>
+          </a:xfrm>
+          <a:prstGeom prst="rect">
+            <a:avLst/>
+          </a:prstGeom>
+          <a:noFill/>
+        </p:spPr>
+        <p:txBody>
+          <a:bodyPr wrap="square" anchor="t">
+            <a:spAutoFit/>
+          </a:bodyPr>
+          <a:lstStyle/>
+          <a:p>
+            <a:pPr algn="l"/>
+            <a:r>
+              <a:rPr sz="1500" b="0" i="0">
+                <a:solidFill>
+                  <a:srgbClr val="6B6B6B"/>
+                </a:solidFill>
+                <a:latin typeface="Calibri"/>
+              </a:rPr>
+              <a:t>AOS 2 - Design and Industry Connections</a:t>
+            </a:r>
           </a:p>
         </p:txBody>
       </p:sp>
@@ -4693,7 +4734,7 @@
                 </a:solidFill>
                 <a:latin typeface="Cambria"/>
               </a:rPr>
-              <a:t>Factors Shaping Industry Practice</a:t>
+              <a:t>Design Fields Overlap &amp; Connect</a:t>
             </a:r>
           </a:p>
         </p:txBody>
@@ -4707,15 +4748,15 @@
         <p:spPr>
           <a:xfrm>
             <a:off x="685800" y="1874519"/>
-            <a:ext cx="2500884" cy="1554480"/>
+            <a:ext cx="5166360" cy="4526280"/>
           </a:xfrm>
           <a:prstGeom prst="roundRect">
             <a:avLst>
-              <a:gd name="adj" fmla="val 12000"/>
+              <a:gd name="adj" fmla="val 6000"/>
             </a:avLst>
           </a:prstGeom>
           <a:solidFill>
-            <a:srgbClr val="EBDFE2"/>
+            <a:srgbClr val="EFE5E8"/>
           </a:solidFill>
           <a:ln>
             <a:noFill/>
@@ -4737,29 +4778,59 @@
           </a:fontRef>
         </p:style>
         <p:txBody>
-          <a:bodyPr rtlCol="0" anchor="ctr" wrap="square" lIns="127000" rIns="127000" tIns="101600" bIns="101600"/>
-          <a:lstStyle/>
-          <a:p>
-            <a:pPr algn="ctr"/>
-            <a:r>
-              <a:rPr b="1" sz="1300">
-                <a:solidFill>
-                  <a:srgbClr val="612435"/>
-                </a:solidFill>
-                <a:latin typeface="Calibri"/>
-              </a:rPr>
-              <a:t>Sustainability</a:t>
-            </a:r>
-          </a:p>
-          <a:p>
-            <a:r>
-              <a:rPr sz="1050">
-                <a:solidFill>
-                  <a:srgbClr val="2A1A1F"/>
-                </a:solidFill>
-                <a:latin typeface="Calibri"/>
-              </a:rPr>
-              <a:t>Materials, energy use, waste and end-of-life disposal are now standard client requirements.</a:t>
+          <a:bodyPr rtlCol="0" anchor="ctr" lIns="279400" rIns="279400" tIns="228600" bIns="228600" wrap="square"/>
+          <a:lstStyle/>
+          <a:p>
+            <a:pPr algn="ctr" indent="-203200" marL="203200">
+              <a:spcAft>
+                <a:spcPts val="900"/>
+              </a:spcAft>
+              <a:buClr>
+                <a:srgbClr val="7A2E43"/>
+              </a:buClr>
+              <a:buSzPct val="90000"/>
+              <a:buFont typeface="Arial"/>
+              <a:buChar char="●"/>
+            </a:pPr>
+            <a:r>
+              <a:rPr sz="1400" b="0" i="0">
+                <a:solidFill>
+                  <a:srgbClr val="2A1A1F"/>
+                </a:solidFill>
+                <a:latin typeface="Calibri"/>
+              </a:rPr>
+              <a:t>Real design projects rarely sit inside a single field. A single product often requires </a:t>
+            </a:r>
+            <a:r>
+              <a:rPr sz="1400" b="1" i="0">
+                <a:solidFill>
+                  <a:srgbClr val="672738"/>
+                </a:solidFill>
+                <a:latin typeface="Calibri"/>
+              </a:rPr>
+              <a:t>multiple design fields working together.</a:t>
+            </a:r>
+          </a:p>
+          <a:p>
+            <a:pPr indent="-203200" marL="203200">
+              <a:spcAft>
+                <a:spcPts val="900"/>
+              </a:spcAft>
+              <a:buClr>
+                <a:srgbClr val="7A2E43"/>
+              </a:buClr>
+              <a:buSzPct val="90000"/>
+              <a:buFont typeface="Arial"/>
+              <a:buChar char="●"/>
+            </a:pPr>
+            <a:r>
+              <a:rPr sz="1400" b="0" i="0">
+                <a:solidFill>
+                  <a:srgbClr val="2A1A1F"/>
+                </a:solidFill>
+                <a:latin typeface="Calibri"/>
+              </a:rPr>
+              <a:t>Example: launching a café involves communication design (branding), environmental design (fit-out), industrial design (furniture) and interaction design (ordering app) — often coordinated by different specialists.</a:t>
             </a:r>
           </a:p>
         </p:txBody>
@@ -4772,16 +4843,16 @@
         </p:nvSpPr>
         <p:spPr>
           <a:xfrm>
-            <a:off x="3387852" y="1874519"/>
-            <a:ext cx="2500884" cy="1554480"/>
+            <a:off x="6080760" y="1874519"/>
+            <a:ext cx="5166360" cy="4526280"/>
           </a:xfrm>
           <a:prstGeom prst="roundRect">
             <a:avLst>
-              <a:gd name="adj" fmla="val 12000"/>
+              <a:gd name="adj" fmla="val 6000"/>
             </a:avLst>
           </a:prstGeom>
           <a:solidFill>
-            <a:srgbClr val="F8F1E3"/>
+            <a:srgbClr val="F4DEE3"/>
           </a:solidFill>
           <a:ln>
             <a:noFill/>
@@ -4803,51 +4874,150 @@
           </a:fontRef>
         </p:style>
         <p:txBody>
-          <a:bodyPr rtlCol="0" anchor="ctr" wrap="square" lIns="127000" rIns="127000" tIns="101600" bIns="101600"/>
-          <a:lstStyle/>
-          <a:p>
-            <a:pPr algn="ctr"/>
-            <a:r>
-              <a:rPr b="1" sz="1300">
-                <a:solidFill>
-                  <a:srgbClr val="AB813B"/>
-                </a:solidFill>
-                <a:latin typeface="Calibri"/>
-              </a:rPr>
-              <a:t>Technology</a:t>
-            </a:r>
-          </a:p>
-          <a:p>
-            <a:r>
-              <a:rPr sz="1050">
-                <a:solidFill>
-                  <a:srgbClr val="2A1A1F"/>
-                </a:solidFill>
-                <a:latin typeface="Calibri"/>
-              </a:rPr>
-              <a:t>New software, materials and manufacturing (3D printing, AI tools) change what's possible and expected.</a:t>
-            </a:r>
-          </a:p>
-        </p:txBody>
-      </p:sp>
-      <p:sp>
-        <p:nvSpPr>
-          <p:cNvPr id="6" name="Rounded Rectangle 5"/>
+          <a:bodyPr rtlCol="0" anchor="ctr" lIns="279400" rIns="279400" tIns="228600" bIns="228600" wrap="square"/>
+          <a:lstStyle/>
+          <a:p>
+            <a:pPr algn="ctr" indent="-203200" marL="203200">
+              <a:spcAft>
+                <a:spcPts val="900"/>
+              </a:spcAft>
+              <a:buClr>
+                <a:srgbClr val="D98C9E"/>
+              </a:buClr>
+              <a:buSzPct val="90000"/>
+              <a:buFont typeface="Arial"/>
+              <a:buChar char="●"/>
+            </a:pPr>
+            <a:r>
+              <a:rPr sz="1400" b="0" i="0">
+                <a:solidFill>
+                  <a:srgbClr val="2A1A1F"/>
+                </a:solidFill>
+                <a:latin typeface="Calibri"/>
+              </a:rPr>
+              <a:t>Why This Matters</a:t>
+            </a:r>
+          </a:p>
+          <a:p>
+            <a:pPr indent="-203200" marL="203200">
+              <a:spcAft>
+                <a:spcPts val="900"/>
+              </a:spcAft>
+              <a:buClr>
+                <a:srgbClr val="D98C9E"/>
+              </a:buClr>
+              <a:buSzPct val="90000"/>
+              <a:buFont typeface="Arial"/>
+              <a:buChar char="–"/>
+            </a:pPr>
+            <a:r>
+              <a:rPr sz="1250" b="0" i="0">
+                <a:solidFill>
+                  <a:srgbClr val="2A1A1F"/>
+                </a:solidFill>
+                <a:latin typeface="Calibri"/>
+              </a:rPr>
+              <a:t>Designers must </a:t>
+            </a:r>
+            <a:r>
+              <a:rPr sz="1250" b="1" i="0">
+                <a:solidFill>
+                  <a:srgbClr val="B87786"/>
+                </a:solidFill>
+                <a:latin typeface="Calibri"/>
+              </a:rPr>
+              <a:t>collaborate</a:t>
+            </a:r>
+            <a:r>
+              <a:rPr sz="1250" b="0" i="0">
+                <a:solidFill>
+                  <a:srgbClr val="2A1A1F"/>
+                </a:solidFill>
+                <a:latin typeface="Calibri"/>
+              </a:rPr>
+              <a:t> across disciplines</a:t>
+            </a:r>
+          </a:p>
+          <a:p>
+            <a:pPr indent="-203200" marL="203200">
+              <a:spcAft>
+                <a:spcPts val="900"/>
+              </a:spcAft>
+              <a:buClr>
+                <a:srgbClr val="D98C9E"/>
+              </a:buClr>
+              <a:buSzPct val="90000"/>
+              <a:buFont typeface="Arial"/>
+              <a:buChar char="–"/>
+            </a:pPr>
+            <a:r>
+              <a:rPr sz="1250" b="0" i="0">
+                <a:solidFill>
+                  <a:srgbClr val="2A1A1F"/>
+                </a:solidFill>
+                <a:latin typeface="Calibri"/>
+              </a:rPr>
+              <a:t>Understand how their design fits a </a:t>
+            </a:r>
+            <a:r>
+              <a:rPr sz="1250" b="1" i="0">
+                <a:solidFill>
+                  <a:srgbClr val="B87786"/>
+                </a:solidFill>
+                <a:latin typeface="Calibri"/>
+              </a:rPr>
+              <a:t>bigger production system</a:t>
+            </a:r>
+          </a:p>
+          <a:p>
+            <a:pPr indent="-203200" marL="203200">
+              <a:spcAft>
+                <a:spcPts val="900"/>
+              </a:spcAft>
+              <a:buClr>
+                <a:srgbClr val="D98C9E"/>
+              </a:buClr>
+              <a:buSzPct val="90000"/>
+              <a:buFont typeface="Arial"/>
+              <a:buChar char="–"/>
+            </a:pPr>
+            <a:r>
+              <a:rPr sz="1250" b="0" i="0">
+                <a:solidFill>
+                  <a:srgbClr val="2A1A1F"/>
+                </a:solidFill>
+                <a:latin typeface="Calibri"/>
+              </a:rPr>
+              <a:t>Work within industry </a:t>
+            </a:r>
+            <a:r>
+              <a:rPr sz="1250" b="1" i="0">
+                <a:solidFill>
+                  <a:srgbClr val="B87786"/>
+                </a:solidFill>
+                <a:latin typeface="Calibri"/>
+              </a:rPr>
+              <a:t>standards, ethics and IP law</a:t>
+            </a:r>
+          </a:p>
+        </p:txBody>
+      </p:sp>
+      <p:sp>
+        <p:nvSpPr>
+          <p:cNvPr id="6" name="Oval 5"/>
           <p:cNvSpPr/>
           <p:nvPr/>
         </p:nvSpPr>
         <p:spPr>
           <a:xfrm>
-            <a:off x="6089904" y="1874519"/>
-            <a:ext cx="2500884" cy="1554480"/>
-          </a:xfrm>
-          <a:prstGeom prst="roundRect">
-            <a:avLst>
-              <a:gd name="adj" fmla="val 12000"/>
-            </a:avLst>
+            <a:off x="5532120" y="3840480"/>
+            <a:ext cx="685800" cy="685800"/>
+          </a:xfrm>
+          <a:prstGeom prst="ellipse">
+            <a:avLst/>
           </a:prstGeom>
           <a:solidFill>
-            <a:srgbClr val="F9EDF0"/>
+            <a:srgbClr val="D6A24A"/>
           </a:solidFill>
           <a:ln>
             <a:noFill/>
@@ -4869,179 +5039,10 @@
           </a:fontRef>
         </p:style>
         <p:txBody>
-          <a:bodyPr rtlCol="0" anchor="ctr" wrap="square" lIns="127000" rIns="127000" tIns="101600" bIns="101600"/>
+          <a:bodyPr rtlCol="0" anchor="ctr"/>
           <a:lstStyle/>
           <a:p>
             <a:pPr algn="ctr"/>
-            <a:r>
-              <a:rPr b="1" sz="1300">
-                <a:solidFill>
-                  <a:srgbClr val="AD707E"/>
-                </a:solidFill>
-                <a:latin typeface="Calibri"/>
-              </a:rPr>
-              <a:t>Ethics</a:t>
-            </a:r>
-          </a:p>
-          <a:p>
-            <a:r>
-              <a:rPr sz="1050">
-                <a:solidFill>
-                  <a:srgbClr val="2A1A1F"/>
-                </a:solidFill>
-                <a:latin typeface="Calibri"/>
-              </a:rPr>
-              <a:t>Fair labour, honest advertising, accessibility and inclusive design are professional expectations.</a:t>
-            </a:r>
-          </a:p>
-        </p:txBody>
-      </p:sp>
-      <p:sp>
-        <p:nvSpPr>
-          <p:cNvPr id="7" name="Rounded Rectangle 6"/>
-          <p:cNvSpPr/>
-          <p:nvPr/>
-        </p:nvSpPr>
-        <p:spPr>
-          <a:xfrm>
-            <a:off x="8791956" y="1874519"/>
-            <a:ext cx="2500884" cy="1554480"/>
-          </a:xfrm>
-          <a:prstGeom prst="roundRect">
-            <a:avLst>
-              <a:gd name="adj" fmla="val 12000"/>
-            </a:avLst>
-          </a:prstGeom>
-          <a:solidFill>
-            <a:srgbClr val="EBDFE2"/>
-          </a:solidFill>
-          <a:ln>
-            <a:noFill/>
-          </a:ln>
-          <a:effectLst/>
-        </p:spPr>
-        <p:style>
-          <a:lnRef idx="1">
-            <a:schemeClr val="accent1"/>
-          </a:lnRef>
-          <a:fillRef idx="3">
-            <a:schemeClr val="accent1"/>
-          </a:fillRef>
-          <a:effectRef idx="2">
-            <a:schemeClr val="accent1"/>
-          </a:effectRef>
-          <a:fontRef idx="minor">
-            <a:schemeClr val="lt1"/>
-          </a:fontRef>
-        </p:style>
-        <p:txBody>
-          <a:bodyPr rtlCol="0" anchor="ctr" wrap="square" lIns="127000" rIns="127000" tIns="101600" bIns="101600"/>
-          <a:lstStyle/>
-          <a:p>
-            <a:pPr algn="ctr"/>
-            <a:r>
-              <a:rPr b="1" sz="1300">
-                <a:solidFill>
-                  <a:srgbClr val="612435"/>
-                </a:solidFill>
-                <a:latin typeface="Calibri"/>
-              </a:rPr>
-              <a:t>© Intellectual Property</a:t>
-            </a:r>
-          </a:p>
-          <a:p>
-            <a:r>
-              <a:rPr sz="1050">
-                <a:solidFill>
-                  <a:srgbClr val="2A1A1F"/>
-                </a:solidFill>
-                <a:latin typeface="Calibri"/>
-              </a:rPr>
-              <a:t>Copyright, trademarks and licensing protect original design work from unauthorised copying.</a:t>
-            </a:r>
-          </a:p>
-        </p:txBody>
-      </p:sp>
-      <p:sp>
-        <p:nvSpPr>
-          <p:cNvPr id="8" name="Rounded Rectangle 7"/>
-          <p:cNvSpPr/>
-          <p:nvPr/>
-        </p:nvSpPr>
-        <p:spPr>
-          <a:xfrm>
-            <a:off x="685800" y="3675887"/>
-            <a:ext cx="10607040" cy="2862073"/>
-          </a:xfrm>
-          <a:prstGeom prst="roundRect">
-            <a:avLst>
-              <a:gd name="adj" fmla="val 10000"/>
-            </a:avLst>
-          </a:prstGeom>
-          <a:solidFill>
-            <a:srgbClr val="F8F1E3"/>
-          </a:solidFill>
-          <a:ln>
-            <a:noFill/>
-          </a:ln>
-          <a:effectLst/>
-        </p:spPr>
-        <p:style>
-          <a:lnRef idx="1">
-            <a:schemeClr val="accent1"/>
-          </a:lnRef>
-          <a:fillRef idx="3">
-            <a:schemeClr val="accent1"/>
-          </a:fillRef>
-          <a:effectRef idx="2">
-            <a:schemeClr val="accent1"/>
-          </a:effectRef>
-          <a:fontRef idx="minor">
-            <a:schemeClr val="lt1"/>
-          </a:fontRef>
-        </p:style>
-        <p:txBody>
-          <a:bodyPr rtlCol="0" anchor="ctr" lIns="203200" rIns="203200" tIns="101600" bIns="101600" wrap="square"/>
-          <a:lstStyle/>
-          <a:p>
-            <a:pPr algn="ctr" indent="-203200" marL="203200">
-              <a:spcAft>
-                <a:spcPts val="900"/>
-              </a:spcAft>
-              <a:buClr>
-                <a:srgbClr val="D6A24A"/>
-              </a:buClr>
-              <a:buSzPct val="90000"/>
-              <a:buFont typeface="Arial"/>
-              <a:buChar char="●"/>
-            </a:pPr>
-            <a:r>
-              <a:rPr sz="1200" b="0" i="0">
-                <a:solidFill>
-                  <a:srgbClr val="2A1A1F"/>
-                </a:solidFill>
-                <a:latin typeface="Calibri"/>
-              </a:rPr>
-              <a:t> These factors don't just affect big companies — they shape </a:t>
-            </a:r>
-            <a:r>
-              <a:rPr sz="1200" b="1" i="0">
-                <a:solidFill>
-                  <a:srgbClr val="B5893E"/>
-                </a:solidFill>
-                <a:latin typeface="Calibri"/>
-              </a:rPr>
-              <a:t>every</a:t>
-            </a:r>
-            <a:r>
-              <a:rPr sz="1200" b="0" i="0">
-                <a:solidFill>
-                  <a:srgbClr val="2A1A1F"/>
-                </a:solidFill>
-                <a:latin typeface="Calibri"/>
-              </a:rPr>
-              <a:t> design decision, from the materials in your VCD folio model to the fonts you're licensed to use. </a:t>
-            </a:r>
           </a:p>
         </p:txBody>
       </p:sp>
@@ -5156,7 +5157,7 @@
                 </a:solidFill>
                 <a:latin typeface="Cambria"/>
               </a:rPr>
-              <a:t>Intellectual Property (IP)</a:t>
+              <a:t>Collaboration in Industry</a:t>
             </a:r>
           </a:p>
         </p:txBody>
@@ -5221,7 +5222,7 @@
                 </a:solidFill>
                 <a:latin typeface="Calibri"/>
               </a:rPr>
-              <a:t>Intellectual property law protects original creative and design work from being copied or used without permission.</a:t>
+              <a:t>Designers rarely work in isolation. They collaborate with other professionals and tradespeople to bring a design from concept to reality.</a:t>
             </a:r>
           </a:p>
           <a:p>
@@ -5243,7 +5244,7 @@
                 </a:solidFill>
                 <a:latin typeface="Calibri"/>
               </a:rPr>
-              <a:t>Types Relevant to Designers</a:t>
+              <a:t>Who Designers Collaborate With</a:t>
             </a:r>
           </a:p>
           <a:p>
@@ -5265,7 +5266,7 @@
                 </a:solidFill>
                 <a:latin typeface="Calibri"/>
               </a:rPr>
-              <a:t>Copyright</a:t>
+              <a:t>Clients</a:t>
             </a:r>
             <a:r>
               <a:rPr sz="1250" b="0" i="0">
@@ -5274,7 +5275,7 @@
                 </a:solidFill>
                 <a:latin typeface="Calibri"/>
               </a:rPr>
-              <a:t> — automatically protects original creative works (images, layouts, text)</a:t>
+              <a:t> — provide the brief, approve directions, fund the project</a:t>
             </a:r>
           </a:p>
           <a:p>
@@ -5296,7 +5297,7 @@
                 </a:solidFill>
                 <a:latin typeface="Calibri"/>
               </a:rPr>
-              <a:t>Trademark</a:t>
+              <a:t>Manufacturers / builders</a:t>
             </a:r>
             <a:r>
               <a:rPr sz="1250" b="0" i="0">
@@ -5305,7 +5306,7 @@
                 </a:solidFill>
                 <a:latin typeface="Calibri"/>
               </a:rPr>
-              <a:t> — protects brand names, logos and slogans</a:t>
+              <a:t> — turn designs into physical reality</a:t>
             </a:r>
           </a:p>
           <a:p>
@@ -5327,7 +5328,7 @@
                 </a:solidFill>
                 <a:latin typeface="Calibri"/>
               </a:rPr>
-              <a:t>Design registration</a:t>
+              <a:t>Other designers</a:t>
             </a:r>
             <a:r>
               <a:rPr sz="1250" b="0" i="0">
@@ -5336,7 +5337,7 @@
                 </a:solidFill>
                 <a:latin typeface="Calibri"/>
               </a:rPr>
-              <a:t> — protects the visual appearance of a manufactured product</a:t>
+              <a:t> — e.g. a graphic designer working with a UX designer</a:t>
             </a:r>
           </a:p>
           <a:p>
@@ -5358,7 +5359,7 @@
                 </a:solidFill>
                 <a:latin typeface="Calibri"/>
               </a:rPr>
-              <a:t>Patent</a:t>
+              <a:t>Marketing / printers / developers</a:t>
             </a:r>
             <a:r>
               <a:rPr sz="1250" b="0" i="0">
@@ -5367,7 +5368,7 @@
                 </a:solidFill>
                 <a:latin typeface="Calibri"/>
               </a:rPr>
-              <a:t> — protects a new invention or functional process</a:t>
+              <a:t> — deliver the design to its final audience</a:t>
             </a:r>
           </a:p>
         </p:txBody>
@@ -5432,7 +5433,7 @@
                 </a:solidFill>
                 <a:latin typeface="Calibri"/>
               </a:rPr>
-              <a:t>Why It Matters to You</a:t>
+              <a:t>Why Collaboration Matters</a:t>
             </a:r>
           </a:p>
           <a:p>
@@ -5454,7 +5455,7 @@
                 </a:solidFill>
                 <a:latin typeface="Calibri"/>
               </a:rPr>
-              <a:t>In your own folio, always use your own photography/imagery or correctly licensed stock and fonts — using copyrighted material without permission is a real industry issue, not just a school rule.</a:t>
+              <a:t>No single designer has expertise in every stage — from materials science to code to construction. Good collaboration keeps the design's original intent intact as it moves through production.</a:t>
             </a:r>
           </a:p>
         </p:txBody>
@@ -5614,7 +5615,7 @@
                 </a:solidFill>
                 <a:latin typeface="Cambria"/>
               </a:rPr>
-              <a:t>Answering Industry Connection Questions</a:t>
+              <a:t>Factors Shaping Industry Practice</a:t>
             </a:r>
           </a:p>
         </p:txBody>
@@ -5628,15 +5629,15 @@
         <p:spPr>
           <a:xfrm>
             <a:off x="685800" y="1874519"/>
-            <a:ext cx="5166360" cy="4526280"/>
+            <a:ext cx="2500884" cy="1554480"/>
           </a:xfrm>
           <a:prstGeom prst="roundRect">
             <a:avLst>
-              <a:gd name="adj" fmla="val 6000"/>
+              <a:gd name="adj" fmla="val 12000"/>
             </a:avLst>
           </a:prstGeom>
           <a:solidFill>
-            <a:srgbClr val="EFE5E8"/>
+            <a:srgbClr val="EBDFE2"/>
           </a:solidFill>
           <a:ln>
             <a:noFill/>
@@ -5658,7 +5659,271 @@
           </a:fontRef>
         </p:style>
         <p:txBody>
-          <a:bodyPr rtlCol="0" anchor="ctr" lIns="279400" rIns="279400" tIns="228600" bIns="228600" wrap="square"/>
+          <a:bodyPr rtlCol="0" anchor="ctr" wrap="square" lIns="127000" rIns="127000" tIns="101600" bIns="101600"/>
+          <a:lstStyle/>
+          <a:p>
+            <a:pPr algn="ctr"/>
+            <a:r>
+              <a:rPr b="1" sz="1300">
+                <a:solidFill>
+                  <a:srgbClr val="612435"/>
+                </a:solidFill>
+                <a:latin typeface="Calibri"/>
+              </a:rPr>
+              <a:t>Sustainability</a:t>
+            </a:r>
+          </a:p>
+          <a:p>
+            <a:r>
+              <a:rPr sz="1050">
+                <a:solidFill>
+                  <a:srgbClr val="2A1A1F"/>
+                </a:solidFill>
+                <a:latin typeface="Calibri"/>
+              </a:rPr>
+              <a:t>Materials, energy use, waste and end-of-life disposal are now standard client requirements.</a:t>
+            </a:r>
+          </a:p>
+        </p:txBody>
+      </p:sp>
+      <p:sp>
+        <p:nvSpPr>
+          <p:cNvPr id="5" name="Rounded Rectangle 4"/>
+          <p:cNvSpPr/>
+          <p:nvPr/>
+        </p:nvSpPr>
+        <p:spPr>
+          <a:xfrm>
+            <a:off x="3387852" y="1874519"/>
+            <a:ext cx="2500884" cy="1554480"/>
+          </a:xfrm>
+          <a:prstGeom prst="roundRect">
+            <a:avLst>
+              <a:gd name="adj" fmla="val 12000"/>
+            </a:avLst>
+          </a:prstGeom>
+          <a:solidFill>
+            <a:srgbClr val="F8F1E3"/>
+          </a:solidFill>
+          <a:ln>
+            <a:noFill/>
+          </a:ln>
+          <a:effectLst/>
+        </p:spPr>
+        <p:style>
+          <a:lnRef idx="1">
+            <a:schemeClr val="accent1"/>
+          </a:lnRef>
+          <a:fillRef idx="3">
+            <a:schemeClr val="accent1"/>
+          </a:fillRef>
+          <a:effectRef idx="2">
+            <a:schemeClr val="accent1"/>
+          </a:effectRef>
+          <a:fontRef idx="minor">
+            <a:schemeClr val="lt1"/>
+          </a:fontRef>
+        </p:style>
+        <p:txBody>
+          <a:bodyPr rtlCol="0" anchor="ctr" wrap="square" lIns="127000" rIns="127000" tIns="101600" bIns="101600"/>
+          <a:lstStyle/>
+          <a:p>
+            <a:pPr algn="ctr"/>
+            <a:r>
+              <a:rPr b="1" sz="1300">
+                <a:solidFill>
+                  <a:srgbClr val="AB813B"/>
+                </a:solidFill>
+                <a:latin typeface="Calibri"/>
+              </a:rPr>
+              <a:t>Technology</a:t>
+            </a:r>
+          </a:p>
+          <a:p>
+            <a:r>
+              <a:rPr sz="1050">
+                <a:solidFill>
+                  <a:srgbClr val="2A1A1F"/>
+                </a:solidFill>
+                <a:latin typeface="Calibri"/>
+              </a:rPr>
+              <a:t>New software, materials and manufacturing (3D printing, AI tools) change what's possible and expected.</a:t>
+            </a:r>
+          </a:p>
+        </p:txBody>
+      </p:sp>
+      <p:sp>
+        <p:nvSpPr>
+          <p:cNvPr id="6" name="Rounded Rectangle 5"/>
+          <p:cNvSpPr/>
+          <p:nvPr/>
+        </p:nvSpPr>
+        <p:spPr>
+          <a:xfrm>
+            <a:off x="6089904" y="1874519"/>
+            <a:ext cx="2500884" cy="1554480"/>
+          </a:xfrm>
+          <a:prstGeom prst="roundRect">
+            <a:avLst>
+              <a:gd name="adj" fmla="val 12000"/>
+            </a:avLst>
+          </a:prstGeom>
+          <a:solidFill>
+            <a:srgbClr val="F9EDF0"/>
+          </a:solidFill>
+          <a:ln>
+            <a:noFill/>
+          </a:ln>
+          <a:effectLst/>
+        </p:spPr>
+        <p:style>
+          <a:lnRef idx="1">
+            <a:schemeClr val="accent1"/>
+          </a:lnRef>
+          <a:fillRef idx="3">
+            <a:schemeClr val="accent1"/>
+          </a:fillRef>
+          <a:effectRef idx="2">
+            <a:schemeClr val="accent1"/>
+          </a:effectRef>
+          <a:fontRef idx="minor">
+            <a:schemeClr val="lt1"/>
+          </a:fontRef>
+        </p:style>
+        <p:txBody>
+          <a:bodyPr rtlCol="0" anchor="ctr" wrap="square" lIns="127000" rIns="127000" tIns="101600" bIns="101600"/>
+          <a:lstStyle/>
+          <a:p>
+            <a:pPr algn="ctr"/>
+            <a:r>
+              <a:rPr b="1" sz="1300">
+                <a:solidFill>
+                  <a:srgbClr val="AD707E"/>
+                </a:solidFill>
+                <a:latin typeface="Calibri"/>
+              </a:rPr>
+              <a:t>Ethics</a:t>
+            </a:r>
+          </a:p>
+          <a:p>
+            <a:r>
+              <a:rPr sz="1050">
+                <a:solidFill>
+                  <a:srgbClr val="2A1A1F"/>
+                </a:solidFill>
+                <a:latin typeface="Calibri"/>
+              </a:rPr>
+              <a:t>Fair labour, honest advertising, accessibility and inclusive design are professional expectations.</a:t>
+            </a:r>
+          </a:p>
+        </p:txBody>
+      </p:sp>
+      <p:sp>
+        <p:nvSpPr>
+          <p:cNvPr id="7" name="Rounded Rectangle 6"/>
+          <p:cNvSpPr/>
+          <p:nvPr/>
+        </p:nvSpPr>
+        <p:spPr>
+          <a:xfrm>
+            <a:off x="8791956" y="1874519"/>
+            <a:ext cx="2500884" cy="1554480"/>
+          </a:xfrm>
+          <a:prstGeom prst="roundRect">
+            <a:avLst>
+              <a:gd name="adj" fmla="val 12000"/>
+            </a:avLst>
+          </a:prstGeom>
+          <a:solidFill>
+            <a:srgbClr val="EBDFE2"/>
+          </a:solidFill>
+          <a:ln>
+            <a:noFill/>
+          </a:ln>
+          <a:effectLst/>
+        </p:spPr>
+        <p:style>
+          <a:lnRef idx="1">
+            <a:schemeClr val="accent1"/>
+          </a:lnRef>
+          <a:fillRef idx="3">
+            <a:schemeClr val="accent1"/>
+          </a:fillRef>
+          <a:effectRef idx="2">
+            <a:schemeClr val="accent1"/>
+          </a:effectRef>
+          <a:fontRef idx="minor">
+            <a:schemeClr val="lt1"/>
+          </a:fontRef>
+        </p:style>
+        <p:txBody>
+          <a:bodyPr rtlCol="0" anchor="ctr" wrap="square" lIns="127000" rIns="127000" tIns="101600" bIns="101600"/>
+          <a:lstStyle/>
+          <a:p>
+            <a:pPr algn="ctr"/>
+            <a:r>
+              <a:rPr b="1" sz="1300">
+                <a:solidFill>
+                  <a:srgbClr val="612435"/>
+                </a:solidFill>
+                <a:latin typeface="Calibri"/>
+              </a:rPr>
+              <a:t>© Intellectual Property</a:t>
+            </a:r>
+          </a:p>
+          <a:p>
+            <a:r>
+              <a:rPr sz="1050">
+                <a:solidFill>
+                  <a:srgbClr val="2A1A1F"/>
+                </a:solidFill>
+                <a:latin typeface="Calibri"/>
+              </a:rPr>
+              <a:t>Copyright, trademarks and licensing protect original design work from unauthorised copying.</a:t>
+            </a:r>
+          </a:p>
+        </p:txBody>
+      </p:sp>
+      <p:sp>
+        <p:nvSpPr>
+          <p:cNvPr id="8" name="Rounded Rectangle 7"/>
+          <p:cNvSpPr/>
+          <p:nvPr/>
+        </p:nvSpPr>
+        <p:spPr>
+          <a:xfrm>
+            <a:off x="685800" y="3675887"/>
+            <a:ext cx="10607040" cy="2862073"/>
+          </a:xfrm>
+          <a:prstGeom prst="roundRect">
+            <a:avLst>
+              <a:gd name="adj" fmla="val 10000"/>
+            </a:avLst>
+          </a:prstGeom>
+          <a:solidFill>
+            <a:srgbClr val="F8F1E3"/>
+          </a:solidFill>
+          <a:ln>
+            <a:noFill/>
+          </a:ln>
+          <a:effectLst/>
+        </p:spPr>
+        <p:style>
+          <a:lnRef idx="1">
+            <a:schemeClr val="accent1"/>
+          </a:lnRef>
+          <a:fillRef idx="3">
+            <a:schemeClr val="accent1"/>
+          </a:fillRef>
+          <a:effectRef idx="2">
+            <a:schemeClr val="accent1"/>
+          </a:effectRef>
+          <a:fontRef idx="minor">
+            <a:schemeClr val="lt1"/>
+          </a:fontRef>
+        </p:style>
+        <p:txBody>
+          <a:bodyPr rtlCol="0" anchor="ctr" lIns="203200" rIns="203200" tIns="101600" bIns="101600" wrap="square"/>
           <a:lstStyle/>
           <a:p>
             <a:pPr algn="ctr" indent="-203200" marL="203200">
@@ -5666,279 +5931,39 @@
                 <a:spcPts val="900"/>
               </a:spcAft>
               <a:buClr>
-                <a:srgbClr val="7A2E43"/>
+                <a:srgbClr val="D6A24A"/>
               </a:buClr>
               <a:buSzPct val="90000"/>
               <a:buFont typeface="Arial"/>
-              <a:buChar char="–"/>
+              <a:buChar char="●"/>
             </a:pPr>
             <a:r>
-              <a:rPr sz="1250" b="0" i="0">
-                <a:solidFill>
-                  <a:srgbClr val="2A1A1F"/>
-                </a:solidFill>
-                <a:latin typeface="Calibri"/>
-              </a:rPr>
-              <a:t>Connection → Roles → Factor</a:t>
-            </a:r>
-          </a:p>
-          <a:p>
-            <a:pPr indent="-203200" marL="203200">
-              <a:spcAft>
-                <a:spcPts val="900"/>
-              </a:spcAft>
-              <a:buClr>
-                <a:srgbClr val="7A2E43"/>
-              </a:buClr>
-              <a:buSzPct val="90000"/>
-              <a:buFont typeface="Arial"/>
-              <a:buChar char="–"/>
-            </a:pPr>
-            <a:r>
-              <a:rPr sz="1250" b="0" i="0">
-                <a:solidFill>
-                  <a:srgbClr val="2A1A1F"/>
-                </a:solidFill>
-                <a:latin typeface="Calibri"/>
-              </a:rPr>
-              <a:t>1. Identify which design fields/roles are connected</a:t>
-            </a:r>
-          </a:p>
-          <a:p>
-            <a:pPr indent="-203200" marL="203200">
-              <a:spcAft>
-                <a:spcPts val="900"/>
-              </a:spcAft>
-              <a:buClr>
-                <a:srgbClr val="7A2E43"/>
-              </a:buClr>
-              <a:buSzPct val="90000"/>
-              <a:buFont typeface="Arial"/>
-              <a:buChar char="–"/>
-            </a:pPr>
-            <a:r>
-              <a:rPr sz="1250" b="0" i="0">
-                <a:solidFill>
-                  <a:srgbClr val="2A1A1F"/>
-                </a:solidFill>
-                <a:latin typeface="Calibri"/>
-              </a:rPr>
-              <a:t>2. Explain how they collaborate</a:t>
-            </a:r>
-          </a:p>
-          <a:p>
-            <a:pPr indent="-203200" marL="203200">
-              <a:spcAft>
-                <a:spcPts val="900"/>
-              </a:spcAft>
-              <a:buClr>
-                <a:srgbClr val="7A2E43"/>
-              </a:buClr>
-              <a:buSzPct val="90000"/>
-              <a:buFont typeface="Arial"/>
-              <a:buChar char="–"/>
-            </a:pPr>
-            <a:r>
-              <a:rPr sz="1250" b="0" i="0">
-                <a:solidFill>
-                  <a:srgbClr val="2A1A1F"/>
-                </a:solidFill>
-                <a:latin typeface="Calibri"/>
-              </a:rPr>
-              <a:t>3. Link to a factor (sustainability, technology, ethics, IP)</a:t>
-            </a:r>
-          </a:p>
-        </p:txBody>
-      </p:sp>
-      <p:sp>
-        <p:nvSpPr>
-          <p:cNvPr id="5" name="Rounded Rectangle 4"/>
-          <p:cNvSpPr/>
-          <p:nvPr/>
-        </p:nvSpPr>
-        <p:spPr>
-          <a:xfrm>
-            <a:off x="6080760" y="1874519"/>
-            <a:ext cx="5166360" cy="4526280"/>
-          </a:xfrm>
-          <a:prstGeom prst="roundRect">
-            <a:avLst>
-              <a:gd name="adj" fmla="val 6000"/>
-            </a:avLst>
-          </a:prstGeom>
-          <a:solidFill>
-            <a:srgbClr val="F4DEE3"/>
-          </a:solidFill>
-          <a:ln>
-            <a:noFill/>
-          </a:ln>
-          <a:effectLst/>
-        </p:spPr>
-        <p:style>
-          <a:lnRef idx="1">
-            <a:schemeClr val="accent1"/>
-          </a:lnRef>
-          <a:fillRef idx="3">
-            <a:schemeClr val="accent1"/>
-          </a:fillRef>
-          <a:effectRef idx="2">
-            <a:schemeClr val="accent1"/>
-          </a:effectRef>
-          <a:fontRef idx="minor">
-            <a:schemeClr val="lt1"/>
-          </a:fontRef>
-        </p:style>
-        <p:txBody>
-          <a:bodyPr rtlCol="0" anchor="ctr" lIns="279400" rIns="279400" tIns="228600" bIns="228600" wrap="square"/>
-          <a:lstStyle/>
-          <a:p>
-            <a:pPr algn="ctr">
-              <a:spcAft>
-                <a:spcPts val="900"/>
-              </a:spcAft>
-              <a:buNone/>
-            </a:pPr>
-            <a:r>
-              <a:rPr sz="1250" b="0" i="1">
-                <a:solidFill>
-                  <a:srgbClr val="2A1A1F"/>
-                </a:solidFill>
-                <a:latin typeface="Calibri"/>
-              </a:rPr>
-              <a:t>Sentence Starters</a:t>
-            </a:r>
-          </a:p>
-          <a:p>
-            <a:pPr indent="-203200" marL="203200">
-              <a:spcAft>
-                <a:spcPts val="900"/>
-              </a:spcAft>
-              <a:buClr>
-                <a:srgbClr val="D98C9E"/>
-              </a:buClr>
-              <a:buSzPct val="90000"/>
-              <a:buFont typeface="Arial"/>
-              <a:buChar char="–"/>
-            </a:pPr>
-            <a:r>
-              <a:rPr sz="1250" b="0" i="0">
-                <a:solidFill>
-                  <a:srgbClr val="2A1A1F"/>
-                </a:solidFill>
-                <a:latin typeface="Calibri"/>
-              </a:rPr>
-              <a:t>"This project connects [field A] and [field B] because..."</a:t>
-            </a:r>
-          </a:p>
-          <a:p>
-            <a:pPr indent="-203200" marL="203200">
-              <a:spcAft>
-                <a:spcPts val="900"/>
-              </a:spcAft>
-              <a:buClr>
-                <a:srgbClr val="D98C9E"/>
-              </a:buClr>
-              <a:buSzPct val="90000"/>
-              <a:buFont typeface="Arial"/>
-              <a:buChar char="–"/>
-            </a:pPr>
-            <a:r>
-              <a:rPr sz="1250" b="0" i="0">
-                <a:solidFill>
-                  <a:srgbClr val="2A1A1F"/>
-                </a:solidFill>
-                <a:latin typeface="Calibri"/>
-              </a:rPr>
-              <a:t>"The designer collaborated with [role] to..."</a:t>
-            </a:r>
-          </a:p>
-          <a:p>
-            <a:pPr indent="-203200" marL="203200">
-              <a:spcAft>
-                <a:spcPts val="900"/>
-              </a:spcAft>
-              <a:buClr>
-                <a:srgbClr val="D98C9E"/>
-              </a:buClr>
-              <a:buSzPct val="90000"/>
-              <a:buFont typeface="Arial"/>
-              <a:buChar char="–"/>
-            </a:pPr>
-            <a:r>
-              <a:rPr sz="1250" b="0" i="0">
-                <a:solidFill>
-                  <a:srgbClr val="2A1A1F"/>
-                </a:solidFill>
-                <a:latin typeface="Calibri"/>
-              </a:rPr>
-              <a:t>"This decision reflects growing industry concern for [factor]..."</a:t>
-            </a:r>
-          </a:p>
-          <a:p>
-            <a:pPr indent="-203200" marL="203200">
-              <a:spcAft>
-                <a:spcPts val="900"/>
-              </a:spcAft>
-              <a:buClr>
-                <a:srgbClr val="D98C9E"/>
-              </a:buClr>
-              <a:buSzPct val="90000"/>
-              <a:buFont typeface="Arial"/>
-              <a:buChar char="–"/>
-            </a:pPr>
-            <a:r>
-              <a:rPr sz="1250" b="0" i="0">
-                <a:solidFill>
-                  <a:srgbClr val="2A1A1F"/>
-                </a:solidFill>
-                <a:latin typeface="Calibri"/>
-              </a:rPr>
-              <a:t>"Without protection of [IP type], this design could be..."</a:t>
-            </a:r>
-          </a:p>
-        </p:txBody>
-      </p:sp>
-      <p:sp>
-        <p:nvSpPr>
-          <p:cNvPr id="6" name="Oval 5"/>
-          <p:cNvSpPr/>
-          <p:nvPr/>
-        </p:nvSpPr>
-        <p:spPr>
-          <a:xfrm>
-            <a:off x="5532120" y="3840480"/>
-            <a:ext cx="685800" cy="685800"/>
-          </a:xfrm>
-          <a:prstGeom prst="ellipse">
-            <a:avLst/>
-          </a:prstGeom>
-          <a:solidFill>
-            <a:srgbClr val="D6A24A"/>
-          </a:solidFill>
-          <a:ln>
-            <a:noFill/>
-          </a:ln>
-          <a:effectLst/>
-        </p:spPr>
-        <p:style>
-          <a:lnRef idx="1">
-            <a:schemeClr val="accent1"/>
-          </a:lnRef>
-          <a:fillRef idx="3">
-            <a:schemeClr val="accent1"/>
-          </a:fillRef>
-          <a:effectRef idx="2">
-            <a:schemeClr val="accent1"/>
-          </a:effectRef>
-          <a:fontRef idx="minor">
-            <a:schemeClr val="lt1"/>
-          </a:fontRef>
-        </p:style>
-        <p:txBody>
-          <a:bodyPr rtlCol="0" anchor="ctr"/>
-          <a:lstStyle/>
-          <a:p>
-            <a:pPr algn="ctr"/>
+              <a:rPr sz="1200" b="0" i="0">
+                <a:solidFill>
+                  <a:srgbClr val="2A1A1F"/>
+                </a:solidFill>
+                <a:latin typeface="Calibri"/>
+              </a:rPr>
+              <a:t> These factors don't just affect big companies — they shape </a:t>
+            </a:r>
+            <a:r>
+              <a:rPr sz="1200" b="1" i="0">
+                <a:solidFill>
+                  <a:srgbClr val="B5893E"/>
+                </a:solidFill>
+                <a:latin typeface="Calibri"/>
+              </a:rPr>
+              <a:t>every</a:t>
+            </a:r>
+            <a:r>
+              <a:rPr sz="1200" b="0" i="0">
+                <a:solidFill>
+                  <a:srgbClr val="2A1A1F"/>
+                </a:solidFill>
+                <a:latin typeface="Calibri"/>
+              </a:rPr>
+              <a:t> design decision, from the materials in your VCD folio model to the fonts you're licensed to use. </a:t>
+            </a:r>
           </a:p>
         </p:txBody>
       </p:sp>
@@ -6053,7 +6078,7 @@
                 </a:solidFill>
                 <a:latin typeface="Cambria"/>
               </a:rPr>
-              <a:t>Design &amp; Industry — Quick Reference</a:t>
+              <a:t>Intellectual Property (IP)</a:t>
             </a:r>
           </a:p>
         </p:txBody>
@@ -6067,15 +6092,15 @@
         <p:spPr>
           <a:xfrm>
             <a:off x="685800" y="1874519"/>
-            <a:ext cx="2500884" cy="1554480"/>
+            <a:ext cx="5166360" cy="4526280"/>
           </a:xfrm>
           <a:prstGeom prst="roundRect">
             <a:avLst>
-              <a:gd name="adj" fmla="val 12000"/>
+              <a:gd name="adj" fmla="val 6000"/>
             </a:avLst>
           </a:prstGeom>
           <a:solidFill>
-            <a:srgbClr val="EBDFE2"/>
+            <a:srgbClr val="EFE5E8"/>
           </a:solidFill>
           <a:ln>
             <a:noFill/>
@@ -6097,29 +6122,174 @@
           </a:fontRef>
         </p:style>
         <p:txBody>
-          <a:bodyPr rtlCol="0" anchor="ctr" wrap="square" lIns="127000" rIns="127000" tIns="101600" bIns="101600"/>
-          <a:lstStyle/>
-          <a:p>
-            <a:pPr algn="ctr"/>
-            <a:r>
-              <a:rPr b="1" sz="1300">
-                <a:solidFill>
-                  <a:srgbClr val="612435"/>
-                </a:solidFill>
-                <a:latin typeface="Calibri"/>
-              </a:rPr>
-              <a:t>Overlap</a:t>
-            </a:r>
-          </a:p>
-          <a:p>
-            <a:r>
-              <a:rPr sz="1050">
-                <a:solidFill>
-                  <a:srgbClr val="2A1A1F"/>
-                </a:solidFill>
-                <a:latin typeface="Calibri"/>
-              </a:rPr>
-              <a:t>Design fields rarely work alone on real projects.</a:t>
+          <a:bodyPr rtlCol="0" anchor="ctr" lIns="279400" rIns="279400" tIns="228600" bIns="228600" wrap="square"/>
+          <a:lstStyle/>
+          <a:p>
+            <a:pPr algn="ctr" indent="-203200" marL="203200">
+              <a:spcAft>
+                <a:spcPts val="900"/>
+              </a:spcAft>
+              <a:buClr>
+                <a:srgbClr val="7A2E43"/>
+              </a:buClr>
+              <a:buSzPct val="90000"/>
+              <a:buFont typeface="Arial"/>
+              <a:buChar char="●"/>
+            </a:pPr>
+            <a:r>
+              <a:rPr sz="1400" b="0" i="0">
+                <a:solidFill>
+                  <a:srgbClr val="2A1A1F"/>
+                </a:solidFill>
+                <a:latin typeface="Calibri"/>
+              </a:rPr>
+              <a:t>Intellectual property law protects original creative and design work from being copied or used without permission.</a:t>
+            </a:r>
+          </a:p>
+          <a:p>
+            <a:pPr indent="-203200" marL="203200">
+              <a:spcAft>
+                <a:spcPts val="900"/>
+              </a:spcAft>
+              <a:buClr>
+                <a:srgbClr val="7A2E43"/>
+              </a:buClr>
+              <a:buSzPct val="90000"/>
+              <a:buFont typeface="Arial"/>
+              <a:buChar char="●"/>
+            </a:pPr>
+            <a:r>
+              <a:rPr sz="1400" b="0" i="0">
+                <a:solidFill>
+                  <a:srgbClr val="2A1A1F"/>
+                </a:solidFill>
+                <a:latin typeface="Calibri"/>
+              </a:rPr>
+              <a:t>Types Relevant to Designers</a:t>
+            </a:r>
+          </a:p>
+          <a:p>
+            <a:pPr indent="-203200" marL="203200">
+              <a:spcAft>
+                <a:spcPts val="900"/>
+              </a:spcAft>
+              <a:buClr>
+                <a:srgbClr val="7A2E43"/>
+              </a:buClr>
+              <a:buSzPct val="90000"/>
+              <a:buFont typeface="Arial"/>
+              <a:buChar char="–"/>
+            </a:pPr>
+            <a:r>
+              <a:rPr sz="1250" b="1" i="0">
+                <a:solidFill>
+                  <a:srgbClr val="672738"/>
+                </a:solidFill>
+                <a:latin typeface="Calibri"/>
+              </a:rPr>
+              <a:t>Copyright</a:t>
+            </a:r>
+            <a:r>
+              <a:rPr sz="1250" b="0" i="0">
+                <a:solidFill>
+                  <a:srgbClr val="2A1A1F"/>
+                </a:solidFill>
+                <a:latin typeface="Calibri"/>
+              </a:rPr>
+              <a:t> — automatically protects original creative works (images, layouts, text)</a:t>
+            </a:r>
+          </a:p>
+          <a:p>
+            <a:pPr indent="-203200" marL="203200">
+              <a:spcAft>
+                <a:spcPts val="900"/>
+              </a:spcAft>
+              <a:buClr>
+                <a:srgbClr val="7A2E43"/>
+              </a:buClr>
+              <a:buSzPct val="90000"/>
+              <a:buFont typeface="Arial"/>
+              <a:buChar char="–"/>
+            </a:pPr>
+            <a:r>
+              <a:rPr sz="1250" b="1" i="0">
+                <a:solidFill>
+                  <a:srgbClr val="672738"/>
+                </a:solidFill>
+                <a:latin typeface="Calibri"/>
+              </a:rPr>
+              <a:t>Trademark</a:t>
+            </a:r>
+            <a:r>
+              <a:rPr sz="1250" b="0" i="0">
+                <a:solidFill>
+                  <a:srgbClr val="2A1A1F"/>
+                </a:solidFill>
+                <a:latin typeface="Calibri"/>
+              </a:rPr>
+              <a:t> — protects brand names, logos and slogans</a:t>
+            </a:r>
+          </a:p>
+          <a:p>
+            <a:pPr indent="-203200" marL="203200">
+              <a:spcAft>
+                <a:spcPts val="900"/>
+              </a:spcAft>
+              <a:buClr>
+                <a:srgbClr val="7A2E43"/>
+              </a:buClr>
+              <a:buSzPct val="90000"/>
+              <a:buFont typeface="Arial"/>
+              <a:buChar char="–"/>
+            </a:pPr>
+            <a:r>
+              <a:rPr sz="1250" b="1" i="0">
+                <a:solidFill>
+                  <a:srgbClr val="672738"/>
+                </a:solidFill>
+                <a:latin typeface="Calibri"/>
+              </a:rPr>
+              <a:t>Design registration</a:t>
+            </a:r>
+            <a:r>
+              <a:rPr sz="1250" b="0" i="0">
+                <a:solidFill>
+                  <a:srgbClr val="2A1A1F"/>
+                </a:solidFill>
+                <a:latin typeface="Calibri"/>
+              </a:rPr>
+              <a:t> — protects the visual appearance of a manufactured product</a:t>
+            </a:r>
+          </a:p>
+          <a:p>
+            <a:pPr indent="-203200" marL="203200">
+              <a:spcAft>
+                <a:spcPts val="900"/>
+              </a:spcAft>
+              <a:buClr>
+                <a:srgbClr val="7A2E43"/>
+              </a:buClr>
+              <a:buSzPct val="90000"/>
+              <a:buFont typeface="Arial"/>
+              <a:buChar char="–"/>
+            </a:pPr>
+            <a:r>
+              <a:rPr sz="1250" b="1" i="0">
+                <a:solidFill>
+                  <a:srgbClr val="672738"/>
+                </a:solidFill>
+                <a:latin typeface="Calibri"/>
+              </a:rPr>
+              <a:t>Patent</a:t>
+            </a:r>
+            <a:r>
+              <a:rPr sz="1250" b="0" i="0">
+                <a:solidFill>
+                  <a:srgbClr val="2A1A1F"/>
+                </a:solidFill>
+                <a:latin typeface="Calibri"/>
+              </a:rPr>
+              <a:t> — protects a new invention or functional process</a:t>
             </a:r>
           </a:p>
         </p:txBody>
@@ -6132,16 +6302,16 @@
         </p:nvSpPr>
         <p:spPr>
           <a:xfrm>
-            <a:off x="3387852" y="1874519"/>
-            <a:ext cx="2500884" cy="1554480"/>
+            <a:off x="6080760" y="1874519"/>
+            <a:ext cx="5166360" cy="4526280"/>
           </a:xfrm>
           <a:prstGeom prst="roundRect">
             <a:avLst>
-              <a:gd name="adj" fmla="val 12000"/>
+              <a:gd name="adj" fmla="val 6000"/>
             </a:avLst>
           </a:prstGeom>
           <a:solidFill>
-            <a:srgbClr val="F8F1E3"/>
+            <a:srgbClr val="F4DEE3"/>
           </a:solidFill>
           <a:ln>
             <a:noFill/>
@@ -6163,51 +6333,70 @@
           </a:fontRef>
         </p:style>
         <p:txBody>
-          <a:bodyPr rtlCol="0" anchor="ctr" wrap="square" lIns="127000" rIns="127000" tIns="101600" bIns="101600"/>
-          <a:lstStyle/>
-          <a:p>
-            <a:pPr algn="ctr"/>
-            <a:r>
-              <a:rPr b="1" sz="1300">
-                <a:solidFill>
-                  <a:srgbClr val="AB813B"/>
-                </a:solidFill>
-                <a:latin typeface="Calibri"/>
-              </a:rPr>
-              <a:t>Collaboration</a:t>
-            </a:r>
-          </a:p>
-          <a:p>
-            <a:r>
-              <a:rPr sz="1050">
-                <a:solidFill>
-                  <a:srgbClr val="2A1A1F"/>
-                </a:solidFill>
-                <a:latin typeface="Calibri"/>
-              </a:rPr>
-              <a:t>Clients, manufacturers, other designers, developers.</a:t>
-            </a:r>
-          </a:p>
-        </p:txBody>
-      </p:sp>
-      <p:sp>
-        <p:nvSpPr>
-          <p:cNvPr id="6" name="Rounded Rectangle 5"/>
+          <a:bodyPr rtlCol="0" anchor="ctr" lIns="279400" rIns="279400" tIns="228600" bIns="228600" wrap="square"/>
+          <a:lstStyle/>
+          <a:p>
+            <a:pPr algn="ctr" indent="-203200" marL="203200">
+              <a:spcAft>
+                <a:spcPts val="900"/>
+              </a:spcAft>
+              <a:buClr>
+                <a:srgbClr val="D98C9E"/>
+              </a:buClr>
+              <a:buSzPct val="90000"/>
+              <a:buFont typeface="Arial"/>
+              <a:buChar char="●"/>
+            </a:pPr>
+            <a:r>
+              <a:rPr sz="1400" b="0" i="0">
+                <a:solidFill>
+                  <a:srgbClr val="2A1A1F"/>
+                </a:solidFill>
+                <a:latin typeface="Calibri"/>
+              </a:rPr>
+              <a:t>Why It Matters to You</a:t>
+            </a:r>
+          </a:p>
+          <a:p>
+            <a:pPr indent="-203200" marL="203200">
+              <a:spcAft>
+                <a:spcPts val="900"/>
+              </a:spcAft>
+              <a:buClr>
+                <a:srgbClr val="D98C9E"/>
+              </a:buClr>
+              <a:buSzPct val="90000"/>
+              <a:buFont typeface="Arial"/>
+              <a:buChar char="●"/>
+            </a:pPr>
+            <a:r>
+              <a:rPr sz="1400" b="0" i="0">
+                <a:solidFill>
+                  <a:srgbClr val="2A1A1F"/>
+                </a:solidFill>
+                <a:latin typeface="Calibri"/>
+              </a:rPr>
+              <a:t>In your own folio, always use your own photography/imagery or correctly licensed stock and fonts — using copyrighted material without permission is a real industry issue, not just a school rule.</a:t>
+            </a:r>
+          </a:p>
+        </p:txBody>
+      </p:sp>
+      <p:sp>
+        <p:nvSpPr>
+          <p:cNvPr id="6" name="Oval 5"/>
           <p:cNvSpPr/>
           <p:nvPr/>
         </p:nvSpPr>
         <p:spPr>
           <a:xfrm>
-            <a:off x="6089904" y="1874519"/>
-            <a:ext cx="2500884" cy="1554480"/>
-          </a:xfrm>
-          <a:prstGeom prst="roundRect">
-            <a:avLst>
-              <a:gd name="adj" fmla="val 12000"/>
-            </a:avLst>
+            <a:off x="5532120" y="3840480"/>
+            <a:ext cx="685800" cy="685800"/>
+          </a:xfrm>
+          <a:prstGeom prst="ellipse">
+            <a:avLst/>
           </a:prstGeom>
           <a:solidFill>
-            <a:srgbClr val="F9EDF0"/>
+            <a:srgbClr val="D6A24A"/>
           </a:solidFill>
           <a:ln>
             <a:noFill/>
@@ -6229,179 +6418,10 @@
           </a:fontRef>
         </p:style>
         <p:txBody>
-          <a:bodyPr rtlCol="0" anchor="ctr" wrap="square" lIns="127000" rIns="127000" tIns="101600" bIns="101600"/>
+          <a:bodyPr rtlCol="0" anchor="ctr"/>
           <a:lstStyle/>
           <a:p>
             <a:pPr algn="ctr"/>
-            <a:r>
-              <a:rPr b="1" sz="1300">
-                <a:solidFill>
-                  <a:srgbClr val="AD707E"/>
-                </a:solidFill>
-                <a:latin typeface="Calibri"/>
-              </a:rPr>
-              <a:t>Industry Factors</a:t>
-            </a:r>
-          </a:p>
-          <a:p>
-            <a:r>
-              <a:rPr sz="1050">
-                <a:solidFill>
-                  <a:srgbClr val="2A1A1F"/>
-                </a:solidFill>
-                <a:latin typeface="Calibri"/>
-              </a:rPr>
-              <a:t>Sustainability, technology, ethics, IP.</a:t>
-            </a:r>
-          </a:p>
-        </p:txBody>
-      </p:sp>
-      <p:sp>
-        <p:nvSpPr>
-          <p:cNvPr id="7" name="Rounded Rectangle 6"/>
-          <p:cNvSpPr/>
-          <p:nvPr/>
-        </p:nvSpPr>
-        <p:spPr>
-          <a:xfrm>
-            <a:off x="8791956" y="1874519"/>
-            <a:ext cx="2500884" cy="1554480"/>
-          </a:xfrm>
-          <a:prstGeom prst="roundRect">
-            <a:avLst>
-              <a:gd name="adj" fmla="val 12000"/>
-            </a:avLst>
-          </a:prstGeom>
-          <a:solidFill>
-            <a:srgbClr val="EBDFE2"/>
-          </a:solidFill>
-          <a:ln>
-            <a:noFill/>
-          </a:ln>
-          <a:effectLst/>
-        </p:spPr>
-        <p:style>
-          <a:lnRef idx="1">
-            <a:schemeClr val="accent1"/>
-          </a:lnRef>
-          <a:fillRef idx="3">
-            <a:schemeClr val="accent1"/>
-          </a:fillRef>
-          <a:effectRef idx="2">
-            <a:schemeClr val="accent1"/>
-          </a:effectRef>
-          <a:fontRef idx="minor">
-            <a:schemeClr val="lt1"/>
-          </a:fontRef>
-        </p:style>
-        <p:txBody>
-          <a:bodyPr rtlCol="0" anchor="ctr" wrap="square" lIns="127000" rIns="127000" tIns="101600" bIns="101600"/>
-          <a:lstStyle/>
-          <a:p>
-            <a:pPr algn="ctr"/>
-            <a:r>
-              <a:rPr b="1" sz="1300">
-                <a:solidFill>
-                  <a:srgbClr val="612435"/>
-                </a:solidFill>
-                <a:latin typeface="Calibri"/>
-              </a:rPr>
-              <a:t>IP Types</a:t>
-            </a:r>
-          </a:p>
-          <a:p>
-            <a:r>
-              <a:rPr sz="1050">
-                <a:solidFill>
-                  <a:srgbClr val="2A1A1F"/>
-                </a:solidFill>
-                <a:latin typeface="Calibri"/>
-              </a:rPr>
-              <a:t>Copyright, trademark, design registration, patent.</a:t>
-            </a:r>
-          </a:p>
-        </p:txBody>
-      </p:sp>
-      <p:sp>
-        <p:nvSpPr>
-          <p:cNvPr id="8" name="Rounded Rectangle 7"/>
-          <p:cNvSpPr/>
-          <p:nvPr/>
-        </p:nvSpPr>
-        <p:spPr>
-          <a:xfrm>
-            <a:off x="685800" y="3675887"/>
-            <a:ext cx="10607040" cy="2862073"/>
-          </a:xfrm>
-          <a:prstGeom prst="roundRect">
-            <a:avLst>
-              <a:gd name="adj" fmla="val 10000"/>
-            </a:avLst>
-          </a:prstGeom>
-          <a:solidFill>
-            <a:srgbClr val="F8F1E3"/>
-          </a:solidFill>
-          <a:ln>
-            <a:noFill/>
-          </a:ln>
-          <a:effectLst/>
-        </p:spPr>
-        <p:style>
-          <a:lnRef idx="1">
-            <a:schemeClr val="accent1"/>
-          </a:lnRef>
-          <a:fillRef idx="3">
-            <a:schemeClr val="accent1"/>
-          </a:fillRef>
-          <a:effectRef idx="2">
-            <a:schemeClr val="accent1"/>
-          </a:effectRef>
-          <a:fontRef idx="minor">
-            <a:schemeClr val="lt1"/>
-          </a:fontRef>
-        </p:style>
-        <p:txBody>
-          <a:bodyPr rtlCol="0" anchor="ctr" lIns="203200" rIns="203200" tIns="101600" bIns="101600" wrap="square"/>
-          <a:lstStyle/>
-          <a:p>
-            <a:pPr algn="ctr" indent="-203200" marL="203200">
-              <a:spcAft>
-                <a:spcPts val="900"/>
-              </a:spcAft>
-              <a:buClr>
-                <a:srgbClr val="D6A24A"/>
-              </a:buClr>
-              <a:buSzPct val="90000"/>
-              <a:buFont typeface="Arial"/>
-              <a:buChar char="●"/>
-            </a:pPr>
-            <a:r>
-              <a:rPr sz="1200" b="0" i="0">
-                <a:solidFill>
-                  <a:srgbClr val="2A1A1F"/>
-                </a:solidFill>
-                <a:latin typeface="Calibri"/>
-              </a:rPr>
-              <a:t> Reminder: always name the </a:t>
-            </a:r>
-            <a:r>
-              <a:rPr sz="1200" b="1" i="0">
-                <a:solidFill>
-                  <a:srgbClr val="B5893E"/>
-                </a:solidFill>
-                <a:latin typeface="Calibri"/>
-              </a:rPr>
-              <a:t>specific roles or IP type</a:t>
-            </a:r>
-            <a:r>
-              <a:rPr sz="1200" b="0" i="0">
-                <a:solidFill>
-                  <a:srgbClr val="2A1A1F"/>
-                </a:solidFill>
-                <a:latin typeface="Calibri"/>
-              </a:rPr>
-              <a:t> involved — general statements about "teamwork" earn few marks. </a:t>
-            </a:r>
           </a:p>
         </p:txBody>
       </p:sp>
@@ -6419,7 +6439,7 @@
     <p:bg>
       <p:bgPr>
         <a:solidFill>
-          <a:srgbClr val="D6A24A"/>
+          <a:srgbClr val="FBF5F1"/>
         </a:solidFill>
         <a:effectLst/>
       </p:bgPr>
@@ -6433,20 +6453,22 @@
       <p:grpSpPr/>
       <p:sp>
         <p:nvSpPr>
-          <p:cNvPr id="2" name="Oval 1"/>
+          <p:cNvPr id="2" name="Rounded Rectangle 1"/>
           <p:cNvSpPr/>
           <p:nvPr/>
         </p:nvSpPr>
         <p:spPr>
           <a:xfrm>
-            <a:off x="9692640" y="-914400"/>
-            <a:ext cx="2926080" cy="2926080"/>
-          </a:xfrm>
-          <a:prstGeom prst="ellipse">
-            <a:avLst/>
+            <a:off x="685800" y="502920"/>
+            <a:ext cx="3291840" cy="457200"/>
+          </a:xfrm>
+          <a:prstGeom prst="roundRect">
+            <a:avLst>
+              <a:gd name="adj" fmla="val 50000"/>
+            </a:avLst>
           </a:prstGeom>
           <a:solidFill>
-            <a:srgbClr val="BC8E41"/>
+            <a:srgbClr val="7A2E43"/>
           </a:solidFill>
           <a:ln>
             <a:noFill/>
@@ -6468,29 +6490,75 @@
           </a:fontRef>
         </p:style>
         <p:txBody>
-          <a:bodyPr rtlCol="0" anchor="ctr"/>
+          <a:bodyPr rtlCol="0" anchor="ctr" wrap="none" lIns="50800" rIns="50800"/>
           <a:lstStyle/>
           <a:p>
             <a:pPr algn="ctr"/>
-          </a:p>
-        </p:txBody>
-      </p:sp>
-      <p:sp>
-        <p:nvSpPr>
-          <p:cNvPr id="3" name="Oval 2"/>
+            <a:r>
+              <a:rPr sz="1100" b="1">
+                <a:solidFill>
+                  <a:srgbClr val="FFFFFF"/>
+                </a:solidFill>
+                <a:latin typeface="Calibri"/>
+              </a:rPr>
+              <a:t>DESIGN &amp; INDUSTRY CONNECTIONS</a:t>
+            </a:r>
+          </a:p>
+        </p:txBody>
+      </p:sp>
+      <p:sp>
+        <p:nvSpPr>
+          <p:cNvPr id="3" name="TextBox 2"/>
+          <p:cNvSpPr txBox="1"/>
+          <p:nvPr/>
+        </p:nvSpPr>
+        <p:spPr>
+          <a:xfrm>
+            <a:off x="685800" y="1051560"/>
+            <a:ext cx="10607040" cy="822960"/>
+          </a:xfrm>
+          <a:prstGeom prst="rect">
+            <a:avLst/>
+          </a:prstGeom>
+          <a:noFill/>
+        </p:spPr>
+        <p:txBody>
+          <a:bodyPr wrap="square" anchor="t">
+            <a:spAutoFit/>
+          </a:bodyPr>
+          <a:lstStyle/>
+          <a:p>
+            <a:pPr algn="l"/>
+            <a:r>
+              <a:rPr sz="2700" b="1" i="0">
+                <a:solidFill>
+                  <a:srgbClr val="2A1A1F"/>
+                </a:solidFill>
+                <a:latin typeface="Cambria"/>
+              </a:rPr>
+              <a:t>Answering Industry Connection Questions</a:t>
+            </a:r>
+          </a:p>
+        </p:txBody>
+      </p:sp>
+      <p:sp>
+        <p:nvSpPr>
+          <p:cNvPr id="4" name="Rounded Rectangle 3"/>
           <p:cNvSpPr/>
           <p:nvPr/>
         </p:nvSpPr>
         <p:spPr>
           <a:xfrm>
-            <a:off x="-914400" y="4937760"/>
-            <a:ext cx="2377440" cy="2377440"/>
-          </a:xfrm>
-          <a:prstGeom prst="ellipse">
-            <a:avLst/>
+            <a:off x="685800" y="1874519"/>
+            <a:ext cx="5166360" cy="4526280"/>
+          </a:xfrm>
+          <a:prstGeom prst="roundRect">
+            <a:avLst>
+              <a:gd name="adj" fmla="val 6000"/>
+            </a:avLst>
           </a:prstGeom>
           <a:solidFill>
-            <a:srgbClr val="BC8E41"/>
+            <a:srgbClr val="EFE5E8"/>
           </a:solidFill>
           <a:ln>
             <a:noFill/>
@@ -6512,31 +6580,116 @@
           </a:fontRef>
         </p:style>
         <p:txBody>
-          <a:bodyPr rtlCol="0" anchor="ctr"/>
-          <a:lstStyle/>
-          <a:p>
-            <a:pPr algn="ctr"/>
-          </a:p>
-        </p:txBody>
-      </p:sp>
-      <p:sp>
-        <p:nvSpPr>
-          <p:cNvPr id="4" name="Rounded Rectangle 3"/>
+          <a:bodyPr rtlCol="0" anchor="ctr" lIns="279400" rIns="279400" tIns="228600" bIns="228600" wrap="square"/>
+          <a:lstStyle/>
+          <a:p>
+            <a:pPr algn="ctr" indent="-203200" marL="203200">
+              <a:spcAft>
+                <a:spcPts val="900"/>
+              </a:spcAft>
+              <a:buClr>
+                <a:srgbClr val="7A2E43"/>
+              </a:buClr>
+              <a:buSzPct val="90000"/>
+              <a:buFont typeface="Arial"/>
+              <a:buChar char="–"/>
+            </a:pPr>
+            <a:r>
+              <a:rPr sz="1250" b="0" i="0">
+                <a:solidFill>
+                  <a:srgbClr val="2A1A1F"/>
+                </a:solidFill>
+                <a:latin typeface="Calibri"/>
+              </a:rPr>
+              <a:t>Connection → Roles → Factor</a:t>
+            </a:r>
+          </a:p>
+          <a:p>
+            <a:pPr indent="-203200" marL="203200">
+              <a:spcAft>
+                <a:spcPts val="900"/>
+              </a:spcAft>
+              <a:buClr>
+                <a:srgbClr val="7A2E43"/>
+              </a:buClr>
+              <a:buSzPct val="90000"/>
+              <a:buFont typeface="Arial"/>
+              <a:buChar char="–"/>
+            </a:pPr>
+            <a:r>
+              <a:rPr sz="1250" b="0" i="0">
+                <a:solidFill>
+                  <a:srgbClr val="2A1A1F"/>
+                </a:solidFill>
+                <a:latin typeface="Calibri"/>
+              </a:rPr>
+              <a:t>1. Identify which design fields/roles are connected</a:t>
+            </a:r>
+          </a:p>
+          <a:p>
+            <a:pPr indent="-203200" marL="203200">
+              <a:spcAft>
+                <a:spcPts val="900"/>
+              </a:spcAft>
+              <a:buClr>
+                <a:srgbClr val="7A2E43"/>
+              </a:buClr>
+              <a:buSzPct val="90000"/>
+              <a:buFont typeface="Arial"/>
+              <a:buChar char="–"/>
+            </a:pPr>
+            <a:r>
+              <a:rPr sz="1250" b="0" i="0">
+                <a:solidFill>
+                  <a:srgbClr val="2A1A1F"/>
+                </a:solidFill>
+                <a:latin typeface="Calibri"/>
+              </a:rPr>
+              <a:t>2. Explain how they collaborate</a:t>
+            </a:r>
+          </a:p>
+          <a:p>
+            <a:pPr indent="-203200" marL="203200">
+              <a:spcAft>
+                <a:spcPts val="900"/>
+              </a:spcAft>
+              <a:buClr>
+                <a:srgbClr val="7A2E43"/>
+              </a:buClr>
+              <a:buSzPct val="90000"/>
+              <a:buFont typeface="Arial"/>
+              <a:buChar char="–"/>
+            </a:pPr>
+            <a:r>
+              <a:rPr sz="1250" b="0" i="0">
+                <a:solidFill>
+                  <a:srgbClr val="2A1A1F"/>
+                </a:solidFill>
+                <a:latin typeface="Calibri"/>
+              </a:rPr>
+              <a:t>3. Link to a factor (sustainability, technology, ethics, IP)</a:t>
+            </a:r>
+          </a:p>
+        </p:txBody>
+      </p:sp>
+      <p:sp>
+        <p:nvSpPr>
+          <p:cNvPr id="5" name="Rounded Rectangle 4"/>
           <p:cNvSpPr/>
           <p:nvPr/>
         </p:nvSpPr>
         <p:spPr>
           <a:xfrm>
-            <a:off x="822960" y="1051560"/>
-            <a:ext cx="1188720" cy="502920"/>
+            <a:off x="6080760" y="1874519"/>
+            <a:ext cx="5166360" cy="4526280"/>
           </a:xfrm>
           <a:prstGeom prst="roundRect">
             <a:avLst>
-              <a:gd name="adj" fmla="val 50000"/>
+              <a:gd name="adj" fmla="val 6000"/>
             </a:avLst>
           </a:prstGeom>
           <a:solidFill>
-            <a:srgbClr val="FFFFFF"/>
+            <a:srgbClr val="F4DEE3"/>
           </a:solidFill>
           <a:ln>
             <a:noFill/>
@@ -6558,40 +6711,131 @@
           </a:fontRef>
         </p:style>
         <p:txBody>
-          <a:bodyPr rtlCol="0" anchor="ctr" wrap="none" lIns="50800" rIns="50800"/>
-          <a:lstStyle/>
-          <a:p>
-            <a:pPr algn="ctr"/>
-            <a:r>
-              <a:rPr sz="1400" b="1">
-                <a:solidFill>
-                  <a:srgbClr val="AB813B"/>
-                </a:solidFill>
-                <a:latin typeface="Calibri"/>
-              </a:rPr>
-              <a:t>03</a:t>
-            </a:r>
-          </a:p>
-        </p:txBody>
-      </p:sp>
-      <p:sp>
-        <p:nvSpPr>
-          <p:cNvPr id="5" name="Rounded Rectangle 4"/>
+          <a:bodyPr rtlCol="0" anchor="ctr" lIns="279400" rIns="279400" tIns="228600" bIns="228600" wrap="square"/>
+          <a:lstStyle/>
+          <a:p>
+            <a:pPr algn="ctr">
+              <a:spcAft>
+                <a:spcPts val="900"/>
+              </a:spcAft>
+              <a:buNone/>
+            </a:pPr>
+            <a:r>
+              <a:rPr sz="1250" b="0" i="1">
+                <a:solidFill>
+                  <a:srgbClr val="2A1A1F"/>
+                </a:solidFill>
+                <a:latin typeface="Calibri"/>
+              </a:rPr>
+              <a:t>Sentence Starters</a:t>
+            </a:r>
+          </a:p>
+          <a:p>
+            <a:pPr indent="-203200" marL="203200">
+              <a:spcAft>
+                <a:spcPts val="900"/>
+              </a:spcAft>
+              <a:buClr>
+                <a:srgbClr val="D98C9E"/>
+              </a:buClr>
+              <a:buSzPct val="90000"/>
+              <a:buFont typeface="Arial"/>
+              <a:buChar char="–"/>
+            </a:pPr>
+            <a:r>
+              <a:rPr sz="1250" b="0" i="0">
+                <a:solidFill>
+                  <a:srgbClr val="2A1A1F"/>
+                </a:solidFill>
+                <a:latin typeface="Calibri"/>
+              </a:rPr>
+              <a:t>"This project connects [field A] and [field B] because..."</a:t>
+            </a:r>
+          </a:p>
+          <a:p>
+            <a:pPr indent="-203200" marL="203200">
+              <a:spcAft>
+                <a:spcPts val="900"/>
+              </a:spcAft>
+              <a:buClr>
+                <a:srgbClr val="D98C9E"/>
+              </a:buClr>
+              <a:buSzPct val="90000"/>
+              <a:buFont typeface="Arial"/>
+              <a:buChar char="–"/>
+            </a:pPr>
+            <a:r>
+              <a:rPr sz="1250" b="0" i="0">
+                <a:solidFill>
+                  <a:srgbClr val="2A1A1F"/>
+                </a:solidFill>
+                <a:latin typeface="Calibri"/>
+              </a:rPr>
+              <a:t>"The designer collaborated with [role] to..."</a:t>
+            </a:r>
+          </a:p>
+          <a:p>
+            <a:pPr indent="-203200" marL="203200">
+              <a:spcAft>
+                <a:spcPts val="900"/>
+              </a:spcAft>
+              <a:buClr>
+                <a:srgbClr val="D98C9E"/>
+              </a:buClr>
+              <a:buSzPct val="90000"/>
+              <a:buFont typeface="Arial"/>
+              <a:buChar char="–"/>
+            </a:pPr>
+            <a:r>
+              <a:rPr sz="1250" b="0" i="0">
+                <a:solidFill>
+                  <a:srgbClr val="2A1A1F"/>
+                </a:solidFill>
+                <a:latin typeface="Calibri"/>
+              </a:rPr>
+              <a:t>"This decision reflects growing industry concern for [factor]..."</a:t>
+            </a:r>
+          </a:p>
+          <a:p>
+            <a:pPr indent="-203200" marL="203200">
+              <a:spcAft>
+                <a:spcPts val="900"/>
+              </a:spcAft>
+              <a:buClr>
+                <a:srgbClr val="D98C9E"/>
+              </a:buClr>
+              <a:buSzPct val="90000"/>
+              <a:buFont typeface="Arial"/>
+              <a:buChar char="–"/>
+            </a:pPr>
+            <a:r>
+              <a:rPr sz="1250" b="0" i="0">
+                <a:solidFill>
+                  <a:srgbClr val="2A1A1F"/>
+                </a:solidFill>
+                <a:latin typeface="Calibri"/>
+              </a:rPr>
+              <a:t>"Without protection of [IP type], this design could be..."</a:t>
+            </a:r>
+          </a:p>
+        </p:txBody>
+      </p:sp>
+      <p:sp>
+        <p:nvSpPr>
+          <p:cNvPr id="6" name="Oval 5"/>
           <p:cNvSpPr/>
           <p:nvPr/>
         </p:nvSpPr>
         <p:spPr>
           <a:xfrm>
-            <a:off x="822960" y="2011680"/>
-            <a:ext cx="10515600" cy="2834640"/>
-          </a:xfrm>
-          <a:prstGeom prst="roundRect">
-            <a:avLst>
-              <a:gd name="adj" fmla="val 18000"/>
-            </a:avLst>
+            <a:off x="5532120" y="3840480"/>
+            <a:ext cx="685800" cy="685800"/>
+          </a:xfrm>
+          <a:prstGeom prst="ellipse">
+            <a:avLst/>
           </a:prstGeom>
           <a:solidFill>
-            <a:srgbClr val="FFFFFF"/>
+            <a:srgbClr val="D6A24A"/>
           </a:solidFill>
           <a:ln>
             <a:noFill/>
@@ -6617,76 +6861,6 @@
           <a:lstStyle/>
           <a:p>
             <a:pPr algn="ctr"/>
-          </a:p>
-        </p:txBody>
-      </p:sp>
-      <p:sp>
-        <p:nvSpPr>
-          <p:cNvPr id="6" name="TextBox 5"/>
-          <p:cNvSpPr txBox="1"/>
-          <p:nvPr/>
-        </p:nvSpPr>
-        <p:spPr>
-          <a:xfrm>
-            <a:off x="1280160" y="2697480"/>
-            <a:ext cx="9601200" cy="1097280"/>
-          </a:xfrm>
-          <a:prstGeom prst="rect">
-            <a:avLst/>
-          </a:prstGeom>
-          <a:noFill/>
-        </p:spPr>
-        <p:txBody>
-          <a:bodyPr wrap="square" anchor="t">
-            <a:spAutoFit/>
-          </a:bodyPr>
-          <a:lstStyle/>
-          <a:p>
-            <a:pPr algn="l"/>
-            <a:r>
-              <a:rPr sz="3400" b="1" i="0">
-                <a:solidFill>
-                  <a:srgbClr val="B5893E"/>
-                </a:solidFill>
-                <a:latin typeface="Cambria"/>
-              </a:rPr>
-              <a:t>Extended Knowledge</a:t>
-            </a:r>
-          </a:p>
-        </p:txBody>
-      </p:sp>
-      <p:sp>
-        <p:nvSpPr>
-          <p:cNvPr id="7" name="TextBox 6"/>
-          <p:cNvSpPr txBox="1"/>
-          <p:nvPr/>
-        </p:nvSpPr>
-        <p:spPr>
-          <a:xfrm>
-            <a:off x="1280160" y="3657600"/>
-            <a:ext cx="9601200" cy="548640"/>
-          </a:xfrm>
-          <a:prstGeom prst="rect">
-            <a:avLst/>
-          </a:prstGeom>
-          <a:noFill/>
-        </p:spPr>
-        <p:txBody>
-          <a:bodyPr wrap="square" anchor="t">
-            <a:spAutoFit/>
-          </a:bodyPr>
-          <a:lstStyle/>
-          <a:p>
-            <a:pPr algn="l"/>
-            <a:r>
-              <a:rPr sz="1500" b="0" i="0">
-                <a:solidFill>
-                  <a:srgbClr val="6B6B6B"/>
-                </a:solidFill>
-                <a:latin typeface="Calibri"/>
-              </a:rPr>
-              <a:t>Beyond the study design</a:t>
-            </a:r>
           </a:p>
         </p:txBody>
       </p:sp>
@@ -6766,7 +6940,7 @@
                 </a:solidFill>
                 <a:latin typeface="Calibri"/>
               </a:rPr>
-              <a:t>EXTENDED KNOWLEDGE</a:t>
+              <a:t>DESIGN &amp; INDUSTRY CONNECTIONS</a:t>
             </a:r>
           </a:p>
         </p:txBody>
@@ -6801,7 +6975,7 @@
                 </a:solidFill>
                 <a:latin typeface="Cambria"/>
               </a:rPr>
-              <a:t>More Design Movements and Trends in History</a:t>
+              <a:t>Design &amp; Industry — Quick Reference</a:t>
             </a:r>
           </a:p>
         </p:txBody>
@@ -6815,15 +6989,15 @@
         <p:spPr>
           <a:xfrm>
             <a:off x="685800" y="1874519"/>
-            <a:ext cx="10607040" cy="4526280"/>
+            <a:ext cx="2500884" cy="1554480"/>
           </a:xfrm>
           <a:prstGeom prst="roundRect">
             <a:avLst>
-              <a:gd name="adj" fmla="val 6000"/>
+              <a:gd name="adj" fmla="val 12000"/>
             </a:avLst>
           </a:prstGeom>
           <a:solidFill>
-            <a:srgbClr val="F1EAEC"/>
+            <a:srgbClr val="EBDFE2"/>
           </a:solidFill>
           <a:ln>
             <a:noFill/>
@@ -6845,7 +7019,271 @@
           </a:fontRef>
         </p:style>
         <p:txBody>
-          <a:bodyPr rtlCol="0" anchor="ctr" lIns="330200" rIns="330200" tIns="254000" bIns="254000" wrap="square"/>
+          <a:bodyPr rtlCol="0" anchor="ctr" wrap="square" lIns="127000" rIns="127000" tIns="101600" bIns="101600"/>
+          <a:lstStyle/>
+          <a:p>
+            <a:pPr algn="ctr"/>
+            <a:r>
+              <a:rPr b="1" sz="1300">
+                <a:solidFill>
+                  <a:srgbClr val="612435"/>
+                </a:solidFill>
+                <a:latin typeface="Calibri"/>
+              </a:rPr>
+              <a:t>Overlap</a:t>
+            </a:r>
+          </a:p>
+          <a:p>
+            <a:r>
+              <a:rPr sz="1050">
+                <a:solidFill>
+                  <a:srgbClr val="2A1A1F"/>
+                </a:solidFill>
+                <a:latin typeface="Calibri"/>
+              </a:rPr>
+              <a:t>Design fields rarely work alone on real projects.</a:t>
+            </a:r>
+          </a:p>
+        </p:txBody>
+      </p:sp>
+      <p:sp>
+        <p:nvSpPr>
+          <p:cNvPr id="5" name="Rounded Rectangle 4"/>
+          <p:cNvSpPr/>
+          <p:nvPr/>
+        </p:nvSpPr>
+        <p:spPr>
+          <a:xfrm>
+            <a:off x="3387852" y="1874519"/>
+            <a:ext cx="2500884" cy="1554480"/>
+          </a:xfrm>
+          <a:prstGeom prst="roundRect">
+            <a:avLst>
+              <a:gd name="adj" fmla="val 12000"/>
+            </a:avLst>
+          </a:prstGeom>
+          <a:solidFill>
+            <a:srgbClr val="F8F1E3"/>
+          </a:solidFill>
+          <a:ln>
+            <a:noFill/>
+          </a:ln>
+          <a:effectLst/>
+        </p:spPr>
+        <p:style>
+          <a:lnRef idx="1">
+            <a:schemeClr val="accent1"/>
+          </a:lnRef>
+          <a:fillRef idx="3">
+            <a:schemeClr val="accent1"/>
+          </a:fillRef>
+          <a:effectRef idx="2">
+            <a:schemeClr val="accent1"/>
+          </a:effectRef>
+          <a:fontRef idx="minor">
+            <a:schemeClr val="lt1"/>
+          </a:fontRef>
+        </p:style>
+        <p:txBody>
+          <a:bodyPr rtlCol="0" anchor="ctr" wrap="square" lIns="127000" rIns="127000" tIns="101600" bIns="101600"/>
+          <a:lstStyle/>
+          <a:p>
+            <a:pPr algn="ctr"/>
+            <a:r>
+              <a:rPr b="1" sz="1300">
+                <a:solidFill>
+                  <a:srgbClr val="AB813B"/>
+                </a:solidFill>
+                <a:latin typeface="Calibri"/>
+              </a:rPr>
+              <a:t>Collaboration</a:t>
+            </a:r>
+          </a:p>
+          <a:p>
+            <a:r>
+              <a:rPr sz="1050">
+                <a:solidFill>
+                  <a:srgbClr val="2A1A1F"/>
+                </a:solidFill>
+                <a:latin typeface="Calibri"/>
+              </a:rPr>
+              <a:t>Clients, manufacturers, other designers, developers.</a:t>
+            </a:r>
+          </a:p>
+        </p:txBody>
+      </p:sp>
+      <p:sp>
+        <p:nvSpPr>
+          <p:cNvPr id="6" name="Rounded Rectangle 5"/>
+          <p:cNvSpPr/>
+          <p:nvPr/>
+        </p:nvSpPr>
+        <p:spPr>
+          <a:xfrm>
+            <a:off x="6089904" y="1874519"/>
+            <a:ext cx="2500884" cy="1554480"/>
+          </a:xfrm>
+          <a:prstGeom prst="roundRect">
+            <a:avLst>
+              <a:gd name="adj" fmla="val 12000"/>
+            </a:avLst>
+          </a:prstGeom>
+          <a:solidFill>
+            <a:srgbClr val="F9EDF0"/>
+          </a:solidFill>
+          <a:ln>
+            <a:noFill/>
+          </a:ln>
+          <a:effectLst/>
+        </p:spPr>
+        <p:style>
+          <a:lnRef idx="1">
+            <a:schemeClr val="accent1"/>
+          </a:lnRef>
+          <a:fillRef idx="3">
+            <a:schemeClr val="accent1"/>
+          </a:fillRef>
+          <a:effectRef idx="2">
+            <a:schemeClr val="accent1"/>
+          </a:effectRef>
+          <a:fontRef idx="minor">
+            <a:schemeClr val="lt1"/>
+          </a:fontRef>
+        </p:style>
+        <p:txBody>
+          <a:bodyPr rtlCol="0" anchor="ctr" wrap="square" lIns="127000" rIns="127000" tIns="101600" bIns="101600"/>
+          <a:lstStyle/>
+          <a:p>
+            <a:pPr algn="ctr"/>
+            <a:r>
+              <a:rPr b="1" sz="1300">
+                <a:solidFill>
+                  <a:srgbClr val="AD707E"/>
+                </a:solidFill>
+                <a:latin typeface="Calibri"/>
+              </a:rPr>
+              <a:t>Industry Factors</a:t>
+            </a:r>
+          </a:p>
+          <a:p>
+            <a:r>
+              <a:rPr sz="1050">
+                <a:solidFill>
+                  <a:srgbClr val="2A1A1F"/>
+                </a:solidFill>
+                <a:latin typeface="Calibri"/>
+              </a:rPr>
+              <a:t>Sustainability, technology, ethics, IP.</a:t>
+            </a:r>
+          </a:p>
+        </p:txBody>
+      </p:sp>
+      <p:sp>
+        <p:nvSpPr>
+          <p:cNvPr id="7" name="Rounded Rectangle 6"/>
+          <p:cNvSpPr/>
+          <p:nvPr/>
+        </p:nvSpPr>
+        <p:spPr>
+          <a:xfrm>
+            <a:off x="8791956" y="1874519"/>
+            <a:ext cx="2500884" cy="1554480"/>
+          </a:xfrm>
+          <a:prstGeom prst="roundRect">
+            <a:avLst>
+              <a:gd name="adj" fmla="val 12000"/>
+            </a:avLst>
+          </a:prstGeom>
+          <a:solidFill>
+            <a:srgbClr val="EBDFE2"/>
+          </a:solidFill>
+          <a:ln>
+            <a:noFill/>
+          </a:ln>
+          <a:effectLst/>
+        </p:spPr>
+        <p:style>
+          <a:lnRef idx="1">
+            <a:schemeClr val="accent1"/>
+          </a:lnRef>
+          <a:fillRef idx="3">
+            <a:schemeClr val="accent1"/>
+          </a:fillRef>
+          <a:effectRef idx="2">
+            <a:schemeClr val="accent1"/>
+          </a:effectRef>
+          <a:fontRef idx="minor">
+            <a:schemeClr val="lt1"/>
+          </a:fontRef>
+        </p:style>
+        <p:txBody>
+          <a:bodyPr rtlCol="0" anchor="ctr" wrap="square" lIns="127000" rIns="127000" tIns="101600" bIns="101600"/>
+          <a:lstStyle/>
+          <a:p>
+            <a:pPr algn="ctr"/>
+            <a:r>
+              <a:rPr b="1" sz="1300">
+                <a:solidFill>
+                  <a:srgbClr val="612435"/>
+                </a:solidFill>
+                <a:latin typeface="Calibri"/>
+              </a:rPr>
+              <a:t>IP Types</a:t>
+            </a:r>
+          </a:p>
+          <a:p>
+            <a:r>
+              <a:rPr sz="1050">
+                <a:solidFill>
+                  <a:srgbClr val="2A1A1F"/>
+                </a:solidFill>
+                <a:latin typeface="Calibri"/>
+              </a:rPr>
+              <a:t>Copyright, trademark, design registration, patent.</a:t>
+            </a:r>
+          </a:p>
+        </p:txBody>
+      </p:sp>
+      <p:sp>
+        <p:nvSpPr>
+          <p:cNvPr id="8" name="Rounded Rectangle 7"/>
+          <p:cNvSpPr/>
+          <p:nvPr/>
+        </p:nvSpPr>
+        <p:spPr>
+          <a:xfrm>
+            <a:off x="685800" y="3675887"/>
+            <a:ext cx="10607040" cy="2862073"/>
+          </a:xfrm>
+          <a:prstGeom prst="roundRect">
+            <a:avLst>
+              <a:gd name="adj" fmla="val 10000"/>
+            </a:avLst>
+          </a:prstGeom>
+          <a:solidFill>
+            <a:srgbClr val="F8F1E3"/>
+          </a:solidFill>
+          <a:ln>
+            <a:noFill/>
+          </a:ln>
+          <a:effectLst/>
+        </p:spPr>
+        <p:style>
+          <a:lnRef idx="1">
+            <a:schemeClr val="accent1"/>
+          </a:lnRef>
+          <a:fillRef idx="3">
+            <a:schemeClr val="accent1"/>
+          </a:fillRef>
+          <a:effectRef idx="2">
+            <a:schemeClr val="accent1"/>
+          </a:effectRef>
+          <a:fontRef idx="minor">
+            <a:schemeClr val="lt1"/>
+          </a:fontRef>
+        </p:style>
+        <p:txBody>
+          <a:bodyPr rtlCol="0" anchor="ctr" lIns="203200" rIns="203200" tIns="101600" bIns="101600" wrap="square"/>
           <a:lstStyle/>
           <a:p>
             <a:pPr algn="ctr" indent="-203200" marL="203200">
@@ -6853,263 +7291,39 @@
                 <a:spcPts val="900"/>
               </a:spcAft>
               <a:buClr>
-                <a:srgbClr val="7A2E43"/>
+                <a:srgbClr val="D6A24A"/>
               </a:buClr>
               <a:buSzPct val="90000"/>
               <a:buFont typeface="Arial"/>
               <a:buChar char="●"/>
             </a:pPr>
             <a:r>
-              <a:rPr sz="1500" b="1" i="0">
-                <a:solidFill>
-                  <a:srgbClr val="672738"/>
-                </a:solidFill>
-                <a:latin typeface="Calibri"/>
-              </a:rPr>
-              <a:t>Movements not covered in Unit 1</a:t>
-            </a:r>
-          </a:p>
-          <a:p>
-            <a:pPr indent="-203200" marL="203200">
-              <a:spcAft>
-                <a:spcPts val="900"/>
-              </a:spcAft>
-              <a:buClr>
-                <a:srgbClr val="7A2E43"/>
-              </a:buClr>
-              <a:buSzPct val="90000"/>
-              <a:buFont typeface="Arial"/>
-              <a:buChar char="–"/>
-            </a:pPr>
-            <a:r>
-              <a:rPr sz="1350" b="0" i="0">
-                <a:solidFill>
-                  <a:srgbClr val="2A1A1F"/>
-                </a:solidFill>
-                <a:latin typeface="Calibri"/>
-              </a:rPr>
-              <a:t>Arts and Crafts (late 1800s) — reaction against industrialisation, craftsmanship, William Morris</a:t>
-            </a:r>
-          </a:p>
-          <a:p>
-            <a:pPr indent="-203200" marL="203200">
-              <a:spcAft>
-                <a:spcPts val="900"/>
-              </a:spcAft>
-              <a:buClr>
-                <a:srgbClr val="7A2E43"/>
-              </a:buClr>
-              <a:buSzPct val="90000"/>
-              <a:buFont typeface="Arial"/>
-              <a:buChar char="–"/>
-            </a:pPr>
-            <a:r>
-              <a:rPr sz="1350" b="0" i="0">
-                <a:solidFill>
-                  <a:srgbClr val="2A1A1F"/>
-                </a:solidFill>
-                <a:latin typeface="Calibri"/>
-              </a:rPr>
-              <a:t>Art Nouveau (1890s-1910s) — organic, flowing lines inspired by nature</a:t>
-            </a:r>
-          </a:p>
-          <a:p>
-            <a:pPr indent="-203200" marL="203200">
-              <a:spcAft>
-                <a:spcPts val="900"/>
-              </a:spcAft>
-              <a:buClr>
-                <a:srgbClr val="7A2E43"/>
-              </a:buClr>
-              <a:buSzPct val="90000"/>
-              <a:buFont typeface="Arial"/>
-              <a:buChar char="–"/>
-            </a:pPr>
-            <a:r>
-              <a:rPr sz="1350" b="0" i="0">
-                <a:solidFill>
-                  <a:srgbClr val="2A1A1F"/>
-                </a:solidFill>
-                <a:latin typeface="Calibri"/>
-              </a:rPr>
-              <a:t>Constructivism (1920s Russia) — geometric abstraction in service of social/political ideas</a:t>
-            </a:r>
-          </a:p>
-          <a:p>
-            <a:pPr indent="-203200" marL="203200">
-              <a:spcAft>
-                <a:spcPts val="900"/>
-              </a:spcAft>
-              <a:buClr>
-                <a:srgbClr val="7A2E43"/>
-              </a:buClr>
-              <a:buSzPct val="90000"/>
-              <a:buFont typeface="Arial"/>
-              <a:buChar char="–"/>
-            </a:pPr>
-            <a:r>
-              <a:rPr sz="1350" b="0" i="0">
-                <a:solidFill>
-                  <a:srgbClr val="2A1A1F"/>
-                </a:solidFill>
-                <a:latin typeface="Calibri"/>
-              </a:rPr>
-              <a:t>De Stijl (1917 onward) — primary colours, grids, Piet Mondrian and Theo van Doesburg</a:t>
-            </a:r>
-          </a:p>
-          <a:p>
-            <a:pPr indent="-203200" marL="203200">
-              <a:spcAft>
-                <a:spcPts val="900"/>
-              </a:spcAft>
-              <a:buClr>
-                <a:srgbClr val="7A2E43"/>
-              </a:buClr>
-              <a:buSzPct val="90000"/>
-              <a:buFont typeface="Arial"/>
-              <a:buChar char="–"/>
-            </a:pPr>
-            <a:r>
-              <a:rPr sz="1350" b="0" i="0">
-                <a:solidFill>
-                  <a:srgbClr val="2A1A1F"/>
-                </a:solidFill>
-                <a:latin typeface="Calibri"/>
-              </a:rPr>
-              <a:t>Memphis Group (1980s) — bold colour, clashing patterns, postmodern furniture and product design</a:t>
-            </a:r>
-          </a:p>
-          <a:p>
-            <a:pPr indent="-203200" marL="203200">
-              <a:spcAft>
-                <a:spcPts val="900"/>
-              </a:spcAft>
-              <a:buClr>
-                <a:srgbClr val="7A2E43"/>
-              </a:buClr>
-              <a:buSzPct val="90000"/>
-              <a:buFont typeface="Arial"/>
-              <a:buChar char="–"/>
-            </a:pPr>
-            <a:r>
-              <a:rPr sz="1350" b="0" i="0">
-                <a:solidFill>
-                  <a:srgbClr val="2A1A1F"/>
-                </a:solidFill>
-                <a:latin typeface="Calibri"/>
-              </a:rPr>
-              <a:t>Minimalism — reduction to essential form, 'less is more'</a:t>
-            </a:r>
-          </a:p>
-          <a:p>
-            <a:pPr indent="-203200" marL="203200">
-              <a:spcAft>
-                <a:spcPts val="900"/>
-              </a:spcAft>
-              <a:buClr>
-                <a:srgbClr val="7A2E43"/>
-              </a:buClr>
-              <a:buSzPct val="90000"/>
-              <a:buFont typeface="Arial"/>
-              <a:buChar char="–"/>
-            </a:pPr>
-            <a:r>
-              <a:rPr sz="1350" b="0" i="0">
-                <a:solidFill>
-                  <a:srgbClr val="2A1A1F"/>
-                </a:solidFill>
-                <a:latin typeface="Calibri"/>
-              </a:rPr>
-              <a:t>Brutalism — raw, unornamented forms in both architecture and web/graphic design</a:t>
-            </a:r>
-          </a:p>
-          <a:p>
-            <a:pPr indent="-203200" marL="203200">
-              <a:spcAft>
-                <a:spcPts val="900"/>
-              </a:spcAft>
-              <a:buClr>
-                <a:srgbClr val="7A2E43"/>
-              </a:buClr>
-              <a:buSzPct val="90000"/>
-              <a:buFont typeface="Arial"/>
-              <a:buChar char="●"/>
-            </a:pPr>
-            <a:r>
-              <a:rPr sz="1500" b="1" i="0">
-                <a:solidFill>
-                  <a:srgbClr val="672738"/>
-                </a:solidFill>
-                <a:latin typeface="Calibri"/>
-              </a:rPr>
-              <a:t>Contemporary considerations</a:t>
-            </a:r>
-          </a:p>
-          <a:p>
-            <a:pPr indent="-203200" marL="203200">
-              <a:spcAft>
-                <a:spcPts val="900"/>
-              </a:spcAft>
-              <a:buClr>
-                <a:srgbClr val="7A2E43"/>
-              </a:buClr>
-              <a:buSzPct val="90000"/>
-              <a:buFont typeface="Arial"/>
-              <a:buChar char="–"/>
-            </a:pPr>
-            <a:r>
-              <a:rPr sz="1350" b="0" i="0">
-                <a:solidFill>
-                  <a:srgbClr val="2A1A1F"/>
-                </a:solidFill>
-                <a:latin typeface="Calibri"/>
-              </a:rPr>
-              <a:t>Y2K aesthetic revival, AI-generated imagery and the ethical questions it raises around authorship and originality, and the growing influence of motion/interactive design as screens become the primary medium for communication design.</a:t>
-            </a:r>
-          </a:p>
-        </p:txBody>
-      </p:sp>
-      <p:sp>
-        <p:nvSpPr>
-          <p:cNvPr id="5" name="Oval 4"/>
-          <p:cNvSpPr/>
-          <p:nvPr/>
-        </p:nvSpPr>
-        <p:spPr>
-          <a:xfrm>
-            <a:off x="10881360" y="5943600"/>
-            <a:ext cx="1005840" cy="1005840"/>
-          </a:xfrm>
-          <a:prstGeom prst="ellipse">
-            <a:avLst/>
-          </a:prstGeom>
-          <a:solidFill>
-            <a:srgbClr val="EDCBD3"/>
-          </a:solidFill>
-          <a:ln>
-            <a:noFill/>
-          </a:ln>
-          <a:effectLst/>
-        </p:spPr>
-        <p:style>
-          <a:lnRef idx="1">
-            <a:schemeClr val="accent1"/>
-          </a:lnRef>
-          <a:fillRef idx="3">
-            <a:schemeClr val="accent1"/>
-          </a:fillRef>
-          <a:effectRef idx="2">
-            <a:schemeClr val="accent1"/>
-          </a:effectRef>
-          <a:fontRef idx="minor">
-            <a:schemeClr val="lt1"/>
-          </a:fontRef>
-        </p:style>
-        <p:txBody>
-          <a:bodyPr rtlCol="0" anchor="ctr"/>
-          <a:lstStyle/>
-          <a:p>
-            <a:pPr algn="ctr"/>
+              <a:rPr sz="1200" b="0" i="0">
+                <a:solidFill>
+                  <a:srgbClr val="2A1A1F"/>
+                </a:solidFill>
+                <a:latin typeface="Calibri"/>
+              </a:rPr>
+              <a:t> Reminder: always name the </a:t>
+            </a:r>
+            <a:r>
+              <a:rPr sz="1200" b="1" i="0">
+                <a:solidFill>
+                  <a:srgbClr val="B5893E"/>
+                </a:solidFill>
+                <a:latin typeface="Calibri"/>
+              </a:rPr>
+              <a:t>specific roles or IP type</a:t>
+            </a:r>
+            <a:r>
+              <a:rPr sz="1200" b="0" i="0">
+                <a:solidFill>
+                  <a:srgbClr val="2A1A1F"/>
+                </a:solidFill>
+                <a:latin typeface="Calibri"/>
+              </a:rPr>
+              <a:t> involved — general statements about "teamwork" earn few marks. </a:t>
+            </a:r>
           </a:p>
         </p:txBody>
       </p:sp>
@@ -7127,7 +7341,7 @@
     <p:bg>
       <p:bgPr>
         <a:solidFill>
-          <a:srgbClr val="FBF5F1"/>
+          <a:srgbClr val="D98C9E"/>
         </a:solidFill>
         <a:effectLst/>
       </p:bgPr>
@@ -7141,22 +7355,20 @@
       <p:grpSpPr/>
       <p:sp>
         <p:nvSpPr>
-          <p:cNvPr id="2" name="Rounded Rectangle 1"/>
+          <p:cNvPr id="2" name="Oval 1"/>
           <p:cNvSpPr/>
           <p:nvPr/>
         </p:nvSpPr>
         <p:spPr>
           <a:xfrm>
-            <a:off x="685800" y="502920"/>
-            <a:ext cx="3291840" cy="457200"/>
-          </a:xfrm>
-          <a:prstGeom prst="roundRect">
-            <a:avLst>
-              <a:gd name="adj" fmla="val 50000"/>
-            </a:avLst>
+            <a:off x="-914400" y="-914400"/>
+            <a:ext cx="2103120" cy="2103120"/>
+          </a:xfrm>
+          <a:prstGeom prst="ellipse">
+            <a:avLst/>
           </a:prstGeom>
           <a:solidFill>
-            <a:srgbClr val="7A2E43"/>
+            <a:srgbClr val="BE7B8B"/>
           </a:solidFill>
           <a:ln>
             <a:noFill/>
@@ -7178,75 +7390,29 @@
           </a:fontRef>
         </p:style>
         <p:txBody>
-          <a:bodyPr rtlCol="0" anchor="ctr" wrap="none" lIns="50800" rIns="50800"/>
+          <a:bodyPr rtlCol="0" anchor="ctr"/>
           <a:lstStyle/>
           <a:p>
             <a:pPr algn="ctr"/>
-            <a:r>
-              <a:rPr sz="1100" b="1">
-                <a:solidFill>
-                  <a:srgbClr val="FFFFFF"/>
-                </a:solidFill>
-                <a:latin typeface="Calibri"/>
-              </a:rPr>
-              <a:t>EXTENDED KNOWLEDGE</a:t>
-            </a:r>
-          </a:p>
-        </p:txBody>
-      </p:sp>
-      <p:sp>
-        <p:nvSpPr>
-          <p:cNvPr id="3" name="TextBox 2"/>
-          <p:cNvSpPr txBox="1"/>
-          <p:nvPr/>
-        </p:nvSpPr>
-        <p:spPr>
-          <a:xfrm>
-            <a:off x="685800" y="1051560"/>
-            <a:ext cx="10607040" cy="822960"/>
-          </a:xfrm>
-          <a:prstGeom prst="rect">
+          </a:p>
+        </p:txBody>
+      </p:sp>
+      <p:sp>
+        <p:nvSpPr>
+          <p:cNvPr id="3" name="Oval 2"/>
+          <p:cNvSpPr/>
+          <p:nvPr/>
+        </p:nvSpPr>
+        <p:spPr>
+          <a:xfrm>
+            <a:off x="11064240" y="5852160"/>
+            <a:ext cx="1737360" cy="1737360"/>
+          </a:xfrm>
+          <a:prstGeom prst="ellipse">
             <a:avLst/>
           </a:prstGeom>
-          <a:noFill/>
-        </p:spPr>
-        <p:txBody>
-          <a:bodyPr wrap="square" anchor="t">
-            <a:spAutoFit/>
-          </a:bodyPr>
-          <a:lstStyle/>
-          <a:p>
-            <a:pPr algn="l"/>
-            <a:r>
-              <a:rPr sz="2700" b="1" i="0">
-                <a:solidFill>
-                  <a:srgbClr val="2A1A1F"/>
-                </a:solidFill>
-                <a:latin typeface="Cambria"/>
-              </a:rPr>
-              <a:t>Sustainable and Circular Design</a:t>
-            </a:r>
-          </a:p>
-        </p:txBody>
-      </p:sp>
-      <p:sp>
-        <p:nvSpPr>
-          <p:cNvPr id="4" name="Rounded Rectangle 3"/>
-          <p:cNvSpPr/>
-          <p:nvPr/>
-        </p:nvSpPr>
-        <p:spPr>
-          <a:xfrm>
-            <a:off x="685800" y="1874519"/>
-            <a:ext cx="10607040" cy="4526280"/>
-          </a:xfrm>
-          <a:prstGeom prst="roundRect">
-            <a:avLst>
-              <a:gd name="adj" fmla="val 6000"/>
-            </a:avLst>
-          </a:prstGeom>
           <a:solidFill>
-            <a:srgbClr val="F1EAEC"/>
+            <a:srgbClr val="BE7B8B"/>
           </a:solidFill>
           <a:ln>
             <a:noFill/>
@@ -7268,7 +7434,253 @@
           </a:fontRef>
         </p:style>
         <p:txBody>
-          <a:bodyPr rtlCol="0" anchor="ctr" lIns="330200" rIns="330200" tIns="254000" bIns="254000" wrap="square"/>
+          <a:bodyPr rtlCol="0" anchor="ctr"/>
+          <a:lstStyle/>
+          <a:p>
+            <a:pPr algn="ctr"/>
+          </a:p>
+        </p:txBody>
+      </p:sp>
+      <p:sp>
+        <p:nvSpPr>
+          <p:cNvPr id="4" name="Rounded Rectangle 3"/>
+          <p:cNvSpPr/>
+          <p:nvPr/>
+        </p:nvSpPr>
+        <p:spPr>
+          <a:xfrm>
+            <a:off x="685800" y="457200"/>
+            <a:ext cx="1033271" cy="502920"/>
+          </a:xfrm>
+          <a:prstGeom prst="roundRect">
+            <a:avLst>
+              <a:gd name="adj" fmla="val 50000"/>
+            </a:avLst>
+          </a:prstGeom>
+          <a:solidFill>
+            <a:srgbClr val="FFFFFF"/>
+          </a:solidFill>
+          <a:ln>
+            <a:noFill/>
+          </a:ln>
+          <a:effectLst/>
+        </p:spPr>
+        <p:style>
+          <a:lnRef idx="1">
+            <a:schemeClr val="accent1"/>
+          </a:lnRef>
+          <a:fillRef idx="3">
+            <a:schemeClr val="accent1"/>
+          </a:fillRef>
+          <a:effectRef idx="2">
+            <a:schemeClr val="accent1"/>
+          </a:effectRef>
+          <a:fontRef idx="minor">
+            <a:schemeClr val="lt1"/>
+          </a:fontRef>
+        </p:style>
+        <p:txBody>
+          <a:bodyPr rtlCol="0" anchor="ctr"/>
+          <a:lstStyle/>
+          <a:p>
+            <a:pPr algn="ctr"/>
+            <a:r>
+              <a:rPr b="1" sz="1400">
+                <a:solidFill>
+                  <a:srgbClr val="8D5B66"/>
+                </a:solidFill>
+                <a:latin typeface="Calibri"/>
+              </a:rPr>
+              <a:t>GAME</a:t>
+            </a:r>
+          </a:p>
+        </p:txBody>
+      </p:sp>
+      <p:sp>
+        <p:nvSpPr>
+          <p:cNvPr id="5" name="TextBox 4"/>
+          <p:cNvSpPr txBox="1"/>
+          <p:nvPr/>
+        </p:nvSpPr>
+        <p:spPr>
+          <a:xfrm>
+            <a:off x="685800" y="1143000"/>
+            <a:ext cx="10607040" cy="914400"/>
+          </a:xfrm>
+          <a:prstGeom prst="rect">
+            <a:avLst/>
+          </a:prstGeom>
+          <a:noFill/>
+        </p:spPr>
+        <p:txBody>
+          <a:bodyPr wrap="square" anchor="t">
+            <a:spAutoFit/>
+          </a:bodyPr>
+          <a:lstStyle/>
+          <a:p>
+            <a:pPr algn="l"/>
+            <a:r>
+              <a:rPr sz="3000" b="1" i="0">
+                <a:solidFill>
+                  <a:srgbClr val="FFFFFF"/>
+                </a:solidFill>
+                <a:latin typeface="Cambria"/>
+              </a:rPr>
+              <a:t>Who Does What?</a:t>
+            </a:r>
+          </a:p>
+        </p:txBody>
+      </p:sp>
+      <p:sp>
+        <p:nvSpPr>
+          <p:cNvPr id="6" name="Rounded Rectangle 5"/>
+          <p:cNvSpPr/>
+          <p:nvPr/>
+        </p:nvSpPr>
+        <p:spPr>
+          <a:xfrm>
+            <a:off x="685800" y="2148840"/>
+            <a:ext cx="960120" cy="411480"/>
+          </a:xfrm>
+          <a:prstGeom prst="roundRect">
+            <a:avLst>
+              <a:gd name="adj" fmla="val 50000"/>
+            </a:avLst>
+          </a:prstGeom>
+          <a:solidFill>
+            <a:srgbClr val="A26976"/>
+          </a:solidFill>
+          <a:ln>
+            <a:noFill/>
+          </a:ln>
+          <a:effectLst/>
+        </p:spPr>
+        <p:style>
+          <a:lnRef idx="1">
+            <a:schemeClr val="accent1"/>
+          </a:lnRef>
+          <a:fillRef idx="3">
+            <a:schemeClr val="accent1"/>
+          </a:fillRef>
+          <a:effectRef idx="2">
+            <a:schemeClr val="accent1"/>
+          </a:effectRef>
+          <a:fontRef idx="minor">
+            <a:schemeClr val="lt1"/>
+          </a:fontRef>
+        </p:style>
+        <p:txBody>
+          <a:bodyPr rtlCol="0" anchor="ctr" wrap="none" lIns="50800" rIns="50800"/>
+          <a:lstStyle/>
+          <a:p>
+            <a:pPr algn="ctr"/>
+            <a:r>
+              <a:rPr sz="1050" b="1">
+                <a:solidFill>
+                  <a:srgbClr val="FFFFFF"/>
+                </a:solidFill>
+                <a:latin typeface="Calibri"/>
+              </a:rPr>
+              <a:t>8 MIN</a:t>
+            </a:r>
+          </a:p>
+        </p:txBody>
+      </p:sp>
+      <p:sp>
+        <p:nvSpPr>
+          <p:cNvPr id="7" name="Rounded Rectangle 6"/>
+          <p:cNvSpPr/>
+          <p:nvPr/>
+        </p:nvSpPr>
+        <p:spPr>
+          <a:xfrm>
+            <a:off x="1783080" y="2148840"/>
+            <a:ext cx="1664208" cy="411480"/>
+          </a:xfrm>
+          <a:prstGeom prst="roundRect">
+            <a:avLst>
+              <a:gd name="adj" fmla="val 50000"/>
+            </a:avLst>
+          </a:prstGeom>
+          <a:solidFill>
+            <a:srgbClr val="A26976"/>
+          </a:solidFill>
+          <a:ln>
+            <a:noFill/>
+          </a:ln>
+          <a:effectLst/>
+        </p:spPr>
+        <p:style>
+          <a:lnRef idx="1">
+            <a:schemeClr val="accent1"/>
+          </a:lnRef>
+          <a:fillRef idx="3">
+            <a:schemeClr val="accent1"/>
+          </a:fillRef>
+          <a:effectRef idx="2">
+            <a:schemeClr val="accent1"/>
+          </a:effectRef>
+          <a:fontRef idx="minor">
+            <a:schemeClr val="lt1"/>
+          </a:fontRef>
+        </p:style>
+        <p:txBody>
+          <a:bodyPr rtlCol="0" anchor="ctr" wrap="none" lIns="50800" rIns="50800"/>
+          <a:lstStyle/>
+          <a:p>
+            <a:pPr algn="ctr"/>
+            <a:r>
+              <a:rPr sz="1050" b="1">
+                <a:solidFill>
+                  <a:srgbClr val="FFFFFF"/>
+                </a:solidFill>
+                <a:latin typeface="Calibri"/>
+              </a:rPr>
+              <a:t>SMALL GROUPS</a:t>
+            </a:r>
+          </a:p>
+        </p:txBody>
+      </p:sp>
+      <p:sp>
+        <p:nvSpPr>
+          <p:cNvPr id="8" name="Rounded Rectangle 7"/>
+          <p:cNvSpPr/>
+          <p:nvPr/>
+        </p:nvSpPr>
+        <p:spPr>
+          <a:xfrm>
+            <a:off x="685800" y="2788920"/>
+            <a:ext cx="10607040" cy="3246120"/>
+          </a:xfrm>
+          <a:prstGeom prst="roundRect">
+            <a:avLst>
+              <a:gd name="adj" fmla="val 8000"/>
+            </a:avLst>
+          </a:prstGeom>
+          <a:solidFill>
+            <a:srgbClr val="FFFFFF"/>
+          </a:solidFill>
+          <a:ln>
+            <a:noFill/>
+          </a:ln>
+          <a:effectLst/>
+        </p:spPr>
+        <p:style>
+          <a:lnRef idx="1">
+            <a:schemeClr val="accent1"/>
+          </a:lnRef>
+          <a:fillRef idx="3">
+            <a:schemeClr val="accent1"/>
+          </a:fillRef>
+          <a:effectRef idx="2">
+            <a:schemeClr val="accent1"/>
+          </a:effectRef>
+          <a:fontRef idx="minor">
+            <a:schemeClr val="lt1"/>
+          </a:fontRef>
+        </p:style>
+        <p:txBody>
+          <a:bodyPr rtlCol="0" anchor="ctr" lIns="304800" rIns="304800" tIns="203200" bIns="203200" wrap="square"/>
           <a:lstStyle/>
           <a:p>
             <a:pPr algn="ctr" indent="-203200" marL="203200">
@@ -7276,20 +7688,20 @@
                 <a:spcPts val="900"/>
               </a:spcAft>
               <a:buClr>
-                <a:srgbClr val="7A2E43"/>
+                <a:srgbClr val="D98C9E"/>
               </a:buClr>
               <a:buSzPct val="90000"/>
               <a:buFont typeface="Arial"/>
               <a:buChar char="●"/>
             </a:pPr>
             <a:r>
-              <a:rPr sz="1500" b="1" i="0">
-                <a:solidFill>
-                  <a:srgbClr val="672738"/>
-                </a:solidFill>
-                <a:latin typeface="Calibri"/>
-              </a:rPr>
-              <a:t>Key concepts</a:t>
+              <a:rPr sz="1450" b="0" i="0">
+                <a:solidFill>
+                  <a:srgbClr val="2A1A1F"/>
+                </a:solidFill>
+                <a:latin typeface="Calibri"/>
+              </a:rPr>
+              <a:t>Match role cards (client, manufacturer, other designer, marketing/developer) to task-description cards.</a:t>
             </a:r>
           </a:p>
           <a:p>
@@ -7298,109 +7710,56 @@
                 <a:spcPts val="900"/>
               </a:spcAft>
               <a:buClr>
-                <a:srgbClr val="7A2E43"/>
+                <a:srgbClr val="D98C9E"/>
               </a:buClr>
               <a:buSzPct val="90000"/>
               <a:buFont typeface="Arial"/>
-              <a:buChar char="–"/>
+              <a:buChar char="●"/>
             </a:pPr>
             <a:r>
-              <a:rPr sz="1350" b="0" i="0">
-                <a:solidFill>
-                  <a:srgbClr val="2A1A1F"/>
-                </a:solidFill>
-                <a:latin typeface="Calibri"/>
-              </a:rPr>
-              <a:t>Cradle-to-cradle design — products designed so materials can be fully recycled or biodegraded at end of life</a:t>
-            </a:r>
-          </a:p>
-          <a:p>
-            <a:pPr indent="-203200" marL="203200">
-              <a:spcAft>
-                <a:spcPts val="900"/>
-              </a:spcAft>
-              <a:buClr>
-                <a:srgbClr val="7A2E43"/>
-              </a:buClr>
-              <a:buSzPct val="90000"/>
-              <a:buFont typeface="Arial"/>
-              <a:buChar char="–"/>
-            </a:pPr>
-            <a:r>
-              <a:rPr sz="1350" b="0" i="0">
-                <a:solidFill>
-                  <a:srgbClr val="2A1A1F"/>
-                </a:solidFill>
-                <a:latin typeface="Calibri"/>
-              </a:rPr>
-              <a:t>Biomimicry — solving design problems by learning from natural systems and forms</a:t>
-            </a:r>
-          </a:p>
-          <a:p>
-            <a:pPr indent="-203200" marL="203200">
-              <a:spcAft>
-                <a:spcPts val="900"/>
-              </a:spcAft>
-              <a:buClr>
-                <a:srgbClr val="7A2E43"/>
-              </a:buClr>
-              <a:buSzPct val="90000"/>
-              <a:buFont typeface="Arial"/>
-              <a:buChar char="–"/>
-            </a:pPr>
-            <a:r>
-              <a:rPr sz="1350" b="0" i="0">
-                <a:solidFill>
-                  <a:srgbClr val="2A1A1F"/>
-                </a:solidFill>
-                <a:latin typeface="Calibri"/>
-              </a:rPr>
-              <a:t>Design for disassembly — products engineered to be easily taken apart for repair or recycling</a:t>
-            </a:r>
-          </a:p>
-        </p:txBody>
-      </p:sp>
-      <p:sp>
-        <p:nvSpPr>
-          <p:cNvPr id="5" name="Oval 4"/>
-          <p:cNvSpPr/>
-          <p:nvPr/>
-        </p:nvSpPr>
-        <p:spPr>
-          <a:xfrm>
-            <a:off x="10881360" y="5943600"/>
-            <a:ext cx="1005840" cy="1005840"/>
-          </a:xfrm>
-          <a:prstGeom prst="ellipse">
+              <a:rPr sz="1450" b="0" i="0">
+                <a:solidFill>
+                  <a:srgbClr val="2A1A1F"/>
+                </a:solidFill>
+                <a:latin typeface="Calibri"/>
+              </a:rPr>
+              <a:t>First group to correctly match all four wins.</a:t>
+            </a:r>
+          </a:p>
+        </p:txBody>
+      </p:sp>
+      <p:sp>
+        <p:nvSpPr>
+          <p:cNvPr id="9" name="TextBox 8"/>
+          <p:cNvSpPr txBox="1"/>
+          <p:nvPr/>
+        </p:nvSpPr>
+        <p:spPr>
+          <a:xfrm>
+            <a:off x="685800" y="6217920"/>
+            <a:ext cx="10607040" cy="502920"/>
+          </a:xfrm>
+          <a:prstGeom prst="rect">
             <a:avLst/>
           </a:prstGeom>
-          <a:solidFill>
-            <a:srgbClr val="EDCBD3"/>
-          </a:solidFill>
-          <a:ln>
-            <a:noFill/>
-          </a:ln>
-          <a:effectLst/>
-        </p:spPr>
-        <p:style>
-          <a:lnRef idx="1">
-            <a:schemeClr val="accent1"/>
-          </a:lnRef>
-          <a:fillRef idx="3">
-            <a:schemeClr val="accent1"/>
-          </a:fillRef>
-          <a:effectRef idx="2">
-            <a:schemeClr val="accent1"/>
-          </a:effectRef>
-          <a:fontRef idx="minor">
-            <a:schemeClr val="lt1"/>
-          </a:fontRef>
-        </p:style>
-        <p:txBody>
-          <a:bodyPr rtlCol="0" anchor="ctr"/>
-          <a:lstStyle/>
-          <a:p>
-            <a:pPr algn="ctr"/>
+          <a:noFill/>
+        </p:spPr>
+        <p:txBody>
+          <a:bodyPr wrap="square" anchor="t">
+            <a:spAutoFit/>
+          </a:bodyPr>
+          <a:lstStyle/>
+          <a:p>
+            <a:pPr algn="l"/>
+            <a:r>
+              <a:rPr sz="1250" b="0" i="1">
+                <a:solidFill>
+                  <a:srgbClr val="FFFFFF"/>
+                </a:solidFill>
+                <a:latin typeface="Calibri"/>
+              </a:rPr>
+              <a:t>Debrief: Which role did you find hardest to place, and why?</a:t>
+            </a:r>
           </a:p>
         </p:txBody>
       </p:sp>
@@ -7703,7 +8062,7 @@
     <p:bg>
       <p:bgPr>
         <a:solidFill>
-          <a:srgbClr val="FBF5F1"/>
+          <a:srgbClr val="D98C9E"/>
         </a:solidFill>
         <a:effectLst/>
       </p:bgPr>
@@ -7717,22 +8076,20 @@
       <p:grpSpPr/>
       <p:sp>
         <p:nvSpPr>
-          <p:cNvPr id="2" name="Rounded Rectangle 1"/>
+          <p:cNvPr id="2" name="Oval 1"/>
           <p:cNvSpPr/>
           <p:nvPr/>
         </p:nvSpPr>
         <p:spPr>
           <a:xfrm>
-            <a:off x="685800" y="502920"/>
-            <a:ext cx="3291840" cy="457200"/>
-          </a:xfrm>
-          <a:prstGeom prst="roundRect">
-            <a:avLst>
-              <a:gd name="adj" fmla="val 50000"/>
-            </a:avLst>
+            <a:off x="-914400" y="-914400"/>
+            <a:ext cx="2103120" cy="2103120"/>
+          </a:xfrm>
+          <a:prstGeom prst="ellipse">
+            <a:avLst/>
           </a:prstGeom>
           <a:solidFill>
-            <a:srgbClr val="7A2E43"/>
+            <a:srgbClr val="BE7B8B"/>
           </a:solidFill>
           <a:ln>
             <a:noFill/>
@@ -7754,75 +8111,29 @@
           </a:fontRef>
         </p:style>
         <p:txBody>
-          <a:bodyPr rtlCol="0" anchor="ctr" wrap="none" lIns="50800" rIns="50800"/>
+          <a:bodyPr rtlCol="0" anchor="ctr"/>
           <a:lstStyle/>
           <a:p>
             <a:pPr algn="ctr"/>
-            <a:r>
-              <a:rPr sz="1100" b="1">
-                <a:solidFill>
-                  <a:srgbClr val="FFFFFF"/>
-                </a:solidFill>
-                <a:latin typeface="Calibri"/>
-              </a:rPr>
-              <a:t>EXTENDED KNOWLEDGE</a:t>
-            </a:r>
-          </a:p>
-        </p:txBody>
-      </p:sp>
-      <p:sp>
-        <p:nvSpPr>
-          <p:cNvPr id="3" name="TextBox 2"/>
-          <p:cNvSpPr txBox="1"/>
-          <p:nvPr/>
-        </p:nvSpPr>
-        <p:spPr>
-          <a:xfrm>
-            <a:off x="685800" y="1051560"/>
-            <a:ext cx="10607040" cy="822960"/>
-          </a:xfrm>
-          <a:prstGeom prst="rect">
+          </a:p>
+        </p:txBody>
+      </p:sp>
+      <p:sp>
+        <p:nvSpPr>
+          <p:cNvPr id="3" name="Oval 2"/>
+          <p:cNvSpPr/>
+          <p:nvPr/>
+        </p:nvSpPr>
+        <p:spPr>
+          <a:xfrm>
+            <a:off x="11064240" y="5852160"/>
+            <a:ext cx="1737360" cy="1737360"/>
+          </a:xfrm>
+          <a:prstGeom prst="ellipse">
             <a:avLst/>
           </a:prstGeom>
-          <a:noFill/>
-        </p:spPr>
-        <p:txBody>
-          <a:bodyPr wrap="square" anchor="t">
-            <a:spAutoFit/>
-          </a:bodyPr>
-          <a:lstStyle/>
-          <a:p>
-            <a:pPr algn="l"/>
-            <a:r>
-              <a:rPr sz="2700" b="1" i="0">
-                <a:solidFill>
-                  <a:srgbClr val="2A1A1F"/>
-                </a:solidFill>
-                <a:latin typeface="Cambria"/>
-              </a:rPr>
-              <a:t>Branding and Identity Theory</a:t>
-            </a:r>
-          </a:p>
-        </p:txBody>
-      </p:sp>
-      <p:sp>
-        <p:nvSpPr>
-          <p:cNvPr id="4" name="Rounded Rectangle 3"/>
-          <p:cNvSpPr/>
-          <p:nvPr/>
-        </p:nvSpPr>
-        <p:spPr>
-          <a:xfrm>
-            <a:off x="685800" y="1874519"/>
-            <a:ext cx="10607040" cy="4526280"/>
-          </a:xfrm>
-          <a:prstGeom prst="roundRect">
-            <a:avLst>
-              <a:gd name="adj" fmla="val 6000"/>
-            </a:avLst>
-          </a:prstGeom>
           <a:solidFill>
-            <a:srgbClr val="F1EAEC"/>
+            <a:srgbClr val="BE7B8B"/>
           </a:solidFill>
           <a:ln>
             <a:noFill/>
@@ -7844,7 +8155,253 @@
           </a:fontRef>
         </p:style>
         <p:txBody>
-          <a:bodyPr rtlCol="0" anchor="ctr" lIns="330200" rIns="330200" tIns="254000" bIns="254000" wrap="square"/>
+          <a:bodyPr rtlCol="0" anchor="ctr"/>
+          <a:lstStyle/>
+          <a:p>
+            <a:pPr algn="ctr"/>
+          </a:p>
+        </p:txBody>
+      </p:sp>
+      <p:sp>
+        <p:nvSpPr>
+          <p:cNvPr id="4" name="Rounded Rectangle 3"/>
+          <p:cNvSpPr/>
+          <p:nvPr/>
+        </p:nvSpPr>
+        <p:spPr>
+          <a:xfrm>
+            <a:off x="685800" y="457200"/>
+            <a:ext cx="1033271" cy="502920"/>
+          </a:xfrm>
+          <a:prstGeom prst="roundRect">
+            <a:avLst>
+              <a:gd name="adj" fmla="val 50000"/>
+            </a:avLst>
+          </a:prstGeom>
+          <a:solidFill>
+            <a:srgbClr val="FFFFFF"/>
+          </a:solidFill>
+          <a:ln>
+            <a:noFill/>
+          </a:ln>
+          <a:effectLst/>
+        </p:spPr>
+        <p:style>
+          <a:lnRef idx="1">
+            <a:schemeClr val="accent1"/>
+          </a:lnRef>
+          <a:fillRef idx="3">
+            <a:schemeClr val="accent1"/>
+          </a:fillRef>
+          <a:effectRef idx="2">
+            <a:schemeClr val="accent1"/>
+          </a:effectRef>
+          <a:fontRef idx="minor">
+            <a:schemeClr val="lt1"/>
+          </a:fontRef>
+        </p:style>
+        <p:txBody>
+          <a:bodyPr rtlCol="0" anchor="ctr"/>
+          <a:lstStyle/>
+          <a:p>
+            <a:pPr algn="ctr"/>
+            <a:r>
+              <a:rPr b="1" sz="1400">
+                <a:solidFill>
+                  <a:srgbClr val="8D5B66"/>
+                </a:solidFill>
+                <a:latin typeface="Calibri"/>
+              </a:rPr>
+              <a:t>QUIZ</a:t>
+            </a:r>
+          </a:p>
+        </p:txBody>
+      </p:sp>
+      <p:sp>
+        <p:nvSpPr>
+          <p:cNvPr id="5" name="TextBox 4"/>
+          <p:cNvSpPr txBox="1"/>
+          <p:nvPr/>
+        </p:nvSpPr>
+        <p:spPr>
+          <a:xfrm>
+            <a:off x="685800" y="1143000"/>
+            <a:ext cx="10607040" cy="914400"/>
+          </a:xfrm>
+          <a:prstGeom prst="rect">
+            <a:avLst/>
+          </a:prstGeom>
+          <a:noFill/>
+        </p:spPr>
+        <p:txBody>
+          <a:bodyPr wrap="square" anchor="t">
+            <a:spAutoFit/>
+          </a:bodyPr>
+          <a:lstStyle/>
+          <a:p>
+            <a:pPr algn="l"/>
+            <a:r>
+              <a:rPr sz="3000" b="1" i="0">
+                <a:solidFill>
+                  <a:srgbClr val="FFFFFF"/>
+                </a:solidFill>
+                <a:latin typeface="Cambria"/>
+              </a:rPr>
+              <a:t>IP or Not?</a:t>
+            </a:r>
+          </a:p>
+        </p:txBody>
+      </p:sp>
+      <p:sp>
+        <p:nvSpPr>
+          <p:cNvPr id="6" name="Rounded Rectangle 5"/>
+          <p:cNvSpPr/>
+          <p:nvPr/>
+        </p:nvSpPr>
+        <p:spPr>
+          <a:xfrm>
+            <a:off x="685800" y="2148840"/>
+            <a:ext cx="960120" cy="411480"/>
+          </a:xfrm>
+          <a:prstGeom prst="roundRect">
+            <a:avLst>
+              <a:gd name="adj" fmla="val 50000"/>
+            </a:avLst>
+          </a:prstGeom>
+          <a:solidFill>
+            <a:srgbClr val="A26976"/>
+          </a:solidFill>
+          <a:ln>
+            <a:noFill/>
+          </a:ln>
+          <a:effectLst/>
+        </p:spPr>
+        <p:style>
+          <a:lnRef idx="1">
+            <a:schemeClr val="accent1"/>
+          </a:lnRef>
+          <a:fillRef idx="3">
+            <a:schemeClr val="accent1"/>
+          </a:fillRef>
+          <a:effectRef idx="2">
+            <a:schemeClr val="accent1"/>
+          </a:effectRef>
+          <a:fontRef idx="minor">
+            <a:schemeClr val="lt1"/>
+          </a:fontRef>
+        </p:style>
+        <p:txBody>
+          <a:bodyPr rtlCol="0" anchor="ctr" wrap="none" lIns="50800" rIns="50800"/>
+          <a:lstStyle/>
+          <a:p>
+            <a:pPr algn="ctr"/>
+            <a:r>
+              <a:rPr sz="1050" b="1">
+                <a:solidFill>
+                  <a:srgbClr val="FFFFFF"/>
+                </a:solidFill>
+                <a:latin typeface="Calibri"/>
+              </a:rPr>
+              <a:t>5 MIN</a:t>
+            </a:r>
+          </a:p>
+        </p:txBody>
+      </p:sp>
+      <p:sp>
+        <p:nvSpPr>
+          <p:cNvPr id="7" name="Rounded Rectangle 6"/>
+          <p:cNvSpPr/>
+          <p:nvPr/>
+        </p:nvSpPr>
+        <p:spPr>
+          <a:xfrm>
+            <a:off x="1783080" y="2148840"/>
+            <a:ext cx="1563624" cy="411480"/>
+          </a:xfrm>
+          <a:prstGeom prst="roundRect">
+            <a:avLst>
+              <a:gd name="adj" fmla="val 50000"/>
+            </a:avLst>
+          </a:prstGeom>
+          <a:solidFill>
+            <a:srgbClr val="A26976"/>
+          </a:solidFill>
+          <a:ln>
+            <a:noFill/>
+          </a:ln>
+          <a:effectLst/>
+        </p:spPr>
+        <p:style>
+          <a:lnRef idx="1">
+            <a:schemeClr val="accent1"/>
+          </a:lnRef>
+          <a:fillRef idx="3">
+            <a:schemeClr val="accent1"/>
+          </a:fillRef>
+          <a:effectRef idx="2">
+            <a:schemeClr val="accent1"/>
+          </a:effectRef>
+          <a:fontRef idx="minor">
+            <a:schemeClr val="lt1"/>
+          </a:fontRef>
+        </p:style>
+        <p:txBody>
+          <a:bodyPr rtlCol="0" anchor="ctr" wrap="none" lIns="50800" rIns="50800"/>
+          <a:lstStyle/>
+          <a:p>
+            <a:pPr algn="ctr"/>
+            <a:r>
+              <a:rPr sz="1050" b="1">
+                <a:solidFill>
+                  <a:srgbClr val="FFFFFF"/>
+                </a:solidFill>
+                <a:latin typeface="Calibri"/>
+              </a:rPr>
+              <a:t>WHOLE CLASS</a:t>
+            </a:r>
+          </a:p>
+        </p:txBody>
+      </p:sp>
+      <p:sp>
+        <p:nvSpPr>
+          <p:cNvPr id="8" name="Rounded Rectangle 7"/>
+          <p:cNvSpPr/>
+          <p:nvPr/>
+        </p:nvSpPr>
+        <p:spPr>
+          <a:xfrm>
+            <a:off x="685800" y="2788920"/>
+            <a:ext cx="10607040" cy="3246120"/>
+          </a:xfrm>
+          <a:prstGeom prst="roundRect">
+            <a:avLst>
+              <a:gd name="adj" fmla="val 8000"/>
+            </a:avLst>
+          </a:prstGeom>
+          <a:solidFill>
+            <a:srgbClr val="FFFFFF"/>
+          </a:solidFill>
+          <a:ln>
+            <a:noFill/>
+          </a:ln>
+          <a:effectLst/>
+        </p:spPr>
+        <p:style>
+          <a:lnRef idx="1">
+            <a:schemeClr val="accent1"/>
+          </a:lnRef>
+          <a:fillRef idx="3">
+            <a:schemeClr val="accent1"/>
+          </a:fillRef>
+          <a:effectRef idx="2">
+            <a:schemeClr val="accent1"/>
+          </a:effectRef>
+          <a:fontRef idx="minor">
+            <a:schemeClr val="lt1"/>
+          </a:fontRef>
+        </p:style>
+        <p:txBody>
+          <a:bodyPr rtlCol="0" anchor="ctr" lIns="304800" rIns="304800" tIns="203200" bIns="203200" wrap="square"/>
           <a:lstStyle/>
           <a:p>
             <a:pPr algn="ctr" indent="-203200" marL="203200">
@@ -7852,20 +8409,20 @@
                 <a:spcPts val="900"/>
               </a:spcAft>
               <a:buClr>
-                <a:srgbClr val="7A2E43"/>
+                <a:srgbClr val="D98C9E"/>
               </a:buClr>
               <a:buSzPct val="90000"/>
               <a:buFont typeface="Arial"/>
               <a:buChar char="●"/>
             </a:pPr>
             <a:r>
-              <a:rPr sz="1500" b="1" i="0">
-                <a:solidFill>
-                  <a:srgbClr val="672738"/>
-                </a:solidFill>
-                <a:latin typeface="Calibri"/>
-              </a:rPr>
-              <a:t>Core concepts</a:t>
+              <a:rPr sz="1450" b="0" i="0">
+                <a:solidFill>
+                  <a:srgbClr val="2A1A1F"/>
+                </a:solidFill>
+                <a:latin typeface="Calibri"/>
+              </a:rPr>
+              <a:t>"A logo can be protected by trademark."  (True)</a:t>
             </a:r>
           </a:p>
           <a:p>
@@ -7874,20 +8431,20 @@
                 <a:spcPts val="900"/>
               </a:spcAft>
               <a:buClr>
-                <a:srgbClr val="7A2E43"/>
+                <a:srgbClr val="D98C9E"/>
               </a:buClr>
               <a:buSzPct val="90000"/>
               <a:buFont typeface="Arial"/>
-              <a:buChar char="–"/>
+              <a:buChar char="●"/>
             </a:pPr>
             <a:r>
-              <a:rPr sz="1350" b="0" i="0">
-                <a:solidFill>
-                  <a:srgbClr val="2A1A1F"/>
-                </a:solidFill>
-                <a:latin typeface="Calibri"/>
-              </a:rPr>
-              <a:t>Brand architecture — how a company organises and relates multiple sub-brands</a:t>
+              <a:rPr sz="1450" b="0" i="0">
+                <a:solidFill>
+                  <a:srgbClr val="2A1A1F"/>
+                </a:solidFill>
+                <a:latin typeface="Calibri"/>
+              </a:rPr>
+              <a:t>"Copyright must be formally registered before it applies."  (False - automatic)</a:t>
             </a:r>
           </a:p>
           <a:p>
@@ -7896,20 +8453,20 @@
                 <a:spcPts val="900"/>
               </a:spcAft>
               <a:buClr>
-                <a:srgbClr val="7A2E43"/>
+                <a:srgbClr val="D98C9E"/>
               </a:buClr>
               <a:buSzPct val="90000"/>
               <a:buFont typeface="Arial"/>
-              <a:buChar char="–"/>
+              <a:buChar char="●"/>
             </a:pPr>
             <a:r>
-              <a:rPr sz="1350" b="0" i="0">
-                <a:solidFill>
-                  <a:srgbClr val="2A1A1F"/>
-                </a:solidFill>
-                <a:latin typeface="Calibri"/>
-              </a:rPr>
-              <a:t>Tone of voice — the consistent personality expressed through language and visuals</a:t>
+              <a:rPr sz="1450" b="0" i="0">
+                <a:solidFill>
+                  <a:srgbClr val="2A1A1F"/>
+                </a:solidFill>
+                <a:latin typeface="Calibri"/>
+              </a:rPr>
+              <a:t>"A patent protects the visual appearance of a product."  (False - that's design registration)</a:t>
             </a:r>
           </a:p>
           <a:p>
@@ -7918,109 +8475,56 @@
                 <a:spcPts val="900"/>
               </a:spcAft>
               <a:buClr>
-                <a:srgbClr val="7A2E43"/>
-              </a:buClr>
-              <a:buSzPct val="90000"/>
-              <a:buFont typeface="Arial"/>
-              <a:buChar char="–"/>
-            </a:pPr>
-            <a:r>
-              <a:rPr sz="1350" b="0" i="0">
-                <a:solidFill>
-                  <a:srgbClr val="2A1A1F"/>
-                </a:solidFill>
-                <a:latin typeface="Calibri"/>
-              </a:rPr>
-              <a:t>Brand guidelines — documented rules for logo use, colour, type and imagery</a:t>
-            </a:r>
-          </a:p>
-          <a:p>
-            <a:pPr indent="-203200" marL="203200">
-              <a:spcAft>
-                <a:spcPts val="900"/>
-              </a:spcAft>
-              <a:buClr>
-                <a:srgbClr val="7A2E43"/>
+                <a:srgbClr val="D98C9E"/>
               </a:buClr>
               <a:buSzPct val="90000"/>
               <a:buFont typeface="Arial"/>
               <a:buChar char="●"/>
             </a:pPr>
             <a:r>
-              <a:rPr sz="1500" b="1" i="0">
-                <a:solidFill>
-                  <a:srgbClr val="672738"/>
-                </a:solidFill>
-                <a:latin typeface="Calibri"/>
-              </a:rPr>
-              <a:t>Worth researching</a:t>
-            </a:r>
-          </a:p>
-          <a:p>
-            <a:pPr indent="-203200" marL="203200">
-              <a:spcAft>
-                <a:spcPts val="900"/>
-              </a:spcAft>
-              <a:buClr>
-                <a:srgbClr val="7A2E43"/>
-              </a:buClr>
-              <a:buSzPct val="90000"/>
-              <a:buFont typeface="Arial"/>
-              <a:buChar char="–"/>
-            </a:pPr>
-            <a:r>
-              <a:rPr sz="1350" b="0" i="0">
-                <a:solidFill>
-                  <a:srgbClr val="2A1A1F"/>
-                </a:solidFill>
-                <a:latin typeface="Calibri"/>
-              </a:rPr>
-              <a:t>Case studies of how major brands have evolved their logos over decades (simplification for digital screens is a common contemporary driver) make strong exam and folio examples.</a:t>
-            </a:r>
-          </a:p>
-        </p:txBody>
-      </p:sp>
-      <p:sp>
-        <p:nvSpPr>
-          <p:cNvPr id="5" name="Oval 4"/>
-          <p:cNvSpPr/>
-          <p:nvPr/>
-        </p:nvSpPr>
-        <p:spPr>
-          <a:xfrm>
-            <a:off x="10881360" y="5943600"/>
-            <a:ext cx="1005840" cy="1005840"/>
-          </a:xfrm>
-          <a:prstGeom prst="ellipse">
+              <a:rPr sz="1450" b="0" i="0">
+                <a:solidFill>
+                  <a:srgbClr val="2A1A1F"/>
+                </a:solidFill>
+                <a:latin typeface="Calibri"/>
+              </a:rPr>
+              <a:t>"Design registration protects a new invention."  (False - that's a patent)</a:t>
+            </a:r>
+          </a:p>
+        </p:txBody>
+      </p:sp>
+      <p:sp>
+        <p:nvSpPr>
+          <p:cNvPr id="9" name="TextBox 8"/>
+          <p:cNvSpPr txBox="1"/>
+          <p:nvPr/>
+        </p:nvSpPr>
+        <p:spPr>
+          <a:xfrm>
+            <a:off x="685800" y="6217920"/>
+            <a:ext cx="10607040" cy="502920"/>
+          </a:xfrm>
+          <a:prstGeom prst="rect">
             <a:avLst/>
           </a:prstGeom>
-          <a:solidFill>
-            <a:srgbClr val="EDCBD3"/>
-          </a:solidFill>
-          <a:ln>
-            <a:noFill/>
-          </a:ln>
-          <a:effectLst/>
-        </p:spPr>
-        <p:style>
-          <a:lnRef idx="1">
-            <a:schemeClr val="accent1"/>
-          </a:lnRef>
-          <a:fillRef idx="3">
-            <a:schemeClr val="accent1"/>
-          </a:fillRef>
-          <a:effectRef idx="2">
-            <a:schemeClr val="accent1"/>
-          </a:effectRef>
-          <a:fontRef idx="minor">
-            <a:schemeClr val="lt1"/>
-          </a:fontRef>
-        </p:style>
-        <p:txBody>
-          <a:bodyPr rtlCol="0" anchor="ctr"/>
-          <a:lstStyle/>
-          <a:p>
-            <a:pPr algn="ctr"/>
+          <a:noFill/>
+        </p:spPr>
+        <p:txBody>
+          <a:bodyPr wrap="square" anchor="t">
+            <a:spAutoFit/>
+          </a:bodyPr>
+          <a:lstStyle/>
+          <a:p>
+            <a:pPr algn="l"/>
+            <a:r>
+              <a:rPr sz="1250" b="0" i="1">
+                <a:solidFill>
+                  <a:srgbClr val="FFFFFF"/>
+                </a:solidFill>
+                <a:latin typeface="Calibri"/>
+              </a:rPr>
+              <a:t>Debrief: Correct the false statements as a class.</a:t>
+            </a:r>
           </a:p>
         </p:txBody>
       </p:sp>
@@ -8038,7 +8542,7 @@
     <p:bg>
       <p:bgPr>
         <a:solidFill>
-          <a:srgbClr val="FBF5F1"/>
+          <a:srgbClr val="D6A24A"/>
         </a:solidFill>
         <a:effectLst/>
       </p:bgPr>
@@ -8052,22 +8556,20 @@
       <p:grpSpPr/>
       <p:sp>
         <p:nvSpPr>
-          <p:cNvPr id="2" name="Rounded Rectangle 1"/>
+          <p:cNvPr id="2" name="Oval 1"/>
           <p:cNvSpPr/>
           <p:nvPr/>
         </p:nvSpPr>
         <p:spPr>
           <a:xfrm>
-            <a:off x="685800" y="502920"/>
-            <a:ext cx="3291840" cy="457200"/>
-          </a:xfrm>
-          <a:prstGeom prst="roundRect">
-            <a:avLst>
-              <a:gd name="adj" fmla="val 50000"/>
-            </a:avLst>
+            <a:off x="9692640" y="-914400"/>
+            <a:ext cx="2926080" cy="2926080"/>
+          </a:xfrm>
+          <a:prstGeom prst="ellipse">
+            <a:avLst/>
           </a:prstGeom>
           <a:solidFill>
-            <a:srgbClr val="7A2E43"/>
+            <a:srgbClr val="BC8E41"/>
           </a:solidFill>
           <a:ln>
             <a:noFill/>
@@ -8089,75 +8591,29 @@
           </a:fontRef>
         </p:style>
         <p:txBody>
-          <a:bodyPr rtlCol="0" anchor="ctr" wrap="none" lIns="50800" rIns="50800"/>
+          <a:bodyPr rtlCol="0" anchor="ctr"/>
           <a:lstStyle/>
           <a:p>
             <a:pPr algn="ctr"/>
-            <a:r>
-              <a:rPr sz="1100" b="1">
-                <a:solidFill>
-                  <a:srgbClr val="FFFFFF"/>
-                </a:solidFill>
-                <a:latin typeface="Calibri"/>
-              </a:rPr>
-              <a:t>EXTENDED KNOWLEDGE</a:t>
-            </a:r>
-          </a:p>
-        </p:txBody>
-      </p:sp>
-      <p:sp>
-        <p:nvSpPr>
-          <p:cNvPr id="3" name="TextBox 2"/>
-          <p:cNvSpPr txBox="1"/>
-          <p:nvPr/>
-        </p:nvSpPr>
-        <p:spPr>
-          <a:xfrm>
-            <a:off x="685800" y="1051560"/>
-            <a:ext cx="10607040" cy="822960"/>
-          </a:xfrm>
-          <a:prstGeom prst="rect">
+          </a:p>
+        </p:txBody>
+      </p:sp>
+      <p:sp>
+        <p:nvSpPr>
+          <p:cNvPr id="3" name="Oval 2"/>
+          <p:cNvSpPr/>
+          <p:nvPr/>
+        </p:nvSpPr>
+        <p:spPr>
+          <a:xfrm>
+            <a:off x="-914400" y="4937760"/>
+            <a:ext cx="2377440" cy="2377440"/>
+          </a:xfrm>
+          <a:prstGeom prst="ellipse">
             <a:avLst/>
           </a:prstGeom>
-          <a:noFill/>
-        </p:spPr>
-        <p:txBody>
-          <a:bodyPr wrap="square" anchor="t">
-            <a:spAutoFit/>
-          </a:bodyPr>
-          <a:lstStyle/>
-          <a:p>
-            <a:pPr algn="l"/>
-            <a:r>
-              <a:rPr sz="2700" b="1" i="0">
-                <a:solidFill>
-                  <a:srgbClr val="2A1A1F"/>
-                </a:solidFill>
-                <a:latin typeface="Cambria"/>
-              </a:rPr>
-              <a:t>UX/UI and Service Design Basics</a:t>
-            </a:r>
-          </a:p>
-        </p:txBody>
-      </p:sp>
-      <p:sp>
-        <p:nvSpPr>
-          <p:cNvPr id="4" name="Rounded Rectangle 3"/>
-          <p:cNvSpPr/>
-          <p:nvPr/>
-        </p:nvSpPr>
-        <p:spPr>
-          <a:xfrm>
-            <a:off x="685800" y="1874519"/>
-            <a:ext cx="10607040" cy="4526280"/>
-          </a:xfrm>
-          <a:prstGeom prst="roundRect">
-            <a:avLst>
-              <a:gd name="adj" fmla="val 6000"/>
-            </a:avLst>
-          </a:prstGeom>
           <a:solidFill>
-            <a:srgbClr val="F1EAEC"/>
+            <a:srgbClr val="BC8E41"/>
           </a:solidFill>
           <a:ln>
             <a:noFill/>
@@ -8179,131 +8635,31 @@
           </a:fontRef>
         </p:style>
         <p:txBody>
-          <a:bodyPr rtlCol="0" anchor="ctr" lIns="330200" rIns="330200" tIns="254000" bIns="254000" wrap="square"/>
-          <a:lstStyle/>
-          <a:p>
-            <a:pPr algn="ctr">
-              <a:spcAft>
-                <a:spcPts val="900"/>
-              </a:spcAft>
-              <a:buNone/>
-            </a:pPr>
-            <a:r>
-              <a:rPr sz="1350" b="1" i="1">
-                <a:solidFill>
-                  <a:srgbClr val="672738"/>
-                </a:solidFill>
-                <a:latin typeface="Calibri"/>
-              </a:rPr>
-              <a:t>Key terms</a:t>
-            </a:r>
-          </a:p>
-          <a:p>
-            <a:pPr indent="-203200" marL="203200">
-              <a:spcAft>
-                <a:spcPts val="900"/>
-              </a:spcAft>
-              <a:buClr>
-                <a:srgbClr val="7A2E43"/>
-              </a:buClr>
-              <a:buSzPct val="90000"/>
-              <a:buFont typeface="Arial"/>
-              <a:buChar char="–"/>
-            </a:pPr>
-            <a:r>
-              <a:rPr sz="1350" b="0" i="0">
-                <a:solidFill>
-                  <a:srgbClr val="2A1A1F"/>
-                </a:solidFill>
-                <a:latin typeface="Calibri"/>
-              </a:rPr>
-              <a:t>User persona — a fictional profile representing a target user segment</a:t>
-            </a:r>
-          </a:p>
-          <a:p>
-            <a:pPr indent="-203200" marL="203200">
-              <a:spcAft>
-                <a:spcPts val="900"/>
-              </a:spcAft>
-              <a:buClr>
-                <a:srgbClr val="7A2E43"/>
-              </a:buClr>
-              <a:buSzPct val="90000"/>
-              <a:buFont typeface="Arial"/>
-              <a:buChar char="–"/>
-            </a:pPr>
-            <a:r>
-              <a:rPr sz="1350" b="0" i="0">
-                <a:solidFill>
-                  <a:srgbClr val="2A1A1F"/>
-                </a:solidFill>
-                <a:latin typeface="Calibri"/>
-              </a:rPr>
-              <a:t>User journey map — a visualisation of the steps a user takes to complete a task</a:t>
-            </a:r>
-          </a:p>
-          <a:p>
-            <a:pPr indent="-203200" marL="203200">
-              <a:spcAft>
-                <a:spcPts val="900"/>
-              </a:spcAft>
-              <a:buClr>
-                <a:srgbClr val="7A2E43"/>
-              </a:buClr>
-              <a:buSzPct val="90000"/>
-              <a:buFont typeface="Arial"/>
-              <a:buChar char="–"/>
-            </a:pPr>
-            <a:r>
-              <a:rPr sz="1350" b="0" i="0">
-                <a:solidFill>
-                  <a:srgbClr val="2A1A1F"/>
-                </a:solidFill>
-                <a:latin typeface="Calibri"/>
-              </a:rPr>
-              <a:t>Wireframe — a low-fidelity structural sketch of an interface, before visual design is applied</a:t>
-            </a:r>
-          </a:p>
-          <a:p>
-            <a:pPr indent="-203200" marL="203200">
-              <a:spcAft>
-                <a:spcPts val="900"/>
-              </a:spcAft>
-              <a:buClr>
-                <a:srgbClr val="7A2E43"/>
-              </a:buClr>
-              <a:buSzPct val="90000"/>
-              <a:buFont typeface="Arial"/>
-              <a:buChar char="–"/>
-            </a:pPr>
-            <a:r>
-              <a:rPr sz="1350" b="0" i="0">
-                <a:solidFill>
-                  <a:srgbClr val="2A1A1F"/>
-                </a:solidFill>
-                <a:latin typeface="Calibri"/>
-              </a:rPr>
-              <a:t>Service design — designing the end-to-end experience of a service, not just a single artefact</a:t>
-            </a:r>
-          </a:p>
-        </p:txBody>
-      </p:sp>
-      <p:sp>
-        <p:nvSpPr>
-          <p:cNvPr id="5" name="Oval 4"/>
+          <a:bodyPr rtlCol="0" anchor="ctr"/>
+          <a:lstStyle/>
+          <a:p>
+            <a:pPr algn="ctr"/>
+          </a:p>
+        </p:txBody>
+      </p:sp>
+      <p:sp>
+        <p:nvSpPr>
+          <p:cNvPr id="4" name="Rounded Rectangle 3"/>
           <p:cNvSpPr/>
           <p:nvPr/>
         </p:nvSpPr>
         <p:spPr>
           <a:xfrm>
-            <a:off x="10881360" y="5943600"/>
-            <a:ext cx="1005840" cy="1005840"/>
-          </a:xfrm>
-          <a:prstGeom prst="ellipse">
-            <a:avLst/>
+            <a:off x="822960" y="1051560"/>
+            <a:ext cx="1188720" cy="502920"/>
+          </a:xfrm>
+          <a:prstGeom prst="roundRect">
+            <a:avLst>
+              <a:gd name="adj" fmla="val 50000"/>
+            </a:avLst>
           </a:prstGeom>
           <a:solidFill>
-            <a:srgbClr val="EDCBD3"/>
+            <a:srgbClr val="FFFFFF"/>
           </a:solidFill>
           <a:ln>
             <a:noFill/>
@@ -8325,10 +8681,135 @@
           </a:fontRef>
         </p:style>
         <p:txBody>
+          <a:bodyPr rtlCol="0" anchor="ctr" wrap="none" lIns="50800" rIns="50800"/>
+          <a:lstStyle/>
+          <a:p>
+            <a:pPr algn="ctr"/>
+            <a:r>
+              <a:rPr sz="1400" b="1">
+                <a:solidFill>
+                  <a:srgbClr val="AB813B"/>
+                </a:solidFill>
+                <a:latin typeface="Calibri"/>
+              </a:rPr>
+              <a:t>03</a:t>
+            </a:r>
+          </a:p>
+        </p:txBody>
+      </p:sp>
+      <p:sp>
+        <p:nvSpPr>
+          <p:cNvPr id="5" name="Rounded Rectangle 4"/>
+          <p:cNvSpPr/>
+          <p:nvPr/>
+        </p:nvSpPr>
+        <p:spPr>
+          <a:xfrm>
+            <a:off x="822960" y="2011680"/>
+            <a:ext cx="10515600" cy="2834640"/>
+          </a:xfrm>
+          <a:prstGeom prst="roundRect">
+            <a:avLst>
+              <a:gd name="adj" fmla="val 18000"/>
+            </a:avLst>
+          </a:prstGeom>
+          <a:solidFill>
+            <a:srgbClr val="FFFFFF"/>
+          </a:solidFill>
+          <a:ln>
+            <a:noFill/>
+          </a:ln>
+          <a:effectLst/>
+        </p:spPr>
+        <p:style>
+          <a:lnRef idx="1">
+            <a:schemeClr val="accent1"/>
+          </a:lnRef>
+          <a:fillRef idx="3">
+            <a:schemeClr val="accent1"/>
+          </a:fillRef>
+          <a:effectRef idx="2">
+            <a:schemeClr val="accent1"/>
+          </a:effectRef>
+          <a:fontRef idx="minor">
+            <a:schemeClr val="lt1"/>
+          </a:fontRef>
+        </p:style>
+        <p:txBody>
           <a:bodyPr rtlCol="0" anchor="ctr"/>
           <a:lstStyle/>
           <a:p>
             <a:pPr algn="ctr"/>
+          </a:p>
+        </p:txBody>
+      </p:sp>
+      <p:sp>
+        <p:nvSpPr>
+          <p:cNvPr id="6" name="TextBox 5"/>
+          <p:cNvSpPr txBox="1"/>
+          <p:nvPr/>
+        </p:nvSpPr>
+        <p:spPr>
+          <a:xfrm>
+            <a:off x="1280160" y="2697480"/>
+            <a:ext cx="9601200" cy="1097280"/>
+          </a:xfrm>
+          <a:prstGeom prst="rect">
+            <a:avLst/>
+          </a:prstGeom>
+          <a:noFill/>
+        </p:spPr>
+        <p:txBody>
+          <a:bodyPr wrap="square" anchor="t">
+            <a:spAutoFit/>
+          </a:bodyPr>
+          <a:lstStyle/>
+          <a:p>
+            <a:pPr algn="l"/>
+            <a:r>
+              <a:rPr sz="3400" b="1" i="0">
+                <a:solidFill>
+                  <a:srgbClr val="B5893E"/>
+                </a:solidFill>
+                <a:latin typeface="Cambria"/>
+              </a:rPr>
+              <a:t>Extended Knowledge</a:t>
+            </a:r>
+          </a:p>
+        </p:txBody>
+      </p:sp>
+      <p:sp>
+        <p:nvSpPr>
+          <p:cNvPr id="7" name="TextBox 6"/>
+          <p:cNvSpPr txBox="1"/>
+          <p:nvPr/>
+        </p:nvSpPr>
+        <p:spPr>
+          <a:xfrm>
+            <a:off x="1280160" y="3657600"/>
+            <a:ext cx="9601200" cy="548640"/>
+          </a:xfrm>
+          <a:prstGeom prst="rect">
+            <a:avLst/>
+          </a:prstGeom>
+          <a:noFill/>
+        </p:spPr>
+        <p:txBody>
+          <a:bodyPr wrap="square" anchor="t">
+            <a:spAutoFit/>
+          </a:bodyPr>
+          <a:lstStyle/>
+          <a:p>
+            <a:pPr algn="l"/>
+            <a:r>
+              <a:rPr sz="1500" b="0" i="0">
+                <a:solidFill>
+                  <a:srgbClr val="6B6B6B"/>
+                </a:solidFill>
+                <a:latin typeface="Calibri"/>
+              </a:rPr>
+              <a:t>Beyond the study design</a:t>
+            </a:r>
           </a:p>
         </p:txBody>
       </p:sp>
@@ -8443,7 +8924,7 @@
                 </a:solidFill>
                 <a:latin typeface="Cambria"/>
               </a:rPr>
-              <a:t>Design Ethics and Responsibility</a:t>
+              <a:t>More Design Movements and Trends in History</a:t>
             </a:r>
           </a:p>
         </p:txBody>
@@ -8508,7 +8989,7 @@
                 </a:solidFill>
                 <a:latin typeface="Calibri"/>
               </a:rPr>
-              <a:t>Issues to be aware of</a:t>
+              <a:t>Movements not covered in Unit 1</a:t>
             </a:r>
           </a:p>
           <a:p>
@@ -8530,7 +9011,7 @@
                 </a:solidFill>
                 <a:latin typeface="Calibri"/>
               </a:rPr>
-              <a:t>Dark patterns — interface designs that deliberately trick users into unintended actions</a:t>
+              <a:t>Arts and Crafts (late 1800s) — reaction against industrialisation, craftsmanship, William Morris</a:t>
             </a:r>
           </a:p>
           <a:p>
@@ -8552,7 +9033,7 @@
                 </a:solidFill>
                 <a:latin typeface="Calibri"/>
               </a:rPr>
-              <a:t>Greenwashing — packaging/branding that overstates environmental credentials</a:t>
+              <a:t>Art Nouveau (1890s-1910s) — organic, flowing lines inspired by nature</a:t>
             </a:r>
           </a:p>
           <a:p>
@@ -8574,7 +9055,7 @@
                 </a:solidFill>
                 <a:latin typeface="Calibri"/>
               </a:rPr>
-              <a:t>Cultural appropriation vs appreciation — using cultural motifs respectfully and with context</a:t>
+              <a:t>Constructivism (1920s Russia) — geometric abstraction in service of social/political ideas</a:t>
             </a:r>
           </a:p>
           <a:p>
@@ -8596,7 +9077,117 @@
                 </a:solidFill>
                 <a:latin typeface="Calibri"/>
               </a:rPr>
-              <a:t>Inclusive design — designing for the widest possible range of users, including disability</a:t>
+              <a:t>De Stijl (1917 onward) — primary colours, grids, Piet Mondrian and Theo van Doesburg</a:t>
+            </a:r>
+          </a:p>
+          <a:p>
+            <a:pPr indent="-203200" marL="203200">
+              <a:spcAft>
+                <a:spcPts val="900"/>
+              </a:spcAft>
+              <a:buClr>
+                <a:srgbClr val="7A2E43"/>
+              </a:buClr>
+              <a:buSzPct val="90000"/>
+              <a:buFont typeface="Arial"/>
+              <a:buChar char="–"/>
+            </a:pPr>
+            <a:r>
+              <a:rPr sz="1350" b="0" i="0">
+                <a:solidFill>
+                  <a:srgbClr val="2A1A1F"/>
+                </a:solidFill>
+                <a:latin typeface="Calibri"/>
+              </a:rPr>
+              <a:t>Memphis Group (1980s) — bold colour, clashing patterns, postmodern furniture and product design</a:t>
+            </a:r>
+          </a:p>
+          <a:p>
+            <a:pPr indent="-203200" marL="203200">
+              <a:spcAft>
+                <a:spcPts val="900"/>
+              </a:spcAft>
+              <a:buClr>
+                <a:srgbClr val="7A2E43"/>
+              </a:buClr>
+              <a:buSzPct val="90000"/>
+              <a:buFont typeface="Arial"/>
+              <a:buChar char="–"/>
+            </a:pPr>
+            <a:r>
+              <a:rPr sz="1350" b="0" i="0">
+                <a:solidFill>
+                  <a:srgbClr val="2A1A1F"/>
+                </a:solidFill>
+                <a:latin typeface="Calibri"/>
+              </a:rPr>
+              <a:t>Minimalism — reduction to essential form, 'less is more'</a:t>
+            </a:r>
+          </a:p>
+          <a:p>
+            <a:pPr indent="-203200" marL="203200">
+              <a:spcAft>
+                <a:spcPts val="900"/>
+              </a:spcAft>
+              <a:buClr>
+                <a:srgbClr val="7A2E43"/>
+              </a:buClr>
+              <a:buSzPct val="90000"/>
+              <a:buFont typeface="Arial"/>
+              <a:buChar char="–"/>
+            </a:pPr>
+            <a:r>
+              <a:rPr sz="1350" b="0" i="0">
+                <a:solidFill>
+                  <a:srgbClr val="2A1A1F"/>
+                </a:solidFill>
+                <a:latin typeface="Calibri"/>
+              </a:rPr>
+              <a:t>Brutalism — raw, unornamented forms in both architecture and web/graphic design</a:t>
+            </a:r>
+          </a:p>
+          <a:p>
+            <a:pPr indent="-203200" marL="203200">
+              <a:spcAft>
+                <a:spcPts val="900"/>
+              </a:spcAft>
+              <a:buClr>
+                <a:srgbClr val="7A2E43"/>
+              </a:buClr>
+              <a:buSzPct val="90000"/>
+              <a:buFont typeface="Arial"/>
+              <a:buChar char="●"/>
+            </a:pPr>
+            <a:r>
+              <a:rPr sz="1500" b="1" i="0">
+                <a:solidFill>
+                  <a:srgbClr val="672738"/>
+                </a:solidFill>
+                <a:latin typeface="Calibri"/>
+              </a:rPr>
+              <a:t>Contemporary considerations</a:t>
+            </a:r>
+          </a:p>
+          <a:p>
+            <a:pPr indent="-203200" marL="203200">
+              <a:spcAft>
+                <a:spcPts val="900"/>
+              </a:spcAft>
+              <a:buClr>
+                <a:srgbClr val="7A2E43"/>
+              </a:buClr>
+              <a:buSzPct val="90000"/>
+              <a:buFont typeface="Arial"/>
+              <a:buChar char="–"/>
+            </a:pPr>
+            <a:r>
+              <a:rPr sz="1350" b="0" i="0">
+                <a:solidFill>
+                  <a:srgbClr val="2A1A1F"/>
+                </a:solidFill>
+                <a:latin typeface="Calibri"/>
+              </a:rPr>
+              <a:t>Y2K aesthetic revival, AI-generated imagery and the ethical questions it raises around authorship and originality, and the growing influence of motion/interactive design as screens become the primary medium for communication design.</a:t>
             </a:r>
           </a:p>
         </p:txBody>
@@ -8756,7 +9347,7 @@
                 </a:solidFill>
                 <a:latin typeface="Cambria"/>
               </a:rPr>
-              <a:t>Designer Case Studies</a:t>
+              <a:t>Sustainable and Circular Design</a:t>
             </a:r>
           </a:p>
         </p:txBody>
@@ -8821,7 +9412,7 @@
                 </a:solidFill>
                 <a:latin typeface="Calibri"/>
               </a:rPr>
-              <a:t>Figures worth knowing</a:t>
+              <a:t>Key concepts</a:t>
             </a:r>
           </a:p>
           <a:p>
@@ -8843,7 +9434,7 @@
                 </a:solidFill>
                 <a:latin typeface="Calibri"/>
               </a:rPr>
-              <a:t>Paula Scher — bold typographic identity work (Citibank, The Public Theater)</a:t>
+              <a:t>Cradle-to-cradle design — products designed so materials can be fully recycled or biodegraded at end of life</a:t>
             </a:r>
           </a:p>
           <a:p>
@@ -8865,7 +9456,7 @@
                 </a:solidFill>
                 <a:latin typeface="Calibri"/>
               </a:rPr>
-              <a:t>Massimo Vignelli — Swiss-influenced systems design (New York City subway map)</a:t>
+              <a:t>Biomimicry — solving design problems by learning from natural systems and forms</a:t>
             </a:r>
           </a:p>
           <a:p>
@@ -8887,29 +9478,7 @@
                 </a:solidFill>
                 <a:latin typeface="Calibri"/>
               </a:rPr>
-              <a:t>Dieter Rams — 10 principles of good design, Braun product design</a:t>
-            </a:r>
-          </a:p>
-          <a:p>
-            <a:pPr indent="-203200" marL="203200">
-              <a:spcAft>
-                <a:spcPts val="900"/>
-              </a:spcAft>
-              <a:buClr>
-                <a:srgbClr val="7A2E43"/>
-              </a:buClr>
-              <a:buSzPct val="90000"/>
-              <a:buFont typeface="Arial"/>
-              <a:buChar char="–"/>
-            </a:pPr>
-            <a:r>
-              <a:rPr sz="1350" b="0" i="0">
-                <a:solidFill>
-                  <a:srgbClr val="2A1A1F"/>
-                </a:solidFill>
-                <a:latin typeface="Calibri"/>
-              </a:rPr>
-              <a:t>Saul Bass — pioneering film title sequences and corporate logos</a:t>
+              <a:t>Design for disassembly — products engineered to be easily taken apart for repair or recycling</a:t>
             </a:r>
           </a:p>
         </p:txBody>
@@ -8972,7 +9541,7 @@
     <p:bg>
       <p:bgPr>
         <a:solidFill>
-          <a:srgbClr val="7A2E43"/>
+          <a:srgbClr val="FBF5F1"/>
         </a:solidFill>
         <a:effectLst/>
       </p:bgPr>
@@ -8986,20 +9555,22 @@
       <p:grpSpPr/>
       <p:sp>
         <p:nvSpPr>
-          <p:cNvPr id="2" name="Oval 1"/>
+          <p:cNvPr id="2" name="Rounded Rectangle 1"/>
           <p:cNvSpPr/>
           <p:nvPr/>
         </p:nvSpPr>
         <p:spPr>
           <a:xfrm>
-            <a:off x="9692640" y="-914400"/>
-            <a:ext cx="2926080" cy="2926080"/>
-          </a:xfrm>
-          <a:prstGeom prst="ellipse">
-            <a:avLst/>
+            <a:off x="685800" y="502920"/>
+            <a:ext cx="3291840" cy="457200"/>
+          </a:xfrm>
+          <a:prstGeom prst="roundRect">
+            <a:avLst>
+              <a:gd name="adj" fmla="val 50000"/>
+            </a:avLst>
           </a:prstGeom>
           <a:solidFill>
-            <a:srgbClr val="6B283A"/>
+            <a:srgbClr val="7A2E43"/>
           </a:solidFill>
           <a:ln>
             <a:noFill/>
@@ -9021,29 +9592,75 @@
           </a:fontRef>
         </p:style>
         <p:txBody>
-          <a:bodyPr rtlCol="0" anchor="ctr"/>
+          <a:bodyPr rtlCol="0" anchor="ctr" wrap="none" lIns="50800" rIns="50800"/>
           <a:lstStyle/>
           <a:p>
             <a:pPr algn="ctr"/>
-          </a:p>
-        </p:txBody>
-      </p:sp>
-      <p:sp>
-        <p:nvSpPr>
-          <p:cNvPr id="3" name="Oval 2"/>
+            <a:r>
+              <a:rPr sz="1100" b="1">
+                <a:solidFill>
+                  <a:srgbClr val="FFFFFF"/>
+                </a:solidFill>
+                <a:latin typeface="Calibri"/>
+              </a:rPr>
+              <a:t>EXTENDED KNOWLEDGE</a:t>
+            </a:r>
+          </a:p>
+        </p:txBody>
+      </p:sp>
+      <p:sp>
+        <p:nvSpPr>
+          <p:cNvPr id="3" name="TextBox 2"/>
+          <p:cNvSpPr txBox="1"/>
+          <p:nvPr/>
+        </p:nvSpPr>
+        <p:spPr>
+          <a:xfrm>
+            <a:off x="685800" y="1051560"/>
+            <a:ext cx="10607040" cy="822960"/>
+          </a:xfrm>
+          <a:prstGeom prst="rect">
+            <a:avLst/>
+          </a:prstGeom>
+          <a:noFill/>
+        </p:spPr>
+        <p:txBody>
+          <a:bodyPr wrap="square" anchor="t">
+            <a:spAutoFit/>
+          </a:bodyPr>
+          <a:lstStyle/>
+          <a:p>
+            <a:pPr algn="l"/>
+            <a:r>
+              <a:rPr sz="2700" b="1" i="0">
+                <a:solidFill>
+                  <a:srgbClr val="2A1A1F"/>
+                </a:solidFill>
+                <a:latin typeface="Cambria"/>
+              </a:rPr>
+              <a:t>Branding and Identity Theory</a:t>
+            </a:r>
+          </a:p>
+        </p:txBody>
+      </p:sp>
+      <p:sp>
+        <p:nvSpPr>
+          <p:cNvPr id="4" name="Rounded Rectangle 3"/>
           <p:cNvSpPr/>
           <p:nvPr/>
         </p:nvSpPr>
         <p:spPr>
           <a:xfrm>
-            <a:off x="-914400" y="4937760"/>
-            <a:ext cx="2377440" cy="2377440"/>
-          </a:xfrm>
-          <a:prstGeom prst="ellipse">
-            <a:avLst/>
+            <a:off x="685800" y="1874519"/>
+            <a:ext cx="10607040" cy="4526280"/>
+          </a:xfrm>
+          <a:prstGeom prst="roundRect">
+            <a:avLst>
+              <a:gd name="adj" fmla="val 6000"/>
+            </a:avLst>
           </a:prstGeom>
           <a:solidFill>
-            <a:srgbClr val="6B283A"/>
+            <a:srgbClr val="F1EAEC"/>
           </a:solidFill>
           <a:ln>
             <a:noFill/>
@@ -9065,31 +9682,158 @@
           </a:fontRef>
         </p:style>
         <p:txBody>
-          <a:bodyPr rtlCol="0" anchor="ctr"/>
-          <a:lstStyle/>
-          <a:p>
-            <a:pPr algn="ctr"/>
-          </a:p>
-        </p:txBody>
-      </p:sp>
-      <p:sp>
-        <p:nvSpPr>
-          <p:cNvPr id="4" name="Rounded Rectangle 3"/>
+          <a:bodyPr rtlCol="0" anchor="ctr" lIns="330200" rIns="330200" tIns="254000" bIns="254000" wrap="square"/>
+          <a:lstStyle/>
+          <a:p>
+            <a:pPr algn="ctr" indent="-203200" marL="203200">
+              <a:spcAft>
+                <a:spcPts val="900"/>
+              </a:spcAft>
+              <a:buClr>
+                <a:srgbClr val="7A2E43"/>
+              </a:buClr>
+              <a:buSzPct val="90000"/>
+              <a:buFont typeface="Arial"/>
+              <a:buChar char="●"/>
+            </a:pPr>
+            <a:r>
+              <a:rPr sz="1500" b="1" i="0">
+                <a:solidFill>
+                  <a:srgbClr val="672738"/>
+                </a:solidFill>
+                <a:latin typeface="Calibri"/>
+              </a:rPr>
+              <a:t>Core concepts</a:t>
+            </a:r>
+          </a:p>
+          <a:p>
+            <a:pPr indent="-203200" marL="203200">
+              <a:spcAft>
+                <a:spcPts val="900"/>
+              </a:spcAft>
+              <a:buClr>
+                <a:srgbClr val="7A2E43"/>
+              </a:buClr>
+              <a:buSzPct val="90000"/>
+              <a:buFont typeface="Arial"/>
+              <a:buChar char="–"/>
+            </a:pPr>
+            <a:r>
+              <a:rPr sz="1350" b="0" i="0">
+                <a:solidFill>
+                  <a:srgbClr val="2A1A1F"/>
+                </a:solidFill>
+                <a:latin typeface="Calibri"/>
+              </a:rPr>
+              <a:t>Brand architecture — how a company organises and relates multiple sub-brands</a:t>
+            </a:r>
+          </a:p>
+          <a:p>
+            <a:pPr indent="-203200" marL="203200">
+              <a:spcAft>
+                <a:spcPts val="900"/>
+              </a:spcAft>
+              <a:buClr>
+                <a:srgbClr val="7A2E43"/>
+              </a:buClr>
+              <a:buSzPct val="90000"/>
+              <a:buFont typeface="Arial"/>
+              <a:buChar char="–"/>
+            </a:pPr>
+            <a:r>
+              <a:rPr sz="1350" b="0" i="0">
+                <a:solidFill>
+                  <a:srgbClr val="2A1A1F"/>
+                </a:solidFill>
+                <a:latin typeface="Calibri"/>
+              </a:rPr>
+              <a:t>Tone of voice — the consistent personality expressed through language and visuals</a:t>
+            </a:r>
+          </a:p>
+          <a:p>
+            <a:pPr indent="-203200" marL="203200">
+              <a:spcAft>
+                <a:spcPts val="900"/>
+              </a:spcAft>
+              <a:buClr>
+                <a:srgbClr val="7A2E43"/>
+              </a:buClr>
+              <a:buSzPct val="90000"/>
+              <a:buFont typeface="Arial"/>
+              <a:buChar char="–"/>
+            </a:pPr>
+            <a:r>
+              <a:rPr sz="1350" b="0" i="0">
+                <a:solidFill>
+                  <a:srgbClr val="2A1A1F"/>
+                </a:solidFill>
+                <a:latin typeface="Calibri"/>
+              </a:rPr>
+              <a:t>Brand guidelines — documented rules for logo use, colour, type and imagery</a:t>
+            </a:r>
+          </a:p>
+          <a:p>
+            <a:pPr indent="-203200" marL="203200">
+              <a:spcAft>
+                <a:spcPts val="900"/>
+              </a:spcAft>
+              <a:buClr>
+                <a:srgbClr val="7A2E43"/>
+              </a:buClr>
+              <a:buSzPct val="90000"/>
+              <a:buFont typeface="Arial"/>
+              <a:buChar char="●"/>
+            </a:pPr>
+            <a:r>
+              <a:rPr sz="1500" b="1" i="0">
+                <a:solidFill>
+                  <a:srgbClr val="672738"/>
+                </a:solidFill>
+                <a:latin typeface="Calibri"/>
+              </a:rPr>
+              <a:t>Worth researching</a:t>
+            </a:r>
+          </a:p>
+          <a:p>
+            <a:pPr indent="-203200" marL="203200">
+              <a:spcAft>
+                <a:spcPts val="900"/>
+              </a:spcAft>
+              <a:buClr>
+                <a:srgbClr val="7A2E43"/>
+              </a:buClr>
+              <a:buSzPct val="90000"/>
+              <a:buFont typeface="Arial"/>
+              <a:buChar char="–"/>
+            </a:pPr>
+            <a:r>
+              <a:rPr sz="1350" b="0" i="0">
+                <a:solidFill>
+                  <a:srgbClr val="2A1A1F"/>
+                </a:solidFill>
+                <a:latin typeface="Calibri"/>
+              </a:rPr>
+              <a:t>Case studies of how major brands have evolved their logos over decades (simplification for digital screens is a common contemporary driver) make strong exam and folio examples.</a:t>
+            </a:r>
+          </a:p>
+        </p:txBody>
+      </p:sp>
+      <p:sp>
+        <p:nvSpPr>
+          <p:cNvPr id="5" name="Oval 4"/>
           <p:cNvSpPr/>
           <p:nvPr/>
         </p:nvSpPr>
         <p:spPr>
           <a:xfrm>
-            <a:off x="822960" y="1051560"/>
-            <a:ext cx="1188720" cy="502920"/>
-          </a:xfrm>
-          <a:prstGeom prst="roundRect">
-            <a:avLst>
-              <a:gd name="adj" fmla="val 50000"/>
-            </a:avLst>
+            <a:off x="10881360" y="5943600"/>
+            <a:ext cx="1005840" cy="1005840"/>
+          </a:xfrm>
+          <a:prstGeom prst="ellipse">
+            <a:avLst/>
           </a:prstGeom>
           <a:solidFill>
-            <a:srgbClr val="FFFFFF"/>
+            <a:srgbClr val="EDCBD3"/>
           </a:solidFill>
           <a:ln>
             <a:noFill/>
@@ -9111,135 +9855,10 @@
           </a:fontRef>
         </p:style>
         <p:txBody>
-          <a:bodyPr rtlCol="0" anchor="ctr" wrap="none" lIns="50800" rIns="50800"/>
+          <a:bodyPr rtlCol="0" anchor="ctr"/>
           <a:lstStyle/>
           <a:p>
             <a:pPr algn="ctr"/>
-            <a:r>
-              <a:rPr sz="1400" b="1">
-                <a:solidFill>
-                  <a:srgbClr val="612435"/>
-                </a:solidFill>
-                <a:latin typeface="Calibri"/>
-              </a:rPr>
-              <a:t>04</a:t>
-            </a:r>
-          </a:p>
-        </p:txBody>
-      </p:sp>
-      <p:sp>
-        <p:nvSpPr>
-          <p:cNvPr id="5" name="Rounded Rectangle 4"/>
-          <p:cNvSpPr/>
-          <p:nvPr/>
-        </p:nvSpPr>
-        <p:spPr>
-          <a:xfrm>
-            <a:off x="822960" y="2011680"/>
-            <a:ext cx="10515600" cy="2834640"/>
-          </a:xfrm>
-          <a:prstGeom prst="roundRect">
-            <a:avLst>
-              <a:gd name="adj" fmla="val 18000"/>
-            </a:avLst>
-          </a:prstGeom>
-          <a:solidFill>
-            <a:srgbClr val="FFFFFF"/>
-          </a:solidFill>
-          <a:ln>
-            <a:noFill/>
-          </a:ln>
-          <a:effectLst/>
-        </p:spPr>
-        <p:style>
-          <a:lnRef idx="1">
-            <a:schemeClr val="accent1"/>
-          </a:lnRef>
-          <a:fillRef idx="3">
-            <a:schemeClr val="accent1"/>
-          </a:fillRef>
-          <a:effectRef idx="2">
-            <a:schemeClr val="accent1"/>
-          </a:effectRef>
-          <a:fontRef idx="minor">
-            <a:schemeClr val="lt1"/>
-          </a:fontRef>
-        </p:style>
-        <p:txBody>
-          <a:bodyPr rtlCol="0" anchor="ctr"/>
-          <a:lstStyle/>
-          <a:p>
-            <a:pPr algn="ctr"/>
-          </a:p>
-        </p:txBody>
-      </p:sp>
-      <p:sp>
-        <p:nvSpPr>
-          <p:cNvPr id="6" name="TextBox 5"/>
-          <p:cNvSpPr txBox="1"/>
-          <p:nvPr/>
-        </p:nvSpPr>
-        <p:spPr>
-          <a:xfrm>
-            <a:off x="1280160" y="2697480"/>
-            <a:ext cx="9601200" cy="1097280"/>
-          </a:xfrm>
-          <a:prstGeom prst="rect">
-            <a:avLst/>
-          </a:prstGeom>
-          <a:noFill/>
-        </p:spPr>
-        <p:txBody>
-          <a:bodyPr wrap="square" anchor="t">
-            <a:spAutoFit/>
-          </a:bodyPr>
-          <a:lstStyle/>
-          <a:p>
-            <a:pPr algn="l"/>
-            <a:r>
-              <a:rPr sz="3400" b="1" i="0">
-                <a:solidFill>
-                  <a:srgbClr val="672738"/>
-                </a:solidFill>
-                <a:latin typeface="Cambria"/>
-              </a:rPr>
-              <a:t>SAC Briefing</a:t>
-            </a:r>
-          </a:p>
-        </p:txBody>
-      </p:sp>
-      <p:sp>
-        <p:nvSpPr>
-          <p:cNvPr id="7" name="TextBox 6"/>
-          <p:cNvSpPr txBox="1"/>
-          <p:nvPr/>
-        </p:nvSpPr>
-        <p:spPr>
-          <a:xfrm>
-            <a:off x="1280160" y="3657600"/>
-            <a:ext cx="9601200" cy="548640"/>
-          </a:xfrm>
-          <a:prstGeom prst="rect">
-            <a:avLst/>
-          </a:prstGeom>
-          <a:noFill/>
-        </p:spPr>
-        <p:txBody>
-          <a:bodyPr wrap="square" anchor="t">
-            <a:spAutoFit/>
-          </a:bodyPr>
-          <a:lstStyle/>
-          <a:p>
-            <a:pPr algn="l"/>
-            <a:r>
-              <a:rPr sz="1500" b="0" i="0">
-                <a:solidFill>
-                  <a:srgbClr val="6B6B6B"/>
-                </a:solidFill>
-                <a:latin typeface="Calibri"/>
-              </a:rPr>
-              <a:t>Draft — confirm against your school’s SAC schedule</a:t>
-            </a:r>
           </a:p>
         </p:txBody>
       </p:sp>
@@ -9319,7 +9938,7 @@
                 </a:solidFill>
                 <a:latin typeface="Calibri"/>
               </a:rPr>
-              <a:t>SAC BRIEFING</a:t>
+              <a:t>EXTENDED KNOWLEDGE</a:t>
             </a:r>
           </a:p>
         </p:txBody>
@@ -9354,7 +9973,7 @@
                 </a:solidFill>
                 <a:latin typeface="Cambria"/>
               </a:rPr>
-              <a:t>Outcome 1 (AOS 1) — Trends in Design</a:t>
+              <a:t>UX/UI and Service Design Basics</a:t>
             </a:r>
           </a:p>
         </p:txBody>
@@ -9401,25 +10020,20 @@
           <a:bodyPr rtlCol="0" anchor="ctr" lIns="330200" rIns="330200" tIns="254000" bIns="254000" wrap="square"/>
           <a:lstStyle/>
           <a:p>
-            <a:pPr algn="ctr" indent="-203200" marL="203200">
+            <a:pPr algn="ctr">
               <a:spcAft>
                 <a:spcPts val="900"/>
               </a:spcAft>
-              <a:buClr>
-                <a:srgbClr val="7A2E43"/>
-              </a:buClr>
-              <a:buSzPct val="90000"/>
-              <a:buFont typeface="Arial"/>
-              <a:buChar char="●"/>
+              <a:buNone/>
             </a:pPr>
             <a:r>
-              <a:rPr sz="1500" b="1" i="0">
+              <a:rPr sz="1350" b="1" i="1">
                 <a:solidFill>
                   <a:srgbClr val="672738"/>
                 </a:solidFill>
                 <a:latin typeface="Calibri"/>
               </a:rPr>
-              <a:t>Task</a:t>
+              <a:t>Key terms</a:t>
             </a:r>
           </a:p>
           <a:p>
@@ -9441,29 +10055,7 @@
                 </a:solidFill>
                 <a:latin typeface="Calibri"/>
               </a:rPr>
-              <a:t>Select a current design trend. Analyse how it manifests across at least two design fields, identifying the factor(s) driving it. Respond as a structured written report or exam-style short-answer responses.</a:t>
-            </a:r>
-          </a:p>
-          <a:p>
-            <a:pPr indent="-203200" marL="203200">
-              <a:spcAft>
-                <a:spcPts val="900"/>
-              </a:spcAft>
-              <a:buClr>
-                <a:srgbClr val="7A2E43"/>
-              </a:buClr>
-              <a:buSzPct val="90000"/>
-              <a:buFont typeface="Arial"/>
-              <a:buChar char="●"/>
-            </a:pPr>
-            <a:r>
-              <a:rPr sz="1500" b="1" i="0">
-                <a:solidFill>
-                  <a:srgbClr val="672738"/>
-                </a:solidFill>
-                <a:latin typeface="Calibri"/>
-              </a:rPr>
-              <a:t>Conditions</a:t>
+              <a:t>User persona — a fictional profile representing a target user segment</a:t>
             </a:r>
           </a:p>
           <a:p>
@@ -9485,7 +10077,7 @@
                 </a:solidFill>
                 <a:latin typeface="Calibri"/>
               </a:rPr>
-              <a:t>Completed in class over 1-2 periods</a:t>
+              <a:t>User journey map — a visualisation of the steps a user takes to complete a task</a:t>
             </a:r>
           </a:p>
           <a:p>
@@ -9507,7 +10099,7 @@
                 </a:solidFill>
                 <a:latin typeface="Calibri"/>
               </a:rPr>
-              <a:t>Notes permitted; no internet access</a:t>
+              <a:t>Wireframe — a low-fidelity structural sketch of an interface, before visual design is applied</a:t>
             </a:r>
           </a:p>
           <a:p>
@@ -9529,117 +10121,7 @@
                 </a:solidFill>
                 <a:latin typeface="Calibri"/>
               </a:rPr>
-              <a:t>Individual, supervised work</a:t>
-            </a:r>
-          </a:p>
-          <a:p>
-            <a:pPr indent="-203200" marL="203200">
-              <a:spcAft>
-                <a:spcPts val="900"/>
-              </a:spcAft>
-              <a:buClr>
-                <a:srgbClr val="7A2E43"/>
-              </a:buClr>
-              <a:buSzPct val="90000"/>
-              <a:buFont typeface="Arial"/>
-              <a:buChar char="●"/>
-            </a:pPr>
-            <a:r>
-              <a:rPr sz="1500" b="1" i="0">
-                <a:solidFill>
-                  <a:srgbClr val="672738"/>
-                </a:solidFill>
-                <a:latin typeface="Calibri"/>
-              </a:rPr>
-              <a:t>Assessment Criteria (/30)</a:t>
-            </a:r>
-          </a:p>
-          <a:p>
-            <a:pPr indent="-203200" marL="203200">
-              <a:spcAft>
-                <a:spcPts val="900"/>
-              </a:spcAft>
-              <a:buClr>
-                <a:srgbClr val="7A2E43"/>
-              </a:buClr>
-              <a:buSzPct val="90000"/>
-              <a:buFont typeface="Arial"/>
-              <a:buChar char="–"/>
-            </a:pPr>
-            <a:r>
-              <a:rPr sz="1350" b="0" i="0">
-                <a:solidFill>
-                  <a:srgbClr val="2A1A1F"/>
-                </a:solidFill>
-                <a:latin typeface="Calibri"/>
-              </a:rPr>
-              <a:t>Identification of trend and driving factor(s) — 5 marks</a:t>
-            </a:r>
-          </a:p>
-          <a:p>
-            <a:pPr indent="-203200" marL="203200">
-              <a:spcAft>
-                <a:spcPts val="900"/>
-              </a:spcAft>
-              <a:buClr>
-                <a:srgbClr val="7A2E43"/>
-              </a:buClr>
-              <a:buSzPct val="90000"/>
-              <a:buFont typeface="Arial"/>
-              <a:buChar char="–"/>
-            </a:pPr>
-            <a:r>
-              <a:rPr sz="1350" b="0" i="0">
-                <a:solidFill>
-                  <a:srgbClr val="2A1A1F"/>
-                </a:solidFill>
-                <a:latin typeface="Calibri"/>
-              </a:rPr>
-              <a:t>Analysis across 2+ design fields with specific evidence — 15 marks</a:t>
-            </a:r>
-          </a:p>
-          <a:p>
-            <a:pPr indent="-203200" marL="203200">
-              <a:spcAft>
-                <a:spcPts val="900"/>
-              </a:spcAft>
-              <a:buClr>
-                <a:srgbClr val="7A2E43"/>
-              </a:buClr>
-              <a:buSzPct val="90000"/>
-              <a:buFont typeface="Arial"/>
-              <a:buChar char="–"/>
-            </a:pPr>
-            <a:r>
-              <a:rPr sz="1350" b="0" i="0">
-                <a:solidFill>
-                  <a:srgbClr val="2A1A1F"/>
-                </a:solidFill>
-                <a:latin typeface="Calibri"/>
-              </a:rPr>
-              <a:t>Use of accurate vocabulary — 5 marks</a:t>
-            </a:r>
-          </a:p>
-          <a:p>
-            <a:pPr indent="-203200" marL="203200">
-              <a:spcAft>
-                <a:spcPts val="900"/>
-              </a:spcAft>
-              <a:buClr>
-                <a:srgbClr val="7A2E43"/>
-              </a:buClr>
-              <a:buSzPct val="90000"/>
-              <a:buFont typeface="Arial"/>
-              <a:buChar char="–"/>
-            </a:pPr>
-            <a:r>
-              <a:rPr sz="1350" b="0" i="0">
-                <a:solidFill>
-                  <a:srgbClr val="2A1A1F"/>
-                </a:solidFill>
-                <a:latin typeface="Calibri"/>
-              </a:rPr>
-              <a:t>Written expression — 5 marks</a:t>
+              <a:t>Service design — designing the end-to-end experience of a service, not just a single artefact</a:t>
             </a:r>
           </a:p>
         </p:txBody>
@@ -9764,7 +10246,7 @@
                 </a:solidFill>
                 <a:latin typeface="Calibri"/>
               </a:rPr>
-              <a:t>SAC BRIEFING</a:t>
+              <a:t>EXTENDED KNOWLEDGE</a:t>
             </a:r>
           </a:p>
         </p:txBody>
@@ -9799,7 +10281,7 @@
                 </a:solidFill>
                 <a:latin typeface="Cambria"/>
               </a:rPr>
-              <a:t>Outcome 2 (AOS 2) — Design and Industry Connections</a:t>
+              <a:t>Design Ethics and Responsibility</a:t>
             </a:r>
           </a:p>
         </p:txBody>
@@ -9864,7 +10346,7 @@
                 </a:solidFill>
                 <a:latin typeface="Calibri"/>
               </a:rPr>
-              <a:t>Task</a:t>
+              <a:t>Issues to be aware of</a:t>
             </a:r>
           </a:p>
           <a:p>
@@ -9886,29 +10368,7 @@
                 </a:solidFill>
                 <a:latin typeface="Calibri"/>
               </a:rPr>
-              <a:t>Respond to a brief requiring industry awareness: produce a visual communication in one design field, while documenting at least one industry connection (a collaboration role, an intellectual property consideration, or an industry factor) relevant to the project.</a:t>
-            </a:r>
-          </a:p>
-          <a:p>
-            <a:pPr indent="-203200" marL="203200">
-              <a:spcAft>
-                <a:spcPts val="900"/>
-              </a:spcAft>
-              <a:buClr>
-                <a:srgbClr val="7A2E43"/>
-              </a:buClr>
-              <a:buSzPct val="90000"/>
-              <a:buFont typeface="Arial"/>
-              <a:buChar char="●"/>
-            </a:pPr>
-            <a:r>
-              <a:rPr sz="1500" b="1" i="0">
-                <a:solidFill>
-                  <a:srgbClr val="672738"/>
-                </a:solidFill>
-                <a:latin typeface="Calibri"/>
-              </a:rPr>
-              <a:t>Conditions</a:t>
+              <a:t>Dark patterns — interface designs that deliberately trick users into unintended actions</a:t>
             </a:r>
           </a:p>
           <a:p>
@@ -9930,7 +10390,7 @@
                 </a:solidFill>
                 <a:latin typeface="Calibri"/>
               </a:rPr>
-              <a:t>Completed over approximately 3-4 weeks</a:t>
+              <a:t>Greenwashing — packaging/branding that overstates environmental credentials</a:t>
             </a:r>
           </a:p>
           <a:p>
@@ -9952,7 +10412,7 @@
                 </a:solidFill>
                 <a:latin typeface="Calibri"/>
               </a:rPr>
-              <a:t>Folio submission combining process work and final piece</a:t>
+              <a:t>Cultural appropriation vs appreciation — using cultural motifs respectfully and with context</a:t>
             </a:r>
           </a:p>
           <a:p>
@@ -9974,11 +10434,214 @@
                 </a:solidFill>
                 <a:latin typeface="Calibri"/>
               </a:rPr>
-              <a:t>Individual work</a:t>
-            </a:r>
-          </a:p>
-          <a:p>
-            <a:pPr indent="-203200" marL="203200">
+              <a:t>Inclusive design — designing for the widest possible range of users, including disability</a:t>
+            </a:r>
+          </a:p>
+        </p:txBody>
+      </p:sp>
+      <p:sp>
+        <p:nvSpPr>
+          <p:cNvPr id="5" name="Oval 4"/>
+          <p:cNvSpPr/>
+          <p:nvPr/>
+        </p:nvSpPr>
+        <p:spPr>
+          <a:xfrm>
+            <a:off x="10881360" y="5943600"/>
+            <a:ext cx="1005840" cy="1005840"/>
+          </a:xfrm>
+          <a:prstGeom prst="ellipse">
+            <a:avLst/>
+          </a:prstGeom>
+          <a:solidFill>
+            <a:srgbClr val="EDCBD3"/>
+          </a:solidFill>
+          <a:ln>
+            <a:noFill/>
+          </a:ln>
+          <a:effectLst/>
+        </p:spPr>
+        <p:style>
+          <a:lnRef idx="1">
+            <a:schemeClr val="accent1"/>
+          </a:lnRef>
+          <a:fillRef idx="3">
+            <a:schemeClr val="accent1"/>
+          </a:fillRef>
+          <a:effectRef idx="2">
+            <a:schemeClr val="accent1"/>
+          </a:effectRef>
+          <a:fontRef idx="minor">
+            <a:schemeClr val="lt1"/>
+          </a:fontRef>
+        </p:style>
+        <p:txBody>
+          <a:bodyPr rtlCol="0" anchor="ctr"/>
+          <a:lstStyle/>
+          <a:p>
+            <a:pPr algn="ctr"/>
+          </a:p>
+        </p:txBody>
+      </p:sp>
+    </p:spTree>
+  </p:cSld>
+  <p:clrMapOvr>
+    <a:masterClrMapping/>
+  </p:clrMapOvr>
+</p:sld>
+</file>
+
+<file path=ppt/slides/slide27.xml><?xml version="1.0" encoding="utf-8"?>
+<p:sld xmlns:a="http://schemas.openxmlformats.org/drawingml/2006/main" xmlns:p="http://schemas.openxmlformats.org/presentationml/2006/main" xmlns:r="http://schemas.openxmlformats.org/officeDocument/2006/relationships">
+  <p:cSld>
+    <p:bg>
+      <p:bgPr>
+        <a:solidFill>
+          <a:srgbClr val="FBF5F1"/>
+        </a:solidFill>
+        <a:effectLst/>
+      </p:bgPr>
+    </p:bg>
+    <p:spTree>
+      <p:nvGrpSpPr>
+        <p:cNvPr id="1" name=""/>
+        <p:cNvGrpSpPr/>
+        <p:nvPr/>
+      </p:nvGrpSpPr>
+      <p:grpSpPr/>
+      <p:sp>
+        <p:nvSpPr>
+          <p:cNvPr id="2" name="Rounded Rectangle 1"/>
+          <p:cNvSpPr/>
+          <p:nvPr/>
+        </p:nvSpPr>
+        <p:spPr>
+          <a:xfrm>
+            <a:off x="685800" y="502920"/>
+            <a:ext cx="3291840" cy="457200"/>
+          </a:xfrm>
+          <a:prstGeom prst="roundRect">
+            <a:avLst>
+              <a:gd name="adj" fmla="val 50000"/>
+            </a:avLst>
+          </a:prstGeom>
+          <a:solidFill>
+            <a:srgbClr val="7A2E43"/>
+          </a:solidFill>
+          <a:ln>
+            <a:noFill/>
+          </a:ln>
+          <a:effectLst/>
+        </p:spPr>
+        <p:style>
+          <a:lnRef idx="1">
+            <a:schemeClr val="accent1"/>
+          </a:lnRef>
+          <a:fillRef idx="3">
+            <a:schemeClr val="accent1"/>
+          </a:fillRef>
+          <a:effectRef idx="2">
+            <a:schemeClr val="accent1"/>
+          </a:effectRef>
+          <a:fontRef idx="minor">
+            <a:schemeClr val="lt1"/>
+          </a:fontRef>
+        </p:style>
+        <p:txBody>
+          <a:bodyPr rtlCol="0" anchor="ctr" wrap="none" lIns="50800" rIns="50800"/>
+          <a:lstStyle/>
+          <a:p>
+            <a:pPr algn="ctr"/>
+            <a:r>
+              <a:rPr sz="1100" b="1">
+                <a:solidFill>
+                  <a:srgbClr val="FFFFFF"/>
+                </a:solidFill>
+                <a:latin typeface="Calibri"/>
+              </a:rPr>
+              <a:t>EXTENDED KNOWLEDGE</a:t>
+            </a:r>
+          </a:p>
+        </p:txBody>
+      </p:sp>
+      <p:sp>
+        <p:nvSpPr>
+          <p:cNvPr id="3" name="TextBox 2"/>
+          <p:cNvSpPr txBox="1"/>
+          <p:nvPr/>
+        </p:nvSpPr>
+        <p:spPr>
+          <a:xfrm>
+            <a:off x="685800" y="1051560"/>
+            <a:ext cx="10607040" cy="822960"/>
+          </a:xfrm>
+          <a:prstGeom prst="rect">
+            <a:avLst/>
+          </a:prstGeom>
+          <a:noFill/>
+        </p:spPr>
+        <p:txBody>
+          <a:bodyPr wrap="square" anchor="t">
+            <a:spAutoFit/>
+          </a:bodyPr>
+          <a:lstStyle/>
+          <a:p>
+            <a:pPr algn="l"/>
+            <a:r>
+              <a:rPr sz="2700" b="1" i="0">
+                <a:solidFill>
+                  <a:srgbClr val="2A1A1F"/>
+                </a:solidFill>
+                <a:latin typeface="Cambria"/>
+              </a:rPr>
+              <a:t>Designer Case Studies</a:t>
+            </a:r>
+          </a:p>
+        </p:txBody>
+      </p:sp>
+      <p:sp>
+        <p:nvSpPr>
+          <p:cNvPr id="4" name="Rounded Rectangle 3"/>
+          <p:cNvSpPr/>
+          <p:nvPr/>
+        </p:nvSpPr>
+        <p:spPr>
+          <a:xfrm>
+            <a:off x="685800" y="1874519"/>
+            <a:ext cx="10607040" cy="4526280"/>
+          </a:xfrm>
+          <a:prstGeom prst="roundRect">
+            <a:avLst>
+              <a:gd name="adj" fmla="val 6000"/>
+            </a:avLst>
+          </a:prstGeom>
+          <a:solidFill>
+            <a:srgbClr val="F1EAEC"/>
+          </a:solidFill>
+          <a:ln>
+            <a:noFill/>
+          </a:ln>
+          <a:effectLst/>
+        </p:spPr>
+        <p:style>
+          <a:lnRef idx="1">
+            <a:schemeClr val="accent1"/>
+          </a:lnRef>
+          <a:fillRef idx="3">
+            <a:schemeClr val="accent1"/>
+          </a:fillRef>
+          <a:effectRef idx="2">
+            <a:schemeClr val="accent1"/>
+          </a:effectRef>
+          <a:fontRef idx="minor">
+            <a:schemeClr val="lt1"/>
+          </a:fontRef>
+        </p:style>
+        <p:txBody>
+          <a:bodyPr rtlCol="0" anchor="ctr" lIns="330200" rIns="330200" tIns="254000" bIns="254000" wrap="square"/>
+          <a:lstStyle/>
+          <a:p>
+            <a:pPr algn="ctr" indent="-203200" marL="203200">
               <a:spcAft>
                 <a:spcPts val="900"/>
               </a:spcAft>
@@ -9996,7 +10659,7 @@
                 </a:solidFill>
                 <a:latin typeface="Calibri"/>
               </a:rPr>
-              <a:t>Assessment Criteria (/50)</a:t>
+              <a:t>Figures worth knowing</a:t>
             </a:r>
           </a:p>
           <a:p>
@@ -10018,7 +10681,7 @@
                 </a:solidFill>
                 <a:latin typeface="Calibri"/>
               </a:rPr>
-              <a:t>Response to the brief — 15 marks</a:t>
+              <a:t>Paula Scher — bold typographic identity work (Citibank, The Public Theater)</a:t>
             </a:r>
           </a:p>
           <a:p>
@@ -10040,7 +10703,7 @@
                 </a:solidFill>
                 <a:latin typeface="Calibri"/>
               </a:rPr>
-              <a:t>Evidence of the design process — 15 marks</a:t>
+              <a:t>Massimo Vignelli — Swiss-influenced systems design (New York City subway map)</a:t>
             </a:r>
           </a:p>
           <a:p>
@@ -10062,7 +10725,7 @@
                 </a:solidFill>
                 <a:latin typeface="Calibri"/>
               </a:rPr>
-              <a:t>Discussion of industry connection(s) — 10 marks</a:t>
+              <a:t>Dieter Rams — 10 principles of good design, Braun product design</a:t>
             </a:r>
           </a:p>
           <a:p>
@@ -10084,7 +10747,7 @@
                 </a:solidFill>
                 <a:latin typeface="Calibri"/>
               </a:rPr>
-              <a:t>Quality of final presentation — 10 marks</a:t>
+              <a:t>Saul Bass — pioneering film title sequences and corporate logos</a:t>
             </a:r>
           </a:p>
         </p:txBody>
@@ -10141,7 +10804,443 @@
 </p:sld>
 </file>
 
-<file path=ppt/slides/slide27.xml><?xml version="1.0" encoding="utf-8"?>
+<file path=ppt/slides/slide28.xml><?xml version="1.0" encoding="utf-8"?>
+<p:sld xmlns:a="http://schemas.openxmlformats.org/drawingml/2006/main" xmlns:p="http://schemas.openxmlformats.org/presentationml/2006/main" xmlns:r="http://schemas.openxmlformats.org/officeDocument/2006/relationships">
+  <p:cSld>
+    <p:bg>
+      <p:bgPr>
+        <a:solidFill>
+          <a:srgbClr val="D98C9E"/>
+        </a:solidFill>
+        <a:effectLst/>
+      </p:bgPr>
+    </p:bg>
+    <p:spTree>
+      <p:nvGrpSpPr>
+        <p:cNvPr id="1" name=""/>
+        <p:cNvGrpSpPr/>
+        <p:nvPr/>
+      </p:nvGrpSpPr>
+      <p:grpSpPr/>
+      <p:sp>
+        <p:nvSpPr>
+          <p:cNvPr id="2" name="Oval 1"/>
+          <p:cNvSpPr/>
+          <p:nvPr/>
+        </p:nvSpPr>
+        <p:spPr>
+          <a:xfrm>
+            <a:off x="-914400" y="-914400"/>
+            <a:ext cx="2103120" cy="2103120"/>
+          </a:xfrm>
+          <a:prstGeom prst="ellipse">
+            <a:avLst/>
+          </a:prstGeom>
+          <a:solidFill>
+            <a:srgbClr val="BE7B8B"/>
+          </a:solidFill>
+          <a:ln>
+            <a:noFill/>
+          </a:ln>
+          <a:effectLst/>
+        </p:spPr>
+        <p:style>
+          <a:lnRef idx="1">
+            <a:schemeClr val="accent1"/>
+          </a:lnRef>
+          <a:fillRef idx="3">
+            <a:schemeClr val="accent1"/>
+          </a:fillRef>
+          <a:effectRef idx="2">
+            <a:schemeClr val="accent1"/>
+          </a:effectRef>
+          <a:fontRef idx="minor">
+            <a:schemeClr val="lt1"/>
+          </a:fontRef>
+        </p:style>
+        <p:txBody>
+          <a:bodyPr rtlCol="0" anchor="ctr"/>
+          <a:lstStyle/>
+          <a:p>
+            <a:pPr algn="ctr"/>
+          </a:p>
+        </p:txBody>
+      </p:sp>
+      <p:sp>
+        <p:nvSpPr>
+          <p:cNvPr id="3" name="Oval 2"/>
+          <p:cNvSpPr/>
+          <p:nvPr/>
+        </p:nvSpPr>
+        <p:spPr>
+          <a:xfrm>
+            <a:off x="11064240" y="5852160"/>
+            <a:ext cx="1737360" cy="1737360"/>
+          </a:xfrm>
+          <a:prstGeom prst="ellipse">
+            <a:avLst/>
+          </a:prstGeom>
+          <a:solidFill>
+            <a:srgbClr val="BE7B8B"/>
+          </a:solidFill>
+          <a:ln>
+            <a:noFill/>
+          </a:ln>
+          <a:effectLst/>
+        </p:spPr>
+        <p:style>
+          <a:lnRef idx="1">
+            <a:schemeClr val="accent1"/>
+          </a:lnRef>
+          <a:fillRef idx="3">
+            <a:schemeClr val="accent1"/>
+          </a:fillRef>
+          <a:effectRef idx="2">
+            <a:schemeClr val="accent1"/>
+          </a:effectRef>
+          <a:fontRef idx="minor">
+            <a:schemeClr val="lt1"/>
+          </a:fontRef>
+        </p:style>
+        <p:txBody>
+          <a:bodyPr rtlCol="0" anchor="ctr"/>
+          <a:lstStyle/>
+          <a:p>
+            <a:pPr algn="ctr"/>
+          </a:p>
+        </p:txBody>
+      </p:sp>
+      <p:sp>
+        <p:nvSpPr>
+          <p:cNvPr id="4" name="Rounded Rectangle 3"/>
+          <p:cNvSpPr/>
+          <p:nvPr/>
+        </p:nvSpPr>
+        <p:spPr>
+          <a:xfrm>
+            <a:off x="685800" y="457200"/>
+            <a:ext cx="1033271" cy="502920"/>
+          </a:xfrm>
+          <a:prstGeom prst="roundRect">
+            <a:avLst>
+              <a:gd name="adj" fmla="val 50000"/>
+            </a:avLst>
+          </a:prstGeom>
+          <a:solidFill>
+            <a:srgbClr val="FFFFFF"/>
+          </a:solidFill>
+          <a:ln>
+            <a:noFill/>
+          </a:ln>
+          <a:effectLst/>
+        </p:spPr>
+        <p:style>
+          <a:lnRef idx="1">
+            <a:schemeClr val="accent1"/>
+          </a:lnRef>
+          <a:fillRef idx="3">
+            <a:schemeClr val="accent1"/>
+          </a:fillRef>
+          <a:effectRef idx="2">
+            <a:schemeClr val="accent1"/>
+          </a:effectRef>
+          <a:fontRef idx="minor">
+            <a:schemeClr val="lt1"/>
+          </a:fontRef>
+        </p:style>
+        <p:txBody>
+          <a:bodyPr rtlCol="0" anchor="ctr"/>
+          <a:lstStyle/>
+          <a:p>
+            <a:pPr algn="ctr"/>
+            <a:r>
+              <a:rPr b="1" sz="1400">
+                <a:solidFill>
+                  <a:srgbClr val="8D5B66"/>
+                </a:solidFill>
+                <a:latin typeface="Calibri"/>
+              </a:rPr>
+              <a:t>GAME</a:t>
+            </a:r>
+          </a:p>
+        </p:txBody>
+      </p:sp>
+      <p:sp>
+        <p:nvSpPr>
+          <p:cNvPr id="5" name="TextBox 4"/>
+          <p:cNvSpPr txBox="1"/>
+          <p:nvPr/>
+        </p:nvSpPr>
+        <p:spPr>
+          <a:xfrm>
+            <a:off x="685800" y="1143000"/>
+            <a:ext cx="10607040" cy="914400"/>
+          </a:xfrm>
+          <a:prstGeom prst="rect">
+            <a:avLst/>
+          </a:prstGeom>
+          <a:noFill/>
+        </p:spPr>
+        <p:txBody>
+          <a:bodyPr wrap="square" anchor="t">
+            <a:spAutoFit/>
+          </a:bodyPr>
+          <a:lstStyle/>
+          <a:p>
+            <a:pPr algn="l"/>
+            <a:r>
+              <a:rPr sz="3000" b="1" i="0">
+                <a:solidFill>
+                  <a:srgbClr val="FFFFFF"/>
+                </a:solidFill>
+                <a:latin typeface="Cambria"/>
+              </a:rPr>
+              <a:t>Design Thinking Frameworks Match-Up</a:t>
+            </a:r>
+          </a:p>
+        </p:txBody>
+      </p:sp>
+      <p:sp>
+        <p:nvSpPr>
+          <p:cNvPr id="6" name="Rounded Rectangle 5"/>
+          <p:cNvSpPr/>
+          <p:nvPr/>
+        </p:nvSpPr>
+        <p:spPr>
+          <a:xfrm>
+            <a:off x="685800" y="2148840"/>
+            <a:ext cx="960120" cy="411480"/>
+          </a:xfrm>
+          <a:prstGeom prst="roundRect">
+            <a:avLst>
+              <a:gd name="adj" fmla="val 50000"/>
+            </a:avLst>
+          </a:prstGeom>
+          <a:solidFill>
+            <a:srgbClr val="A26976"/>
+          </a:solidFill>
+          <a:ln>
+            <a:noFill/>
+          </a:ln>
+          <a:effectLst/>
+        </p:spPr>
+        <p:style>
+          <a:lnRef idx="1">
+            <a:schemeClr val="accent1"/>
+          </a:lnRef>
+          <a:fillRef idx="3">
+            <a:schemeClr val="accent1"/>
+          </a:fillRef>
+          <a:effectRef idx="2">
+            <a:schemeClr val="accent1"/>
+          </a:effectRef>
+          <a:fontRef idx="minor">
+            <a:schemeClr val="lt1"/>
+          </a:fontRef>
+        </p:style>
+        <p:txBody>
+          <a:bodyPr rtlCol="0" anchor="ctr" wrap="none" lIns="50800" rIns="50800"/>
+          <a:lstStyle/>
+          <a:p>
+            <a:pPr algn="ctr"/>
+            <a:r>
+              <a:rPr sz="1050" b="1">
+                <a:solidFill>
+                  <a:srgbClr val="FFFFFF"/>
+                </a:solidFill>
+                <a:latin typeface="Calibri"/>
+              </a:rPr>
+              <a:t>6 MIN</a:t>
+            </a:r>
+          </a:p>
+        </p:txBody>
+      </p:sp>
+      <p:sp>
+        <p:nvSpPr>
+          <p:cNvPr id="7" name="Rounded Rectangle 6"/>
+          <p:cNvSpPr/>
+          <p:nvPr/>
+        </p:nvSpPr>
+        <p:spPr>
+          <a:xfrm>
+            <a:off x="1783080" y="2148840"/>
+            <a:ext cx="960120" cy="411480"/>
+          </a:xfrm>
+          <a:prstGeom prst="roundRect">
+            <a:avLst>
+              <a:gd name="adj" fmla="val 50000"/>
+            </a:avLst>
+          </a:prstGeom>
+          <a:solidFill>
+            <a:srgbClr val="A26976"/>
+          </a:solidFill>
+          <a:ln>
+            <a:noFill/>
+          </a:ln>
+          <a:effectLst/>
+        </p:spPr>
+        <p:style>
+          <a:lnRef idx="1">
+            <a:schemeClr val="accent1"/>
+          </a:lnRef>
+          <a:fillRef idx="3">
+            <a:schemeClr val="accent1"/>
+          </a:fillRef>
+          <a:effectRef idx="2">
+            <a:schemeClr val="accent1"/>
+          </a:effectRef>
+          <a:fontRef idx="minor">
+            <a:schemeClr val="lt1"/>
+          </a:fontRef>
+        </p:style>
+        <p:txBody>
+          <a:bodyPr rtlCol="0" anchor="ctr" wrap="none" lIns="50800" rIns="50800"/>
+          <a:lstStyle/>
+          <a:p>
+            <a:pPr algn="ctr"/>
+            <a:r>
+              <a:rPr sz="1050" b="1">
+                <a:solidFill>
+                  <a:srgbClr val="FFFFFF"/>
+                </a:solidFill>
+                <a:latin typeface="Calibri"/>
+              </a:rPr>
+              <a:t>PAIRS</a:t>
+            </a:r>
+          </a:p>
+        </p:txBody>
+      </p:sp>
+      <p:sp>
+        <p:nvSpPr>
+          <p:cNvPr id="8" name="Rounded Rectangle 7"/>
+          <p:cNvSpPr/>
+          <p:nvPr/>
+        </p:nvSpPr>
+        <p:spPr>
+          <a:xfrm>
+            <a:off x="685800" y="2788920"/>
+            <a:ext cx="10607040" cy="3246120"/>
+          </a:xfrm>
+          <a:prstGeom prst="roundRect">
+            <a:avLst>
+              <a:gd name="adj" fmla="val 8000"/>
+            </a:avLst>
+          </a:prstGeom>
+          <a:solidFill>
+            <a:srgbClr val="FFFFFF"/>
+          </a:solidFill>
+          <a:ln>
+            <a:noFill/>
+          </a:ln>
+          <a:effectLst/>
+        </p:spPr>
+        <p:style>
+          <a:lnRef idx="1">
+            <a:schemeClr val="accent1"/>
+          </a:lnRef>
+          <a:fillRef idx="3">
+            <a:schemeClr val="accent1"/>
+          </a:fillRef>
+          <a:effectRef idx="2">
+            <a:schemeClr val="accent1"/>
+          </a:effectRef>
+          <a:fontRef idx="minor">
+            <a:schemeClr val="lt1"/>
+          </a:fontRef>
+        </p:style>
+        <p:txBody>
+          <a:bodyPr rtlCol="0" anchor="ctr" lIns="304800" rIns="304800" tIns="203200" bIns="203200" wrap="square"/>
+          <a:lstStyle/>
+          <a:p>
+            <a:pPr algn="ctr" indent="-203200" marL="203200">
+              <a:spcAft>
+                <a:spcPts val="900"/>
+              </a:spcAft>
+              <a:buClr>
+                <a:srgbClr val="D98C9E"/>
+              </a:buClr>
+              <a:buSzPct val="90000"/>
+              <a:buFont typeface="Arial"/>
+              <a:buChar char="●"/>
+            </a:pPr>
+            <a:r>
+              <a:rPr sz="1450" b="0" i="0">
+                <a:solidFill>
+                  <a:srgbClr val="2A1A1F"/>
+                </a:solidFill>
+                <a:latin typeface="Calibri"/>
+              </a:rPr>
+              <a:t>Match each framework name (Double Diamond, IDEO model, Design Sprint) to its correct stages.</a:t>
+            </a:r>
+          </a:p>
+          <a:p>
+            <a:pPr indent="-203200" marL="203200">
+              <a:spcAft>
+                <a:spcPts val="900"/>
+              </a:spcAft>
+              <a:buClr>
+                <a:srgbClr val="D98C9E"/>
+              </a:buClr>
+              <a:buSzPct val="90000"/>
+              <a:buFont typeface="Arial"/>
+              <a:buChar char="●"/>
+            </a:pPr>
+            <a:r>
+              <a:rPr sz="1450" b="0" i="0">
+                <a:solidFill>
+                  <a:srgbClr val="2A1A1F"/>
+                </a:solidFill>
+                <a:latin typeface="Calibri"/>
+              </a:rPr>
+              <a:t>Then match each framework to which VCAA design process stage(s) it most closely overlaps with.</a:t>
+            </a:r>
+          </a:p>
+        </p:txBody>
+      </p:sp>
+      <p:sp>
+        <p:nvSpPr>
+          <p:cNvPr id="9" name="TextBox 8"/>
+          <p:cNvSpPr txBox="1"/>
+          <p:nvPr/>
+        </p:nvSpPr>
+        <p:spPr>
+          <a:xfrm>
+            <a:off x="685800" y="6217920"/>
+            <a:ext cx="10607040" cy="502920"/>
+          </a:xfrm>
+          <a:prstGeom prst="rect">
+            <a:avLst/>
+          </a:prstGeom>
+          <a:noFill/>
+        </p:spPr>
+        <p:txBody>
+          <a:bodyPr wrap="square" anchor="t">
+            <a:spAutoFit/>
+          </a:bodyPr>
+          <a:lstStyle/>
+          <a:p>
+            <a:pPr algn="l"/>
+            <a:r>
+              <a:rPr sz="1250" b="0" i="1">
+                <a:solidFill>
+                  <a:srgbClr val="FFFFFF"/>
+                </a:solidFill>
+                <a:latin typeface="Calibri"/>
+              </a:rPr>
+              <a:t>Debrief: Which framework would you personally find most useful for your folio work?</a:t>
+            </a:r>
+          </a:p>
+        </p:txBody>
+      </p:sp>
+    </p:spTree>
+  </p:cSld>
+  <p:clrMapOvr>
+    <a:masterClrMapping/>
+  </p:clrMapOvr>
+</p:sld>
+</file>
+
+<file path=ppt/slides/slide29.xml><?xml version="1.0" encoding="utf-8"?>
 <p:sld xmlns:a="http://schemas.openxmlformats.org/drawingml/2006/main" xmlns:p="http://schemas.openxmlformats.org/presentationml/2006/main" xmlns:r="http://schemas.openxmlformats.org/officeDocument/2006/relationships">
   <p:cSld>
     <p:bg>
@@ -10167,8 +11266,8 @@
         </p:nvSpPr>
         <p:spPr>
           <a:xfrm>
-            <a:off x="-1097280" y="4114800"/>
-            <a:ext cx="3108960" cy="3108960"/>
+            <a:off x="9692640" y="-914400"/>
+            <a:ext cx="2926080" cy="2926080"/>
           </a:xfrm>
           <a:prstGeom prst="ellipse">
             <a:avLst/>
@@ -10211,14 +11310,14 @@
         </p:nvSpPr>
         <p:spPr>
           <a:xfrm>
-            <a:off x="9875520" y="-1188720"/>
-            <a:ext cx="2743200" cy="2743200"/>
+            <a:off x="-914400" y="4937760"/>
+            <a:ext cx="2377440" cy="2377440"/>
           </a:xfrm>
           <a:prstGeom prst="ellipse">
             <a:avLst/>
           </a:prstGeom>
           <a:solidFill>
-            <a:srgbClr val="D6A24A"/>
+            <a:srgbClr val="6B283A"/>
           </a:solidFill>
           <a:ln>
             <a:noFill/>
@@ -10255,12 +11354,12 @@
         </p:nvSpPr>
         <p:spPr>
           <a:xfrm>
-            <a:off x="1920240" y="2286000"/>
-            <a:ext cx="8321040" cy="2377440"/>
+            <a:off x="822960" y="1051560"/>
+            <a:ext cx="1188720" cy="502920"/>
           </a:xfrm>
           <a:prstGeom prst="roundRect">
             <a:avLst>
-              <a:gd name="adj" fmla="val 20000"/>
+              <a:gd name="adj" fmla="val 50000"/>
             </a:avLst>
           </a:prstGeom>
           <a:solidFill>
@@ -10286,29 +11385,134 @@
           </a:fontRef>
         </p:style>
         <p:txBody>
+          <a:bodyPr rtlCol="0" anchor="ctr" wrap="none" lIns="50800" rIns="50800"/>
+          <a:lstStyle/>
+          <a:p>
+            <a:pPr algn="ctr"/>
+            <a:r>
+              <a:rPr sz="1400" b="1">
+                <a:solidFill>
+                  <a:srgbClr val="612435"/>
+                </a:solidFill>
+                <a:latin typeface="Calibri"/>
+              </a:rPr>
+              <a:t>04</a:t>
+            </a:r>
+          </a:p>
+        </p:txBody>
+      </p:sp>
+      <p:sp>
+        <p:nvSpPr>
+          <p:cNvPr id="5" name="Rounded Rectangle 4"/>
+          <p:cNvSpPr/>
+          <p:nvPr/>
+        </p:nvSpPr>
+        <p:spPr>
+          <a:xfrm>
+            <a:off x="822960" y="2011680"/>
+            <a:ext cx="10515600" cy="2834640"/>
+          </a:xfrm>
+          <a:prstGeom prst="roundRect">
+            <a:avLst>
+              <a:gd name="adj" fmla="val 18000"/>
+            </a:avLst>
+          </a:prstGeom>
+          <a:solidFill>
+            <a:srgbClr val="FFFFFF"/>
+          </a:solidFill>
+          <a:ln>
+            <a:noFill/>
+          </a:ln>
+          <a:effectLst/>
+        </p:spPr>
+        <p:style>
+          <a:lnRef idx="1">
+            <a:schemeClr val="accent1"/>
+          </a:lnRef>
+          <a:fillRef idx="3">
+            <a:schemeClr val="accent1"/>
+          </a:fillRef>
+          <a:effectRef idx="2">
+            <a:schemeClr val="accent1"/>
+          </a:effectRef>
+          <a:fontRef idx="minor">
+            <a:schemeClr val="lt1"/>
+          </a:fontRef>
+        </p:style>
+        <p:txBody>
           <a:bodyPr rtlCol="0" anchor="ctr"/>
           <a:lstStyle/>
           <a:p>
             <a:pPr algn="ctr"/>
-            <a:r>
-              <a:rPr b="1" sz="3000">
-                <a:solidFill>
-                  <a:srgbClr val="7A2E43"/>
+          </a:p>
+        </p:txBody>
+      </p:sp>
+      <p:sp>
+        <p:nvSpPr>
+          <p:cNvPr id="6" name="TextBox 5"/>
+          <p:cNvSpPr txBox="1"/>
+          <p:nvPr/>
+        </p:nvSpPr>
+        <p:spPr>
+          <a:xfrm>
+            <a:off x="1280160" y="2697480"/>
+            <a:ext cx="9601200" cy="1097280"/>
+          </a:xfrm>
+          <a:prstGeom prst="rect">
+            <a:avLst/>
+          </a:prstGeom>
+          <a:noFill/>
+        </p:spPr>
+        <p:txBody>
+          <a:bodyPr wrap="square" anchor="t">
+            <a:spAutoFit/>
+          </a:bodyPr>
+          <a:lstStyle/>
+          <a:p>
+            <a:pPr algn="l"/>
+            <a:r>
+              <a:rPr sz="3400" b="1" i="0">
+                <a:solidFill>
+                  <a:srgbClr val="672738"/>
                 </a:solidFill>
                 <a:latin typeface="Cambria"/>
               </a:rPr>
-              <a:t>End of Unit 2</a:t>
-            </a:r>
-          </a:p>
-          <a:p>
-            <a:pPr algn="ctr"/>
-            <a:r>
-              <a:rPr sz="1400">
-                <a:solidFill>
-                  <a:srgbClr val="595959"/>
-                </a:solidFill>
-              </a:rPr>
-              <a:t>Review the matching workbook to consolidate what you have learnt.</a:t>
+              <a:t>SAC Briefing</a:t>
+            </a:r>
+          </a:p>
+        </p:txBody>
+      </p:sp>
+      <p:sp>
+        <p:nvSpPr>
+          <p:cNvPr id="7" name="TextBox 6"/>
+          <p:cNvSpPr txBox="1"/>
+          <p:nvPr/>
+        </p:nvSpPr>
+        <p:spPr>
+          <a:xfrm>
+            <a:off x="1280160" y="3657600"/>
+            <a:ext cx="9601200" cy="548640"/>
+          </a:xfrm>
+          <a:prstGeom prst="rect">
+            <a:avLst/>
+          </a:prstGeom>
+          <a:noFill/>
+        </p:spPr>
+        <p:txBody>
+          <a:bodyPr wrap="square" anchor="t">
+            <a:spAutoFit/>
+          </a:bodyPr>
+          <a:lstStyle/>
+          <a:p>
+            <a:pPr algn="l"/>
+            <a:r>
+              <a:rPr sz="1500" b="0" i="0">
+                <a:solidFill>
+                  <a:srgbClr val="6B6B6B"/>
+                </a:solidFill>
+                <a:latin typeface="Calibri"/>
+              </a:rPr>
+              <a:t>Draft — confirm against your school’s SAC schedule</a:t>
             </a:r>
           </a:p>
         </p:txBody>
@@ -10822,6 +12026,1512 @@
           <a:lstStyle/>
           <a:p>
             <a:pPr algn="ctr"/>
+          </a:p>
+        </p:txBody>
+      </p:sp>
+    </p:spTree>
+  </p:cSld>
+  <p:clrMapOvr>
+    <a:masterClrMapping/>
+  </p:clrMapOvr>
+</p:sld>
+</file>
+
+<file path=ppt/slides/slide30.xml><?xml version="1.0" encoding="utf-8"?>
+<p:sld xmlns:a="http://schemas.openxmlformats.org/drawingml/2006/main" xmlns:p="http://schemas.openxmlformats.org/presentationml/2006/main" xmlns:r="http://schemas.openxmlformats.org/officeDocument/2006/relationships">
+  <p:cSld>
+    <p:bg>
+      <p:bgPr>
+        <a:solidFill>
+          <a:srgbClr val="FBF5F1"/>
+        </a:solidFill>
+        <a:effectLst/>
+      </p:bgPr>
+    </p:bg>
+    <p:spTree>
+      <p:nvGrpSpPr>
+        <p:cNvPr id="1" name=""/>
+        <p:cNvGrpSpPr/>
+        <p:nvPr/>
+      </p:nvGrpSpPr>
+      <p:grpSpPr/>
+      <p:sp>
+        <p:nvSpPr>
+          <p:cNvPr id="2" name="Rounded Rectangle 1"/>
+          <p:cNvSpPr/>
+          <p:nvPr/>
+        </p:nvSpPr>
+        <p:spPr>
+          <a:xfrm>
+            <a:off x="685800" y="502920"/>
+            <a:ext cx="3291840" cy="457200"/>
+          </a:xfrm>
+          <a:prstGeom prst="roundRect">
+            <a:avLst>
+              <a:gd name="adj" fmla="val 50000"/>
+            </a:avLst>
+          </a:prstGeom>
+          <a:solidFill>
+            <a:srgbClr val="7A2E43"/>
+          </a:solidFill>
+          <a:ln>
+            <a:noFill/>
+          </a:ln>
+          <a:effectLst/>
+        </p:spPr>
+        <p:style>
+          <a:lnRef idx="1">
+            <a:schemeClr val="accent1"/>
+          </a:lnRef>
+          <a:fillRef idx="3">
+            <a:schemeClr val="accent1"/>
+          </a:fillRef>
+          <a:effectRef idx="2">
+            <a:schemeClr val="accent1"/>
+          </a:effectRef>
+          <a:fontRef idx="minor">
+            <a:schemeClr val="lt1"/>
+          </a:fontRef>
+        </p:style>
+        <p:txBody>
+          <a:bodyPr rtlCol="0" anchor="ctr" wrap="none" lIns="50800" rIns="50800"/>
+          <a:lstStyle/>
+          <a:p>
+            <a:pPr algn="ctr"/>
+            <a:r>
+              <a:rPr sz="1100" b="1">
+                <a:solidFill>
+                  <a:srgbClr val="FFFFFF"/>
+                </a:solidFill>
+                <a:latin typeface="Calibri"/>
+              </a:rPr>
+              <a:t>SAC BRIEFING</a:t>
+            </a:r>
+          </a:p>
+        </p:txBody>
+      </p:sp>
+      <p:sp>
+        <p:nvSpPr>
+          <p:cNvPr id="3" name="TextBox 2"/>
+          <p:cNvSpPr txBox="1"/>
+          <p:nvPr/>
+        </p:nvSpPr>
+        <p:spPr>
+          <a:xfrm>
+            <a:off x="685800" y="1051560"/>
+            <a:ext cx="10607040" cy="822960"/>
+          </a:xfrm>
+          <a:prstGeom prst="rect">
+            <a:avLst/>
+          </a:prstGeom>
+          <a:noFill/>
+        </p:spPr>
+        <p:txBody>
+          <a:bodyPr wrap="square" anchor="t">
+            <a:spAutoFit/>
+          </a:bodyPr>
+          <a:lstStyle/>
+          <a:p>
+            <a:pPr algn="l"/>
+            <a:r>
+              <a:rPr sz="2700" b="1" i="0">
+                <a:solidFill>
+                  <a:srgbClr val="2A1A1F"/>
+                </a:solidFill>
+                <a:latin typeface="Cambria"/>
+              </a:rPr>
+              <a:t>Outcome 1 (AOS 1) — Trends in Design</a:t>
+            </a:r>
+          </a:p>
+        </p:txBody>
+      </p:sp>
+      <p:sp>
+        <p:nvSpPr>
+          <p:cNvPr id="4" name="Rounded Rectangle 3"/>
+          <p:cNvSpPr/>
+          <p:nvPr/>
+        </p:nvSpPr>
+        <p:spPr>
+          <a:xfrm>
+            <a:off x="685800" y="1874519"/>
+            <a:ext cx="10607040" cy="4526280"/>
+          </a:xfrm>
+          <a:prstGeom prst="roundRect">
+            <a:avLst>
+              <a:gd name="adj" fmla="val 6000"/>
+            </a:avLst>
+          </a:prstGeom>
+          <a:solidFill>
+            <a:srgbClr val="F1EAEC"/>
+          </a:solidFill>
+          <a:ln>
+            <a:noFill/>
+          </a:ln>
+          <a:effectLst/>
+        </p:spPr>
+        <p:style>
+          <a:lnRef idx="1">
+            <a:schemeClr val="accent1"/>
+          </a:lnRef>
+          <a:fillRef idx="3">
+            <a:schemeClr val="accent1"/>
+          </a:fillRef>
+          <a:effectRef idx="2">
+            <a:schemeClr val="accent1"/>
+          </a:effectRef>
+          <a:fontRef idx="minor">
+            <a:schemeClr val="lt1"/>
+          </a:fontRef>
+        </p:style>
+        <p:txBody>
+          <a:bodyPr rtlCol="0" anchor="ctr" lIns="330200" rIns="330200" tIns="254000" bIns="254000" wrap="square"/>
+          <a:lstStyle/>
+          <a:p>
+            <a:pPr algn="ctr" indent="-203200" marL="203200">
+              <a:spcAft>
+                <a:spcPts val="900"/>
+              </a:spcAft>
+              <a:buClr>
+                <a:srgbClr val="7A2E43"/>
+              </a:buClr>
+              <a:buSzPct val="90000"/>
+              <a:buFont typeface="Arial"/>
+              <a:buChar char="●"/>
+            </a:pPr>
+            <a:r>
+              <a:rPr sz="1500" b="1" i="0">
+                <a:solidFill>
+                  <a:srgbClr val="672738"/>
+                </a:solidFill>
+                <a:latin typeface="Calibri"/>
+              </a:rPr>
+              <a:t>Task</a:t>
+            </a:r>
+          </a:p>
+          <a:p>
+            <a:pPr indent="-203200" marL="203200">
+              <a:spcAft>
+                <a:spcPts val="900"/>
+              </a:spcAft>
+              <a:buClr>
+                <a:srgbClr val="7A2E43"/>
+              </a:buClr>
+              <a:buSzPct val="90000"/>
+              <a:buFont typeface="Arial"/>
+              <a:buChar char="–"/>
+            </a:pPr>
+            <a:r>
+              <a:rPr sz="1350" b="0" i="0">
+                <a:solidFill>
+                  <a:srgbClr val="2A1A1F"/>
+                </a:solidFill>
+                <a:latin typeface="Calibri"/>
+              </a:rPr>
+              <a:t>Select a current design trend. Analyse how it manifests across at least two design fields, identifying the factor(s) driving it. Respond as a structured written report or exam-style short-answer responses.</a:t>
+            </a:r>
+          </a:p>
+          <a:p>
+            <a:pPr indent="-203200" marL="203200">
+              <a:spcAft>
+                <a:spcPts val="900"/>
+              </a:spcAft>
+              <a:buClr>
+                <a:srgbClr val="7A2E43"/>
+              </a:buClr>
+              <a:buSzPct val="90000"/>
+              <a:buFont typeface="Arial"/>
+              <a:buChar char="●"/>
+            </a:pPr>
+            <a:r>
+              <a:rPr sz="1500" b="1" i="0">
+                <a:solidFill>
+                  <a:srgbClr val="672738"/>
+                </a:solidFill>
+                <a:latin typeface="Calibri"/>
+              </a:rPr>
+              <a:t>Conditions</a:t>
+            </a:r>
+          </a:p>
+          <a:p>
+            <a:pPr indent="-203200" marL="203200">
+              <a:spcAft>
+                <a:spcPts val="900"/>
+              </a:spcAft>
+              <a:buClr>
+                <a:srgbClr val="7A2E43"/>
+              </a:buClr>
+              <a:buSzPct val="90000"/>
+              <a:buFont typeface="Arial"/>
+              <a:buChar char="–"/>
+            </a:pPr>
+            <a:r>
+              <a:rPr sz="1350" b="0" i="0">
+                <a:solidFill>
+                  <a:srgbClr val="2A1A1F"/>
+                </a:solidFill>
+                <a:latin typeface="Calibri"/>
+              </a:rPr>
+              <a:t>Completed in class over 1-2 periods</a:t>
+            </a:r>
+          </a:p>
+          <a:p>
+            <a:pPr indent="-203200" marL="203200">
+              <a:spcAft>
+                <a:spcPts val="900"/>
+              </a:spcAft>
+              <a:buClr>
+                <a:srgbClr val="7A2E43"/>
+              </a:buClr>
+              <a:buSzPct val="90000"/>
+              <a:buFont typeface="Arial"/>
+              <a:buChar char="–"/>
+            </a:pPr>
+            <a:r>
+              <a:rPr sz="1350" b="0" i="0">
+                <a:solidFill>
+                  <a:srgbClr val="2A1A1F"/>
+                </a:solidFill>
+                <a:latin typeface="Calibri"/>
+              </a:rPr>
+              <a:t>Notes permitted; no internet access</a:t>
+            </a:r>
+          </a:p>
+          <a:p>
+            <a:pPr indent="-203200" marL="203200">
+              <a:spcAft>
+                <a:spcPts val="900"/>
+              </a:spcAft>
+              <a:buClr>
+                <a:srgbClr val="7A2E43"/>
+              </a:buClr>
+              <a:buSzPct val="90000"/>
+              <a:buFont typeface="Arial"/>
+              <a:buChar char="–"/>
+            </a:pPr>
+            <a:r>
+              <a:rPr sz="1350" b="0" i="0">
+                <a:solidFill>
+                  <a:srgbClr val="2A1A1F"/>
+                </a:solidFill>
+                <a:latin typeface="Calibri"/>
+              </a:rPr>
+              <a:t>Individual, supervised work</a:t>
+            </a:r>
+          </a:p>
+          <a:p>
+            <a:pPr indent="-203200" marL="203200">
+              <a:spcAft>
+                <a:spcPts val="900"/>
+              </a:spcAft>
+              <a:buClr>
+                <a:srgbClr val="7A2E43"/>
+              </a:buClr>
+              <a:buSzPct val="90000"/>
+              <a:buFont typeface="Arial"/>
+              <a:buChar char="●"/>
+            </a:pPr>
+            <a:r>
+              <a:rPr sz="1500" b="1" i="0">
+                <a:solidFill>
+                  <a:srgbClr val="672738"/>
+                </a:solidFill>
+                <a:latin typeface="Calibri"/>
+              </a:rPr>
+              <a:t>Assessment Criteria (/30)</a:t>
+            </a:r>
+          </a:p>
+          <a:p>
+            <a:pPr indent="-203200" marL="203200">
+              <a:spcAft>
+                <a:spcPts val="900"/>
+              </a:spcAft>
+              <a:buClr>
+                <a:srgbClr val="7A2E43"/>
+              </a:buClr>
+              <a:buSzPct val="90000"/>
+              <a:buFont typeface="Arial"/>
+              <a:buChar char="–"/>
+            </a:pPr>
+            <a:r>
+              <a:rPr sz="1350" b="0" i="0">
+                <a:solidFill>
+                  <a:srgbClr val="2A1A1F"/>
+                </a:solidFill>
+                <a:latin typeface="Calibri"/>
+              </a:rPr>
+              <a:t>Identification of trend and driving factor(s) — 5 marks</a:t>
+            </a:r>
+          </a:p>
+          <a:p>
+            <a:pPr indent="-203200" marL="203200">
+              <a:spcAft>
+                <a:spcPts val="900"/>
+              </a:spcAft>
+              <a:buClr>
+                <a:srgbClr val="7A2E43"/>
+              </a:buClr>
+              <a:buSzPct val="90000"/>
+              <a:buFont typeface="Arial"/>
+              <a:buChar char="–"/>
+            </a:pPr>
+            <a:r>
+              <a:rPr sz="1350" b="0" i="0">
+                <a:solidFill>
+                  <a:srgbClr val="2A1A1F"/>
+                </a:solidFill>
+                <a:latin typeface="Calibri"/>
+              </a:rPr>
+              <a:t>Analysis across 2+ design fields with specific evidence — 15 marks</a:t>
+            </a:r>
+          </a:p>
+          <a:p>
+            <a:pPr indent="-203200" marL="203200">
+              <a:spcAft>
+                <a:spcPts val="900"/>
+              </a:spcAft>
+              <a:buClr>
+                <a:srgbClr val="7A2E43"/>
+              </a:buClr>
+              <a:buSzPct val="90000"/>
+              <a:buFont typeface="Arial"/>
+              <a:buChar char="–"/>
+            </a:pPr>
+            <a:r>
+              <a:rPr sz="1350" b="0" i="0">
+                <a:solidFill>
+                  <a:srgbClr val="2A1A1F"/>
+                </a:solidFill>
+                <a:latin typeface="Calibri"/>
+              </a:rPr>
+              <a:t>Use of accurate vocabulary — 5 marks</a:t>
+            </a:r>
+          </a:p>
+          <a:p>
+            <a:pPr indent="-203200" marL="203200">
+              <a:spcAft>
+                <a:spcPts val="900"/>
+              </a:spcAft>
+              <a:buClr>
+                <a:srgbClr val="7A2E43"/>
+              </a:buClr>
+              <a:buSzPct val="90000"/>
+              <a:buFont typeface="Arial"/>
+              <a:buChar char="–"/>
+            </a:pPr>
+            <a:r>
+              <a:rPr sz="1350" b="0" i="0">
+                <a:solidFill>
+                  <a:srgbClr val="2A1A1F"/>
+                </a:solidFill>
+                <a:latin typeface="Calibri"/>
+              </a:rPr>
+              <a:t>Written expression — 5 marks</a:t>
+            </a:r>
+          </a:p>
+        </p:txBody>
+      </p:sp>
+      <p:sp>
+        <p:nvSpPr>
+          <p:cNvPr id="5" name="Oval 4"/>
+          <p:cNvSpPr/>
+          <p:nvPr/>
+        </p:nvSpPr>
+        <p:spPr>
+          <a:xfrm>
+            <a:off x="10881360" y="5943600"/>
+            <a:ext cx="1005840" cy="1005840"/>
+          </a:xfrm>
+          <a:prstGeom prst="ellipse">
+            <a:avLst/>
+          </a:prstGeom>
+          <a:solidFill>
+            <a:srgbClr val="EDCBD3"/>
+          </a:solidFill>
+          <a:ln>
+            <a:noFill/>
+          </a:ln>
+          <a:effectLst/>
+        </p:spPr>
+        <p:style>
+          <a:lnRef idx="1">
+            <a:schemeClr val="accent1"/>
+          </a:lnRef>
+          <a:fillRef idx="3">
+            <a:schemeClr val="accent1"/>
+          </a:fillRef>
+          <a:effectRef idx="2">
+            <a:schemeClr val="accent1"/>
+          </a:effectRef>
+          <a:fontRef idx="minor">
+            <a:schemeClr val="lt1"/>
+          </a:fontRef>
+        </p:style>
+        <p:txBody>
+          <a:bodyPr rtlCol="0" anchor="ctr"/>
+          <a:lstStyle/>
+          <a:p>
+            <a:pPr algn="ctr"/>
+          </a:p>
+        </p:txBody>
+      </p:sp>
+    </p:spTree>
+  </p:cSld>
+  <p:clrMapOvr>
+    <a:masterClrMapping/>
+  </p:clrMapOvr>
+</p:sld>
+</file>
+
+<file path=ppt/slides/slide31.xml><?xml version="1.0" encoding="utf-8"?>
+<p:sld xmlns:a="http://schemas.openxmlformats.org/drawingml/2006/main" xmlns:p="http://schemas.openxmlformats.org/presentationml/2006/main" xmlns:r="http://schemas.openxmlformats.org/officeDocument/2006/relationships">
+  <p:cSld>
+    <p:bg>
+      <p:bgPr>
+        <a:solidFill>
+          <a:srgbClr val="FBF5F1"/>
+        </a:solidFill>
+        <a:effectLst/>
+      </p:bgPr>
+    </p:bg>
+    <p:spTree>
+      <p:nvGrpSpPr>
+        <p:cNvPr id="1" name=""/>
+        <p:cNvGrpSpPr/>
+        <p:nvPr/>
+      </p:nvGrpSpPr>
+      <p:grpSpPr/>
+      <p:sp>
+        <p:nvSpPr>
+          <p:cNvPr id="2" name="Rounded Rectangle 1"/>
+          <p:cNvSpPr/>
+          <p:nvPr/>
+        </p:nvSpPr>
+        <p:spPr>
+          <a:xfrm>
+            <a:off x="685800" y="502920"/>
+            <a:ext cx="3291840" cy="457200"/>
+          </a:xfrm>
+          <a:prstGeom prst="roundRect">
+            <a:avLst>
+              <a:gd name="adj" fmla="val 50000"/>
+            </a:avLst>
+          </a:prstGeom>
+          <a:solidFill>
+            <a:srgbClr val="7A2E43"/>
+          </a:solidFill>
+          <a:ln>
+            <a:noFill/>
+          </a:ln>
+          <a:effectLst/>
+        </p:spPr>
+        <p:style>
+          <a:lnRef idx="1">
+            <a:schemeClr val="accent1"/>
+          </a:lnRef>
+          <a:fillRef idx="3">
+            <a:schemeClr val="accent1"/>
+          </a:fillRef>
+          <a:effectRef idx="2">
+            <a:schemeClr val="accent1"/>
+          </a:effectRef>
+          <a:fontRef idx="minor">
+            <a:schemeClr val="lt1"/>
+          </a:fontRef>
+        </p:style>
+        <p:txBody>
+          <a:bodyPr rtlCol="0" anchor="ctr" wrap="none" lIns="50800" rIns="50800"/>
+          <a:lstStyle/>
+          <a:p>
+            <a:pPr algn="ctr"/>
+            <a:r>
+              <a:rPr sz="1100" b="1">
+                <a:solidFill>
+                  <a:srgbClr val="FFFFFF"/>
+                </a:solidFill>
+                <a:latin typeface="Calibri"/>
+              </a:rPr>
+              <a:t>SAC BRIEFING</a:t>
+            </a:r>
+          </a:p>
+        </p:txBody>
+      </p:sp>
+      <p:sp>
+        <p:nvSpPr>
+          <p:cNvPr id="3" name="TextBox 2"/>
+          <p:cNvSpPr txBox="1"/>
+          <p:nvPr/>
+        </p:nvSpPr>
+        <p:spPr>
+          <a:xfrm>
+            <a:off x="685800" y="1051560"/>
+            <a:ext cx="10607040" cy="822960"/>
+          </a:xfrm>
+          <a:prstGeom prst="rect">
+            <a:avLst/>
+          </a:prstGeom>
+          <a:noFill/>
+        </p:spPr>
+        <p:txBody>
+          <a:bodyPr wrap="square" anchor="t">
+            <a:spAutoFit/>
+          </a:bodyPr>
+          <a:lstStyle/>
+          <a:p>
+            <a:pPr algn="l"/>
+            <a:r>
+              <a:rPr sz="2700" b="1" i="0">
+                <a:solidFill>
+                  <a:srgbClr val="2A1A1F"/>
+                </a:solidFill>
+                <a:latin typeface="Cambria"/>
+              </a:rPr>
+              <a:t>Outcome 2 (AOS 2) — Design and Industry Connections</a:t>
+            </a:r>
+          </a:p>
+        </p:txBody>
+      </p:sp>
+      <p:sp>
+        <p:nvSpPr>
+          <p:cNvPr id="4" name="Rounded Rectangle 3"/>
+          <p:cNvSpPr/>
+          <p:nvPr/>
+        </p:nvSpPr>
+        <p:spPr>
+          <a:xfrm>
+            <a:off x="685800" y="1874519"/>
+            <a:ext cx="10607040" cy="4526280"/>
+          </a:xfrm>
+          <a:prstGeom prst="roundRect">
+            <a:avLst>
+              <a:gd name="adj" fmla="val 6000"/>
+            </a:avLst>
+          </a:prstGeom>
+          <a:solidFill>
+            <a:srgbClr val="F1EAEC"/>
+          </a:solidFill>
+          <a:ln>
+            <a:noFill/>
+          </a:ln>
+          <a:effectLst/>
+        </p:spPr>
+        <p:style>
+          <a:lnRef idx="1">
+            <a:schemeClr val="accent1"/>
+          </a:lnRef>
+          <a:fillRef idx="3">
+            <a:schemeClr val="accent1"/>
+          </a:fillRef>
+          <a:effectRef idx="2">
+            <a:schemeClr val="accent1"/>
+          </a:effectRef>
+          <a:fontRef idx="minor">
+            <a:schemeClr val="lt1"/>
+          </a:fontRef>
+        </p:style>
+        <p:txBody>
+          <a:bodyPr rtlCol="0" anchor="ctr" lIns="330200" rIns="330200" tIns="254000" bIns="254000" wrap="square"/>
+          <a:lstStyle/>
+          <a:p>
+            <a:pPr algn="ctr" indent="-203200" marL="203200">
+              <a:spcAft>
+                <a:spcPts val="900"/>
+              </a:spcAft>
+              <a:buClr>
+                <a:srgbClr val="7A2E43"/>
+              </a:buClr>
+              <a:buSzPct val="90000"/>
+              <a:buFont typeface="Arial"/>
+              <a:buChar char="●"/>
+            </a:pPr>
+            <a:r>
+              <a:rPr sz="1500" b="1" i="0">
+                <a:solidFill>
+                  <a:srgbClr val="672738"/>
+                </a:solidFill>
+                <a:latin typeface="Calibri"/>
+              </a:rPr>
+              <a:t>Task</a:t>
+            </a:r>
+          </a:p>
+          <a:p>
+            <a:pPr indent="-203200" marL="203200">
+              <a:spcAft>
+                <a:spcPts val="900"/>
+              </a:spcAft>
+              <a:buClr>
+                <a:srgbClr val="7A2E43"/>
+              </a:buClr>
+              <a:buSzPct val="90000"/>
+              <a:buFont typeface="Arial"/>
+              <a:buChar char="–"/>
+            </a:pPr>
+            <a:r>
+              <a:rPr sz="1350" b="0" i="0">
+                <a:solidFill>
+                  <a:srgbClr val="2A1A1F"/>
+                </a:solidFill>
+                <a:latin typeface="Calibri"/>
+              </a:rPr>
+              <a:t>Respond to a brief requiring industry awareness: produce a visual communication in one design field, while documenting at least one industry connection (a collaboration role, an intellectual property consideration, or an industry factor) relevant to the project.</a:t>
+            </a:r>
+          </a:p>
+          <a:p>
+            <a:pPr indent="-203200" marL="203200">
+              <a:spcAft>
+                <a:spcPts val="900"/>
+              </a:spcAft>
+              <a:buClr>
+                <a:srgbClr val="7A2E43"/>
+              </a:buClr>
+              <a:buSzPct val="90000"/>
+              <a:buFont typeface="Arial"/>
+              <a:buChar char="●"/>
+            </a:pPr>
+            <a:r>
+              <a:rPr sz="1500" b="1" i="0">
+                <a:solidFill>
+                  <a:srgbClr val="672738"/>
+                </a:solidFill>
+                <a:latin typeface="Calibri"/>
+              </a:rPr>
+              <a:t>Conditions</a:t>
+            </a:r>
+          </a:p>
+          <a:p>
+            <a:pPr indent="-203200" marL="203200">
+              <a:spcAft>
+                <a:spcPts val="900"/>
+              </a:spcAft>
+              <a:buClr>
+                <a:srgbClr val="7A2E43"/>
+              </a:buClr>
+              <a:buSzPct val="90000"/>
+              <a:buFont typeface="Arial"/>
+              <a:buChar char="–"/>
+            </a:pPr>
+            <a:r>
+              <a:rPr sz="1350" b="0" i="0">
+                <a:solidFill>
+                  <a:srgbClr val="2A1A1F"/>
+                </a:solidFill>
+                <a:latin typeface="Calibri"/>
+              </a:rPr>
+              <a:t>Completed over approximately 3-4 weeks</a:t>
+            </a:r>
+          </a:p>
+          <a:p>
+            <a:pPr indent="-203200" marL="203200">
+              <a:spcAft>
+                <a:spcPts val="900"/>
+              </a:spcAft>
+              <a:buClr>
+                <a:srgbClr val="7A2E43"/>
+              </a:buClr>
+              <a:buSzPct val="90000"/>
+              <a:buFont typeface="Arial"/>
+              <a:buChar char="–"/>
+            </a:pPr>
+            <a:r>
+              <a:rPr sz="1350" b="0" i="0">
+                <a:solidFill>
+                  <a:srgbClr val="2A1A1F"/>
+                </a:solidFill>
+                <a:latin typeface="Calibri"/>
+              </a:rPr>
+              <a:t>Folio submission combining process work and final piece</a:t>
+            </a:r>
+          </a:p>
+          <a:p>
+            <a:pPr indent="-203200" marL="203200">
+              <a:spcAft>
+                <a:spcPts val="900"/>
+              </a:spcAft>
+              <a:buClr>
+                <a:srgbClr val="7A2E43"/>
+              </a:buClr>
+              <a:buSzPct val="90000"/>
+              <a:buFont typeface="Arial"/>
+              <a:buChar char="–"/>
+            </a:pPr>
+            <a:r>
+              <a:rPr sz="1350" b="0" i="0">
+                <a:solidFill>
+                  <a:srgbClr val="2A1A1F"/>
+                </a:solidFill>
+                <a:latin typeface="Calibri"/>
+              </a:rPr>
+              <a:t>Individual work</a:t>
+            </a:r>
+          </a:p>
+          <a:p>
+            <a:pPr indent="-203200" marL="203200">
+              <a:spcAft>
+                <a:spcPts val="900"/>
+              </a:spcAft>
+              <a:buClr>
+                <a:srgbClr val="7A2E43"/>
+              </a:buClr>
+              <a:buSzPct val="90000"/>
+              <a:buFont typeface="Arial"/>
+              <a:buChar char="●"/>
+            </a:pPr>
+            <a:r>
+              <a:rPr sz="1500" b="1" i="0">
+                <a:solidFill>
+                  <a:srgbClr val="672738"/>
+                </a:solidFill>
+                <a:latin typeface="Calibri"/>
+              </a:rPr>
+              <a:t>Assessment Criteria (/50)</a:t>
+            </a:r>
+          </a:p>
+          <a:p>
+            <a:pPr indent="-203200" marL="203200">
+              <a:spcAft>
+                <a:spcPts val="900"/>
+              </a:spcAft>
+              <a:buClr>
+                <a:srgbClr val="7A2E43"/>
+              </a:buClr>
+              <a:buSzPct val="90000"/>
+              <a:buFont typeface="Arial"/>
+              <a:buChar char="–"/>
+            </a:pPr>
+            <a:r>
+              <a:rPr sz="1350" b="0" i="0">
+                <a:solidFill>
+                  <a:srgbClr val="2A1A1F"/>
+                </a:solidFill>
+                <a:latin typeface="Calibri"/>
+              </a:rPr>
+              <a:t>Response to the brief — 15 marks</a:t>
+            </a:r>
+          </a:p>
+          <a:p>
+            <a:pPr indent="-203200" marL="203200">
+              <a:spcAft>
+                <a:spcPts val="900"/>
+              </a:spcAft>
+              <a:buClr>
+                <a:srgbClr val="7A2E43"/>
+              </a:buClr>
+              <a:buSzPct val="90000"/>
+              <a:buFont typeface="Arial"/>
+              <a:buChar char="–"/>
+            </a:pPr>
+            <a:r>
+              <a:rPr sz="1350" b="0" i="0">
+                <a:solidFill>
+                  <a:srgbClr val="2A1A1F"/>
+                </a:solidFill>
+                <a:latin typeface="Calibri"/>
+              </a:rPr>
+              <a:t>Evidence of the design process — 15 marks</a:t>
+            </a:r>
+          </a:p>
+          <a:p>
+            <a:pPr indent="-203200" marL="203200">
+              <a:spcAft>
+                <a:spcPts val="900"/>
+              </a:spcAft>
+              <a:buClr>
+                <a:srgbClr val="7A2E43"/>
+              </a:buClr>
+              <a:buSzPct val="90000"/>
+              <a:buFont typeface="Arial"/>
+              <a:buChar char="–"/>
+            </a:pPr>
+            <a:r>
+              <a:rPr sz="1350" b="0" i="0">
+                <a:solidFill>
+                  <a:srgbClr val="2A1A1F"/>
+                </a:solidFill>
+                <a:latin typeface="Calibri"/>
+              </a:rPr>
+              <a:t>Discussion of industry connection(s) — 10 marks</a:t>
+            </a:r>
+          </a:p>
+          <a:p>
+            <a:pPr indent="-203200" marL="203200">
+              <a:spcAft>
+                <a:spcPts val="900"/>
+              </a:spcAft>
+              <a:buClr>
+                <a:srgbClr val="7A2E43"/>
+              </a:buClr>
+              <a:buSzPct val="90000"/>
+              <a:buFont typeface="Arial"/>
+              <a:buChar char="–"/>
+            </a:pPr>
+            <a:r>
+              <a:rPr sz="1350" b="0" i="0">
+                <a:solidFill>
+                  <a:srgbClr val="2A1A1F"/>
+                </a:solidFill>
+                <a:latin typeface="Calibri"/>
+              </a:rPr>
+              <a:t>Quality of final presentation — 10 marks</a:t>
+            </a:r>
+          </a:p>
+        </p:txBody>
+      </p:sp>
+      <p:sp>
+        <p:nvSpPr>
+          <p:cNvPr id="5" name="Oval 4"/>
+          <p:cNvSpPr/>
+          <p:nvPr/>
+        </p:nvSpPr>
+        <p:spPr>
+          <a:xfrm>
+            <a:off x="10881360" y="5943600"/>
+            <a:ext cx="1005840" cy="1005840"/>
+          </a:xfrm>
+          <a:prstGeom prst="ellipse">
+            <a:avLst/>
+          </a:prstGeom>
+          <a:solidFill>
+            <a:srgbClr val="EDCBD3"/>
+          </a:solidFill>
+          <a:ln>
+            <a:noFill/>
+          </a:ln>
+          <a:effectLst/>
+        </p:spPr>
+        <p:style>
+          <a:lnRef idx="1">
+            <a:schemeClr val="accent1"/>
+          </a:lnRef>
+          <a:fillRef idx="3">
+            <a:schemeClr val="accent1"/>
+          </a:fillRef>
+          <a:effectRef idx="2">
+            <a:schemeClr val="accent1"/>
+          </a:effectRef>
+          <a:fontRef idx="minor">
+            <a:schemeClr val="lt1"/>
+          </a:fontRef>
+        </p:style>
+        <p:txBody>
+          <a:bodyPr rtlCol="0" anchor="ctr"/>
+          <a:lstStyle/>
+          <a:p>
+            <a:pPr algn="ctr"/>
+          </a:p>
+        </p:txBody>
+      </p:sp>
+    </p:spTree>
+  </p:cSld>
+  <p:clrMapOvr>
+    <a:masterClrMapping/>
+  </p:clrMapOvr>
+</p:sld>
+</file>
+
+<file path=ppt/slides/slide32.xml><?xml version="1.0" encoding="utf-8"?>
+<p:sld xmlns:a="http://schemas.openxmlformats.org/drawingml/2006/main" xmlns:p="http://schemas.openxmlformats.org/presentationml/2006/main" xmlns:r="http://schemas.openxmlformats.org/officeDocument/2006/relationships">
+  <p:cSld>
+    <p:bg>
+      <p:bgPr>
+        <a:solidFill>
+          <a:srgbClr val="D98C9E"/>
+        </a:solidFill>
+        <a:effectLst/>
+      </p:bgPr>
+    </p:bg>
+    <p:spTree>
+      <p:nvGrpSpPr>
+        <p:cNvPr id="1" name=""/>
+        <p:cNvGrpSpPr/>
+        <p:nvPr/>
+      </p:nvGrpSpPr>
+      <p:grpSpPr/>
+      <p:sp>
+        <p:nvSpPr>
+          <p:cNvPr id="2" name="Oval 1"/>
+          <p:cNvSpPr/>
+          <p:nvPr/>
+        </p:nvSpPr>
+        <p:spPr>
+          <a:xfrm>
+            <a:off x="-914400" y="-914400"/>
+            <a:ext cx="2103120" cy="2103120"/>
+          </a:xfrm>
+          <a:prstGeom prst="ellipse">
+            <a:avLst/>
+          </a:prstGeom>
+          <a:solidFill>
+            <a:srgbClr val="BE7B8B"/>
+          </a:solidFill>
+          <a:ln>
+            <a:noFill/>
+          </a:ln>
+          <a:effectLst/>
+        </p:spPr>
+        <p:style>
+          <a:lnRef idx="1">
+            <a:schemeClr val="accent1"/>
+          </a:lnRef>
+          <a:fillRef idx="3">
+            <a:schemeClr val="accent1"/>
+          </a:fillRef>
+          <a:effectRef idx="2">
+            <a:schemeClr val="accent1"/>
+          </a:effectRef>
+          <a:fontRef idx="minor">
+            <a:schemeClr val="lt1"/>
+          </a:fontRef>
+        </p:style>
+        <p:txBody>
+          <a:bodyPr rtlCol="0" anchor="ctr"/>
+          <a:lstStyle/>
+          <a:p>
+            <a:pPr algn="ctr"/>
+          </a:p>
+        </p:txBody>
+      </p:sp>
+      <p:sp>
+        <p:nvSpPr>
+          <p:cNvPr id="3" name="Oval 2"/>
+          <p:cNvSpPr/>
+          <p:nvPr/>
+        </p:nvSpPr>
+        <p:spPr>
+          <a:xfrm>
+            <a:off x="11064240" y="5852160"/>
+            <a:ext cx="1737360" cy="1737360"/>
+          </a:xfrm>
+          <a:prstGeom prst="ellipse">
+            <a:avLst/>
+          </a:prstGeom>
+          <a:solidFill>
+            <a:srgbClr val="BE7B8B"/>
+          </a:solidFill>
+          <a:ln>
+            <a:noFill/>
+          </a:ln>
+          <a:effectLst/>
+        </p:spPr>
+        <p:style>
+          <a:lnRef idx="1">
+            <a:schemeClr val="accent1"/>
+          </a:lnRef>
+          <a:fillRef idx="3">
+            <a:schemeClr val="accent1"/>
+          </a:fillRef>
+          <a:effectRef idx="2">
+            <a:schemeClr val="accent1"/>
+          </a:effectRef>
+          <a:fontRef idx="minor">
+            <a:schemeClr val="lt1"/>
+          </a:fontRef>
+        </p:style>
+        <p:txBody>
+          <a:bodyPr rtlCol="0" anchor="ctr"/>
+          <a:lstStyle/>
+          <a:p>
+            <a:pPr algn="ctr"/>
+          </a:p>
+        </p:txBody>
+      </p:sp>
+      <p:sp>
+        <p:nvSpPr>
+          <p:cNvPr id="4" name="Rounded Rectangle 3"/>
+          <p:cNvSpPr/>
+          <p:nvPr/>
+        </p:nvSpPr>
+        <p:spPr>
+          <a:xfrm>
+            <a:off x="685800" y="457200"/>
+            <a:ext cx="1696212" cy="502920"/>
+          </a:xfrm>
+          <a:prstGeom prst="roundRect">
+            <a:avLst>
+              <a:gd name="adj" fmla="val 50000"/>
+            </a:avLst>
+          </a:prstGeom>
+          <a:solidFill>
+            <a:srgbClr val="FFFFFF"/>
+          </a:solidFill>
+          <a:ln>
+            <a:noFill/>
+          </a:ln>
+          <a:effectLst/>
+        </p:spPr>
+        <p:style>
+          <a:lnRef idx="1">
+            <a:schemeClr val="accent1"/>
+          </a:lnRef>
+          <a:fillRef idx="3">
+            <a:schemeClr val="accent1"/>
+          </a:fillRef>
+          <a:effectRef idx="2">
+            <a:schemeClr val="accent1"/>
+          </a:effectRef>
+          <a:fontRef idx="minor">
+            <a:schemeClr val="lt1"/>
+          </a:fontRef>
+        </p:style>
+        <p:txBody>
+          <a:bodyPr rtlCol="0" anchor="ctr"/>
+          <a:lstStyle/>
+          <a:p>
+            <a:pPr algn="ctr"/>
+            <a:r>
+              <a:rPr b="1" sz="1400">
+                <a:solidFill>
+                  <a:srgbClr val="8D5B66"/>
+                </a:solidFill>
+                <a:latin typeface="Calibri"/>
+              </a:rPr>
+              <a:t>CHALLENGE</a:t>
+            </a:r>
+          </a:p>
+        </p:txBody>
+      </p:sp>
+      <p:sp>
+        <p:nvSpPr>
+          <p:cNvPr id="5" name="TextBox 4"/>
+          <p:cNvSpPr txBox="1"/>
+          <p:nvPr/>
+        </p:nvSpPr>
+        <p:spPr>
+          <a:xfrm>
+            <a:off x="685800" y="1143000"/>
+            <a:ext cx="10607040" cy="914400"/>
+          </a:xfrm>
+          <a:prstGeom prst="rect">
+            <a:avLst/>
+          </a:prstGeom>
+          <a:noFill/>
+        </p:spPr>
+        <p:txBody>
+          <a:bodyPr wrap="square" anchor="t">
+            <a:spAutoFit/>
+          </a:bodyPr>
+          <a:lstStyle/>
+          <a:p>
+            <a:pPr algn="l"/>
+            <a:r>
+              <a:rPr sz="3000" b="1" i="0">
+                <a:solidFill>
+                  <a:srgbClr val="FFFFFF"/>
+                </a:solidFill>
+                <a:latin typeface="Cambria"/>
+              </a:rPr>
+              <a:t>Mock SAC Speed Round</a:t>
+            </a:r>
+          </a:p>
+        </p:txBody>
+      </p:sp>
+      <p:sp>
+        <p:nvSpPr>
+          <p:cNvPr id="6" name="Rounded Rectangle 5"/>
+          <p:cNvSpPr/>
+          <p:nvPr/>
+        </p:nvSpPr>
+        <p:spPr>
+          <a:xfrm>
+            <a:off x="685800" y="2148840"/>
+            <a:ext cx="960120" cy="411480"/>
+          </a:xfrm>
+          <a:prstGeom prst="roundRect">
+            <a:avLst>
+              <a:gd name="adj" fmla="val 50000"/>
+            </a:avLst>
+          </a:prstGeom>
+          <a:solidFill>
+            <a:srgbClr val="A26976"/>
+          </a:solidFill>
+          <a:ln>
+            <a:noFill/>
+          </a:ln>
+          <a:effectLst/>
+        </p:spPr>
+        <p:style>
+          <a:lnRef idx="1">
+            <a:schemeClr val="accent1"/>
+          </a:lnRef>
+          <a:fillRef idx="3">
+            <a:schemeClr val="accent1"/>
+          </a:fillRef>
+          <a:effectRef idx="2">
+            <a:schemeClr val="accent1"/>
+          </a:effectRef>
+          <a:fontRef idx="minor">
+            <a:schemeClr val="lt1"/>
+          </a:fontRef>
+        </p:style>
+        <p:txBody>
+          <a:bodyPr rtlCol="0" anchor="ctr" wrap="none" lIns="50800" rIns="50800"/>
+          <a:lstStyle/>
+          <a:p>
+            <a:pPr algn="ctr"/>
+            <a:r>
+              <a:rPr sz="1050" b="1">
+                <a:solidFill>
+                  <a:srgbClr val="FFFFFF"/>
+                </a:solidFill>
+                <a:latin typeface="Calibri"/>
+              </a:rPr>
+              <a:t>6 MIN</a:t>
+            </a:r>
+          </a:p>
+        </p:txBody>
+      </p:sp>
+      <p:sp>
+        <p:nvSpPr>
+          <p:cNvPr id="7" name="Rounded Rectangle 6"/>
+          <p:cNvSpPr/>
+          <p:nvPr/>
+        </p:nvSpPr>
+        <p:spPr>
+          <a:xfrm>
+            <a:off x="1783080" y="2148840"/>
+            <a:ext cx="1463040" cy="411480"/>
+          </a:xfrm>
+          <a:prstGeom prst="roundRect">
+            <a:avLst>
+              <a:gd name="adj" fmla="val 50000"/>
+            </a:avLst>
+          </a:prstGeom>
+          <a:solidFill>
+            <a:srgbClr val="A26976"/>
+          </a:solidFill>
+          <a:ln>
+            <a:noFill/>
+          </a:ln>
+          <a:effectLst/>
+        </p:spPr>
+        <p:style>
+          <a:lnRef idx="1">
+            <a:schemeClr val="accent1"/>
+          </a:lnRef>
+          <a:fillRef idx="3">
+            <a:schemeClr val="accent1"/>
+          </a:fillRef>
+          <a:effectRef idx="2">
+            <a:schemeClr val="accent1"/>
+          </a:effectRef>
+          <a:fontRef idx="minor">
+            <a:schemeClr val="lt1"/>
+          </a:fontRef>
+        </p:style>
+        <p:txBody>
+          <a:bodyPr rtlCol="0" anchor="ctr" wrap="none" lIns="50800" rIns="50800"/>
+          <a:lstStyle/>
+          <a:p>
+            <a:pPr algn="ctr"/>
+            <a:r>
+              <a:rPr sz="1050" b="1">
+                <a:solidFill>
+                  <a:srgbClr val="FFFFFF"/>
+                </a:solidFill>
+                <a:latin typeface="Calibri"/>
+              </a:rPr>
+              <a:t>INDIVIDUAL</a:t>
+            </a:r>
+          </a:p>
+        </p:txBody>
+      </p:sp>
+      <p:sp>
+        <p:nvSpPr>
+          <p:cNvPr id="8" name="Rounded Rectangle 7"/>
+          <p:cNvSpPr/>
+          <p:nvPr/>
+        </p:nvSpPr>
+        <p:spPr>
+          <a:xfrm>
+            <a:off x="685800" y="2788920"/>
+            <a:ext cx="10607040" cy="3246120"/>
+          </a:xfrm>
+          <a:prstGeom prst="roundRect">
+            <a:avLst>
+              <a:gd name="adj" fmla="val 8000"/>
+            </a:avLst>
+          </a:prstGeom>
+          <a:solidFill>
+            <a:srgbClr val="FFFFFF"/>
+          </a:solidFill>
+          <a:ln>
+            <a:noFill/>
+          </a:ln>
+          <a:effectLst/>
+        </p:spPr>
+        <p:style>
+          <a:lnRef idx="1">
+            <a:schemeClr val="accent1"/>
+          </a:lnRef>
+          <a:fillRef idx="3">
+            <a:schemeClr val="accent1"/>
+          </a:fillRef>
+          <a:effectRef idx="2">
+            <a:schemeClr val="accent1"/>
+          </a:effectRef>
+          <a:fontRef idx="minor">
+            <a:schemeClr val="lt1"/>
+          </a:fontRef>
+        </p:style>
+        <p:txBody>
+          <a:bodyPr rtlCol="0" anchor="ctr" lIns="304800" rIns="304800" tIns="203200" bIns="203200" wrap="square"/>
+          <a:lstStyle/>
+          <a:p>
+            <a:pPr algn="ctr" indent="-203200" marL="203200">
+              <a:spcAft>
+                <a:spcPts val="900"/>
+              </a:spcAft>
+              <a:buClr>
+                <a:srgbClr val="D98C9E"/>
+              </a:buClr>
+              <a:buSzPct val="90000"/>
+              <a:buFont typeface="Arial"/>
+              <a:buChar char="●"/>
+            </a:pPr>
+            <a:r>
+              <a:rPr sz="1450" b="0" i="0">
+                <a:solidFill>
+                  <a:srgbClr val="2A1A1F"/>
+                </a:solidFill>
+                <a:latin typeface="Calibri"/>
+              </a:rPr>
+              <a:t>Answer one exam-style short-answer question on trends or industry connections, under timed conditions.</a:t>
+            </a:r>
+          </a:p>
+          <a:p>
+            <a:pPr indent="-203200" marL="203200">
+              <a:spcAft>
+                <a:spcPts val="900"/>
+              </a:spcAft>
+              <a:buClr>
+                <a:srgbClr val="D98C9E"/>
+              </a:buClr>
+              <a:buSzPct val="90000"/>
+              <a:buFont typeface="Arial"/>
+              <a:buChar char="●"/>
+            </a:pPr>
+            <a:r>
+              <a:rPr sz="1450" b="0" i="0">
+                <a:solidFill>
+                  <a:srgbClr val="2A1A1F"/>
+                </a:solidFill>
+                <a:latin typeface="Calibri"/>
+              </a:rPr>
+              <a:t>Swap with a partner and check against the marking criteria discussed.</a:t>
+            </a:r>
+          </a:p>
+        </p:txBody>
+      </p:sp>
+      <p:sp>
+        <p:nvSpPr>
+          <p:cNvPr id="9" name="TextBox 8"/>
+          <p:cNvSpPr txBox="1"/>
+          <p:nvPr/>
+        </p:nvSpPr>
+        <p:spPr>
+          <a:xfrm>
+            <a:off x="685800" y="6217920"/>
+            <a:ext cx="10607040" cy="502920"/>
+          </a:xfrm>
+          <a:prstGeom prst="rect">
+            <a:avLst/>
+          </a:prstGeom>
+          <a:noFill/>
+        </p:spPr>
+        <p:txBody>
+          <a:bodyPr wrap="square" anchor="t">
+            <a:spAutoFit/>
+          </a:bodyPr>
+          <a:lstStyle/>
+          <a:p>
+            <a:pPr algn="l"/>
+            <a:r>
+              <a:rPr sz="1250" b="0" i="1">
+                <a:solidFill>
+                  <a:srgbClr val="FFFFFF"/>
+                </a:solidFill>
+                <a:latin typeface="Calibri"/>
+              </a:rPr>
+              <a:t>Debrief: Where did you lose the most marks, and why?</a:t>
+            </a:r>
+          </a:p>
+        </p:txBody>
+      </p:sp>
+    </p:spTree>
+  </p:cSld>
+  <p:clrMapOvr>
+    <a:masterClrMapping/>
+  </p:clrMapOvr>
+</p:sld>
+</file>
+
+<file path=ppt/slides/slide33.xml><?xml version="1.0" encoding="utf-8"?>
+<p:sld xmlns:a="http://schemas.openxmlformats.org/drawingml/2006/main" xmlns:p="http://schemas.openxmlformats.org/presentationml/2006/main" xmlns:r="http://schemas.openxmlformats.org/officeDocument/2006/relationships">
+  <p:cSld>
+    <p:bg>
+      <p:bgPr>
+        <a:solidFill>
+          <a:srgbClr val="7A2E43"/>
+        </a:solidFill>
+        <a:effectLst/>
+      </p:bgPr>
+    </p:bg>
+    <p:spTree>
+      <p:nvGrpSpPr>
+        <p:cNvPr id="1" name=""/>
+        <p:cNvGrpSpPr/>
+        <p:nvPr/>
+      </p:nvGrpSpPr>
+      <p:grpSpPr/>
+      <p:sp>
+        <p:nvSpPr>
+          <p:cNvPr id="2" name="Oval 1"/>
+          <p:cNvSpPr/>
+          <p:nvPr/>
+        </p:nvSpPr>
+        <p:spPr>
+          <a:xfrm>
+            <a:off x="-1097280" y="4114800"/>
+            <a:ext cx="3108960" cy="3108960"/>
+          </a:xfrm>
+          <a:prstGeom prst="ellipse">
+            <a:avLst/>
+          </a:prstGeom>
+          <a:solidFill>
+            <a:srgbClr val="6B283A"/>
+          </a:solidFill>
+          <a:ln>
+            <a:noFill/>
+          </a:ln>
+          <a:effectLst/>
+        </p:spPr>
+        <p:style>
+          <a:lnRef idx="1">
+            <a:schemeClr val="accent1"/>
+          </a:lnRef>
+          <a:fillRef idx="3">
+            <a:schemeClr val="accent1"/>
+          </a:fillRef>
+          <a:effectRef idx="2">
+            <a:schemeClr val="accent1"/>
+          </a:effectRef>
+          <a:fontRef idx="minor">
+            <a:schemeClr val="lt1"/>
+          </a:fontRef>
+        </p:style>
+        <p:txBody>
+          <a:bodyPr rtlCol="0" anchor="ctr"/>
+          <a:lstStyle/>
+          <a:p>
+            <a:pPr algn="ctr"/>
+          </a:p>
+        </p:txBody>
+      </p:sp>
+      <p:sp>
+        <p:nvSpPr>
+          <p:cNvPr id="3" name="Oval 2"/>
+          <p:cNvSpPr/>
+          <p:nvPr/>
+        </p:nvSpPr>
+        <p:spPr>
+          <a:xfrm>
+            <a:off x="9875520" y="-1188720"/>
+            <a:ext cx="2743200" cy="2743200"/>
+          </a:xfrm>
+          <a:prstGeom prst="ellipse">
+            <a:avLst/>
+          </a:prstGeom>
+          <a:solidFill>
+            <a:srgbClr val="D6A24A"/>
+          </a:solidFill>
+          <a:ln>
+            <a:noFill/>
+          </a:ln>
+          <a:effectLst/>
+        </p:spPr>
+        <p:style>
+          <a:lnRef idx="1">
+            <a:schemeClr val="accent1"/>
+          </a:lnRef>
+          <a:fillRef idx="3">
+            <a:schemeClr val="accent1"/>
+          </a:fillRef>
+          <a:effectRef idx="2">
+            <a:schemeClr val="accent1"/>
+          </a:effectRef>
+          <a:fontRef idx="minor">
+            <a:schemeClr val="lt1"/>
+          </a:fontRef>
+        </p:style>
+        <p:txBody>
+          <a:bodyPr rtlCol="0" anchor="ctr"/>
+          <a:lstStyle/>
+          <a:p>
+            <a:pPr algn="ctr"/>
+          </a:p>
+        </p:txBody>
+      </p:sp>
+      <p:sp>
+        <p:nvSpPr>
+          <p:cNvPr id="4" name="Rounded Rectangle 3"/>
+          <p:cNvSpPr/>
+          <p:nvPr/>
+        </p:nvSpPr>
+        <p:spPr>
+          <a:xfrm>
+            <a:off x="1920240" y="2286000"/>
+            <a:ext cx="8321040" cy="2377440"/>
+          </a:xfrm>
+          <a:prstGeom prst="roundRect">
+            <a:avLst>
+              <a:gd name="adj" fmla="val 20000"/>
+            </a:avLst>
+          </a:prstGeom>
+          <a:solidFill>
+            <a:srgbClr val="FFFFFF"/>
+          </a:solidFill>
+          <a:ln>
+            <a:noFill/>
+          </a:ln>
+          <a:effectLst/>
+        </p:spPr>
+        <p:style>
+          <a:lnRef idx="1">
+            <a:schemeClr val="accent1"/>
+          </a:lnRef>
+          <a:fillRef idx="3">
+            <a:schemeClr val="accent1"/>
+          </a:fillRef>
+          <a:effectRef idx="2">
+            <a:schemeClr val="accent1"/>
+          </a:effectRef>
+          <a:fontRef idx="minor">
+            <a:schemeClr val="lt1"/>
+          </a:fontRef>
+        </p:style>
+        <p:txBody>
+          <a:bodyPr rtlCol="0" anchor="ctr"/>
+          <a:lstStyle/>
+          <a:p>
+            <a:pPr algn="ctr"/>
+            <a:r>
+              <a:rPr b="1" sz="3000">
+                <a:solidFill>
+                  <a:srgbClr val="7A2E43"/>
+                </a:solidFill>
+                <a:latin typeface="Cambria"/>
+              </a:rPr>
+              <a:t>End of Unit 2</a:t>
+            </a:r>
+          </a:p>
+          <a:p>
+            <a:pPr algn="ctr"/>
+            <a:r>
+              <a:rPr sz="1400">
+                <a:solidFill>
+                  <a:srgbClr val="595959"/>
+                </a:solidFill>
+              </a:rPr>
+              <a:t>Review the matching workbook to consolidate what you have learnt.</a:t>
+            </a:r>
           </a:p>
         </p:txBody>
       </p:sp>
